--- a/results/pptx/Oracle_DB_Migration_Guide.pptx
+++ b/results/pptx/Oracle_DB_Migration_Guide.pptx
@@ -122,17 +122,17 @@
   <p:extLst>
     <p:ext uri="{521415D9-36F7-43E2-AB2F-B90AF26B5E84}">
       <p14:sectionLst xmlns:p14="http://schemas.microsoft.com/office/powerpoint/2010/main">
-        <p14:section name="표지" id="{B0000001}">
+        <p14:section name="표지" id="{7321E9E0-4414-48B6-928B-2A781DDB42F0}">
           <p14:sldIdLst>
             <p14:sldId id="500"/>
           </p14:sldIdLst>
         </p14:section>
-        <p14:section name="목차" id="{B0000002}">
+        <p14:section name="목차" id="{9E3BB65B-53F3-4329-A82D-DADCE5A569AE}">
           <p14:sldIdLst>
             <p14:sldId id="501"/>
           </p14:sldIdLst>
         </p14:section>
-        <p14:section name="본문" id="{B0000003}">
+        <p14:section name="본문" id="{B8ABE98F-39ED-4A3A-B3C3-4BEA4EB45FBA}">
           <p14:sldIdLst>
             <p14:sldId id="502"/>
             <p14:sldId id="503"/>
@@ -143,7 +143,7 @@
             <p14:sldId id="508"/>
           </p14:sldIdLst>
         </p14:section>
-        <p14:section name="끝맺음" id="{B0000004}">
+        <p14:section name="끝맺음" id="{DBD35560-5944-4083-9EED-3AC03737B5AF}">
           <p14:sldIdLst>
             <p14:sldId id="509"/>
           </p14:sldIdLst>

--- a/results/pptx/Oracle_DB_Migration_Guide.pptx
+++ b/results/pptx/Oracle_DB_Migration_Guide.pptx
@@ -122,17 +122,17 @@
   <p:extLst>
     <p:ext uri="{521415D9-36F7-43E2-AB2F-B90AF26B5E84}">
       <p14:sectionLst xmlns:p14="http://schemas.microsoft.com/office/powerpoint/2010/main">
-        <p14:section name="표지" id="{7321E9E0-4414-48B6-928B-2A781DDB42F0}">
+        <p14:section name="표지" id="{9B5C0231-FCBA-4F83-8ACE-B0A799F53B91}">
           <p14:sldIdLst>
             <p14:sldId id="500"/>
           </p14:sldIdLst>
         </p14:section>
-        <p14:section name="목차" id="{9E3BB65B-53F3-4329-A82D-DADCE5A569AE}">
+        <p14:section name="목차" id="{A0C878EF-B6DE-408F-A0B0-3E3987472B55}">
           <p14:sldIdLst>
             <p14:sldId id="501"/>
           </p14:sldIdLst>
         </p14:section>
-        <p14:section name="본문" id="{B8ABE98F-39ED-4A3A-B3C3-4BEA4EB45FBA}">
+        <p14:section name="본문" id="{FCE70868-BB08-4726-BDA1-BC6D2C463683}">
           <p14:sldIdLst>
             <p14:sldId id="502"/>
             <p14:sldId id="503"/>
@@ -143,7 +143,7 @@
             <p14:sldId id="508"/>
           </p14:sldIdLst>
         </p14:section>
-        <p14:section name="끝맺음" id="{DBD35560-5944-4083-9EED-3AC03737B5AF}">
+        <p14:section name="끝맺음" id="{FD15903C-2545-468A-8B76-5E1C92EB4CD3}">
           <p14:sldIdLst>
             <p14:sldId id="509"/>
           </p14:sldIdLst>
@@ -3522,7 +3522,7 @@
                 <a:ea typeface="프리젠테이션 4 Regular" pitchFamily="2" charset="-127"/>
                 <a:cs typeface="Pretendard" panose="02000503000000020004" pitchFamily="2" charset="-127"/>
               </a:rPr>
-              <a:t>On-Premise Oracle → AWS Oracle RDS/EC2 전환을 위한 아키텍처·도구·운영 가이드</a:t>
+              <a:t>On-Premise Oracle → AWS Oracle RDS 전환을 위한 아키텍처·도구·운영 가이드</a:t>
             </a:r>
           </a:p>
         </p:txBody>
@@ -3668,7 +3668,7 @@
     </p:spTree>
     <p:extLst>
       <p:ext uri="{BB962C8B-B14F-4D97-AF65-F5344CB8AC3E}">
-        <p14:creationId xmlns:p14="http://schemas.microsoft.com/office/powerpoint/2010/main" val="976552988"/>
+        <p14:creationId xmlns:p14="http://schemas.microsoft.com/office/powerpoint/2010/main" val="919817509"/>
       </p:ext>
     </p:extLst>
   </p:cSld>
@@ -4125,7 +4125,7 @@
     </p:spTree>
     <p:extLst>
       <p:ext uri="{BB962C8B-B14F-4D97-AF65-F5344CB8AC3E}">
-        <p14:creationId xmlns:p14="http://schemas.microsoft.com/office/powerpoint/2010/main" val="1872559416"/>
+        <p14:creationId xmlns:p14="http://schemas.microsoft.com/office/powerpoint/2010/main" val="937872819"/>
       </p:ext>
     </p:extLst>
   </p:cSld>
@@ -4390,7 +4390,7 @@
                 <a:ea typeface="프리젠테이션 7 Bold" pitchFamily="2" charset="-127"/>
                 <a:cs typeface="Pretendard" panose="02000503000000020004" pitchFamily="2" charset="-127"/>
               </a:rPr>
-              <a:t>현재 환경의 문제점과 목표 상태</a:t>
+              <a:t>AS-IS / TO-BE — 현재 한계와 목표 상태</a:t>
             </a:r>
             <a:endParaRPr lang="en-US" altLang="ko-KR" sz="2400" dirty="0" smtClean="0">
               <a:ln>
@@ -4439,7 +4439,7 @@
                 <a:ea typeface="프리젠테이션 7 Bold" pitchFamily="2" charset="-127"/>
                 <a:cs typeface="Pretendard" panose="02000503000000020004" pitchFamily="2" charset="-127"/>
               </a:rPr>
-              <a:t>인프라 아키텍처 전환</a:t>
+              <a:t>인프라 전환 전/후 KPI 비교</a:t>
             </a:r>
             <a:endParaRPr lang="en-US" altLang="ko-KR" sz="2400" dirty="0" smtClean="0">
               <a:ln>
@@ -4488,7 +4488,7 @@
                 <a:ea typeface="프리젠테이션 7 Bold" pitchFamily="2" charset="-127"/>
                 <a:cs typeface="Pretendard" panose="02000503000000020004" pitchFamily="2" charset="-127"/>
               </a:rPr>
-              <a:t>도구 선택 의사결정 프레임워크</a:t>
+              <a:t>도구 선택 프레임워크 &amp; 6개월 로드맵</a:t>
             </a:r>
             <a:endParaRPr lang="en-US" altLang="ko-KR" sz="2400" dirty="0" smtClean="0">
               <a:ln>
@@ -4537,7 +4537,7 @@
                 <a:ea typeface="프리젠테이션 7 Bold" pitchFamily="2" charset="-127"/>
                 <a:cs typeface="Pretendard" panose="02000503000000020004" pitchFamily="2" charset="-127"/>
               </a:rPr>
-              <a:t>6개월 마이그레이션 로드맵</a:t>
+              <a:t>핵심 성과 지표 (KPI Dashboard)</a:t>
             </a:r>
             <a:endParaRPr lang="en-US" altLang="ko-KR" sz="2400" dirty="0" smtClean="0">
               <a:ln>
@@ -4586,7 +4586,7 @@
                 <a:ea typeface="프리젠테이션 7 Bold" pitchFamily="2" charset="-127"/>
                 <a:cs typeface="Pretendard" panose="02000503000000020004" pitchFamily="2" charset="-127"/>
               </a:rPr>
-              <a:t>핵심 성과 지표 / 운영 주의사항 / SWOT</a:t>
+              <a:t>Do &amp; Don't + GoldenGate SWOT 분석</a:t>
             </a:r>
             <a:endParaRPr lang="en-US" altLang="ko-KR" sz="2400" dirty="0" smtClean="0">
               <a:ln>
@@ -4802,7 +4802,7 @@
     </p:spTree>
     <p:extLst>
       <p:ext uri="{BB962C8B-B14F-4D97-AF65-F5344CB8AC3E}">
-        <p14:creationId xmlns:p14="http://schemas.microsoft.com/office/powerpoint/2010/main" val="439611039"/>
+        <p14:creationId xmlns:p14="http://schemas.microsoft.com/office/powerpoint/2010/main" val="2774157920"/>
       </p:ext>
     </p:extLst>
   </p:cSld>
@@ -4888,8 +4888,7 @@
                 <a:ea typeface="프리젠테이션 7 Bold" pitchFamily="2" charset="-127"/>
                 <a:cs typeface="Pretendard ExtraBold" panose="02000903000000020004" pitchFamily="2" charset="-127"/>
               </a:rPr>
-              <a:t>1-1.
-현황 분석</a:t>
+              <a:t>서브색상</a:t>
             </a:r>
             <a:r>
               <a:rPr lang="ko-KR" altLang="en-US" sz="2000" dirty="0">
@@ -4897,8 +4896,28 @@
                 <a:ea typeface="프리젠테이션 7 Bold" pitchFamily="2" charset="-127"/>
                 <a:cs typeface="Pretendard ExtraBold" panose="02000903000000020004" pitchFamily="2" charset="-127"/>
               </a:rPr>
-              <a:t/>
-            </a:r>
+              <a:t> </a:t>
+            </a:r>
+          </a:p>
+          <a:p>
+            <a:pPr>
+              <a:lnSpc>
+                <a:spcPct val="120000"/>
+              </a:lnSpc>
+            </a:pPr>
+            <a:r>
+              <a:rPr lang="ko-KR" altLang="en-US" sz="2000" dirty="0">
+                <a:latin typeface="프리젠테이션 7 Bold" pitchFamily="2" charset="-127"/>
+                <a:ea typeface="프리젠테이션 7 Bold" pitchFamily="2" charset="-127"/>
+                <a:cs typeface="Pretendard ExtraBold" panose="02000903000000020004" pitchFamily="2" charset="-127"/>
+              </a:rPr>
+              <a:t>적용 예시</a:t>
+            </a:r>
+            <a:endParaRPr lang="ko-KR" altLang="en-US" sz="2000" dirty="0">
+              <a:latin typeface="프리젠테이션 7 Bold" pitchFamily="2" charset="-127"/>
+              <a:ea typeface="프리젠테이션 7 Bold" pitchFamily="2" charset="-127"/>
+              <a:cs typeface="Pretendard ExtraBold" panose="02000903000000020004" pitchFamily="2" charset="-127"/>
+            </a:endParaRPr>
           </a:p>
         </p:txBody>
       </p:sp>
@@ -4948,7 +4967,7 @@
                 <a:ea typeface="프리젠테이션 5 Medium" pitchFamily="2" charset="-127"/>
                 <a:cs typeface="Pretendard" panose="02000503000000020004" pitchFamily="2" charset="-127"/>
               </a:rPr>
-              <a:t>As-Is vs To-Be — 레거시 Oracle 한계와 AWS 전환 기대 효과</a:t>
+              <a:t>설명글을</a:t>
             </a:r>
             <a:r>
               <a:rPr lang="ko-KR" altLang="en-US" sz="1200" dirty="0">
@@ -4969,7 +4988,7 @@
                 <a:ea typeface="프리젠테이션 5 Medium" pitchFamily="2" charset="-127"/>
                 <a:cs typeface="Pretendard" panose="02000503000000020004" pitchFamily="2" charset="-127"/>
               </a:rPr>
-              <a:t/>
+              <a:t> 적어주세요</a:t>
             </a:r>
             <a:r>
               <a:rPr lang="en-US" altLang="ko-KR" sz="1200" b="1" dirty="0">
@@ -4990,7 +5009,7 @@
                 <a:ea typeface="프리젠테이션 5 Medium" pitchFamily="2" charset="-127"/>
                 <a:cs typeface="Pretendard" panose="02000503000000020004" pitchFamily="2" charset="-127"/>
               </a:rPr>
-              <a:t/>
+              <a:t>. </a:t>
             </a:r>
             <a:r>
               <a:rPr lang="ko-KR" altLang="en-US" sz="1200" b="1" dirty="0">
@@ -5008,7 +5027,7 @@
                 <a:ea typeface="프리젠테이션 7 Bold" pitchFamily="2" charset="-127"/>
                 <a:cs typeface="Pretendard" panose="02000503000000020004" pitchFamily="2" charset="-127"/>
               </a:rPr>
-              <a:t/>
+              <a:t>강조 텍스트</a:t>
             </a:r>
             <a:r>
               <a:rPr lang="en-US" altLang="ko-KR" sz="1200" b="1" dirty="0">
@@ -5026,7 +5045,7 @@
                 <a:ea typeface="프리젠테이션 7 Bold" pitchFamily="2" charset="-127"/>
                 <a:cs typeface="Pretendard" panose="02000503000000020004" pitchFamily="2" charset="-127"/>
               </a:rPr>
-              <a:t/>
+              <a:t>(</a:t>
             </a:r>
             <a:r>
               <a:rPr lang="ko-KR" altLang="en-US" sz="1200" b="1" dirty="0" err="1">
@@ -5044,7 +5063,7 @@
                 <a:ea typeface="프리젠테이션 7 Bold" pitchFamily="2" charset="-127"/>
                 <a:cs typeface="Pretendard" panose="02000503000000020004" pitchFamily="2" charset="-127"/>
               </a:rPr>
-              <a:t/>
+              <a:t>프리젠테이션</a:t>
             </a:r>
             <a:r>
               <a:rPr lang="ko-KR" altLang="en-US" sz="1200" b="1" dirty="0">
@@ -5062,7 +5081,7 @@
                 <a:ea typeface="프리젠테이션 7 Bold" pitchFamily="2" charset="-127"/>
                 <a:cs typeface="Pretendard" panose="02000503000000020004" pitchFamily="2" charset="-127"/>
               </a:rPr>
-              <a:t/>
+              <a:t> </a:t>
             </a:r>
             <a:r>
               <a:rPr lang="en-US" altLang="ko-KR" sz="1200" b="1" dirty="0">
@@ -5080,7 +5099,7 @@
                 <a:ea typeface="프리젠테이션 7 Bold" pitchFamily="2" charset="-127"/>
                 <a:cs typeface="Pretendard" panose="02000503000000020004" pitchFamily="2" charset="-127"/>
               </a:rPr>
-              <a:t/>
+              <a:t>7 Bold, </a:t>
             </a:r>
             <a:r>
               <a:rPr lang="ko-KR" altLang="en-US" sz="1200" b="1" dirty="0">
@@ -5098,7 +5117,7 @@
                 <a:ea typeface="프리젠테이션 7 Bold" pitchFamily="2" charset="-127"/>
                 <a:cs typeface="Pretendard" panose="02000503000000020004" pitchFamily="2" charset="-127"/>
               </a:rPr>
-              <a:t/>
+              <a:t>메인 컬러</a:t>
             </a:r>
             <a:r>
               <a:rPr lang="en-US" altLang="ko-KR" sz="1200" b="1" dirty="0" smtClean="0">
@@ -5116,8 +5135,219 @@
                 <a:ea typeface="프리젠테이션 7 Bold" pitchFamily="2" charset="-127"/>
                 <a:cs typeface="Pretendard" panose="02000503000000020004" pitchFamily="2" charset="-127"/>
               </a:rPr>
-              <a:t/>
-            </a:r>
+              <a:t>)</a:t>
+            </a:r>
+          </a:p>
+          <a:p>
+            <a:pPr latinLnBrk="0">
+              <a:lnSpc>
+                <a:spcPct val="150000"/>
+              </a:lnSpc>
+            </a:pPr>
+            <a:r>
+              <a:rPr lang="ko-KR" altLang="en-US" sz="1200" dirty="0" smtClean="0">
+                <a:ln>
+                  <a:solidFill>
+                    <a:schemeClr val="accent1">
+                      <a:alpha val="0"/>
+                    </a:schemeClr>
+                  </a:solidFill>
+                </a:ln>
+                <a:solidFill>
+                  <a:schemeClr val="tx1">
+                    <a:lumMod val="75000"/>
+                    <a:lumOff val="25000"/>
+                  </a:schemeClr>
+                </a:solidFill>
+                <a:latin typeface="프리젠테이션 5 Medium" pitchFamily="2" charset="-127"/>
+                <a:ea typeface="프리젠테이션 5 Medium" pitchFamily="2" charset="-127"/>
+                <a:cs typeface="Pretendard" panose="02000503000000020004" pitchFamily="2" charset="-127"/>
+              </a:rPr>
+              <a:t>폰트 </a:t>
+            </a:r>
+            <a:r>
+              <a:rPr lang="en-US" altLang="ko-KR" sz="1200" dirty="0" smtClean="0">
+                <a:ln>
+                  <a:solidFill>
+                    <a:schemeClr val="accent1">
+                      <a:alpha val="0"/>
+                    </a:schemeClr>
+                  </a:solidFill>
+                </a:ln>
+                <a:solidFill>
+                  <a:schemeClr val="tx1">
+                    <a:lumMod val="75000"/>
+                    <a:lumOff val="25000"/>
+                  </a:schemeClr>
+                </a:solidFill>
+                <a:latin typeface="프리젠테이션 5 Medium" pitchFamily="2" charset="-127"/>
+                <a:ea typeface="프리젠테이션 5 Medium" pitchFamily="2" charset="-127"/>
+                <a:cs typeface="Pretendard" panose="02000503000000020004" pitchFamily="2" charset="-127"/>
+              </a:rPr>
+              <a:t>: </a:t>
+            </a:r>
+            <a:r>
+              <a:rPr lang="ko-KR" altLang="en-US" sz="1200" dirty="0" err="1" smtClean="0">
+                <a:ln>
+                  <a:solidFill>
+                    <a:schemeClr val="accent1">
+                      <a:alpha val="0"/>
+                    </a:schemeClr>
+                  </a:solidFill>
+                </a:ln>
+                <a:solidFill>
+                  <a:schemeClr val="tx1">
+                    <a:lumMod val="75000"/>
+                    <a:lumOff val="25000"/>
+                  </a:schemeClr>
+                </a:solidFill>
+                <a:latin typeface="프리젠테이션 5 Medium" pitchFamily="2" charset="-127"/>
+                <a:ea typeface="프리젠테이션 5 Medium" pitchFamily="2" charset="-127"/>
+                <a:cs typeface="Pretendard" panose="02000503000000020004" pitchFamily="2" charset="-127"/>
+              </a:rPr>
+              <a:t>프리젠테이션</a:t>
+            </a:r>
+            <a:r>
+              <a:rPr lang="ko-KR" altLang="en-US" sz="1200" dirty="0" smtClean="0">
+                <a:ln>
+                  <a:solidFill>
+                    <a:schemeClr val="accent1">
+                      <a:alpha val="0"/>
+                    </a:schemeClr>
+                  </a:solidFill>
+                </a:ln>
+                <a:solidFill>
+                  <a:schemeClr val="tx1">
+                    <a:lumMod val="75000"/>
+                    <a:lumOff val="25000"/>
+                  </a:schemeClr>
+                </a:solidFill>
+                <a:latin typeface="프리젠테이션 5 Medium" pitchFamily="2" charset="-127"/>
+                <a:ea typeface="프리젠테이션 5 Medium" pitchFamily="2" charset="-127"/>
+                <a:cs typeface="Pretendard" panose="02000503000000020004" pitchFamily="2" charset="-127"/>
+              </a:rPr>
+              <a:t> </a:t>
+            </a:r>
+            <a:r>
+              <a:rPr lang="en-US" altLang="ko-KR" sz="1200" dirty="0" smtClean="0">
+                <a:ln>
+                  <a:solidFill>
+                    <a:schemeClr val="accent1">
+                      <a:alpha val="0"/>
+                    </a:schemeClr>
+                  </a:solidFill>
+                </a:ln>
+                <a:solidFill>
+                  <a:schemeClr val="tx1">
+                    <a:lumMod val="75000"/>
+                    <a:lumOff val="25000"/>
+                  </a:schemeClr>
+                </a:solidFill>
+                <a:latin typeface="프리젠테이션 5 Medium" pitchFamily="2" charset="-127"/>
+                <a:ea typeface="프리젠테이션 5 Medium" pitchFamily="2" charset="-127"/>
+                <a:cs typeface="Pretendard" panose="02000503000000020004" pitchFamily="2" charset="-127"/>
+              </a:rPr>
+              <a:t>5 Medium 12pt  </a:t>
+            </a:r>
+            <a:r>
+              <a:rPr lang="ko-KR" altLang="en-US" sz="1200" dirty="0" smtClean="0">
+                <a:ln>
+                  <a:solidFill>
+                    <a:schemeClr val="accent1">
+                      <a:alpha val="0"/>
+                    </a:schemeClr>
+                  </a:solidFill>
+                </a:ln>
+                <a:solidFill>
+                  <a:schemeClr val="tx1">
+                    <a:lumMod val="75000"/>
+                    <a:lumOff val="25000"/>
+                  </a:schemeClr>
+                </a:solidFill>
+                <a:latin typeface="프리젠테이션 5 Medium" pitchFamily="2" charset="-127"/>
+                <a:ea typeface="프리젠테이션 5 Medium" pitchFamily="2" charset="-127"/>
+                <a:cs typeface="Pretendard" panose="02000503000000020004" pitchFamily="2" charset="-127"/>
+              </a:rPr>
+              <a:t>최대 </a:t>
+            </a:r>
+            <a:r>
+              <a:rPr lang="en-US" altLang="ko-KR" sz="1200" dirty="0" smtClean="0">
+                <a:ln>
+                  <a:solidFill>
+                    <a:schemeClr val="accent1">
+                      <a:alpha val="0"/>
+                    </a:schemeClr>
+                  </a:solidFill>
+                </a:ln>
+                <a:solidFill>
+                  <a:schemeClr val="tx1">
+                    <a:lumMod val="75000"/>
+                    <a:lumOff val="25000"/>
+                  </a:schemeClr>
+                </a:solidFill>
+                <a:latin typeface="프리젠테이션 5 Medium" pitchFamily="2" charset="-127"/>
+                <a:ea typeface="프리젠테이션 5 Medium" pitchFamily="2" charset="-127"/>
+                <a:cs typeface="Pretendard" panose="02000503000000020004" pitchFamily="2" charset="-127"/>
+              </a:rPr>
+              <a:t>3</a:t>
+            </a:r>
+            <a:r>
+              <a:rPr lang="ko-KR" altLang="en-US" sz="1200" dirty="0" smtClean="0">
+                <a:ln>
+                  <a:solidFill>
+                    <a:schemeClr val="accent1">
+                      <a:alpha val="0"/>
+                    </a:schemeClr>
+                  </a:solidFill>
+                </a:ln>
+                <a:solidFill>
+                  <a:schemeClr val="tx1">
+                    <a:lumMod val="75000"/>
+                    <a:lumOff val="25000"/>
+                  </a:schemeClr>
+                </a:solidFill>
+                <a:latin typeface="프리젠테이션 5 Medium" pitchFamily="2" charset="-127"/>
+                <a:ea typeface="프리젠테이션 5 Medium" pitchFamily="2" charset="-127"/>
+                <a:cs typeface="Pretendard" panose="02000503000000020004" pitchFamily="2" charset="-127"/>
+              </a:rPr>
+              <a:t>줄까지 작성 가능합니다</a:t>
+            </a:r>
+            <a:r>
+              <a:rPr lang="en-US" altLang="ko-KR" sz="1200" dirty="0" smtClean="0">
+                <a:ln>
+                  <a:solidFill>
+                    <a:schemeClr val="accent1">
+                      <a:alpha val="0"/>
+                    </a:schemeClr>
+                  </a:solidFill>
+                </a:ln>
+                <a:solidFill>
+                  <a:schemeClr val="tx1">
+                    <a:lumMod val="75000"/>
+                    <a:lumOff val="25000"/>
+                  </a:schemeClr>
+                </a:solidFill>
+                <a:latin typeface="프리젠테이션 5 Medium" pitchFamily="2" charset="-127"/>
+                <a:ea typeface="프리젠테이션 5 Medium" pitchFamily="2" charset="-127"/>
+                <a:cs typeface="Pretendard" panose="02000503000000020004" pitchFamily="2" charset="-127"/>
+              </a:rPr>
+              <a:t>.</a:t>
+            </a:r>
+            <a:endParaRPr lang="en-US" altLang="ko-KR" sz="1200" dirty="0">
+              <a:ln>
+                <a:solidFill>
+                  <a:schemeClr val="accent1">
+                    <a:alpha val="0"/>
+                  </a:schemeClr>
+                </a:solidFill>
+              </a:ln>
+              <a:solidFill>
+                <a:srgbClr val="2765E1"/>
+              </a:solidFill>
+              <a:latin typeface="프리젠테이션 5 Medium" pitchFamily="2" charset="-127"/>
+              <a:ea typeface="프리젠테이션 5 Medium" pitchFamily="2" charset="-127"/>
+              <a:cs typeface="Pretendard" panose="02000503000000020004" pitchFamily="2" charset="-127"/>
+            </a:endParaRPr>
           </a:p>
         </p:txBody>
       </p:sp>
@@ -5131,8 +5361,8 @@
         </p:nvSpPr>
         <p:spPr>
           <a:xfrm>
-            <a:off x="457200" y="1750000"/>
-            <a:ext cx="11277600" cy="280000"/>
+            <a:off x="457200" y="1600200"/>
+            <a:ext cx="11277600" cy="320040"/>
           </a:xfrm>
           <a:prstGeom prst="rect">
             <a:avLst/>
@@ -5143,14 +5373,14 @@
           </a:ln>
         </p:spPr>
         <p:txBody>
-          <a:bodyPr anchor="ctr" lIns="91440" rIns="91440" tIns="91440" bIns="91440"/>
+          <a:bodyPr anchor="ctr" lIns="0" rIns="0" tIns="0" bIns="0"/>
           <a:lstStyle/>
           <a:p>
             <a:pPr algn="l"/>
             <a:r>
-              <a:rPr lang="ko-KR" altLang="en-US" sz="1600" b="1" dirty="0">
-                <a:solidFill>
-                  <a:srgbClr val="1B3A5C"/>
+              <a:rPr sz="1600" b="1" dirty="0">
+                <a:solidFill>
+                  <a:srgbClr val="0043DA"/>
                 </a:solidFill>
                 <a:latin typeface="Freesentation"/>
                 <a:ea typeface="Freesentation"/>
@@ -5170,8 +5400,8 @@
         </p:nvSpPr>
         <p:spPr>
           <a:xfrm>
-            <a:off x="457200" y="2040000"/>
-            <a:ext cx="11277600" cy="230000"/>
+            <a:off x="457200" y="1965960"/>
+            <a:ext cx="11277600" cy="274320"/>
           </a:xfrm>
           <a:prstGeom prst="rect">
             <a:avLst/>
@@ -5182,14 +5412,14 @@
           </a:ln>
         </p:spPr>
         <p:txBody>
-          <a:bodyPr anchor="ctr" lIns="91440" rIns="91440" tIns="91440" bIns="91440"/>
+          <a:bodyPr anchor="ctr" lIns="0" rIns="0" tIns="0" bIns="0"/>
           <a:lstStyle/>
           <a:p>
             <a:pPr algn="l"/>
             <a:r>
-              <a:rPr lang="ko-KR" altLang="en-US" sz="1200" b="0" dirty="0">
-                <a:solidFill>
-                  <a:srgbClr val="7F8C8D"/>
+              <a:rPr sz="1300" b="0" dirty="0">
+                <a:solidFill>
+                  <a:srgbClr val="212121"/>
                 </a:solidFill>
                 <a:latin typeface="Freesentation"/>
                 <a:ea typeface="Freesentation"/>
@@ -5209,8 +5439,90 @@
         </p:nvSpPr>
         <p:spPr>
           <a:xfrm>
-            <a:off x="457200" y="2361440"/>
-            <a:ext cx="5629800" cy="4405120"/>
+            <a:off x="637160" y="2423160"/>
+            <a:ext cx="1371600" cy="274320"/>
+          </a:xfrm>
+          <a:prstGeom prst="rect">
+            <a:avLst/>
+          </a:prstGeom>
+          <a:solidFill>
+            <a:srgbClr val="212121"/>
+          </a:solidFill>
+          <a:ln>
+            <a:noFill/>
+          </a:ln>
+        </p:spPr>
+        <p:txBody>
+          <a:bodyPr anchor="ctr" lIns="91440" rIns="91440" tIns="91440" bIns="91440"/>
+          <a:lstStyle/>
+          <a:p>
+            <a:pPr algn="ctr"/>
+            <a:r>
+              <a:rPr sz="1300" b="1" dirty="0">
+                <a:solidFill>
+                  <a:srgbClr val="FFFFFF"/>
+                </a:solidFill>
+                <a:latin typeface="프리젠테이션 7"/>
+                <a:ea typeface="프리젠테이션 7"/>
+              </a:rPr>
+              <a:t>⚠  AS-IS</a:t>
+            </a:r>
+          </a:p>
+        </p:txBody>
+      </p:sp>
+      <p:sp>
+        <p:nvSpPr>
+          <p:cNvPr id="204" name="S204"/>
+          <p:cNvSpPr>
+            <a:spLocks noGrp="1"/>
+          </p:cNvSpPr>
+          <p:nvPr/>
+        </p:nvSpPr>
+        <p:spPr>
+          <a:xfrm>
+            <a:off x="6611040" y="2423160"/>
+            <a:ext cx="1371600" cy="274320"/>
+          </a:xfrm>
+          <a:prstGeom prst="rect">
+            <a:avLst/>
+          </a:prstGeom>
+          <a:solidFill>
+            <a:srgbClr val="0043DA"/>
+          </a:solidFill>
+          <a:ln>
+            <a:noFill/>
+          </a:ln>
+        </p:spPr>
+        <p:txBody>
+          <a:bodyPr anchor="ctr" lIns="91440" rIns="91440" tIns="91440" bIns="91440"/>
+          <a:lstStyle/>
+          <a:p>
+            <a:pPr algn="ctr"/>
+            <a:r>
+              <a:rPr sz="1300" b="1" dirty="0">
+                <a:solidFill>
+                  <a:srgbClr val="FFFFFF"/>
+                </a:solidFill>
+                <a:latin typeface="프리젠테이션 7"/>
+                <a:ea typeface="프리젠테이션 7"/>
+              </a:rPr>
+              <a:t>✓  TO-BE</a:t>
+            </a:r>
+          </a:p>
+        </p:txBody>
+      </p:sp>
+      <p:sp>
+        <p:nvSpPr>
+          <p:cNvPr id="205" name="S205"/>
+          <p:cNvSpPr>
+            <a:spLocks noGrp="1"/>
+          </p:cNvSpPr>
+          <p:nvPr/>
+        </p:nvSpPr>
+        <p:spPr>
+          <a:xfrm>
+            <a:off x="457200" y="2789820"/>
+            <a:ext cx="5303520" cy="3885660"/>
           </a:xfrm>
           <a:prstGeom prst="roundRect">
             <a:avLst>
@@ -5218,11 +5530,11 @@
             </a:avLst>
           </a:prstGeom>
           <a:solidFill>
-            <a:srgbClr val="D6E8F5"/>
+            <a:srgbClr val="F8F9FA"/>
           </a:solidFill>
-          <a:ln w="12700">
+          <a:ln w="9525">
             <a:solidFill>
-              <a:srgbClr val="AECDE0"/>
+              <a:srgbClr val="DCDCDC"/>
             </a:solidFill>
           </a:ln>
         </p:spPr>
@@ -5234,7 +5546,7 @@
       </p:sp>
       <p:sp>
         <p:nvSpPr>
-          <p:cNvPr id="204" name="S204"/>
+          <p:cNvPr id="206" name="S206"/>
           <p:cNvSpPr>
             <a:spLocks noGrp="1"/>
           </p:cNvSpPr>
@@ -5242,14 +5554,399 @@
         </p:nvSpPr>
         <p:spPr>
           <a:xfrm>
-            <a:off x="457200" y="2361440"/>
-            <a:ext cx="5629800" cy="420000"/>
-          </a:xfrm>
-          <a:prstGeom prst="rect">
-            <a:avLst/>
+            <a:off x="6431280" y="2789820"/>
+            <a:ext cx="5303520" cy="3885660"/>
+          </a:xfrm>
+          <a:prstGeom prst="roundRect">
+            <a:avLst>
+              <a:gd name="adj" fmla="val 16667"/>
+            </a:avLst>
           </a:prstGeom>
           <a:solidFill>
-            <a:srgbClr val="2E6DA4"/>
+            <a:srgbClr val="E6F0FF"/>
+          </a:solidFill>
+          <a:ln w="9525">
+            <a:solidFill>
+              <a:srgbClr val="0043DA"/>
+            </a:solidFill>
+          </a:ln>
+        </p:spPr>
+        <p:txBody>
+          <a:bodyPr anchor="ctr" lIns="91440" rIns="91440" tIns="91440" bIns="91440"/>
+          <a:lstStyle/>
+          <a:p/>
+        </p:txBody>
+      </p:sp>
+      <p:sp>
+        <p:nvSpPr>
+          <p:cNvPr id="207" name="S207"/>
+          <p:cNvSpPr>
+            <a:spLocks noGrp="1"/>
+          </p:cNvSpPr>
+          <p:nvPr/>
+        </p:nvSpPr>
+        <p:spPr>
+          <a:xfrm>
+            <a:off x="637160" y="2897580"/>
+            <a:ext cx="4941840" cy="365760"/>
+          </a:xfrm>
+          <a:prstGeom prst="rect">
+            <a:avLst/>
+          </a:prstGeom>
+          <a:noFill/>
+          <a:ln>
+            <a:noFill/>
+          </a:ln>
+        </p:spPr>
+        <p:txBody>
+          <a:bodyPr anchor="t" lIns="0" rIns="0" tIns="0" bIns="0"/>
+          <a:lstStyle/>
+          <a:p>
+            <a:pPr algn="l"/>
+            <a:r>
+              <a:rPr sz="1400" b="1" dirty="0">
+                <a:solidFill>
+                  <a:srgbClr val="212121"/>
+                </a:solidFill>
+                <a:latin typeface="프리젠테이션 7"/>
+                <a:ea typeface="프리젠테이션 7"/>
+              </a:rPr>
+              <a:t>Oracle 온프레미스 DB 현황</a:t>
+            </a:r>
+          </a:p>
+        </p:txBody>
+      </p:sp>
+      <p:sp>
+        <p:nvSpPr>
+          <p:cNvPr id="208" name="S208"/>
+          <p:cNvSpPr>
+            <a:spLocks noGrp="1"/>
+          </p:cNvSpPr>
+          <p:nvPr/>
+        </p:nvSpPr>
+        <p:spPr>
+          <a:xfrm>
+            <a:off x="6611040" y="2897580"/>
+            <a:ext cx="4941840" cy="365760"/>
+          </a:xfrm>
+          <a:prstGeom prst="rect">
+            <a:avLst/>
+          </a:prstGeom>
+          <a:noFill/>
+          <a:ln>
+            <a:noFill/>
+          </a:ln>
+        </p:spPr>
+        <p:txBody>
+          <a:bodyPr anchor="t" lIns="0" rIns="0" tIns="0" bIns="0"/>
+          <a:lstStyle/>
+          <a:p>
+            <a:pPr algn="l"/>
+            <a:r>
+              <a:rPr sz="1400" b="1" dirty="0">
+                <a:solidFill>
+                  <a:srgbClr val="0043DA"/>
+                </a:solidFill>
+                <a:latin typeface="프리젠테이션 7"/>
+                <a:ea typeface="프리젠테이션 7"/>
+              </a:rPr>
+              <a:t>AWS RDS Oracle 전환 후 효과</a:t>
+            </a:r>
+          </a:p>
+        </p:txBody>
+      </p:sp>
+      <p:sp>
+        <p:nvSpPr>
+          <p:cNvPr id="209" name="S209"/>
+          <p:cNvSpPr>
+            <a:spLocks noGrp="1"/>
+          </p:cNvSpPr>
+          <p:nvPr/>
+        </p:nvSpPr>
+        <p:spPr>
+          <a:xfrm>
+            <a:off x="637160" y="3263580"/>
+            <a:ext cx="4484640" cy="2449720"/>
+          </a:xfrm>
+          <a:prstGeom prst="rect">
+            <a:avLst/>
+          </a:prstGeom>
+          <a:noFill/>
+          <a:ln>
+            <a:noFill/>
+          </a:ln>
+        </p:spPr>
+        <p:txBody>
+          <a:bodyPr anchor="t" lIns="91440" rIns="91440" tIns="91440" bIns="91440"/>
+          <a:lstStyle/>
+          <a:p>
+            <a:pPr algn="l"/>
+            <a:r>
+              <a:rPr sz="1300" b="0" dirty="0">
+                <a:solidFill>
+                  <a:srgbClr val="212121"/>
+                </a:solidFill>
+                <a:latin typeface="Freesentation"/>
+                <a:ea typeface="Freesentation"/>
+              </a:rPr>
+              <a:t>• 높은 Oracle 라이선스·유지보수 비용</a:t>
+            </a:r>
+          </a:p>
+          <a:p>
+            <a:pPr algn="l"/>
+            <a:r>
+              <a:rPr sz="1100" b="0" dirty="0">
+                <a:solidFill>
+                  <a:srgbClr val="505050"/>
+                </a:solidFill>
+                <a:latin typeface="Freesentation"/>
+                <a:ea typeface="Freesentation"/>
+              </a:rPr>
+              <a:t>   연간 수억원 이상 고정 지출</a:t>
+            </a:r>
+          </a:p>
+          <a:p>
+            <a:pPr algn="l"/>
+            <a:endParaRPr sz="600"/>
+          </a:p>
+          <a:p>
+            <a:pPr algn="l"/>
+            <a:r>
+              <a:rPr sz="1300" b="0" dirty="0">
+                <a:solidFill>
+                  <a:srgbClr val="212121"/>
+                </a:solidFill>
+                <a:latin typeface="Freesentation"/>
+                <a:ea typeface="Freesentation"/>
+              </a:rPr>
+              <a:t>• 수동 백업 — RPO 24시간 이상</a:t>
+            </a:r>
+          </a:p>
+          <a:p>
+            <a:pPr algn="l"/>
+            <a:endParaRPr sz="600"/>
+          </a:p>
+          <a:p>
+            <a:pPr algn="l"/>
+            <a:r>
+              <a:rPr sz="1300" b="0" dirty="0">
+                <a:solidFill>
+                  <a:srgbClr val="212121"/>
+                </a:solidFill>
+                <a:latin typeface="Freesentation"/>
+                <a:ea typeface="Freesentation"/>
+              </a:rPr>
+              <a:t>• 수직 스케일만 가능, 하드웨어 증설 필요</a:t>
+            </a:r>
+          </a:p>
+          <a:p>
+            <a:pPr algn="l"/>
+            <a:endParaRPr sz="600"/>
+          </a:p>
+          <a:p>
+            <a:pPr algn="l"/>
+            <a:r>
+              <a:rPr sz="1300" b="0" dirty="0">
+                <a:solidFill>
+                  <a:srgbClr val="212121"/>
+                </a:solidFill>
+                <a:latin typeface="Freesentation"/>
+                <a:ea typeface="Freesentation"/>
+              </a:rPr>
+              <a:t>• 단일 장애점(SPOF), 이중화 구성 복잡</a:t>
+            </a:r>
+          </a:p>
+          <a:p>
+            <a:pPr algn="l"/>
+            <a:endParaRPr sz="600"/>
+          </a:p>
+          <a:p>
+            <a:pPr algn="l"/>
+            <a:r>
+              <a:rPr sz="1300" b="0" dirty="0">
+                <a:solidFill>
+                  <a:srgbClr val="212121"/>
+                </a:solidFill>
+                <a:latin typeface="Freesentation"/>
+                <a:ea typeface="Freesentation"/>
+              </a:rPr>
+              <a:t>• 패치·업그레이드 사이클 수개월 소요</a:t>
+            </a:r>
+          </a:p>
+          <a:p>
+            <a:pPr algn="l"/>
+            <a:endParaRPr sz="600"/>
+          </a:p>
+          <a:p>
+            <a:pPr algn="l"/>
+            <a:r>
+              <a:rPr sz="1300" b="0" dirty="0">
+                <a:solidFill>
+                  <a:srgbClr val="212121"/>
+                </a:solidFill>
+                <a:latin typeface="Freesentation"/>
+                <a:ea typeface="Freesentation"/>
+              </a:rPr>
+              <a:t>• DBA 전담 인력 상시 운영 필수</a:t>
+            </a:r>
+          </a:p>
+        </p:txBody>
+      </p:sp>
+      <p:sp>
+        <p:nvSpPr>
+          <p:cNvPr id="210" name="S210"/>
+          <p:cNvSpPr>
+            <a:spLocks noGrp="1"/>
+          </p:cNvSpPr>
+          <p:nvPr/>
+        </p:nvSpPr>
+        <p:spPr>
+          <a:xfrm>
+            <a:off x="6611040" y="3263580"/>
+            <a:ext cx="4484640" cy="2449720"/>
+          </a:xfrm>
+          <a:prstGeom prst="rect">
+            <a:avLst/>
+          </a:prstGeom>
+          <a:noFill/>
+          <a:ln>
+            <a:noFill/>
+          </a:ln>
+        </p:spPr>
+        <p:txBody>
+          <a:bodyPr anchor="t" lIns="91440" rIns="91440" tIns="91440" bIns="91440"/>
+          <a:lstStyle/>
+          <a:p>
+            <a:pPr algn="l"/>
+            <a:r>
+              <a:rPr sz="1300" b="0" dirty="0">
+                <a:solidFill>
+                  <a:srgbClr val="212121"/>
+                </a:solidFill>
+                <a:latin typeface="Freesentation"/>
+                <a:ea typeface="Freesentation"/>
+              </a:rPr>
+              <a:t>• Pay-as-you-go — 비용 30~50% 절감</a:t>
+            </a:r>
+          </a:p>
+          <a:p>
+            <a:pPr algn="l"/>
+            <a:r>
+              <a:rPr sz="1100" b="0" dirty="0">
+                <a:solidFill>
+                  <a:srgbClr val="505050"/>
+                </a:solidFill>
+                <a:latin typeface="Freesentation"/>
+                <a:ea typeface="Freesentation"/>
+              </a:rPr>
+              <a:t>   온프레미스 대비 3년 TCO 분석 기준</a:t>
+            </a:r>
+          </a:p>
+          <a:p>
+            <a:pPr algn="l"/>
+            <a:endParaRPr sz="600"/>
+          </a:p>
+          <a:p>
+            <a:pPr algn="l"/>
+            <a:r>
+              <a:rPr sz="1300" b="0" dirty="0">
+                <a:solidFill>
+                  <a:srgbClr val="212121"/>
+                </a:solidFill>
+                <a:latin typeface="Freesentation"/>
+                <a:ea typeface="Freesentation"/>
+              </a:rPr>
+              <a:t>• 자동 백업 + Multi-AZ (RPO &lt; 5분)</a:t>
+            </a:r>
+          </a:p>
+          <a:p>
+            <a:pPr algn="l"/>
+            <a:endParaRPr sz="600"/>
+          </a:p>
+          <a:p>
+            <a:pPr algn="l"/>
+            <a:r>
+              <a:rPr sz="1300" b="0" dirty="0">
+                <a:solidFill>
+                  <a:srgbClr val="212121"/>
+                </a:solidFill>
+                <a:latin typeface="Freesentation"/>
+                <a:ea typeface="Freesentation"/>
+              </a:rPr>
+              <a:t>• Read Replica로 수평 스케일 즉시</a:t>
+            </a:r>
+          </a:p>
+          <a:p>
+            <a:pPr algn="l"/>
+            <a:endParaRPr sz="600"/>
+          </a:p>
+          <a:p>
+            <a:pPr algn="l"/>
+            <a:r>
+              <a:rPr sz="1300" b="0" dirty="0">
+                <a:solidFill>
+                  <a:srgbClr val="212121"/>
+                </a:solidFill>
+                <a:latin typeface="Freesentation"/>
+                <a:ea typeface="Freesentation"/>
+              </a:rPr>
+              <a:t>• 99.99% SLA, 자동 Multi-AZ 장애조치</a:t>
+            </a:r>
+          </a:p>
+          <a:p>
+            <a:pPr algn="l"/>
+            <a:endParaRPr sz="600"/>
+          </a:p>
+          <a:p>
+            <a:pPr algn="l"/>
+            <a:r>
+              <a:rPr sz="1300" b="0" dirty="0">
+                <a:solidFill>
+                  <a:srgbClr val="212121"/>
+                </a:solidFill>
+                <a:latin typeface="Freesentation"/>
+                <a:ea typeface="Freesentation"/>
+              </a:rPr>
+              <a:t>• 자동 패치·마이너 버전 업그레이드</a:t>
+            </a:r>
+          </a:p>
+          <a:p>
+            <a:pPr algn="l"/>
+            <a:endParaRPr sz="600"/>
+          </a:p>
+          <a:p>
+            <a:pPr algn="l"/>
+            <a:r>
+              <a:rPr sz="1300" b="0" dirty="0">
+                <a:solidFill>
+                  <a:srgbClr val="212121"/>
+                </a:solidFill>
+                <a:latin typeface="Freesentation"/>
+                <a:ea typeface="Freesentation"/>
+              </a:rPr>
+              <a:t>• RDS 관리형 서비스 — DBA 운영 부담 ↓</a:t>
+            </a:r>
+          </a:p>
+        </p:txBody>
+      </p:sp>
+      <p:sp>
+        <p:nvSpPr>
+          <p:cNvPr id="211" name="S211"/>
+          <p:cNvSpPr>
+            <a:spLocks noGrp="1"/>
+          </p:cNvSpPr>
+          <p:nvPr/>
+        </p:nvSpPr>
+        <p:spPr>
+          <a:xfrm>
+            <a:off x="5944440" y="4594980"/>
+            <a:ext cx="411480" cy="274320"/>
+          </a:xfrm>
+          <a:prstGeom prst="rect">
+            <a:avLst/>
+          </a:prstGeom>
+          <a:solidFill>
+            <a:srgbClr val="0043DA"/>
           </a:solidFill>
           <a:ln>
             <a:noFill/>
@@ -5261,370 +5958,70 @@
           <a:p>
             <a:pPr algn="ctr"/>
             <a:r>
-              <a:rPr lang="ko-KR" altLang="en-US" sz="1400" b="1" dirty="0">
+              <a:rPr sz="1600" b="1" dirty="0">
                 <a:solidFill>
                   <a:srgbClr val="FFFFFF"/>
                 </a:solidFill>
-                <a:latin typeface="나눔스퀘어 ExtraBold"/>
-                <a:ea typeface="나눔스퀘어 ExtraBold"/>
-              </a:rPr>
-              <a:t>⚠  AS-IS  현재 상태</a:t>
-            </a:r>
-          </a:p>
-        </p:txBody>
-      </p:sp>
-      <p:sp>
-        <p:nvSpPr>
-          <p:cNvPr id="205" name="S205"/>
-          <p:cNvSpPr>
-            <a:spLocks noGrp="1"/>
-          </p:cNvSpPr>
-          <p:nvPr/>
-        </p:nvSpPr>
-        <p:spPr>
-          <a:xfrm>
-            <a:off x="457200" y="2781440"/>
-            <a:ext cx="5629800" cy="3985120"/>
-          </a:xfrm>
-          <a:prstGeom prst="rect">
-            <a:avLst/>
-          </a:prstGeom>
-          <a:noFill/>
-          <a:ln>
-            <a:noFill/>
-          </a:ln>
-        </p:spPr>
-        <p:txBody>
-          <a:bodyPr anchor="t" lIns="80000" rIns="80000" tIns="80000" bIns="80000"/>
-          <a:lstStyle/>
-          <a:p>
-            <a:pPr algn="l"/>
-            <a:r>
-              <a:rPr lang="ko-KR" altLang="en-US" sz="1300" b="0" dirty="0">
-                <a:solidFill>
-                  <a:srgbClr val="404040"/>
-                </a:solidFill>
-                <a:latin typeface="Freesentation"/>
-                <a:ea typeface="Freesentation"/>
-              </a:rPr>
-              <a:t>• 높은 Oracle 라이선스·유지보수 비용</a:t>
-            </a:r>
-          </a:p>
-          <a:p>
-            <a:pPr algn="l"/>
-            <a:r>
-              <a:rPr lang="ko-KR" altLang="en-US" sz="1100" b="0" dirty="0">
-                <a:solidFill>
-                  <a:srgbClr val="7F8C8D"/>
-                </a:solidFill>
-                <a:latin typeface="Freesentation"/>
-                <a:ea typeface="Freesentation"/>
-              </a:rPr>
-              <a:t>   연간 수억원 이상 고정 지출</a:t>
-            </a:r>
-          </a:p>
-          <a:p>
-            <a:pPr algn="l"/>
-            <a:endParaRPr lang="ko-KR" sz="500"/>
-          </a:p>
-          <a:p>
-            <a:pPr algn="l"/>
-            <a:r>
-              <a:rPr lang="ko-KR" altLang="en-US" sz="1300" b="0" dirty="0">
-                <a:solidFill>
-                  <a:srgbClr val="404040"/>
-                </a:solidFill>
-                <a:latin typeface="Freesentation"/>
-                <a:ea typeface="Freesentation"/>
-              </a:rPr>
-              <a:t>• 수동 백업/복구 프로세스 (RPO 24시간+)</a:t>
-            </a:r>
-          </a:p>
-          <a:p>
-            <a:pPr algn="l"/>
-            <a:endParaRPr lang="ko-KR" sz="500"/>
-          </a:p>
-          <a:p>
-            <a:pPr algn="l"/>
-            <a:r>
-              <a:rPr lang="ko-KR" altLang="en-US" sz="1300" b="0" dirty="0">
-                <a:solidFill>
-                  <a:srgbClr val="404040"/>
-                </a:solidFill>
-                <a:latin typeface="Freesentation"/>
-                <a:ea typeface="Freesentation"/>
-              </a:rPr>
-              <a:t>• 수직 스케일만 가능 — 하드웨어 증설 필요</a:t>
-            </a:r>
-          </a:p>
-          <a:p>
-            <a:pPr algn="l"/>
-            <a:endParaRPr lang="ko-KR" sz="500"/>
-          </a:p>
-          <a:p>
-            <a:pPr algn="l"/>
-            <a:r>
-              <a:rPr lang="ko-KR" altLang="en-US" sz="1300" b="0" dirty="0">
-                <a:solidFill>
-                  <a:srgbClr val="404040"/>
-                </a:solidFill>
-                <a:latin typeface="Freesentation"/>
-                <a:ea typeface="Freesentation"/>
-              </a:rPr>
-              <a:t>• 단일 장애점(SPOF) — 이중화 구성 복잡</a:t>
-            </a:r>
-          </a:p>
-          <a:p>
-            <a:pPr algn="l"/>
-            <a:endParaRPr lang="ko-KR" sz="500"/>
-          </a:p>
-          <a:p>
-            <a:pPr algn="l"/>
-            <a:r>
-              <a:rPr lang="ko-KR" altLang="en-US" sz="1300" b="0" dirty="0">
-                <a:solidFill>
-                  <a:srgbClr val="404040"/>
-                </a:solidFill>
-                <a:latin typeface="Freesentation"/>
-                <a:ea typeface="Freesentation"/>
-              </a:rPr>
-              <a:t>• 패치·업그레이드 사이클 수개월 소요</a:t>
-            </a:r>
-          </a:p>
-          <a:p>
-            <a:pPr algn="l"/>
-            <a:endParaRPr lang="ko-KR" sz="500"/>
-          </a:p>
-          <a:p>
-            <a:pPr algn="l"/>
-            <a:r>
-              <a:rPr lang="ko-KR" altLang="en-US" sz="1300" b="0" dirty="0">
-                <a:solidFill>
-                  <a:srgbClr val="404040"/>
-                </a:solidFill>
-                <a:latin typeface="Freesentation"/>
-                <a:ea typeface="Freesentation"/>
-              </a:rPr>
-              <a:t>• DBA 전담 인력 상시 운영 필수</a:t>
-            </a:r>
-          </a:p>
-        </p:txBody>
-      </p:sp>
-      <p:sp>
-        <p:nvSpPr>
-          <p:cNvPr id="206" name="S206"/>
-          <p:cNvSpPr>
-            <a:spLocks noGrp="1"/>
-          </p:cNvSpPr>
-          <p:nvPr/>
-        </p:nvSpPr>
-        <p:spPr>
-          <a:xfrm>
-            <a:off x="6105000" y="2361440"/>
-            <a:ext cx="5629800" cy="4405120"/>
-          </a:xfrm>
-          <a:prstGeom prst="roundRect">
-            <a:avLst>
-              <a:gd name="adj" fmla="val 16667"/>
-            </a:avLst>
-          </a:prstGeom>
-          <a:solidFill>
-            <a:srgbClr val="D5F5E3"/>
-          </a:solidFill>
-          <a:ln w="12700">
-            <a:solidFill>
-              <a:srgbClr val="A9DFBF"/>
-            </a:solidFill>
-          </a:ln>
-        </p:spPr>
-        <p:txBody>
-          <a:bodyPr anchor="ctr" lIns="91440" rIns="91440" tIns="91440" bIns="91440"/>
-          <a:lstStyle/>
-          <a:p/>
-        </p:txBody>
-      </p:sp>
-      <p:sp>
-        <p:nvSpPr>
-          <p:cNvPr id="207" name="S207"/>
-          <p:cNvSpPr>
-            <a:spLocks noGrp="1"/>
-          </p:cNvSpPr>
-          <p:nvPr/>
-        </p:nvSpPr>
-        <p:spPr>
-          <a:xfrm>
-            <a:off x="6105000" y="2361440"/>
-            <a:ext cx="5629800" cy="420000"/>
-          </a:xfrm>
-          <a:prstGeom prst="rect">
-            <a:avLst/>
-          </a:prstGeom>
-          <a:solidFill>
-            <a:srgbClr val="27AE60"/>
-          </a:solidFill>
-          <a:ln>
-            <a:noFill/>
-          </a:ln>
-        </p:spPr>
-        <p:txBody>
-          <a:bodyPr anchor="ctr" lIns="91440" rIns="91440" tIns="91440" bIns="91440"/>
-          <a:lstStyle/>
-          <a:p>
-            <a:pPr algn="ctr"/>
-            <a:r>
-              <a:rPr lang="ko-KR" altLang="en-US" sz="1400" b="1" dirty="0">
-                <a:solidFill>
-                  <a:srgbClr val="FFFFFF"/>
-                </a:solidFill>
-                <a:latin typeface="나눔스퀘어 ExtraBold"/>
-                <a:ea typeface="나눔스퀘어 ExtraBold"/>
-              </a:rPr>
-              <a:t>✓  TO-BE  AWS 전환 후</a:t>
-            </a:r>
-          </a:p>
-        </p:txBody>
-      </p:sp>
-      <p:sp>
-        <p:nvSpPr>
-          <p:cNvPr id="208" name="S208"/>
-          <p:cNvSpPr>
-            <a:spLocks noGrp="1"/>
-          </p:cNvSpPr>
-          <p:nvPr/>
-        </p:nvSpPr>
-        <p:spPr>
-          <a:xfrm>
-            <a:off x="6105000" y="2781440"/>
-            <a:ext cx="5629800" cy="3985120"/>
-          </a:xfrm>
-          <a:prstGeom prst="rect">
-            <a:avLst/>
-          </a:prstGeom>
-          <a:noFill/>
-          <a:ln>
-            <a:noFill/>
-          </a:ln>
-        </p:spPr>
-        <p:txBody>
-          <a:bodyPr anchor="t" lIns="80000" rIns="80000" tIns="80000" bIns="80000"/>
-          <a:lstStyle/>
-          <a:p>
-            <a:pPr algn="l"/>
-            <a:r>
-              <a:rPr lang="ko-KR" altLang="en-US" sz="1300" b="0" dirty="0">
-                <a:solidFill>
-                  <a:srgbClr val="404040"/>
-                </a:solidFill>
-                <a:latin typeface="Freesentation"/>
-                <a:ea typeface="Freesentation"/>
-              </a:rPr>
-              <a:t>• Pay-as-you-go 비용 (사용량 기반 과금)</a:t>
-            </a:r>
-          </a:p>
-          <a:p>
-            <a:pPr algn="l"/>
-            <a:r>
-              <a:rPr lang="ko-KR" altLang="en-US" sz="1100" b="0" dirty="0">
-                <a:solidFill>
-                  <a:srgbClr val="7F8C8D"/>
-                </a:solidFill>
-                <a:latin typeface="Freesentation"/>
-                <a:ea typeface="Freesentation"/>
-              </a:rPr>
-              <a:t>   비용 30~50% 절감 효과 예상</a:t>
-            </a:r>
-          </a:p>
-          <a:p>
-            <a:pPr algn="l"/>
-            <a:endParaRPr lang="ko-KR" sz="500"/>
-          </a:p>
-          <a:p>
-            <a:pPr algn="l"/>
-            <a:r>
-              <a:rPr lang="ko-KR" altLang="en-US" sz="1300" b="0" dirty="0">
-                <a:solidFill>
-                  <a:srgbClr val="404040"/>
-                </a:solidFill>
-                <a:latin typeface="Freesentation"/>
-                <a:ea typeface="Freesentation"/>
-              </a:rPr>
-              <a:t>• 자동 백업 + Multi-AZ  (RPO &lt; 5분)</a:t>
-            </a:r>
-          </a:p>
-          <a:p>
-            <a:pPr algn="l"/>
-            <a:endParaRPr lang="ko-KR" sz="500"/>
-          </a:p>
-          <a:p>
-            <a:pPr algn="l"/>
-            <a:r>
-              <a:rPr lang="ko-KR" altLang="en-US" sz="1300" b="0" dirty="0">
-                <a:solidFill>
-                  <a:srgbClr val="404040"/>
-                </a:solidFill>
-                <a:latin typeface="Freesentation"/>
-                <a:ea typeface="Freesentation"/>
-              </a:rPr>
-              <a:t>• 수평 스케일 — Read Replica 즉시 추가</a:t>
-            </a:r>
-          </a:p>
-          <a:p>
-            <a:pPr algn="l"/>
-            <a:endParaRPr lang="ko-KR" sz="500"/>
-          </a:p>
-          <a:p>
-            <a:pPr algn="l"/>
-            <a:r>
-              <a:rPr lang="ko-KR" altLang="en-US" sz="1300" b="0" dirty="0">
-                <a:solidFill>
-                  <a:srgbClr val="404040"/>
-                </a:solidFill>
-                <a:latin typeface="Freesentation"/>
-                <a:ea typeface="Freesentation"/>
-              </a:rPr>
-              <a:t>• 고가용성 99.99% SLA 보장</a:t>
-            </a:r>
-          </a:p>
-          <a:p>
-            <a:pPr algn="l"/>
-            <a:endParaRPr lang="ko-KR" sz="500"/>
-          </a:p>
-          <a:p>
-            <a:pPr algn="l"/>
-            <a:r>
-              <a:rPr lang="ko-KR" altLang="en-US" sz="1300" b="0" dirty="0">
-                <a:solidFill>
-                  <a:srgbClr val="404040"/>
-                </a:solidFill>
-                <a:latin typeface="Freesentation"/>
-                <a:ea typeface="Freesentation"/>
-              </a:rPr>
-              <a:t>• 자동 패치·마이너 버전 업그레이드</a:t>
-            </a:r>
-          </a:p>
-          <a:p>
-            <a:pPr algn="l"/>
-            <a:endParaRPr lang="ko-KR" sz="500"/>
-          </a:p>
-          <a:p>
-            <a:pPr algn="l"/>
-            <a:r>
-              <a:rPr lang="ko-KR" altLang="en-US" sz="1300" b="0" dirty="0">
-                <a:solidFill>
-                  <a:srgbClr val="404040"/>
-                </a:solidFill>
-                <a:latin typeface="Freesentation"/>
-                <a:ea typeface="Freesentation"/>
-              </a:rPr>
-              <a:t>• RDS 관리형 서비스로 DBA 운영 부담 ↓</a:t>
-            </a:r>
-          </a:p>
-        </p:txBody>
-      </p:sp>
+                <a:latin typeface="프리젠테이션 7"/>
+                <a:ea typeface="프리젠테이션 7"/>
+              </a:rPr>
+              <a:t>→</a:t>
+            </a:r>
+          </a:p>
+        </p:txBody>
+      </p:sp>
+      <p:pic>
+        <p:nvPicPr>
+          <p:cNvPr id="201" name="Img201"/>
+          <p:cNvPicPr>
+            <a:picLocks noChangeAspect="1"/>
+          </p:cNvPicPr>
+          <p:nvPr/>
+        </p:nvPicPr>
+        <p:blipFill>
+          <a:blip r:embed="rId2"/>
+          <a:stretch>
+            <a:fillRect/>
+          </a:stretch>
+        </p:blipFill>
+        <p:spPr>
+          <a:xfrm>
+            <a:off x="5047200" y="6087600"/>
+            <a:ext cx="411480" cy="411480"/>
+          </a:xfrm>
+          <a:prstGeom prst="rect">
+            <a:avLst/>
+          </a:prstGeom>
+        </p:spPr>
+      </p:pic>
+      <p:pic>
+        <p:nvPicPr>
+          <p:cNvPr id="201" name="Img201"/>
+          <p:cNvPicPr>
+            <a:picLocks noChangeAspect="1"/>
+          </p:cNvPicPr>
+          <p:nvPr/>
+        </p:nvPicPr>
+        <p:blipFill>
+          <a:blip r:embed="rId3"/>
+          <a:stretch>
+            <a:fillRect/>
+          </a:stretch>
+        </p:blipFill>
+        <p:spPr>
+          <a:xfrm>
+            <a:off x="11021280" y="6087600"/>
+            <a:ext cx="411480" cy="411480"/>
+          </a:xfrm>
+          <a:prstGeom prst="rect">
+            <a:avLst/>
+          </a:prstGeom>
+        </p:spPr>
+      </p:pic>
     </p:spTree>
     <p:extLst>
       <p:ext uri="{BB962C8B-B14F-4D97-AF65-F5344CB8AC3E}">
-        <p14:creationId xmlns:p14="http://schemas.microsoft.com/office/powerpoint/2010/main" val="3510897824"/>
+        <p14:creationId xmlns:p14="http://schemas.microsoft.com/office/powerpoint/2010/main" val="3160912687"/>
       </p:ext>
     </p:extLst>
   </p:cSld>
@@ -5710,8 +6107,7 @@
                 <a:ea typeface="프리젠테이션 7 Bold" pitchFamily="2" charset="-127"/>
                 <a:cs typeface="Pretendard ExtraBold" panose="02000903000000020004" pitchFamily="2" charset="-127"/>
               </a:rPr>
-              <a:t>1-2.
-아키텍처</a:t>
+              <a:t>서브색상</a:t>
             </a:r>
             <a:r>
               <a:rPr lang="ko-KR" altLang="en-US" sz="2000" dirty="0">
@@ -5719,8 +6115,28 @@
                 <a:ea typeface="프리젠테이션 7 Bold" pitchFamily="2" charset="-127"/>
                 <a:cs typeface="Pretendard ExtraBold" panose="02000903000000020004" pitchFamily="2" charset="-127"/>
               </a:rPr>
-              <a:t/>
-            </a:r>
+              <a:t> </a:t>
+            </a:r>
+          </a:p>
+          <a:p>
+            <a:pPr>
+              <a:lnSpc>
+                <a:spcPct val="120000"/>
+              </a:lnSpc>
+            </a:pPr>
+            <a:r>
+              <a:rPr lang="ko-KR" altLang="en-US" sz="2000" dirty="0">
+                <a:latin typeface="프리젠테이션 7 Bold" pitchFamily="2" charset="-127"/>
+                <a:ea typeface="프리젠테이션 7 Bold" pitchFamily="2" charset="-127"/>
+                <a:cs typeface="Pretendard ExtraBold" panose="02000903000000020004" pitchFamily="2" charset="-127"/>
+              </a:rPr>
+              <a:t>적용 예시</a:t>
+            </a:r>
+            <a:endParaRPr lang="ko-KR" altLang="en-US" sz="2000" dirty="0">
+              <a:latin typeface="프리젠테이션 7 Bold" pitchFamily="2" charset="-127"/>
+              <a:ea typeface="프리젠테이션 7 Bold" pitchFamily="2" charset="-127"/>
+              <a:cs typeface="Pretendard ExtraBold" panose="02000903000000020004" pitchFamily="2" charset="-127"/>
+            </a:endParaRPr>
           </a:p>
         </p:txBody>
       </p:sp>
@@ -5770,7 +6186,7 @@
                 <a:ea typeface="프리젠테이션 5 Medium" pitchFamily="2" charset="-127"/>
                 <a:cs typeface="Pretendard" panose="02000503000000020004" pitchFamily="2" charset="-127"/>
               </a:rPr>
-              <a:t>Before/After — On-Premise 3-Tier → AWS 클라우드 네이티브</a:t>
+              <a:t>설명글을</a:t>
             </a:r>
             <a:r>
               <a:rPr lang="ko-KR" altLang="en-US" sz="1200" dirty="0">
@@ -5791,7 +6207,7 @@
                 <a:ea typeface="프리젠테이션 5 Medium" pitchFamily="2" charset="-127"/>
                 <a:cs typeface="Pretendard" panose="02000503000000020004" pitchFamily="2" charset="-127"/>
               </a:rPr>
-              <a:t/>
+              <a:t> 적어주세요</a:t>
             </a:r>
             <a:r>
               <a:rPr lang="en-US" altLang="ko-KR" sz="1200" b="1" dirty="0">
@@ -5812,7 +6228,7 @@
                 <a:ea typeface="프리젠테이션 5 Medium" pitchFamily="2" charset="-127"/>
                 <a:cs typeface="Pretendard" panose="02000503000000020004" pitchFamily="2" charset="-127"/>
               </a:rPr>
-              <a:t/>
+              <a:t>. </a:t>
             </a:r>
             <a:r>
               <a:rPr lang="ko-KR" altLang="en-US" sz="1200" b="1" dirty="0">
@@ -5830,7 +6246,7 @@
                 <a:ea typeface="프리젠테이션 7 Bold" pitchFamily="2" charset="-127"/>
                 <a:cs typeface="Pretendard" panose="02000503000000020004" pitchFamily="2" charset="-127"/>
               </a:rPr>
-              <a:t/>
+              <a:t>강조 텍스트</a:t>
             </a:r>
             <a:r>
               <a:rPr lang="en-US" altLang="ko-KR" sz="1200" b="1" dirty="0">
@@ -5848,7 +6264,7 @@
                 <a:ea typeface="프리젠테이션 7 Bold" pitchFamily="2" charset="-127"/>
                 <a:cs typeface="Pretendard" panose="02000503000000020004" pitchFamily="2" charset="-127"/>
               </a:rPr>
-              <a:t/>
+              <a:t>(</a:t>
             </a:r>
             <a:r>
               <a:rPr lang="ko-KR" altLang="en-US" sz="1200" b="1" dirty="0" err="1">
@@ -5866,7 +6282,7 @@
                 <a:ea typeface="프리젠테이션 7 Bold" pitchFamily="2" charset="-127"/>
                 <a:cs typeface="Pretendard" panose="02000503000000020004" pitchFamily="2" charset="-127"/>
               </a:rPr>
-              <a:t/>
+              <a:t>프리젠테이션</a:t>
             </a:r>
             <a:r>
               <a:rPr lang="ko-KR" altLang="en-US" sz="1200" b="1" dirty="0">
@@ -5884,7 +6300,7 @@
                 <a:ea typeface="프리젠테이션 7 Bold" pitchFamily="2" charset="-127"/>
                 <a:cs typeface="Pretendard" panose="02000503000000020004" pitchFamily="2" charset="-127"/>
               </a:rPr>
-              <a:t/>
+              <a:t> </a:t>
             </a:r>
             <a:r>
               <a:rPr lang="en-US" altLang="ko-KR" sz="1200" b="1" dirty="0">
@@ -5902,7 +6318,7 @@
                 <a:ea typeface="프리젠테이션 7 Bold" pitchFamily="2" charset="-127"/>
                 <a:cs typeface="Pretendard" panose="02000503000000020004" pitchFamily="2" charset="-127"/>
               </a:rPr>
-              <a:t/>
+              <a:t>7 Bold, </a:t>
             </a:r>
             <a:r>
               <a:rPr lang="ko-KR" altLang="en-US" sz="1200" b="1" dirty="0">
@@ -5920,7 +6336,7 @@
                 <a:ea typeface="프리젠테이션 7 Bold" pitchFamily="2" charset="-127"/>
                 <a:cs typeface="Pretendard" panose="02000503000000020004" pitchFamily="2" charset="-127"/>
               </a:rPr>
-              <a:t/>
+              <a:t>메인 컬러</a:t>
             </a:r>
             <a:r>
               <a:rPr lang="en-US" altLang="ko-KR" sz="1200" b="1" dirty="0" smtClean="0">
@@ -5938,8 +6354,219 @@
                 <a:ea typeface="프리젠테이션 7 Bold" pitchFamily="2" charset="-127"/>
                 <a:cs typeface="Pretendard" panose="02000503000000020004" pitchFamily="2" charset="-127"/>
               </a:rPr>
-              <a:t/>
-            </a:r>
+              <a:t>)</a:t>
+            </a:r>
+          </a:p>
+          <a:p>
+            <a:pPr latinLnBrk="0">
+              <a:lnSpc>
+                <a:spcPct val="150000"/>
+              </a:lnSpc>
+            </a:pPr>
+            <a:r>
+              <a:rPr lang="ko-KR" altLang="en-US" sz="1200" dirty="0" smtClean="0">
+                <a:ln>
+                  <a:solidFill>
+                    <a:schemeClr val="accent1">
+                      <a:alpha val="0"/>
+                    </a:schemeClr>
+                  </a:solidFill>
+                </a:ln>
+                <a:solidFill>
+                  <a:schemeClr val="tx1">
+                    <a:lumMod val="75000"/>
+                    <a:lumOff val="25000"/>
+                  </a:schemeClr>
+                </a:solidFill>
+                <a:latin typeface="프리젠테이션 5 Medium" pitchFamily="2" charset="-127"/>
+                <a:ea typeface="프리젠테이션 5 Medium" pitchFamily="2" charset="-127"/>
+                <a:cs typeface="Pretendard" panose="02000503000000020004" pitchFamily="2" charset="-127"/>
+              </a:rPr>
+              <a:t>폰트 </a:t>
+            </a:r>
+            <a:r>
+              <a:rPr lang="en-US" altLang="ko-KR" sz="1200" dirty="0" smtClean="0">
+                <a:ln>
+                  <a:solidFill>
+                    <a:schemeClr val="accent1">
+                      <a:alpha val="0"/>
+                    </a:schemeClr>
+                  </a:solidFill>
+                </a:ln>
+                <a:solidFill>
+                  <a:schemeClr val="tx1">
+                    <a:lumMod val="75000"/>
+                    <a:lumOff val="25000"/>
+                  </a:schemeClr>
+                </a:solidFill>
+                <a:latin typeface="프리젠테이션 5 Medium" pitchFamily="2" charset="-127"/>
+                <a:ea typeface="프리젠테이션 5 Medium" pitchFamily="2" charset="-127"/>
+                <a:cs typeface="Pretendard" panose="02000503000000020004" pitchFamily="2" charset="-127"/>
+              </a:rPr>
+              <a:t>: </a:t>
+            </a:r>
+            <a:r>
+              <a:rPr lang="ko-KR" altLang="en-US" sz="1200" dirty="0" err="1" smtClean="0">
+                <a:ln>
+                  <a:solidFill>
+                    <a:schemeClr val="accent1">
+                      <a:alpha val="0"/>
+                    </a:schemeClr>
+                  </a:solidFill>
+                </a:ln>
+                <a:solidFill>
+                  <a:schemeClr val="tx1">
+                    <a:lumMod val="75000"/>
+                    <a:lumOff val="25000"/>
+                  </a:schemeClr>
+                </a:solidFill>
+                <a:latin typeface="프리젠테이션 5 Medium" pitchFamily="2" charset="-127"/>
+                <a:ea typeface="프리젠테이션 5 Medium" pitchFamily="2" charset="-127"/>
+                <a:cs typeface="Pretendard" panose="02000503000000020004" pitchFamily="2" charset="-127"/>
+              </a:rPr>
+              <a:t>프리젠테이션</a:t>
+            </a:r>
+            <a:r>
+              <a:rPr lang="ko-KR" altLang="en-US" sz="1200" dirty="0" smtClean="0">
+                <a:ln>
+                  <a:solidFill>
+                    <a:schemeClr val="accent1">
+                      <a:alpha val="0"/>
+                    </a:schemeClr>
+                  </a:solidFill>
+                </a:ln>
+                <a:solidFill>
+                  <a:schemeClr val="tx1">
+                    <a:lumMod val="75000"/>
+                    <a:lumOff val="25000"/>
+                  </a:schemeClr>
+                </a:solidFill>
+                <a:latin typeface="프리젠테이션 5 Medium" pitchFamily="2" charset="-127"/>
+                <a:ea typeface="프리젠테이션 5 Medium" pitchFamily="2" charset="-127"/>
+                <a:cs typeface="Pretendard" panose="02000503000000020004" pitchFamily="2" charset="-127"/>
+              </a:rPr>
+              <a:t> </a:t>
+            </a:r>
+            <a:r>
+              <a:rPr lang="en-US" altLang="ko-KR" sz="1200" dirty="0" smtClean="0">
+                <a:ln>
+                  <a:solidFill>
+                    <a:schemeClr val="accent1">
+                      <a:alpha val="0"/>
+                    </a:schemeClr>
+                  </a:solidFill>
+                </a:ln>
+                <a:solidFill>
+                  <a:schemeClr val="tx1">
+                    <a:lumMod val="75000"/>
+                    <a:lumOff val="25000"/>
+                  </a:schemeClr>
+                </a:solidFill>
+                <a:latin typeface="프리젠테이션 5 Medium" pitchFamily="2" charset="-127"/>
+                <a:ea typeface="프리젠테이션 5 Medium" pitchFamily="2" charset="-127"/>
+                <a:cs typeface="Pretendard" panose="02000503000000020004" pitchFamily="2" charset="-127"/>
+              </a:rPr>
+              <a:t>5 Medium 12pt  </a:t>
+            </a:r>
+            <a:r>
+              <a:rPr lang="ko-KR" altLang="en-US" sz="1200" dirty="0" smtClean="0">
+                <a:ln>
+                  <a:solidFill>
+                    <a:schemeClr val="accent1">
+                      <a:alpha val="0"/>
+                    </a:schemeClr>
+                  </a:solidFill>
+                </a:ln>
+                <a:solidFill>
+                  <a:schemeClr val="tx1">
+                    <a:lumMod val="75000"/>
+                    <a:lumOff val="25000"/>
+                  </a:schemeClr>
+                </a:solidFill>
+                <a:latin typeface="프리젠테이션 5 Medium" pitchFamily="2" charset="-127"/>
+                <a:ea typeface="프리젠테이션 5 Medium" pitchFamily="2" charset="-127"/>
+                <a:cs typeface="Pretendard" panose="02000503000000020004" pitchFamily="2" charset="-127"/>
+              </a:rPr>
+              <a:t>최대 </a:t>
+            </a:r>
+            <a:r>
+              <a:rPr lang="en-US" altLang="ko-KR" sz="1200" dirty="0" smtClean="0">
+                <a:ln>
+                  <a:solidFill>
+                    <a:schemeClr val="accent1">
+                      <a:alpha val="0"/>
+                    </a:schemeClr>
+                  </a:solidFill>
+                </a:ln>
+                <a:solidFill>
+                  <a:schemeClr val="tx1">
+                    <a:lumMod val="75000"/>
+                    <a:lumOff val="25000"/>
+                  </a:schemeClr>
+                </a:solidFill>
+                <a:latin typeface="프리젠테이션 5 Medium" pitchFamily="2" charset="-127"/>
+                <a:ea typeface="프리젠테이션 5 Medium" pitchFamily="2" charset="-127"/>
+                <a:cs typeface="Pretendard" panose="02000503000000020004" pitchFamily="2" charset="-127"/>
+              </a:rPr>
+              <a:t>3</a:t>
+            </a:r>
+            <a:r>
+              <a:rPr lang="ko-KR" altLang="en-US" sz="1200" dirty="0" smtClean="0">
+                <a:ln>
+                  <a:solidFill>
+                    <a:schemeClr val="accent1">
+                      <a:alpha val="0"/>
+                    </a:schemeClr>
+                  </a:solidFill>
+                </a:ln>
+                <a:solidFill>
+                  <a:schemeClr val="tx1">
+                    <a:lumMod val="75000"/>
+                    <a:lumOff val="25000"/>
+                  </a:schemeClr>
+                </a:solidFill>
+                <a:latin typeface="프리젠테이션 5 Medium" pitchFamily="2" charset="-127"/>
+                <a:ea typeface="프리젠테이션 5 Medium" pitchFamily="2" charset="-127"/>
+                <a:cs typeface="Pretendard" panose="02000503000000020004" pitchFamily="2" charset="-127"/>
+              </a:rPr>
+              <a:t>줄까지 작성 가능합니다</a:t>
+            </a:r>
+            <a:r>
+              <a:rPr lang="en-US" altLang="ko-KR" sz="1200" dirty="0" smtClean="0">
+                <a:ln>
+                  <a:solidFill>
+                    <a:schemeClr val="accent1">
+                      <a:alpha val="0"/>
+                    </a:schemeClr>
+                  </a:solidFill>
+                </a:ln>
+                <a:solidFill>
+                  <a:schemeClr val="tx1">
+                    <a:lumMod val="75000"/>
+                    <a:lumOff val="25000"/>
+                  </a:schemeClr>
+                </a:solidFill>
+                <a:latin typeface="프리젠테이션 5 Medium" pitchFamily="2" charset="-127"/>
+                <a:ea typeface="프리젠테이션 5 Medium" pitchFamily="2" charset="-127"/>
+                <a:cs typeface="Pretendard" panose="02000503000000020004" pitchFamily="2" charset="-127"/>
+              </a:rPr>
+              <a:t>.</a:t>
+            </a:r>
+            <a:endParaRPr lang="en-US" altLang="ko-KR" sz="1200" dirty="0">
+              <a:ln>
+                <a:solidFill>
+                  <a:schemeClr val="accent1">
+                    <a:alpha val="0"/>
+                  </a:schemeClr>
+                </a:solidFill>
+              </a:ln>
+              <a:solidFill>
+                <a:srgbClr val="2765E1"/>
+              </a:solidFill>
+              <a:latin typeface="프리젠테이션 5 Medium" pitchFamily="2" charset="-127"/>
+              <a:ea typeface="프리젠테이션 5 Medium" pitchFamily="2" charset="-127"/>
+              <a:cs typeface="Pretendard" panose="02000503000000020004" pitchFamily="2" charset="-127"/>
+            </a:endParaRPr>
           </a:p>
         </p:txBody>
       </p:sp>
@@ -5953,8 +6580,8 @@
         </p:nvSpPr>
         <p:spPr>
           <a:xfrm>
-            <a:off x="457200" y="1750000"/>
-            <a:ext cx="11277600" cy="280000"/>
+            <a:off x="457200" y="1600200"/>
+            <a:ext cx="11277600" cy="320040"/>
           </a:xfrm>
           <a:prstGeom prst="rect">
             <a:avLst/>
@@ -5965,19 +6592,19 @@
           </a:ln>
         </p:spPr>
         <p:txBody>
-          <a:bodyPr anchor="ctr" lIns="91440" rIns="91440" tIns="91440" bIns="91440"/>
+          <a:bodyPr anchor="ctr" lIns="0" rIns="0" tIns="0" bIns="0"/>
           <a:lstStyle/>
           <a:p>
             <a:pPr algn="l"/>
             <a:r>
-              <a:rPr lang="ko-KR" altLang="en-US" sz="1600" b="1" dirty="0">
-                <a:solidFill>
-                  <a:srgbClr val="1B3A5C"/>
+              <a:rPr sz="1600" b="1" dirty="0">
+                <a:solidFill>
+                  <a:srgbClr val="0043DA"/>
                 </a:solidFill>
                 <a:latin typeface="Freesentation"/>
                 <a:ea typeface="Freesentation"/>
               </a:rPr>
-              <a:t>인프라 아키텍처 전환</a:t>
+              <a:t>인프라 아키텍처 전환 효과</a:t>
             </a:r>
           </a:p>
         </p:txBody>
@@ -5992,8 +6619,8 @@
         </p:nvSpPr>
         <p:spPr>
           <a:xfrm>
-            <a:off x="457200" y="2040000"/>
-            <a:ext cx="11277600" cy="230000"/>
+            <a:off x="457200" y="1965960"/>
+            <a:ext cx="11277600" cy="274320"/>
           </a:xfrm>
           <a:prstGeom prst="rect">
             <a:avLst/>
@@ -6004,19 +6631,19 @@
           </a:ln>
         </p:spPr>
         <p:txBody>
-          <a:bodyPr anchor="ctr" lIns="91440" rIns="91440" tIns="91440" bIns="91440"/>
+          <a:bodyPr anchor="ctr" lIns="0" rIns="0" tIns="0" bIns="0"/>
           <a:lstStyle/>
           <a:p>
             <a:pPr algn="l"/>
             <a:r>
-              <a:rPr lang="ko-KR" altLang="en-US" sz="1200" b="0" dirty="0">
-                <a:solidFill>
-                  <a:srgbClr val="7F8C8D"/>
+              <a:rPr sz="1300" b="0" dirty="0">
+                <a:solidFill>
+                  <a:srgbClr val="212121"/>
                 </a:solidFill>
                 <a:latin typeface="Freesentation"/>
                 <a:ea typeface="Freesentation"/>
               </a:rPr>
-              <a:t>물리 서버 3-Tier 구조에서 AWS 클라우드 네이티브 아키텍처로</a:t>
+              <a:t>On-Premise 3-Tier → AWS Cloud Native 전환 전/후 KPI 수치 비교</a:t>
             </a:r>
           </a:p>
         </p:txBody>
@@ -6031,25 +6658,35 @@
         </p:nvSpPr>
         <p:spPr>
           <a:xfrm>
-            <a:off x="457200" y="2361440"/>
-            <a:ext cx="5400800" cy="4405120"/>
+            <a:off x="637160" y="2423160"/>
+            <a:ext cx="1371600" cy="274320"/>
           </a:xfrm>
           <a:prstGeom prst="rect">
             <a:avLst/>
           </a:prstGeom>
           <a:solidFill>
-            <a:srgbClr val="F0F4F8"/>
+            <a:srgbClr val="212121"/>
           </a:solidFill>
-          <a:ln w="12700">
-            <a:solidFill>
-              <a:srgbClr val="CCCCCC"/>
-            </a:solidFill>
+          <a:ln>
+            <a:noFill/>
           </a:ln>
         </p:spPr>
         <p:txBody>
           <a:bodyPr anchor="ctr" lIns="91440" rIns="91440" tIns="91440" bIns="91440"/>
           <a:lstStyle/>
-          <a:p/>
+          <a:p>
+            <a:pPr algn="ctr"/>
+            <a:r>
+              <a:rPr sz="1300" b="1" dirty="0">
+                <a:solidFill>
+                  <a:srgbClr val="FFFFFF"/>
+                </a:solidFill>
+                <a:latin typeface="프리젠테이션 7"/>
+                <a:ea typeface="프리젠테이션 7"/>
+              </a:rPr>
+              <a:t>BEFORE</a:t>
+            </a:r>
+          </a:p>
         </p:txBody>
       </p:sp>
       <p:sp>
@@ -6062,14 +6699,14 @@
         </p:nvSpPr>
         <p:spPr>
           <a:xfrm>
-            <a:off x="457200" y="2361440"/>
-            <a:ext cx="5400800" cy="380000"/>
+            <a:off x="6611040" y="2423160"/>
+            <a:ext cx="1371600" cy="274320"/>
           </a:xfrm>
           <a:prstGeom prst="rect">
             <a:avLst/>
           </a:prstGeom>
           <a:solidFill>
-            <a:srgbClr val="1B3A5C"/>
+            <a:srgbClr val="0043DA"/>
           </a:solidFill>
           <a:ln>
             <a:noFill/>
@@ -6081,14 +6718,14 @@
           <a:p>
             <a:pPr algn="ctr"/>
             <a:r>
-              <a:rPr lang="ko-KR" altLang="en-US" sz="1400" b="1" dirty="0">
+              <a:rPr sz="1300" b="1" dirty="0">
                 <a:solidFill>
                   <a:srgbClr val="FFFFFF"/>
                 </a:solidFill>
-                <a:latin typeface="나눔스퀘어 ExtraBold"/>
-                <a:ea typeface="나눔스퀘어 ExtraBold"/>
-              </a:rPr>
-              <a:t>BEFORE  |  On-Premise</a:t>
+                <a:latin typeface="프리젠테이션 7"/>
+                <a:ea typeface="프리젠테이션 7"/>
+              </a:rPr>
+              <a:t>AFTER</a:t>
             </a:r>
           </a:p>
         </p:txBody>
@@ -6103,8 +6740,74 @@
         </p:nvSpPr>
         <p:spPr>
           <a:xfrm>
-            <a:off x="457200" y="2741440"/>
-            <a:ext cx="5400800" cy="4025120"/>
+            <a:off x="457200" y="2789820"/>
+            <a:ext cx="5303520" cy="3885660"/>
+          </a:xfrm>
+          <a:prstGeom prst="roundRect">
+            <a:avLst>
+              <a:gd name="adj" fmla="val 16667"/>
+            </a:avLst>
+          </a:prstGeom>
+          <a:solidFill>
+            <a:srgbClr val="F8F9FA"/>
+          </a:solidFill>
+          <a:ln w="9525">
+            <a:solidFill>
+              <a:srgbClr val="DCDCDC"/>
+            </a:solidFill>
+          </a:ln>
+        </p:spPr>
+        <p:txBody>
+          <a:bodyPr anchor="ctr" lIns="91440" rIns="91440" tIns="91440" bIns="91440"/>
+          <a:lstStyle/>
+          <a:p/>
+        </p:txBody>
+      </p:sp>
+      <p:sp>
+        <p:nvSpPr>
+          <p:cNvPr id="206" name="S206"/>
+          <p:cNvSpPr>
+            <a:spLocks noGrp="1"/>
+          </p:cNvSpPr>
+          <p:nvPr/>
+        </p:nvSpPr>
+        <p:spPr>
+          <a:xfrm>
+            <a:off x="6431280" y="2789820"/>
+            <a:ext cx="5303520" cy="3885660"/>
+          </a:xfrm>
+          <a:prstGeom prst="roundRect">
+            <a:avLst>
+              <a:gd name="adj" fmla="val 16667"/>
+            </a:avLst>
+          </a:prstGeom>
+          <a:solidFill>
+            <a:srgbClr val="E6F0FF"/>
+          </a:solidFill>
+          <a:ln w="9525">
+            <a:solidFill>
+              <a:srgbClr val="0043DA"/>
+            </a:solidFill>
+          </a:ln>
+        </p:spPr>
+        <p:txBody>
+          <a:bodyPr anchor="ctr" lIns="91440" rIns="91440" tIns="91440" bIns="91440"/>
+          <a:lstStyle/>
+          <a:p/>
+        </p:txBody>
+      </p:sp>
+      <p:sp>
+        <p:nvSpPr>
+          <p:cNvPr id="207" name="S207"/>
+          <p:cNvSpPr>
+            <a:spLocks noGrp="1"/>
+          </p:cNvSpPr>
+          <p:nvPr/>
+        </p:nvSpPr>
+        <p:spPr>
+          <a:xfrm>
+            <a:off x="637160" y="2897580"/>
+            <a:ext cx="4941840" cy="457200"/>
           </a:xfrm>
           <a:prstGeom prst="rect">
             <a:avLst/>
@@ -6115,129 +6818,26 @@
           </a:ln>
         </p:spPr>
         <p:txBody>
-          <a:bodyPr anchor="t" lIns="80000" rIns="80000" tIns="80000" bIns="80000"/>
+          <a:bodyPr anchor="ctr" lIns="0" rIns="0" tIns="0" bIns="0"/>
           <a:lstStyle/>
           <a:p>
             <a:pPr algn="l"/>
             <a:r>
-              <a:rPr lang="ko-KR" altLang="en-US" sz="1300" b="1" dirty="0">
-                <a:solidFill>
-                  <a:srgbClr val="1B3A5C"/>
-                </a:solidFill>
-                <a:latin typeface="Freesentation"/>
-                <a:ea typeface="Freesentation"/>
-              </a:rPr>
-              <a:t>▣  네트워크 계층</a:t>
-            </a:r>
-          </a:p>
-          <a:p>
-            <a:pPr algn="l"/>
-            <a:r>
-              <a:rPr lang="ko-KR" altLang="en-US" sz="1300" b="0" dirty="0">
-                <a:solidFill>
-                  <a:srgbClr val="404040"/>
-                </a:solidFill>
-                <a:latin typeface="Freesentation"/>
-                <a:ea typeface="Freesentation"/>
-              </a:rPr>
-              <a:t>   IDC 내 L4/L7 스위치, 방화벽</a:t>
-            </a:r>
-          </a:p>
-          <a:p>
-            <a:pPr algn="l"/>
-            <a:endParaRPr lang="ko-KR" sz="400"/>
-          </a:p>
-          <a:p>
-            <a:pPr algn="l"/>
-            <a:r>
-              <a:rPr lang="ko-KR" altLang="en-US" sz="1300" b="1" dirty="0">
-                <a:solidFill>
-                  <a:srgbClr val="1B3A5C"/>
-                </a:solidFill>
-                <a:latin typeface="Freesentation"/>
-                <a:ea typeface="Freesentation"/>
-              </a:rPr>
-              <a:t>▣  웹/AP 계층</a:t>
-            </a:r>
-          </a:p>
-          <a:p>
-            <a:pPr algn="l"/>
-            <a:r>
-              <a:rPr lang="ko-KR" altLang="en-US" sz="1300" b="0" dirty="0">
-                <a:solidFill>
-                  <a:srgbClr val="404040"/>
-                </a:solidFill>
-                <a:latin typeface="Freesentation"/>
-                <a:ea typeface="Freesentation"/>
-              </a:rPr>
-              <a:t>   물리 서버 WAS 클러스터 (Active-Active)</a:t>
-            </a:r>
-          </a:p>
-          <a:p>
-            <a:pPr algn="l"/>
-            <a:endParaRPr lang="ko-KR" sz="400"/>
-          </a:p>
-          <a:p>
-            <a:pPr algn="l"/>
-            <a:r>
-              <a:rPr lang="ko-KR" altLang="en-US" sz="1300" b="1" dirty="0">
-                <a:solidFill>
-                  <a:srgbClr val="1B3A5C"/>
-                </a:solidFill>
-                <a:latin typeface="Freesentation"/>
-                <a:ea typeface="Freesentation"/>
-              </a:rPr>
-              <a:t>▣  DB 계층</a:t>
-            </a:r>
-          </a:p>
-          <a:p>
-            <a:pPr algn="l"/>
-            <a:r>
-              <a:rPr lang="ko-KR" altLang="en-US" sz="1300" b="0" dirty="0">
-                <a:solidFill>
-                  <a:srgbClr val="404040"/>
-                </a:solidFill>
-                <a:latin typeface="Freesentation"/>
-                <a:ea typeface="Freesentation"/>
-              </a:rPr>
-              <a:t>   Oracle DB Active-Standby 이중화</a:t>
-            </a:r>
-          </a:p>
-          <a:p>
-            <a:pPr algn="l"/>
-            <a:endParaRPr lang="ko-KR" sz="400"/>
-          </a:p>
-          <a:p>
-            <a:pPr algn="l"/>
-            <a:r>
-              <a:rPr lang="ko-KR" altLang="en-US" sz="1300" b="1" dirty="0">
-                <a:solidFill>
-                  <a:srgbClr val="1B3A5C"/>
-                </a:solidFill>
-                <a:latin typeface="Freesentation"/>
-                <a:ea typeface="Freesentation"/>
-              </a:rPr>
-              <a:t>▣  백업</a:t>
-            </a:r>
-          </a:p>
-          <a:p>
-            <a:pPr algn="l"/>
-            <a:r>
-              <a:rPr lang="ko-KR" altLang="en-US" sz="1300" b="0" dirty="0">
-                <a:solidFill>
-                  <a:srgbClr val="404040"/>
-                </a:solidFill>
-                <a:latin typeface="Freesentation"/>
-                <a:ea typeface="Freesentation"/>
-              </a:rPr>
-              <a:t>   테이프/NAS 백업 (수동 스케줄링)</a:t>
-            </a:r>
-          </a:p>
-        </p:txBody>
-      </p:sp>
-      <p:sp>
-        <p:nvSpPr>
-          <p:cNvPr id="206" name="S206"/>
+              <a:rPr sz="2400" b="1" dirty="0">
+                <a:solidFill>
+                  <a:srgbClr val="212121"/>
+                </a:solidFill>
+                <a:latin typeface="프리젠테이션 7"/>
+                <a:ea typeface="프리젠테이션 7"/>
+              </a:rPr>
+              <a:t>99.5%  가용성</a:t>
+            </a:r>
+          </a:p>
+        </p:txBody>
+      </p:sp>
+      <p:sp>
+        <p:nvSpPr>
+          <p:cNvPr id="208" name="S208"/>
           <p:cNvSpPr>
             <a:spLocks noGrp="1"/>
           </p:cNvSpPr>
@@ -6245,14 +6845,131 @@
         </p:nvSpPr>
         <p:spPr>
           <a:xfrm>
-            <a:off x="5876000" y="4484000"/>
-            <a:ext cx="440000" cy="160000"/>
+            <a:off x="6611040" y="2897580"/>
+            <a:ext cx="4941840" cy="457200"/>
+          </a:xfrm>
+          <a:prstGeom prst="rect">
+            <a:avLst/>
+          </a:prstGeom>
+          <a:noFill/>
+          <a:ln>
+            <a:noFill/>
+          </a:ln>
+        </p:spPr>
+        <p:txBody>
+          <a:bodyPr anchor="ctr" lIns="0" rIns="0" tIns="0" bIns="0"/>
+          <a:lstStyle/>
+          <a:p>
+            <a:pPr algn="l"/>
+            <a:r>
+              <a:rPr sz="2400" b="1" dirty="0">
+                <a:solidFill>
+                  <a:srgbClr val="0043DA"/>
+                </a:solidFill>
+                <a:latin typeface="프리젠테이션 7"/>
+                <a:ea typeface="프리젠테이션 7"/>
+              </a:rPr>
+              <a:t>99.99%  가용성</a:t>
+            </a:r>
+          </a:p>
+        </p:txBody>
+      </p:sp>
+      <p:sp>
+        <p:nvSpPr>
+          <p:cNvPr id="209" name="S209"/>
+          <p:cNvSpPr>
+            <a:spLocks noGrp="1"/>
+          </p:cNvSpPr>
+          <p:nvPr/>
+        </p:nvSpPr>
+        <p:spPr>
+          <a:xfrm>
+            <a:off x="637160" y="3354780"/>
+            <a:ext cx="4941840" cy="228600"/>
+          </a:xfrm>
+          <a:prstGeom prst="rect">
+            <a:avLst/>
+          </a:prstGeom>
+          <a:noFill/>
+          <a:ln>
+            <a:noFill/>
+          </a:ln>
+        </p:spPr>
+        <p:txBody>
+          <a:bodyPr anchor="ctr" lIns="0" rIns="0" tIns="0" bIns="0"/>
+          <a:lstStyle/>
+          <a:p>
+            <a:pPr algn="l"/>
+            <a:r>
+              <a:rPr sz="1100" b="0" dirty="0">
+                <a:solidFill>
+                  <a:srgbClr val="505050"/>
+                </a:solidFill>
+                <a:latin typeface="Freesentation"/>
+                <a:ea typeface="Freesentation"/>
+              </a:rPr>
+              <a:t>Active-Standby 이중화 기준 (2025년 실측)</a:t>
+            </a:r>
+          </a:p>
+        </p:txBody>
+      </p:sp>
+      <p:sp>
+        <p:nvSpPr>
+          <p:cNvPr id="210" name="S210"/>
+          <p:cNvSpPr>
+            <a:spLocks noGrp="1"/>
+          </p:cNvSpPr>
+          <p:nvPr/>
+        </p:nvSpPr>
+        <p:spPr>
+          <a:xfrm>
+            <a:off x="6611040" y="3354780"/>
+            <a:ext cx="4941840" cy="228600"/>
+          </a:xfrm>
+          <a:prstGeom prst="rect">
+            <a:avLst/>
+          </a:prstGeom>
+          <a:noFill/>
+          <a:ln>
+            <a:noFill/>
+          </a:ln>
+        </p:spPr>
+        <p:txBody>
+          <a:bodyPr anchor="ctr" lIns="0" rIns="0" tIns="0" bIns="0"/>
+          <a:lstStyle/>
+          <a:p>
+            <a:pPr algn="l"/>
+            <a:r>
+              <a:rPr sz="1100" b="0" dirty="0">
+                <a:solidFill>
+                  <a:srgbClr val="505050"/>
+                </a:solidFill>
+                <a:latin typeface="Freesentation"/>
+                <a:ea typeface="Freesentation"/>
+              </a:rPr>
+              <a:t>RDS Multi-AZ SLA (자동 장애조치 60초)</a:t>
+            </a:r>
+          </a:p>
+        </p:txBody>
+      </p:sp>
+      <p:sp>
+        <p:nvSpPr>
+          <p:cNvPr id="211" name="S211"/>
+          <p:cNvSpPr>
+            <a:spLocks noGrp="1"/>
+          </p:cNvSpPr>
+          <p:nvPr/>
+        </p:nvSpPr>
+        <p:spPr>
+          <a:xfrm>
+            <a:off x="637160" y="3674820"/>
+            <a:ext cx="4941840" cy="9000"/>
           </a:xfrm>
           <a:prstGeom prst="rect">
             <a:avLst/>
           </a:prstGeom>
           <a:solidFill>
-            <a:srgbClr val="E87722"/>
+            <a:srgbClr val="DCDCDC"/>
           </a:solidFill>
           <a:ln>
             <a:noFill/>
@@ -6261,24 +6978,12 @@
         <p:txBody>
           <a:bodyPr anchor="ctr" lIns="91440" rIns="91440" tIns="91440" bIns="91440"/>
           <a:lstStyle/>
-          <a:p>
-            <a:pPr algn="ctr"/>
-            <a:r>
-              <a:rPr lang="ko-KR" altLang="en-US" sz="2000" b="1" dirty="0">
-                <a:solidFill>
-                  <a:srgbClr val="FFFFFF"/>
-                </a:solidFill>
-                <a:latin typeface="나눔스퀘어 ExtraBold"/>
-                <a:ea typeface="나눔스퀘어 ExtraBold"/>
-              </a:rPr>
-              <a:t>→</a:t>
-            </a:r>
-          </a:p>
-        </p:txBody>
-      </p:sp>
-      <p:sp>
-        <p:nvSpPr>
-          <p:cNvPr id="207" name="S207"/>
+          <a:p/>
+        </p:txBody>
+      </p:sp>
+      <p:sp>
+        <p:nvSpPr>
+          <p:cNvPr id="212" name="S212"/>
           <p:cNvSpPr>
             <a:spLocks noGrp="1"/>
           </p:cNvSpPr>
@@ -6286,45 +6991,14 @@
         </p:nvSpPr>
         <p:spPr>
           <a:xfrm>
-            <a:off x="6334000" y="2361440"/>
-            <a:ext cx="5400800" cy="4405120"/>
+            <a:off x="6611040" y="3674820"/>
+            <a:ext cx="4941840" cy="9000"/>
           </a:xfrm>
           <a:prstGeom prst="rect">
             <a:avLst/>
           </a:prstGeom>
           <a:solidFill>
-            <a:srgbClr val="D5F5E3"/>
-          </a:solidFill>
-          <a:ln w="12700">
-            <a:solidFill>
-              <a:srgbClr val="A9DFBF"/>
-            </a:solidFill>
-          </a:ln>
-        </p:spPr>
-        <p:txBody>
-          <a:bodyPr anchor="ctr" lIns="91440" rIns="91440" tIns="91440" bIns="91440"/>
-          <a:lstStyle/>
-          <a:p/>
-        </p:txBody>
-      </p:sp>
-      <p:sp>
-        <p:nvSpPr>
-          <p:cNvPr id="208" name="S208"/>
-          <p:cNvSpPr>
-            <a:spLocks noGrp="1"/>
-          </p:cNvSpPr>
-          <p:nvPr/>
-        </p:nvSpPr>
-        <p:spPr>
-          <a:xfrm>
-            <a:off x="6334000" y="2361440"/>
-            <a:ext cx="5400800" cy="380000"/>
-          </a:xfrm>
-          <a:prstGeom prst="rect">
-            <a:avLst/>
-          </a:prstGeom>
-          <a:solidFill>
-            <a:srgbClr val="27AE60"/>
+            <a:srgbClr val="DCDCDC"/>
           </a:solidFill>
           <a:ln>
             <a:noFill/>
@@ -6333,24 +7007,12 @@
         <p:txBody>
           <a:bodyPr anchor="ctr" lIns="91440" rIns="91440" tIns="91440" bIns="91440"/>
           <a:lstStyle/>
-          <a:p>
-            <a:pPr algn="ctr"/>
-            <a:r>
-              <a:rPr lang="ko-KR" altLang="en-US" sz="1400" b="1" dirty="0">
-                <a:solidFill>
-                  <a:srgbClr val="FFFFFF"/>
-                </a:solidFill>
-                <a:latin typeface="나눔스퀘어 ExtraBold"/>
-                <a:ea typeface="나눔스퀘어 ExtraBold"/>
-              </a:rPr>
-              <a:t>AFTER  |  AWS Cloud</a:t>
-            </a:r>
-          </a:p>
-        </p:txBody>
-      </p:sp>
-      <p:sp>
-        <p:nvSpPr>
-          <p:cNvPr id="209" name="S209"/>
+          <a:p/>
+        </p:txBody>
+      </p:sp>
+      <p:sp>
+        <p:nvSpPr>
+          <p:cNvPr id="213" name="S213"/>
           <p:cNvSpPr>
             <a:spLocks noGrp="1"/>
           </p:cNvSpPr>
@@ -6358,8 +7020,8 @@
         </p:nvSpPr>
         <p:spPr>
           <a:xfrm>
-            <a:off x="6334000" y="2741440"/>
-            <a:ext cx="5400800" cy="4025120"/>
+            <a:off x="637160" y="3766260"/>
+            <a:ext cx="4484640" cy="1947040"/>
           </a:xfrm>
           <a:prstGeom prst="rect">
             <a:avLst/>
@@ -6370,130 +7032,342 @@
           </a:ln>
         </p:spPr>
         <p:txBody>
-          <a:bodyPr anchor="t" lIns="80000" rIns="80000" tIns="80000" bIns="80000"/>
+          <a:bodyPr anchor="t" lIns="91440" rIns="91440" tIns="91440" bIns="91440"/>
           <a:lstStyle/>
           <a:p>
             <a:pPr algn="l"/>
             <a:r>
-              <a:rPr lang="ko-KR" altLang="en-US" sz="1300" b="1" dirty="0">
-                <a:solidFill>
-                  <a:srgbClr val="27AE60"/>
+              <a:rPr sz="1300" b="1" dirty="0">
+                <a:solidFill>
+                  <a:srgbClr val="212121"/>
+                </a:solidFill>
+                <a:latin typeface="프리젠테이션 7"/>
+                <a:ea typeface="프리젠테이션 7"/>
+              </a:rPr>
+              <a:t>▣  네트워크</a:t>
+            </a:r>
+          </a:p>
+          <a:p>
+            <a:pPr algn="l"/>
+            <a:r>
+              <a:rPr sz="1300" b="0" dirty="0">
+                <a:solidFill>
+                  <a:srgbClr val="212121"/>
                 </a:solidFill>
                 <a:latin typeface="Freesentation"/>
                 <a:ea typeface="Freesentation"/>
               </a:rPr>
-              <a:t>▣  네트워크 계층</a:t>
+              <a:t>   IDC L4/L7 스위치, 방화벽</a:t>
             </a:r>
           </a:p>
           <a:p>
             <a:pPr algn="l"/>
-            <a:r>
-              <a:rPr lang="ko-KR" altLang="en-US" sz="1300" b="0" dirty="0">
-                <a:solidFill>
-                  <a:srgbClr val="404040"/>
+            <a:endParaRPr sz="500"/>
+          </a:p>
+          <a:p>
+            <a:pPr algn="l"/>
+            <a:r>
+              <a:rPr sz="1300" b="1" dirty="0">
+                <a:solidFill>
+                  <a:srgbClr val="212121"/>
+                </a:solidFill>
+                <a:latin typeface="프리젠테이션 7"/>
+                <a:ea typeface="프리젠테이션 7"/>
+              </a:rPr>
+              <a:t>▣  웹/AP 계층</a:t>
+            </a:r>
+          </a:p>
+          <a:p>
+            <a:pPr algn="l"/>
+            <a:r>
+              <a:rPr sz="1300" b="0" dirty="0">
+                <a:solidFill>
+                  <a:srgbClr val="212121"/>
                 </a:solidFill>
                 <a:latin typeface="Freesentation"/>
                 <a:ea typeface="Freesentation"/>
               </a:rPr>
-              <a:t>   VPC + ALB (Application Load Balancer)</a:t>
+              <a:t>   물리 서버 WAS 클러스터 (Active-Active)</a:t>
             </a:r>
           </a:p>
           <a:p>
             <a:pPr algn="l"/>
-            <a:endParaRPr lang="ko-KR" sz="400"/>
+            <a:endParaRPr sz="500"/>
           </a:p>
           <a:p>
             <a:pPr algn="l"/>
             <a:r>
-              <a:rPr lang="ko-KR" altLang="en-US" sz="1300" b="1" dirty="0">
-                <a:solidFill>
-                  <a:srgbClr val="27AE60"/>
+              <a:rPr sz="1300" b="1" dirty="0">
+                <a:solidFill>
+                  <a:srgbClr val="212121"/>
+                </a:solidFill>
+                <a:latin typeface="프리젠테이션 7"/>
+                <a:ea typeface="프리젠테이션 7"/>
+              </a:rPr>
+              <a:t>▣  DB 계층</a:t>
+            </a:r>
+          </a:p>
+          <a:p>
+            <a:pPr algn="l"/>
+            <a:r>
+              <a:rPr sz="1300" b="0" dirty="0">
+                <a:solidFill>
+                  <a:srgbClr val="212121"/>
                 </a:solidFill>
                 <a:latin typeface="Freesentation"/>
                 <a:ea typeface="Freesentation"/>
               </a:rPr>
-              <a:t>▣  웹/AP 계층</a:t>
-            </a:r>
-          </a:p>
+              <a:t>   Oracle Active-Standby / 수동 백업</a:t>
+            </a:r>
+          </a:p>
+        </p:txBody>
+      </p:sp>
+      <p:sp>
+        <p:nvSpPr>
+          <p:cNvPr id="214" name="S214"/>
+          <p:cNvSpPr>
+            <a:spLocks noGrp="1"/>
+          </p:cNvSpPr>
+          <p:nvPr/>
+        </p:nvSpPr>
+        <p:spPr>
+          <a:xfrm>
+            <a:off x="6611040" y="3766260"/>
+            <a:ext cx="4484640" cy="1947040"/>
+          </a:xfrm>
+          <a:prstGeom prst="rect">
+            <a:avLst/>
+          </a:prstGeom>
+          <a:noFill/>
+          <a:ln>
+            <a:noFill/>
+          </a:ln>
+        </p:spPr>
+        <p:txBody>
+          <a:bodyPr anchor="t" lIns="91440" rIns="91440" tIns="91440" bIns="91440"/>
+          <a:lstStyle/>
           <a:p>
             <a:pPr algn="l"/>
             <a:r>
-              <a:rPr lang="ko-KR" altLang="en-US" sz="1300" b="0" dirty="0">
-                <a:solidFill>
-                  <a:srgbClr val="404040"/>
+              <a:rPr sz="1300" b="1" dirty="0">
+                <a:solidFill>
+                  <a:srgbClr val="0043DA"/>
+                </a:solidFill>
+                <a:latin typeface="프리젠테이션 7"/>
+                <a:ea typeface="프리젠테이션 7"/>
+              </a:rPr>
+              <a:t>▣  네트워크</a:t>
+            </a:r>
+          </a:p>
+          <a:p>
+            <a:pPr algn="l"/>
+            <a:r>
+              <a:rPr sz="1300" b="0" dirty="0">
+                <a:solidFill>
+                  <a:srgbClr val="212121"/>
                 </a:solidFill>
                 <a:latin typeface="Freesentation"/>
                 <a:ea typeface="Freesentation"/>
               </a:rPr>
-              <a:t>   EC2 Auto Scaling Group (AZ 이중화)</a:t>
+              <a:t>   VPC + ALB (Application Load Balancer)</a:t>
             </a:r>
           </a:p>
           <a:p>
             <a:pPr algn="l"/>
-            <a:endParaRPr lang="ko-KR" sz="400"/>
+            <a:endParaRPr sz="500"/>
           </a:p>
           <a:p>
             <a:pPr algn="l"/>
             <a:r>
-              <a:rPr lang="ko-KR" altLang="en-US" sz="1300" b="1" dirty="0">
-                <a:solidFill>
-                  <a:srgbClr val="27AE60"/>
+              <a:rPr sz="1300" b="1" dirty="0">
+                <a:solidFill>
+                  <a:srgbClr val="0043DA"/>
+                </a:solidFill>
+                <a:latin typeface="프리젠테이션 7"/>
+                <a:ea typeface="프리젠테이션 7"/>
+              </a:rPr>
+              <a:t>▣  웹/AP 계층</a:t>
+            </a:r>
+          </a:p>
+          <a:p>
+            <a:pPr algn="l"/>
+            <a:r>
+              <a:rPr sz="1300" b="0" dirty="0">
+                <a:solidFill>
+                  <a:srgbClr val="212121"/>
                 </a:solidFill>
                 <a:latin typeface="Freesentation"/>
                 <a:ea typeface="Freesentation"/>
               </a:rPr>
+              <a:t>   EC2 Auto Scaling Group (AZ 이중화)</a:t>
+            </a:r>
+          </a:p>
+          <a:p>
+            <a:pPr algn="l"/>
+            <a:endParaRPr sz="500"/>
+          </a:p>
+          <a:p>
+            <a:pPr algn="l"/>
+            <a:r>
+              <a:rPr sz="1300" b="1" dirty="0">
+                <a:solidFill>
+                  <a:srgbClr val="0043DA"/>
+                </a:solidFill>
+                <a:latin typeface="프리젠테이션 7"/>
+                <a:ea typeface="프리젠테이션 7"/>
+              </a:rPr>
               <a:t>▣  DB 계층</a:t>
             </a:r>
           </a:p>
           <a:p>
             <a:pPr algn="l"/>
             <a:r>
-              <a:rPr lang="ko-KR" altLang="en-US" sz="1300" b="0" dirty="0">
-                <a:solidFill>
-                  <a:srgbClr val="404040"/>
+              <a:rPr sz="1300" b="0" dirty="0">
+                <a:solidFill>
+                  <a:srgbClr val="212121"/>
                 </a:solidFill>
                 <a:latin typeface="Freesentation"/>
                 <a:ea typeface="Freesentation"/>
               </a:rPr>
-              <a:t>   RDS for Oracle (Multi-AZ 자동 장애조치)</a:t>
-            </a:r>
-          </a:p>
-          <a:p>
-            <a:pPr algn="l"/>
-            <a:endParaRPr lang="ko-KR" sz="400"/>
-          </a:p>
-          <a:p>
-            <a:pPr algn="l"/>
-            <a:r>
-              <a:rPr lang="ko-KR" altLang="en-US" sz="1300" b="1" dirty="0">
-                <a:solidFill>
-                  <a:srgbClr val="27AE60"/>
-                </a:solidFill>
-                <a:latin typeface="Freesentation"/>
-                <a:ea typeface="Freesentation"/>
-              </a:rPr>
-              <a:t>▣  백업</a:t>
-            </a:r>
-          </a:p>
-          <a:p>
-            <a:pPr algn="l"/>
-            <a:r>
-              <a:rPr lang="ko-KR" altLang="en-US" sz="1300" b="0" dirty="0">
-                <a:solidFill>
-                  <a:srgbClr val="404040"/>
-                </a:solidFill>
-                <a:latin typeface="Freesentation"/>
-                <a:ea typeface="Freesentation"/>
-              </a:rPr>
-              <a:t>   S3 자동 백업 (Point-in-Time Recovery)</a:t>
-            </a:r>
-          </a:p>
-        </p:txBody>
-      </p:sp>
+              <a:t>   RDS Multi-AZ / 자동 백업 + PITR</a:t>
+            </a:r>
+          </a:p>
+        </p:txBody>
+      </p:sp>
+      <p:sp>
+        <p:nvSpPr>
+          <p:cNvPr id="215" name="S215"/>
+          <p:cNvSpPr>
+            <a:spLocks noGrp="1"/>
+          </p:cNvSpPr>
+          <p:nvPr/>
+        </p:nvSpPr>
+        <p:spPr>
+          <a:xfrm>
+            <a:off x="5944440" y="4594980"/>
+            <a:ext cx="411480" cy="274320"/>
+          </a:xfrm>
+          <a:prstGeom prst="rect">
+            <a:avLst/>
+          </a:prstGeom>
+          <a:solidFill>
+            <a:srgbClr val="0043DA"/>
+          </a:solidFill>
+          <a:ln>
+            <a:noFill/>
+          </a:ln>
+        </p:spPr>
+        <p:txBody>
+          <a:bodyPr anchor="ctr" lIns="91440" rIns="91440" tIns="91440" bIns="91440"/>
+          <a:lstStyle/>
+          <a:p>
+            <a:pPr algn="ctr"/>
+            <a:r>
+              <a:rPr sz="1600" b="1" dirty="0">
+                <a:solidFill>
+                  <a:srgbClr val="FFFFFF"/>
+                </a:solidFill>
+                <a:latin typeface="프리젠테이션 7"/>
+                <a:ea typeface="프리젠테이션 7"/>
+              </a:rPr>
+              <a:t>→</a:t>
+            </a:r>
+          </a:p>
+        </p:txBody>
+      </p:sp>
+      <p:sp>
+        <p:nvSpPr>
+          <p:cNvPr id="216" name="S216"/>
+          <p:cNvSpPr>
+            <a:spLocks noGrp="1"/>
+          </p:cNvSpPr>
+          <p:nvPr/>
+        </p:nvSpPr>
+        <p:spPr>
+          <a:xfrm>
+            <a:off x="5318760" y="5029200"/>
+            <a:ext cx="1554480" cy="457200"/>
+          </a:xfrm>
+          <a:prstGeom prst="rect">
+            <a:avLst/>
+          </a:prstGeom>
+          <a:solidFill>
+            <a:srgbClr val="0043DA"/>
+          </a:solidFill>
+          <a:ln>
+            <a:noFill/>
+          </a:ln>
+        </p:spPr>
+        <p:txBody>
+          <a:bodyPr anchor="ctr" lIns="91440" rIns="91440" tIns="91440" bIns="91440"/>
+          <a:lstStyle/>
+          <a:p>
+            <a:pPr algn="ctr"/>
+            <a:r>
+              <a:rPr sz="1300" b="1" dirty="0">
+                <a:solidFill>
+                  <a:srgbClr val="FFFFFF"/>
+                </a:solidFill>
+                <a:latin typeface="프리젠테이션 7"/>
+                <a:ea typeface="프리젠테이션 7"/>
+              </a:rPr>
+              <a:t>▲ 99.5%→99.99%</a:t>
+            </a:r>
+          </a:p>
+        </p:txBody>
+      </p:sp>
+      <p:pic>
+        <p:nvPicPr>
+          <p:cNvPr id="201" name="Img201"/>
+          <p:cNvPicPr>
+            <a:picLocks noChangeAspect="1"/>
+          </p:cNvPicPr>
+          <p:nvPr/>
+        </p:nvPicPr>
+        <p:blipFill>
+          <a:blip r:embed="rId2"/>
+          <a:stretch>
+            <a:fillRect/>
+          </a:stretch>
+        </p:blipFill>
+        <p:spPr>
+          <a:xfrm>
+            <a:off x="5047200" y="6087600"/>
+            <a:ext cx="411480" cy="411480"/>
+          </a:xfrm>
+          <a:prstGeom prst="rect">
+            <a:avLst/>
+          </a:prstGeom>
+        </p:spPr>
+      </p:pic>
+      <p:pic>
+        <p:nvPicPr>
+          <p:cNvPr id="201" name="Img201"/>
+          <p:cNvPicPr>
+            <a:picLocks noChangeAspect="1"/>
+          </p:cNvPicPr>
+          <p:nvPr/>
+        </p:nvPicPr>
+        <p:blipFill>
+          <a:blip r:embed="rId3"/>
+          <a:stretch>
+            <a:fillRect/>
+          </a:stretch>
+        </p:blipFill>
+        <p:spPr>
+          <a:xfrm>
+            <a:off x="11021280" y="6087600"/>
+            <a:ext cx="411480" cy="411480"/>
+          </a:xfrm>
+          <a:prstGeom prst="rect">
+            <a:avLst/>
+          </a:prstGeom>
+        </p:spPr>
+      </p:pic>
     </p:spTree>
     <p:extLst>
       <p:ext uri="{BB962C8B-B14F-4D97-AF65-F5344CB8AC3E}">
-        <p14:creationId xmlns:p14="http://schemas.microsoft.com/office/powerpoint/2010/main" val="3624661528"/>
+        <p14:creationId xmlns:p14="http://schemas.microsoft.com/office/powerpoint/2010/main" val="3639436041"/>
       </p:ext>
     </p:extLst>
   </p:cSld>
@@ -6579,8 +7453,7 @@
                 <a:ea typeface="프리젠테이션 7 Bold" pitchFamily="2" charset="-127"/>
                 <a:cs typeface="Pretendard ExtraBold" panose="02000903000000020004" pitchFamily="2" charset="-127"/>
               </a:rPr>
-              <a:t>2-1.
-도구 선택</a:t>
+              <a:t>서브색상</a:t>
             </a:r>
             <a:r>
               <a:rPr lang="ko-KR" altLang="en-US" sz="2000" dirty="0">
@@ -6588,8 +7461,28 @@
                 <a:ea typeface="프리젠테이션 7 Bold" pitchFamily="2" charset="-127"/>
                 <a:cs typeface="Pretendard ExtraBold" panose="02000903000000020004" pitchFamily="2" charset="-127"/>
               </a:rPr>
-              <a:t/>
-            </a:r>
+              <a:t> </a:t>
+            </a:r>
+          </a:p>
+          <a:p>
+            <a:pPr>
+              <a:lnSpc>
+                <a:spcPct val="120000"/>
+              </a:lnSpc>
+            </a:pPr>
+            <a:r>
+              <a:rPr lang="ko-KR" altLang="en-US" sz="2000" dirty="0">
+                <a:latin typeface="프리젠테이션 7 Bold" pitchFamily="2" charset="-127"/>
+                <a:ea typeface="프리젠테이션 7 Bold" pitchFamily="2" charset="-127"/>
+                <a:cs typeface="Pretendard ExtraBold" panose="02000903000000020004" pitchFamily="2" charset="-127"/>
+              </a:rPr>
+              <a:t>적용 예시</a:t>
+            </a:r>
+            <a:endParaRPr lang="ko-KR" altLang="en-US" sz="2000" dirty="0">
+              <a:latin typeface="프리젠테이션 7 Bold" pitchFamily="2" charset="-127"/>
+              <a:ea typeface="프리젠테이션 7 Bold" pitchFamily="2" charset="-127"/>
+              <a:cs typeface="Pretendard ExtraBold" panose="02000903000000020004" pitchFamily="2" charset="-127"/>
+            </a:endParaRPr>
           </a:p>
         </p:txBody>
       </p:sp>
@@ -6639,7 +7532,7 @@
                 <a:ea typeface="프리젠테이션 5 Medium" pitchFamily="2" charset="-127"/>
                 <a:cs typeface="Pretendard" panose="02000503000000020004" pitchFamily="2" charset="-127"/>
               </a:rPr>
-              <a:t>4단계 깔때기 — 요구사항 정의부터 최종 도구 선정까지</a:t>
+              <a:t>설명글을</a:t>
             </a:r>
             <a:r>
               <a:rPr lang="ko-KR" altLang="en-US" sz="1200" dirty="0">
@@ -6660,7 +7553,7 @@
                 <a:ea typeface="프리젠테이션 5 Medium" pitchFamily="2" charset="-127"/>
                 <a:cs typeface="Pretendard" panose="02000503000000020004" pitchFamily="2" charset="-127"/>
               </a:rPr>
-              <a:t/>
+              <a:t> 적어주세요</a:t>
             </a:r>
             <a:r>
               <a:rPr lang="en-US" altLang="ko-KR" sz="1200" b="1" dirty="0">
@@ -6681,7 +7574,7 @@
                 <a:ea typeface="프리젠테이션 5 Medium" pitchFamily="2" charset="-127"/>
                 <a:cs typeface="Pretendard" panose="02000503000000020004" pitchFamily="2" charset="-127"/>
               </a:rPr>
-              <a:t/>
+              <a:t>. </a:t>
             </a:r>
             <a:r>
               <a:rPr lang="ko-KR" altLang="en-US" sz="1200" b="1" dirty="0">
@@ -6699,7 +7592,7 @@
                 <a:ea typeface="프리젠테이션 7 Bold" pitchFamily="2" charset="-127"/>
                 <a:cs typeface="Pretendard" panose="02000503000000020004" pitchFamily="2" charset="-127"/>
               </a:rPr>
-              <a:t/>
+              <a:t>강조 텍스트</a:t>
             </a:r>
             <a:r>
               <a:rPr lang="en-US" altLang="ko-KR" sz="1200" b="1" dirty="0">
@@ -6717,7 +7610,7 @@
                 <a:ea typeface="프리젠테이션 7 Bold" pitchFamily="2" charset="-127"/>
                 <a:cs typeface="Pretendard" panose="02000503000000020004" pitchFamily="2" charset="-127"/>
               </a:rPr>
-              <a:t/>
+              <a:t>(</a:t>
             </a:r>
             <a:r>
               <a:rPr lang="ko-KR" altLang="en-US" sz="1200" b="1" dirty="0" err="1">
@@ -6735,7 +7628,7 @@
                 <a:ea typeface="프리젠테이션 7 Bold" pitchFamily="2" charset="-127"/>
                 <a:cs typeface="Pretendard" panose="02000503000000020004" pitchFamily="2" charset="-127"/>
               </a:rPr>
-              <a:t/>
+              <a:t>프리젠테이션</a:t>
             </a:r>
             <a:r>
               <a:rPr lang="ko-KR" altLang="en-US" sz="1200" b="1" dirty="0">
@@ -6753,7 +7646,7 @@
                 <a:ea typeface="프리젠테이션 7 Bold" pitchFamily="2" charset="-127"/>
                 <a:cs typeface="Pretendard" panose="02000503000000020004" pitchFamily="2" charset="-127"/>
               </a:rPr>
-              <a:t/>
+              <a:t> </a:t>
             </a:r>
             <a:r>
               <a:rPr lang="en-US" altLang="ko-KR" sz="1200" b="1" dirty="0">
@@ -6771,7 +7664,7 @@
                 <a:ea typeface="프리젠테이션 7 Bold" pitchFamily="2" charset="-127"/>
                 <a:cs typeface="Pretendard" panose="02000503000000020004" pitchFamily="2" charset="-127"/>
               </a:rPr>
-              <a:t/>
+              <a:t>7 Bold, </a:t>
             </a:r>
             <a:r>
               <a:rPr lang="ko-KR" altLang="en-US" sz="1200" b="1" dirty="0">
@@ -6789,7 +7682,7 @@
                 <a:ea typeface="프리젠테이션 7 Bold" pitchFamily="2" charset="-127"/>
                 <a:cs typeface="Pretendard" panose="02000503000000020004" pitchFamily="2" charset="-127"/>
               </a:rPr>
-              <a:t/>
+              <a:t>메인 컬러</a:t>
             </a:r>
             <a:r>
               <a:rPr lang="en-US" altLang="ko-KR" sz="1200" b="1" dirty="0" smtClean="0">
@@ -6807,8 +7700,219 @@
                 <a:ea typeface="프리젠테이션 7 Bold" pitchFamily="2" charset="-127"/>
                 <a:cs typeface="Pretendard" panose="02000503000000020004" pitchFamily="2" charset="-127"/>
               </a:rPr>
-              <a:t/>
-            </a:r>
+              <a:t>)</a:t>
+            </a:r>
+          </a:p>
+          <a:p>
+            <a:pPr latinLnBrk="0">
+              <a:lnSpc>
+                <a:spcPct val="150000"/>
+              </a:lnSpc>
+            </a:pPr>
+            <a:r>
+              <a:rPr lang="ko-KR" altLang="en-US" sz="1200" dirty="0" smtClean="0">
+                <a:ln>
+                  <a:solidFill>
+                    <a:schemeClr val="accent1">
+                      <a:alpha val="0"/>
+                    </a:schemeClr>
+                  </a:solidFill>
+                </a:ln>
+                <a:solidFill>
+                  <a:schemeClr val="tx1">
+                    <a:lumMod val="75000"/>
+                    <a:lumOff val="25000"/>
+                  </a:schemeClr>
+                </a:solidFill>
+                <a:latin typeface="프리젠테이션 5 Medium" pitchFamily="2" charset="-127"/>
+                <a:ea typeface="프리젠테이션 5 Medium" pitchFamily="2" charset="-127"/>
+                <a:cs typeface="Pretendard" panose="02000503000000020004" pitchFamily="2" charset="-127"/>
+              </a:rPr>
+              <a:t>폰트 </a:t>
+            </a:r>
+            <a:r>
+              <a:rPr lang="en-US" altLang="ko-KR" sz="1200" dirty="0" smtClean="0">
+                <a:ln>
+                  <a:solidFill>
+                    <a:schemeClr val="accent1">
+                      <a:alpha val="0"/>
+                    </a:schemeClr>
+                  </a:solidFill>
+                </a:ln>
+                <a:solidFill>
+                  <a:schemeClr val="tx1">
+                    <a:lumMod val="75000"/>
+                    <a:lumOff val="25000"/>
+                  </a:schemeClr>
+                </a:solidFill>
+                <a:latin typeface="프리젠테이션 5 Medium" pitchFamily="2" charset="-127"/>
+                <a:ea typeface="프리젠테이션 5 Medium" pitchFamily="2" charset="-127"/>
+                <a:cs typeface="Pretendard" panose="02000503000000020004" pitchFamily="2" charset="-127"/>
+              </a:rPr>
+              <a:t>: </a:t>
+            </a:r>
+            <a:r>
+              <a:rPr lang="ko-KR" altLang="en-US" sz="1200" dirty="0" err="1" smtClean="0">
+                <a:ln>
+                  <a:solidFill>
+                    <a:schemeClr val="accent1">
+                      <a:alpha val="0"/>
+                    </a:schemeClr>
+                  </a:solidFill>
+                </a:ln>
+                <a:solidFill>
+                  <a:schemeClr val="tx1">
+                    <a:lumMod val="75000"/>
+                    <a:lumOff val="25000"/>
+                  </a:schemeClr>
+                </a:solidFill>
+                <a:latin typeface="프리젠테이션 5 Medium" pitchFamily="2" charset="-127"/>
+                <a:ea typeface="프리젠테이션 5 Medium" pitchFamily="2" charset="-127"/>
+                <a:cs typeface="Pretendard" panose="02000503000000020004" pitchFamily="2" charset="-127"/>
+              </a:rPr>
+              <a:t>프리젠테이션</a:t>
+            </a:r>
+            <a:r>
+              <a:rPr lang="ko-KR" altLang="en-US" sz="1200" dirty="0" smtClean="0">
+                <a:ln>
+                  <a:solidFill>
+                    <a:schemeClr val="accent1">
+                      <a:alpha val="0"/>
+                    </a:schemeClr>
+                  </a:solidFill>
+                </a:ln>
+                <a:solidFill>
+                  <a:schemeClr val="tx1">
+                    <a:lumMod val="75000"/>
+                    <a:lumOff val="25000"/>
+                  </a:schemeClr>
+                </a:solidFill>
+                <a:latin typeface="프리젠테이션 5 Medium" pitchFamily="2" charset="-127"/>
+                <a:ea typeface="프리젠테이션 5 Medium" pitchFamily="2" charset="-127"/>
+                <a:cs typeface="Pretendard" panose="02000503000000020004" pitchFamily="2" charset="-127"/>
+              </a:rPr>
+              <a:t> </a:t>
+            </a:r>
+            <a:r>
+              <a:rPr lang="en-US" altLang="ko-KR" sz="1200" dirty="0" smtClean="0">
+                <a:ln>
+                  <a:solidFill>
+                    <a:schemeClr val="accent1">
+                      <a:alpha val="0"/>
+                    </a:schemeClr>
+                  </a:solidFill>
+                </a:ln>
+                <a:solidFill>
+                  <a:schemeClr val="tx1">
+                    <a:lumMod val="75000"/>
+                    <a:lumOff val="25000"/>
+                  </a:schemeClr>
+                </a:solidFill>
+                <a:latin typeface="프리젠테이션 5 Medium" pitchFamily="2" charset="-127"/>
+                <a:ea typeface="프리젠테이션 5 Medium" pitchFamily="2" charset="-127"/>
+                <a:cs typeface="Pretendard" panose="02000503000000020004" pitchFamily="2" charset="-127"/>
+              </a:rPr>
+              <a:t>5 Medium 12pt  </a:t>
+            </a:r>
+            <a:r>
+              <a:rPr lang="ko-KR" altLang="en-US" sz="1200" dirty="0" smtClean="0">
+                <a:ln>
+                  <a:solidFill>
+                    <a:schemeClr val="accent1">
+                      <a:alpha val="0"/>
+                    </a:schemeClr>
+                  </a:solidFill>
+                </a:ln>
+                <a:solidFill>
+                  <a:schemeClr val="tx1">
+                    <a:lumMod val="75000"/>
+                    <a:lumOff val="25000"/>
+                  </a:schemeClr>
+                </a:solidFill>
+                <a:latin typeface="프리젠테이션 5 Medium" pitchFamily="2" charset="-127"/>
+                <a:ea typeface="프리젠테이션 5 Medium" pitchFamily="2" charset="-127"/>
+                <a:cs typeface="Pretendard" panose="02000503000000020004" pitchFamily="2" charset="-127"/>
+              </a:rPr>
+              <a:t>최대 </a:t>
+            </a:r>
+            <a:r>
+              <a:rPr lang="en-US" altLang="ko-KR" sz="1200" dirty="0" smtClean="0">
+                <a:ln>
+                  <a:solidFill>
+                    <a:schemeClr val="accent1">
+                      <a:alpha val="0"/>
+                    </a:schemeClr>
+                  </a:solidFill>
+                </a:ln>
+                <a:solidFill>
+                  <a:schemeClr val="tx1">
+                    <a:lumMod val="75000"/>
+                    <a:lumOff val="25000"/>
+                  </a:schemeClr>
+                </a:solidFill>
+                <a:latin typeface="프리젠테이션 5 Medium" pitchFamily="2" charset="-127"/>
+                <a:ea typeface="프리젠테이션 5 Medium" pitchFamily="2" charset="-127"/>
+                <a:cs typeface="Pretendard" panose="02000503000000020004" pitchFamily="2" charset="-127"/>
+              </a:rPr>
+              <a:t>3</a:t>
+            </a:r>
+            <a:r>
+              <a:rPr lang="ko-KR" altLang="en-US" sz="1200" dirty="0" smtClean="0">
+                <a:ln>
+                  <a:solidFill>
+                    <a:schemeClr val="accent1">
+                      <a:alpha val="0"/>
+                    </a:schemeClr>
+                  </a:solidFill>
+                </a:ln>
+                <a:solidFill>
+                  <a:schemeClr val="tx1">
+                    <a:lumMod val="75000"/>
+                    <a:lumOff val="25000"/>
+                  </a:schemeClr>
+                </a:solidFill>
+                <a:latin typeface="프리젠테이션 5 Medium" pitchFamily="2" charset="-127"/>
+                <a:ea typeface="프리젠테이션 5 Medium" pitchFamily="2" charset="-127"/>
+                <a:cs typeface="Pretendard" panose="02000503000000020004" pitchFamily="2" charset="-127"/>
+              </a:rPr>
+              <a:t>줄까지 작성 가능합니다</a:t>
+            </a:r>
+            <a:r>
+              <a:rPr lang="en-US" altLang="ko-KR" sz="1200" dirty="0" smtClean="0">
+                <a:ln>
+                  <a:solidFill>
+                    <a:schemeClr val="accent1">
+                      <a:alpha val="0"/>
+                    </a:schemeClr>
+                  </a:solidFill>
+                </a:ln>
+                <a:solidFill>
+                  <a:schemeClr val="tx1">
+                    <a:lumMod val="75000"/>
+                    <a:lumOff val="25000"/>
+                  </a:schemeClr>
+                </a:solidFill>
+                <a:latin typeface="프리젠테이션 5 Medium" pitchFamily="2" charset="-127"/>
+                <a:ea typeface="프리젠테이션 5 Medium" pitchFamily="2" charset="-127"/>
+                <a:cs typeface="Pretendard" panose="02000503000000020004" pitchFamily="2" charset="-127"/>
+              </a:rPr>
+              <a:t>.</a:t>
+            </a:r>
+            <a:endParaRPr lang="en-US" altLang="ko-KR" sz="1200" dirty="0">
+              <a:ln>
+                <a:solidFill>
+                  <a:schemeClr val="accent1">
+                    <a:alpha val="0"/>
+                  </a:schemeClr>
+                </a:solidFill>
+              </a:ln>
+              <a:solidFill>
+                <a:srgbClr val="2765E1"/>
+              </a:solidFill>
+              <a:latin typeface="프리젠테이션 5 Medium" pitchFamily="2" charset="-127"/>
+              <a:ea typeface="프리젠테이션 5 Medium" pitchFamily="2" charset="-127"/>
+              <a:cs typeface="Pretendard" panose="02000503000000020004" pitchFamily="2" charset="-127"/>
+            </a:endParaRPr>
           </a:p>
         </p:txBody>
       </p:sp>
@@ -6822,8 +7926,8 @@
         </p:nvSpPr>
         <p:spPr>
           <a:xfrm>
-            <a:off x="457200" y="1750000"/>
-            <a:ext cx="11277600" cy="280000"/>
+            <a:off x="457200" y="1600200"/>
+            <a:ext cx="11277600" cy="320040"/>
           </a:xfrm>
           <a:prstGeom prst="rect">
             <a:avLst/>
@@ -6834,14 +7938,14 @@
           </a:ln>
         </p:spPr>
         <p:txBody>
-          <a:bodyPr anchor="ctr" lIns="91440" rIns="91440" tIns="91440" bIns="91440"/>
+          <a:bodyPr anchor="ctr" lIns="0" rIns="0" tIns="0" bIns="0"/>
           <a:lstStyle/>
           <a:p>
             <a:pPr algn="l"/>
             <a:r>
-              <a:rPr lang="ko-KR" altLang="en-US" sz="1600" b="1" dirty="0">
-                <a:solidFill>
-                  <a:srgbClr val="1B3A5C"/>
+              <a:rPr sz="1600" b="1" dirty="0">
+                <a:solidFill>
+                  <a:srgbClr val="0043DA"/>
                 </a:solidFill>
                 <a:latin typeface="Freesentation"/>
                 <a:ea typeface="Freesentation"/>
@@ -6861,8 +7965,8 @@
         </p:nvSpPr>
         <p:spPr>
           <a:xfrm>
-            <a:off x="457200" y="2040000"/>
-            <a:ext cx="11277600" cy="230000"/>
+            <a:off x="457200" y="1965960"/>
+            <a:ext cx="11277600" cy="274320"/>
           </a:xfrm>
           <a:prstGeom prst="rect">
             <a:avLst/>
@@ -6873,52 +7977,21 @@
           </a:ln>
         </p:spPr>
         <p:txBody>
-          <a:bodyPr anchor="ctr" lIns="91440" rIns="91440" tIns="91440" bIns="91440"/>
+          <a:bodyPr anchor="ctr" lIns="0" rIns="0" tIns="0" bIns="0"/>
           <a:lstStyle/>
           <a:p>
             <a:pPr algn="l"/>
             <a:r>
-              <a:rPr lang="ko-KR" altLang="en-US" sz="1200" b="0" dirty="0">
-                <a:solidFill>
-                  <a:srgbClr val="7F8C8D"/>
+              <a:rPr sz="1300" b="0" dirty="0">
+                <a:solidFill>
+                  <a:srgbClr val="212121"/>
                 </a:solidFill>
                 <a:latin typeface="Freesentation"/>
                 <a:ea typeface="Freesentation"/>
               </a:rPr>
-              <a:t>4단계 깔때기 평가로 최적 도구 선정 — 요구사항부터 최종 결정까지</a:t>
-            </a:r>
-          </a:p>
-        </p:txBody>
-      </p:sp>
-      <p:sp>
-        <p:nvSpPr>
-          <p:cNvPr id="203" name="S203"/>
-          <p:cNvSpPr>
-            <a:spLocks noGrp="1"/>
-          </p:cNvSpPr>
-          <p:nvPr/>
-        </p:nvSpPr>
-        <p:spPr>
-          <a:xfrm>
-            <a:off x="457200" y="2361440"/>
-            <a:ext cx="11277600" cy="1074280"/>
-          </a:xfrm>
-          <a:prstGeom prst="rect">
-            <a:avLst/>
-          </a:prstGeom>
-          <a:solidFill>
-            <a:srgbClr val="D6E8F5"/>
-          </a:solidFill>
-          <a:ln w="12700">
-            <a:solidFill>
-              <a:srgbClr val="CCCCCC"/>
-            </a:solidFill>
-          </a:ln>
-        </p:spPr>
-        <p:txBody>
-          <a:bodyPr anchor="ctr" lIns="91440" rIns="91440" tIns="91440" bIns="91440"/>
-          <a:lstStyle/>
-          <a:p/>
+              <a:t>4단계 깔때기 평가 — 요구사항 정의부터 최종 도구 선정까지</a:t>
+            </a:r>
+          </a:p>
         </p:txBody>
       </p:sp>
       <p:sp>
@@ -6931,14 +8004,14 @@
         </p:nvSpPr>
         <p:spPr>
           <a:xfrm>
-            <a:off x="457200" y="2361440"/>
-            <a:ext cx="11277600" cy="360000"/>
+            <a:off x="457200" y="3076764"/>
+            <a:ext cx="7315200" cy="695040"/>
           </a:xfrm>
           <a:prstGeom prst="rect">
             <a:avLst/>
           </a:prstGeom>
           <a:solidFill>
-            <a:srgbClr val="1B3A5C"/>
+            <a:srgbClr val="E6F0FF"/>
           </a:solidFill>
           <a:ln>
             <a:noFill/>
@@ -6948,16 +8021,29 @@
           <a:bodyPr anchor="ctr" lIns="91440" rIns="91440" tIns="91440" bIns="91440"/>
           <a:lstStyle/>
           <a:p>
-            <a:pPr algn="ctr"/>
-            <a:r>
-              <a:rPr lang="ko-KR" altLang="en-US" sz="1300" b="1" dirty="0">
-                <a:solidFill>
-                  <a:srgbClr val="FFFFFF"/>
-                </a:solidFill>
-                <a:latin typeface="나눔스퀘어 ExtraBold"/>
-                <a:ea typeface="나눔스퀘어 ExtraBold"/>
+            <a:pPr algn="l"/>
+            <a:r>
+              <a:rPr sz="1300" b="1" dirty="0">
+                <a:solidFill>
+                  <a:srgbClr val="0043DA"/>
+                </a:solidFill>
+                <a:latin typeface="프리젠테이션 7"/>
+                <a:ea typeface="프리젠테이션 7"/>
               </a:rPr>
               <a:t>1단계  요구사항 정의</a:t>
+            </a:r>
+          </a:p>
+          <a:p>
+            <a:pPr algn="l"/>
+            <a:r>
+              <a:rPr sz="1100" b="0" dirty="0">
+                <a:solidFill>
+                  <a:srgbClr val="0043DA"/>
+                </a:solidFill>
+                <a:latin typeface="Freesentation"/>
+                <a:ea typeface="Freesentation"/>
+              </a:rPr>
+              <a:t>데이터 볼륨 / RPO·RTO SLA / 변환 복잡도 / 예산</a:t>
             </a:r>
           </a:p>
         </p:txBody>
@@ -6972,8 +8058,8 @@
         </p:nvSpPr>
         <p:spPr>
           <a:xfrm>
-            <a:off x="457200" y="2721440"/>
-            <a:ext cx="11277600" cy="714280"/>
+            <a:off x="8046720" y="3076764"/>
+            <a:ext cx="3688080" cy="695040"/>
           </a:xfrm>
           <a:prstGeom prst="rect">
             <a:avLst/>
@@ -6987,49 +8073,18 @@
           <a:bodyPr anchor="ctr" lIns="91440" rIns="91440" tIns="91440" bIns="91440"/>
           <a:lstStyle/>
           <a:p>
-            <a:pPr algn="ctr"/>
-            <a:r>
-              <a:rPr lang="ko-KR" altLang="en-US" sz="1200" b="0" dirty="0">
-                <a:solidFill>
-                  <a:srgbClr val="404040"/>
+            <a:pPr algn="l"/>
+            <a:r>
+              <a:rPr sz="1100" b="0" dirty="0">
+                <a:solidFill>
+                  <a:srgbClr val="212121"/>
                 </a:solidFill>
                 <a:latin typeface="Freesentation"/>
                 <a:ea typeface="Freesentation"/>
               </a:rPr>
-              <a:t>데이터 볼륨 / RPO·RTO SLA / 변환 복잡도 / 이기종 여부 / 예산</a:t>
-            </a:r>
-          </a:p>
-        </p:txBody>
-      </p:sp>
-      <p:sp>
-        <p:nvSpPr>
-          <p:cNvPr id="206" name="S206"/>
-          <p:cNvSpPr>
-            <a:spLocks noGrp="1"/>
-          </p:cNvSpPr>
-          <p:nvPr/>
-        </p:nvSpPr>
-        <p:spPr>
-          <a:xfrm>
-            <a:off x="1472184" y="3471720"/>
-            <a:ext cx="9247632" cy="1074280"/>
-          </a:xfrm>
-          <a:prstGeom prst="rect">
-            <a:avLst/>
-          </a:prstGeom>
-          <a:solidFill>
-            <a:srgbClr val="E8F4FD"/>
-          </a:solidFill>
-          <a:ln w="12700">
-            <a:solidFill>
-              <a:srgbClr val="CCCCCC"/>
-            </a:solidFill>
-          </a:ln>
-        </p:spPr>
-        <p:txBody>
-          <a:bodyPr anchor="ctr" lIns="91440" rIns="91440" tIns="91440" bIns="91440"/>
-          <a:lstStyle/>
-          <a:p/>
+              <a:t>입력 기준: 이기종 여부, 볼륨 크기</a:t>
+            </a:r>
+          </a:p>
         </p:txBody>
       </p:sp>
       <p:sp>
@@ -7042,14 +8097,14 @@
         </p:nvSpPr>
         <p:spPr>
           <a:xfrm>
-            <a:off x="1472184" y="3471720"/>
-            <a:ext cx="9247632" cy="360000"/>
+            <a:off x="1005840" y="3826668"/>
+            <a:ext cx="6217920" cy="695040"/>
           </a:xfrm>
           <a:prstGeom prst="rect">
             <a:avLst/>
           </a:prstGeom>
           <a:solidFill>
-            <a:srgbClr val="2E6DA4"/>
+            <a:srgbClr val="C8DCFF"/>
           </a:solidFill>
           <a:ln>
             <a:noFill/>
@@ -7059,16 +8114,29 @@
           <a:bodyPr anchor="ctr" lIns="91440" rIns="91440" tIns="91440" bIns="91440"/>
           <a:lstStyle/>
           <a:p>
-            <a:pPr algn="ctr"/>
-            <a:r>
-              <a:rPr lang="ko-KR" altLang="en-US" sz="1300" b="1" dirty="0">
-                <a:solidFill>
-                  <a:srgbClr val="FFFFFF"/>
-                </a:solidFill>
-                <a:latin typeface="나눔스퀘어 ExtraBold"/>
-                <a:ea typeface="나눔스퀘어 ExtraBold"/>
-              </a:rPr>
-              <a:t>2단계  후보 검토</a:t>
+            <a:pPr algn="l"/>
+            <a:r>
+              <a:rPr sz="1300" b="1" dirty="0">
+                <a:solidFill>
+                  <a:srgbClr val="0043DA"/>
+                </a:solidFill>
+                <a:latin typeface="프리젠테이션 7"/>
+                <a:ea typeface="프리젠테이션 7"/>
+              </a:rPr>
+              <a:t>2단계  후보 도구 검토</a:t>
+            </a:r>
+          </a:p>
+          <a:p>
+            <a:pPr algn="l"/>
+            <a:r>
+              <a:rPr sz="1100" b="0" dirty="0">
+                <a:solidFill>
+                  <a:srgbClr val="0043DA"/>
+                </a:solidFill>
+                <a:latin typeface="Freesentation"/>
+                <a:ea typeface="Freesentation"/>
+              </a:rPr>
+              <a:t>GoldenGate · AWS DMS · DataStage · Debezium</a:t>
             </a:r>
           </a:p>
         </p:txBody>
@@ -7083,8 +8151,8 @@
         </p:nvSpPr>
         <p:spPr>
           <a:xfrm>
-            <a:off x="1472184" y="3831720"/>
-            <a:ext cx="9247632" cy="714280"/>
+            <a:off x="8046720" y="3826668"/>
+            <a:ext cx="3688080" cy="695040"/>
           </a:xfrm>
           <a:prstGeom prst="rect">
             <a:avLst/>
@@ -7098,49 +8166,18 @@
           <a:bodyPr anchor="ctr" lIns="91440" rIns="91440" tIns="91440" bIns="91440"/>
           <a:lstStyle/>
           <a:p>
-            <a:pPr algn="ctr"/>
-            <a:r>
-              <a:rPr lang="ko-KR" altLang="en-US" sz="1200" b="0" dirty="0">
-                <a:solidFill>
-                  <a:srgbClr val="404040"/>
+            <a:pPr algn="l"/>
+            <a:r>
+              <a:rPr sz="1100" b="0" dirty="0">
+                <a:solidFill>
+                  <a:srgbClr val="212121"/>
                 </a:solidFill>
                 <a:latin typeface="Freesentation"/>
                 <a:ea typeface="Freesentation"/>
               </a:rPr>
-              <a:t>GoldenGate · DataStage · AWS DMS · StreamSets · Debezium</a:t>
-            </a:r>
-          </a:p>
-        </p:txBody>
-      </p:sp>
-      <p:sp>
-        <p:nvSpPr>
-          <p:cNvPr id="209" name="S209"/>
-          <p:cNvSpPr>
-            <a:spLocks noGrp="1"/>
-          </p:cNvSpPr>
-          <p:nvPr/>
-        </p:nvSpPr>
-        <p:spPr>
-          <a:xfrm>
-            <a:off x="2430780" y="4582000"/>
-            <a:ext cx="7330440" cy="1074280"/>
-          </a:xfrm>
-          <a:prstGeom prst="rect">
-            <a:avLst/>
-          </a:prstGeom>
-          <a:solidFill>
-            <a:srgbClr val="FEF5EC"/>
-          </a:solidFill>
-          <a:ln w="12700">
-            <a:solidFill>
-              <a:srgbClr val="CCCCCC"/>
-            </a:solidFill>
-          </a:ln>
-        </p:spPr>
-        <p:txBody>
-          <a:bodyPr anchor="ctr" lIns="91440" rIns="91440" tIns="91440" bIns="91440"/>
-          <a:lstStyle/>
-          <a:p/>
+              <a:t>통과 기준: 공식 지원 + 레퍼런스 존재</a:t>
+            </a:r>
+          </a:p>
         </p:txBody>
       </p:sp>
       <p:sp>
@@ -7153,14 +8190,14 @@
         </p:nvSpPr>
         <p:spPr>
           <a:xfrm>
-            <a:off x="2430780" y="4582000"/>
-            <a:ext cx="7330440" cy="360000"/>
+            <a:off x="1554480" y="4576572"/>
+            <a:ext cx="5120640" cy="695040"/>
           </a:xfrm>
           <a:prstGeom prst="rect">
             <a:avLst/>
           </a:prstGeom>
           <a:solidFill>
-            <a:srgbClr val="E87722"/>
+            <a:srgbClr val="8AB4F8"/>
           </a:solidFill>
           <a:ln>
             <a:noFill/>
@@ -7170,16 +8207,29 @@
           <a:bodyPr anchor="ctr" lIns="91440" rIns="91440" tIns="91440" bIns="91440"/>
           <a:lstStyle/>
           <a:p>
-            <a:pPr algn="ctr"/>
-            <a:r>
-              <a:rPr lang="ko-KR" altLang="en-US" sz="1300" b="1" dirty="0">
+            <a:pPr algn="l"/>
+            <a:r>
+              <a:rPr sz="1300" b="1" dirty="0">
                 <a:solidFill>
                   <a:srgbClr val="FFFFFF"/>
                 </a:solidFill>
-                <a:latin typeface="나눔스퀘어 ExtraBold"/>
-                <a:ea typeface="나눔스퀘어 ExtraBold"/>
+                <a:latin typeface="프리젠테이션 7"/>
+                <a:ea typeface="프리젠테이션 7"/>
               </a:rPr>
               <a:t>3단계  PoC 평가</a:t>
+            </a:r>
+          </a:p>
+          <a:p>
+            <a:pPr algn="l"/>
+            <a:r>
+              <a:rPr sz="1100" b="0" dirty="0">
+                <a:solidFill>
+                  <a:srgbClr val="FFFFFF"/>
+                </a:solidFill>
+                <a:latin typeface="Freesentation"/>
+                <a:ea typeface="Freesentation"/>
+              </a:rPr>
+              <a:t>성능 테스트 / 비용 분석 / 운영 복잡도</a:t>
             </a:r>
           </a:p>
         </p:txBody>
@@ -7194,8 +8244,8 @@
         </p:nvSpPr>
         <p:spPr>
           <a:xfrm>
-            <a:off x="2430780" y="4942000"/>
-            <a:ext cx="7330440" cy="714280"/>
+            <a:off x="8046720" y="4576572"/>
+            <a:ext cx="3688080" cy="695040"/>
           </a:xfrm>
           <a:prstGeom prst="rect">
             <a:avLst/>
@@ -7209,49 +8259,18 @@
           <a:bodyPr anchor="ctr" lIns="91440" rIns="91440" tIns="91440" bIns="91440"/>
           <a:lstStyle/>
           <a:p>
-            <a:pPr algn="ctr"/>
-            <a:r>
-              <a:rPr lang="ko-KR" altLang="en-US" sz="1200" b="0" dirty="0">
-                <a:solidFill>
-                  <a:srgbClr val="404040"/>
+            <a:pPr algn="l"/>
+            <a:r>
+              <a:rPr sz="1100" b="0" dirty="0">
+                <a:solidFill>
+                  <a:srgbClr val="212121"/>
                 </a:solidFill>
                 <a:latin typeface="Freesentation"/>
                 <a:ea typeface="Freesentation"/>
               </a:rPr>
-              <a:t>성능 테스트 / 비용 분석 / 운영 복잡도 / 내부 레퍼런스</a:t>
-            </a:r>
-          </a:p>
-        </p:txBody>
-      </p:sp>
-      <p:sp>
-        <p:nvSpPr>
-          <p:cNvPr id="212" name="S212"/>
-          <p:cNvSpPr>
-            <a:spLocks noGrp="1"/>
-          </p:cNvSpPr>
-          <p:nvPr/>
-        </p:nvSpPr>
-        <p:spPr>
-          <a:xfrm>
-            <a:off x="3389376" y="5692280"/>
-            <a:ext cx="5413248" cy="1074280"/>
-          </a:xfrm>
-          <a:prstGeom prst="rect">
-            <a:avLst/>
-          </a:prstGeom>
-          <a:solidFill>
-            <a:srgbClr val="D5F5E3"/>
-          </a:solidFill>
-          <a:ln w="12700">
-            <a:solidFill>
-              <a:srgbClr val="CCCCCC"/>
-            </a:solidFill>
-          </a:ln>
-        </p:spPr>
-        <p:txBody>
-          <a:bodyPr anchor="ctr" lIns="91440" rIns="91440" tIns="91440" bIns="91440"/>
-          <a:lstStyle/>
-          <a:p/>
+              <a:t>통과 기준: SLA 충족 + ROI 양수</a:t>
+            </a:r>
+          </a:p>
         </p:txBody>
       </p:sp>
       <p:sp>
@@ -7264,14 +8283,14 @@
         </p:nvSpPr>
         <p:spPr>
           <a:xfrm>
-            <a:off x="3389376" y="5692280"/>
-            <a:ext cx="5413248" cy="360000"/>
+            <a:off x="2103120" y="5326476"/>
+            <a:ext cx="4023360" cy="695040"/>
           </a:xfrm>
           <a:prstGeom prst="rect">
             <a:avLst/>
           </a:prstGeom>
           <a:solidFill>
-            <a:srgbClr val="27AE60"/>
+            <a:srgbClr val="0043DA"/>
           </a:solidFill>
           <a:ln>
             <a:noFill/>
@@ -7281,16 +8300,29 @@
           <a:bodyPr anchor="ctr" lIns="91440" rIns="91440" tIns="91440" bIns="91440"/>
           <a:lstStyle/>
           <a:p>
-            <a:pPr algn="ctr"/>
-            <a:r>
-              <a:rPr lang="ko-KR" altLang="en-US" sz="1300" b="1" dirty="0">
+            <a:pPr algn="l"/>
+            <a:r>
+              <a:rPr sz="1300" b="1" dirty="0">
                 <a:solidFill>
                   <a:srgbClr val="FFFFFF"/>
                 </a:solidFill>
-                <a:latin typeface="나눔스퀘어 ExtraBold"/>
-                <a:ea typeface="나눔스퀘어 ExtraBold"/>
-              </a:rPr>
-              <a:t>4단계  최종 선정</a:t>
+                <a:latin typeface="프리젠테이션 7"/>
+                <a:ea typeface="프리젠테이션 7"/>
+              </a:rPr>
+              <a:t>4단계  최종 선정 ★</a:t>
+            </a:r>
+          </a:p>
+          <a:p>
+            <a:pPr algn="l"/>
+            <a:r>
+              <a:rPr sz="1100" b="0" dirty="0">
+                <a:solidFill>
+                  <a:srgbClr val="FFFFFF"/>
+                </a:solidFill>
+                <a:latin typeface="Freesentation"/>
+                <a:ea typeface="Freesentation"/>
+              </a:rPr>
+              <a:t>GoldenGate 선정 — 경영 승인 · 계약 · 킥오프</a:t>
             </a:r>
           </a:p>
         </p:txBody>
@@ -7305,8 +8337,8 @@
         </p:nvSpPr>
         <p:spPr>
           <a:xfrm>
-            <a:off x="3389376" y="6052280"/>
-            <a:ext cx="5413248" cy="714280"/>
+            <a:off x="8046720" y="5326476"/>
+            <a:ext cx="3688080" cy="695040"/>
           </a:xfrm>
           <a:prstGeom prst="rect">
             <a:avLst/>
@@ -7320,16 +8352,16 @@
           <a:bodyPr anchor="ctr" lIns="91440" rIns="91440" tIns="91440" bIns="91440"/>
           <a:lstStyle/>
           <a:p>
-            <a:pPr algn="ctr"/>
-            <a:r>
-              <a:rPr lang="ko-KR" altLang="en-US" sz="1200" b="0" dirty="0">
-                <a:solidFill>
-                  <a:srgbClr val="404040"/>
-                </a:solidFill>
-                <a:latin typeface="Freesentation"/>
-                <a:ea typeface="Freesentation"/>
-              </a:rPr>
-              <a:t>경영 승인 / 계약 협상 / 구축 계획 수립 / 킥오프</a:t>
+            <a:pPr algn="l"/>
+            <a:r>
+              <a:rPr sz="1200" b="1" dirty="0">
+                <a:solidFill>
+                  <a:srgbClr val="0043DA"/>
+                </a:solidFill>
+                <a:latin typeface="프리젠테이션 7"/>
+                <a:ea typeface="프리젠테이션 7"/>
+              </a:rPr>
+              <a:t>결과: 6개월 마이그레이션 계획 수립</a:t>
             </a:r>
           </a:p>
         </p:txBody>
@@ -7337,7 +8369,7 @@
     </p:spTree>
     <p:extLst>
       <p:ext uri="{BB962C8B-B14F-4D97-AF65-F5344CB8AC3E}">
-        <p14:creationId xmlns:p14="http://schemas.microsoft.com/office/powerpoint/2010/main" val="3389939738"/>
+        <p14:creationId xmlns:p14="http://schemas.microsoft.com/office/powerpoint/2010/main" val="1434484834"/>
       </p:ext>
     </p:extLst>
   </p:cSld>
@@ -7423,8 +8455,7 @@
                 <a:ea typeface="프리젠테이션 7 Bold" pitchFamily="2" charset="-127"/>
                 <a:cs typeface="Pretendard ExtraBold" panose="02000903000000020004" pitchFamily="2" charset="-127"/>
               </a:rPr>
-              <a:t>2-2.
-로드맵</a:t>
+              <a:t>서브색상</a:t>
             </a:r>
             <a:r>
               <a:rPr lang="ko-KR" altLang="en-US" sz="2000" dirty="0">
@@ -7432,8 +8463,28 @@
                 <a:ea typeface="프리젠테이션 7 Bold" pitchFamily="2" charset="-127"/>
                 <a:cs typeface="Pretendard ExtraBold" panose="02000903000000020004" pitchFamily="2" charset="-127"/>
               </a:rPr>
-              <a:t/>
-            </a:r>
+              <a:t> </a:t>
+            </a:r>
+          </a:p>
+          <a:p>
+            <a:pPr>
+              <a:lnSpc>
+                <a:spcPct val="120000"/>
+              </a:lnSpc>
+            </a:pPr>
+            <a:r>
+              <a:rPr lang="ko-KR" altLang="en-US" sz="2000" dirty="0">
+                <a:latin typeface="프리젠테이션 7 Bold" pitchFamily="2" charset="-127"/>
+                <a:ea typeface="프리젠테이션 7 Bold" pitchFamily="2" charset="-127"/>
+                <a:cs typeface="Pretendard ExtraBold" panose="02000903000000020004" pitchFamily="2" charset="-127"/>
+              </a:rPr>
+              <a:t>적용 예시</a:t>
+            </a:r>
+            <a:endParaRPr lang="ko-KR" altLang="en-US" sz="2000" dirty="0">
+              <a:latin typeface="프리젠테이션 7 Bold" pitchFamily="2" charset="-127"/>
+              <a:ea typeface="프리젠테이션 7 Bold" pitchFamily="2" charset="-127"/>
+              <a:cs typeface="Pretendard ExtraBold" panose="02000903000000020004" pitchFamily="2" charset="-127"/>
+            </a:endParaRPr>
           </a:p>
         </p:txBody>
       </p:sp>
@@ -7483,7 +8534,7 @@
                 <a:ea typeface="프리젠테이션 5 Medium" pitchFamily="2" charset="-127"/>
                 <a:cs typeface="Pretendard" panose="02000503000000020004" pitchFamily="2" charset="-127"/>
               </a:rPr>
-              <a:t>6개월 단계별 전환 로드맵 — 분석·파일럿·검증·전환·안정화</a:t>
+              <a:t>설명글을</a:t>
             </a:r>
             <a:r>
               <a:rPr lang="ko-KR" altLang="en-US" sz="1200" dirty="0">
@@ -7504,7 +8555,7 @@
                 <a:ea typeface="프리젠테이션 5 Medium" pitchFamily="2" charset="-127"/>
                 <a:cs typeface="Pretendard" panose="02000503000000020004" pitchFamily="2" charset="-127"/>
               </a:rPr>
-              <a:t/>
+              <a:t> 적어주세요</a:t>
             </a:r>
             <a:r>
               <a:rPr lang="en-US" altLang="ko-KR" sz="1200" b="1" dirty="0">
@@ -7525,7 +8576,7 @@
                 <a:ea typeface="프리젠테이션 5 Medium" pitchFamily="2" charset="-127"/>
                 <a:cs typeface="Pretendard" panose="02000503000000020004" pitchFamily="2" charset="-127"/>
               </a:rPr>
-              <a:t/>
+              <a:t>. </a:t>
             </a:r>
             <a:r>
               <a:rPr lang="ko-KR" altLang="en-US" sz="1200" b="1" dirty="0">
@@ -7543,7 +8594,7 @@
                 <a:ea typeface="프리젠테이션 7 Bold" pitchFamily="2" charset="-127"/>
                 <a:cs typeface="Pretendard" panose="02000503000000020004" pitchFamily="2" charset="-127"/>
               </a:rPr>
-              <a:t/>
+              <a:t>강조 텍스트</a:t>
             </a:r>
             <a:r>
               <a:rPr lang="en-US" altLang="ko-KR" sz="1200" b="1" dirty="0">
@@ -7561,7 +8612,7 @@
                 <a:ea typeface="프리젠테이션 7 Bold" pitchFamily="2" charset="-127"/>
                 <a:cs typeface="Pretendard" panose="02000503000000020004" pitchFamily="2" charset="-127"/>
               </a:rPr>
-              <a:t/>
+              <a:t>(</a:t>
             </a:r>
             <a:r>
               <a:rPr lang="ko-KR" altLang="en-US" sz="1200" b="1" dirty="0" err="1">
@@ -7579,7 +8630,7 @@
                 <a:ea typeface="프리젠테이션 7 Bold" pitchFamily="2" charset="-127"/>
                 <a:cs typeface="Pretendard" panose="02000503000000020004" pitchFamily="2" charset="-127"/>
               </a:rPr>
-              <a:t/>
+              <a:t>프리젠테이션</a:t>
             </a:r>
             <a:r>
               <a:rPr lang="ko-KR" altLang="en-US" sz="1200" b="1" dirty="0">
@@ -7597,7 +8648,7 @@
                 <a:ea typeface="프리젠테이션 7 Bold" pitchFamily="2" charset="-127"/>
                 <a:cs typeface="Pretendard" panose="02000503000000020004" pitchFamily="2" charset="-127"/>
               </a:rPr>
-              <a:t/>
+              <a:t> </a:t>
             </a:r>
             <a:r>
               <a:rPr lang="en-US" altLang="ko-KR" sz="1200" b="1" dirty="0">
@@ -7615,7 +8666,7 @@
                 <a:ea typeface="프리젠테이션 7 Bold" pitchFamily="2" charset="-127"/>
                 <a:cs typeface="Pretendard" panose="02000503000000020004" pitchFamily="2" charset="-127"/>
               </a:rPr>
-              <a:t/>
+              <a:t>7 Bold, </a:t>
             </a:r>
             <a:r>
               <a:rPr lang="ko-KR" altLang="en-US" sz="1200" b="1" dirty="0">
@@ -7633,7 +8684,7 @@
                 <a:ea typeface="프리젠테이션 7 Bold" pitchFamily="2" charset="-127"/>
                 <a:cs typeface="Pretendard" panose="02000503000000020004" pitchFamily="2" charset="-127"/>
               </a:rPr>
-              <a:t/>
+              <a:t>메인 컬러</a:t>
             </a:r>
             <a:r>
               <a:rPr lang="en-US" altLang="ko-KR" sz="1200" b="1" dirty="0" smtClean="0">
@@ -7651,8 +8702,219 @@
                 <a:ea typeface="프리젠테이션 7 Bold" pitchFamily="2" charset="-127"/>
                 <a:cs typeface="Pretendard" panose="02000503000000020004" pitchFamily="2" charset="-127"/>
               </a:rPr>
-              <a:t/>
-            </a:r>
+              <a:t>)</a:t>
+            </a:r>
+          </a:p>
+          <a:p>
+            <a:pPr latinLnBrk="0">
+              <a:lnSpc>
+                <a:spcPct val="150000"/>
+              </a:lnSpc>
+            </a:pPr>
+            <a:r>
+              <a:rPr lang="ko-KR" altLang="en-US" sz="1200" dirty="0" smtClean="0">
+                <a:ln>
+                  <a:solidFill>
+                    <a:schemeClr val="accent1">
+                      <a:alpha val="0"/>
+                    </a:schemeClr>
+                  </a:solidFill>
+                </a:ln>
+                <a:solidFill>
+                  <a:schemeClr val="tx1">
+                    <a:lumMod val="75000"/>
+                    <a:lumOff val="25000"/>
+                  </a:schemeClr>
+                </a:solidFill>
+                <a:latin typeface="프리젠테이션 5 Medium" pitchFamily="2" charset="-127"/>
+                <a:ea typeface="프리젠테이션 5 Medium" pitchFamily="2" charset="-127"/>
+                <a:cs typeface="Pretendard" panose="02000503000000020004" pitchFamily="2" charset="-127"/>
+              </a:rPr>
+              <a:t>폰트 </a:t>
+            </a:r>
+            <a:r>
+              <a:rPr lang="en-US" altLang="ko-KR" sz="1200" dirty="0" smtClean="0">
+                <a:ln>
+                  <a:solidFill>
+                    <a:schemeClr val="accent1">
+                      <a:alpha val="0"/>
+                    </a:schemeClr>
+                  </a:solidFill>
+                </a:ln>
+                <a:solidFill>
+                  <a:schemeClr val="tx1">
+                    <a:lumMod val="75000"/>
+                    <a:lumOff val="25000"/>
+                  </a:schemeClr>
+                </a:solidFill>
+                <a:latin typeface="프리젠테이션 5 Medium" pitchFamily="2" charset="-127"/>
+                <a:ea typeface="프리젠테이션 5 Medium" pitchFamily="2" charset="-127"/>
+                <a:cs typeface="Pretendard" panose="02000503000000020004" pitchFamily="2" charset="-127"/>
+              </a:rPr>
+              <a:t>: </a:t>
+            </a:r>
+            <a:r>
+              <a:rPr lang="ko-KR" altLang="en-US" sz="1200" dirty="0" err="1" smtClean="0">
+                <a:ln>
+                  <a:solidFill>
+                    <a:schemeClr val="accent1">
+                      <a:alpha val="0"/>
+                    </a:schemeClr>
+                  </a:solidFill>
+                </a:ln>
+                <a:solidFill>
+                  <a:schemeClr val="tx1">
+                    <a:lumMod val="75000"/>
+                    <a:lumOff val="25000"/>
+                  </a:schemeClr>
+                </a:solidFill>
+                <a:latin typeface="프리젠테이션 5 Medium" pitchFamily="2" charset="-127"/>
+                <a:ea typeface="프리젠테이션 5 Medium" pitchFamily="2" charset="-127"/>
+                <a:cs typeface="Pretendard" panose="02000503000000020004" pitchFamily="2" charset="-127"/>
+              </a:rPr>
+              <a:t>프리젠테이션</a:t>
+            </a:r>
+            <a:r>
+              <a:rPr lang="ko-KR" altLang="en-US" sz="1200" dirty="0" smtClean="0">
+                <a:ln>
+                  <a:solidFill>
+                    <a:schemeClr val="accent1">
+                      <a:alpha val="0"/>
+                    </a:schemeClr>
+                  </a:solidFill>
+                </a:ln>
+                <a:solidFill>
+                  <a:schemeClr val="tx1">
+                    <a:lumMod val="75000"/>
+                    <a:lumOff val="25000"/>
+                  </a:schemeClr>
+                </a:solidFill>
+                <a:latin typeface="프리젠테이션 5 Medium" pitchFamily="2" charset="-127"/>
+                <a:ea typeface="프리젠테이션 5 Medium" pitchFamily="2" charset="-127"/>
+                <a:cs typeface="Pretendard" panose="02000503000000020004" pitchFamily="2" charset="-127"/>
+              </a:rPr>
+              <a:t> </a:t>
+            </a:r>
+            <a:r>
+              <a:rPr lang="en-US" altLang="ko-KR" sz="1200" dirty="0" smtClean="0">
+                <a:ln>
+                  <a:solidFill>
+                    <a:schemeClr val="accent1">
+                      <a:alpha val="0"/>
+                    </a:schemeClr>
+                  </a:solidFill>
+                </a:ln>
+                <a:solidFill>
+                  <a:schemeClr val="tx1">
+                    <a:lumMod val="75000"/>
+                    <a:lumOff val="25000"/>
+                  </a:schemeClr>
+                </a:solidFill>
+                <a:latin typeface="프리젠테이션 5 Medium" pitchFamily="2" charset="-127"/>
+                <a:ea typeface="프리젠테이션 5 Medium" pitchFamily="2" charset="-127"/>
+                <a:cs typeface="Pretendard" panose="02000503000000020004" pitchFamily="2" charset="-127"/>
+              </a:rPr>
+              <a:t>5 Medium 12pt  </a:t>
+            </a:r>
+            <a:r>
+              <a:rPr lang="ko-KR" altLang="en-US" sz="1200" dirty="0" smtClean="0">
+                <a:ln>
+                  <a:solidFill>
+                    <a:schemeClr val="accent1">
+                      <a:alpha val="0"/>
+                    </a:schemeClr>
+                  </a:solidFill>
+                </a:ln>
+                <a:solidFill>
+                  <a:schemeClr val="tx1">
+                    <a:lumMod val="75000"/>
+                    <a:lumOff val="25000"/>
+                  </a:schemeClr>
+                </a:solidFill>
+                <a:latin typeface="프리젠테이션 5 Medium" pitchFamily="2" charset="-127"/>
+                <a:ea typeface="프리젠테이션 5 Medium" pitchFamily="2" charset="-127"/>
+                <a:cs typeface="Pretendard" panose="02000503000000020004" pitchFamily="2" charset="-127"/>
+              </a:rPr>
+              <a:t>최대 </a:t>
+            </a:r>
+            <a:r>
+              <a:rPr lang="en-US" altLang="ko-KR" sz="1200" dirty="0" smtClean="0">
+                <a:ln>
+                  <a:solidFill>
+                    <a:schemeClr val="accent1">
+                      <a:alpha val="0"/>
+                    </a:schemeClr>
+                  </a:solidFill>
+                </a:ln>
+                <a:solidFill>
+                  <a:schemeClr val="tx1">
+                    <a:lumMod val="75000"/>
+                    <a:lumOff val="25000"/>
+                  </a:schemeClr>
+                </a:solidFill>
+                <a:latin typeface="프리젠테이션 5 Medium" pitchFamily="2" charset="-127"/>
+                <a:ea typeface="프리젠테이션 5 Medium" pitchFamily="2" charset="-127"/>
+                <a:cs typeface="Pretendard" panose="02000503000000020004" pitchFamily="2" charset="-127"/>
+              </a:rPr>
+              <a:t>3</a:t>
+            </a:r>
+            <a:r>
+              <a:rPr lang="ko-KR" altLang="en-US" sz="1200" dirty="0" smtClean="0">
+                <a:ln>
+                  <a:solidFill>
+                    <a:schemeClr val="accent1">
+                      <a:alpha val="0"/>
+                    </a:schemeClr>
+                  </a:solidFill>
+                </a:ln>
+                <a:solidFill>
+                  <a:schemeClr val="tx1">
+                    <a:lumMod val="75000"/>
+                    <a:lumOff val="25000"/>
+                  </a:schemeClr>
+                </a:solidFill>
+                <a:latin typeface="프리젠테이션 5 Medium" pitchFamily="2" charset="-127"/>
+                <a:ea typeface="프리젠테이션 5 Medium" pitchFamily="2" charset="-127"/>
+                <a:cs typeface="Pretendard" panose="02000503000000020004" pitchFamily="2" charset="-127"/>
+              </a:rPr>
+              <a:t>줄까지 작성 가능합니다</a:t>
+            </a:r>
+            <a:r>
+              <a:rPr lang="en-US" altLang="ko-KR" sz="1200" dirty="0" smtClean="0">
+                <a:ln>
+                  <a:solidFill>
+                    <a:schemeClr val="accent1">
+                      <a:alpha val="0"/>
+                    </a:schemeClr>
+                  </a:solidFill>
+                </a:ln>
+                <a:solidFill>
+                  <a:schemeClr val="tx1">
+                    <a:lumMod val="75000"/>
+                    <a:lumOff val="25000"/>
+                  </a:schemeClr>
+                </a:solidFill>
+                <a:latin typeface="프리젠테이션 5 Medium" pitchFamily="2" charset="-127"/>
+                <a:ea typeface="프리젠테이션 5 Medium" pitchFamily="2" charset="-127"/>
+                <a:cs typeface="Pretendard" panose="02000503000000020004" pitchFamily="2" charset="-127"/>
+              </a:rPr>
+              <a:t>.</a:t>
+            </a:r>
+            <a:endParaRPr lang="en-US" altLang="ko-KR" sz="1200" dirty="0">
+              <a:ln>
+                <a:solidFill>
+                  <a:schemeClr val="accent1">
+                    <a:alpha val="0"/>
+                  </a:schemeClr>
+                </a:solidFill>
+              </a:ln>
+              <a:solidFill>
+                <a:srgbClr val="2765E1"/>
+              </a:solidFill>
+              <a:latin typeface="프리젠테이션 5 Medium" pitchFamily="2" charset="-127"/>
+              <a:ea typeface="프리젠테이션 5 Medium" pitchFamily="2" charset="-127"/>
+              <a:cs typeface="Pretendard" panose="02000503000000020004" pitchFamily="2" charset="-127"/>
+            </a:endParaRPr>
           </a:p>
         </p:txBody>
       </p:sp>
@@ -7666,8 +8928,8 @@
         </p:nvSpPr>
         <p:spPr>
           <a:xfrm>
-            <a:off x="457200" y="1750000"/>
-            <a:ext cx="11277600" cy="280000"/>
+            <a:off x="457200" y="1600200"/>
+            <a:ext cx="11277600" cy="320040"/>
           </a:xfrm>
           <a:prstGeom prst="rect">
             <a:avLst/>
@@ -7678,14 +8940,14 @@
           </a:ln>
         </p:spPr>
         <p:txBody>
-          <a:bodyPr anchor="ctr" lIns="91440" rIns="91440" tIns="91440" bIns="91440"/>
+          <a:bodyPr anchor="ctr" lIns="0" rIns="0" tIns="0" bIns="0"/>
           <a:lstStyle/>
           <a:p>
             <a:pPr algn="l"/>
             <a:r>
-              <a:rPr lang="ko-KR" altLang="en-US" sz="1600" b="1" dirty="0">
-                <a:solidFill>
-                  <a:srgbClr val="1B3A5C"/>
+              <a:rPr sz="1600" b="1" dirty="0">
+                <a:solidFill>
+                  <a:srgbClr val="0043DA"/>
                 </a:solidFill>
                 <a:latin typeface="Freesentation"/>
                 <a:ea typeface="Freesentation"/>
@@ -7705,8 +8967,8 @@
         </p:nvSpPr>
         <p:spPr>
           <a:xfrm>
-            <a:off x="457200" y="2040000"/>
-            <a:ext cx="11277600" cy="230000"/>
+            <a:off x="457200" y="1965960"/>
+            <a:ext cx="11277600" cy="274320"/>
           </a:xfrm>
           <a:prstGeom prst="rect">
             <a:avLst/>
@@ -7717,19 +8979,19 @@
           </a:ln>
         </p:spPr>
         <p:txBody>
-          <a:bodyPr anchor="ctr" lIns="91440" rIns="91440" tIns="91440" bIns="91440"/>
+          <a:bodyPr anchor="ctr" lIns="0" rIns="0" tIns="0" bIns="0"/>
           <a:lstStyle/>
           <a:p>
             <a:pPr algn="l"/>
             <a:r>
-              <a:rPr lang="ko-KR" altLang="en-US" sz="1200" b="0" dirty="0">
-                <a:solidFill>
-                  <a:srgbClr val="7F8C8D"/>
+              <a:rPr sz="1300" b="0" dirty="0">
+                <a:solidFill>
+                  <a:srgbClr val="212121"/>
                 </a:solidFill>
                 <a:latin typeface="Freesentation"/>
                 <a:ea typeface="Freesentation"/>
               </a:rPr>
-              <a:t>단계별 점진적 전환 — 무중단 운영 보장 · 각 단계 완료 후 승인 게이트</a:t>
+              <a:t>수영장 레인(Swim Lane) — 4개 워크스트림 동시 진행, 무중단 운영 보장</a:t>
             </a:r>
           </a:p>
         </p:txBody>
@@ -7744,15 +9006,19 @@
         </p:nvSpPr>
         <p:spPr>
           <a:xfrm>
-            <a:off x="457200" y="2361440"/>
-            <a:ext cx="2241120" cy="260000"/>
-          </a:xfrm>
-          <a:prstGeom prst="rect">
-            <a:avLst/>
-          </a:prstGeom>
-          <a:noFill/>
-          <a:ln>
-            <a:noFill/>
+            <a:off x="1920240" y="2423160"/>
+            <a:ext cx="1635760" cy="365760"/>
+          </a:xfrm>
+          <a:prstGeom prst="rect">
+            <a:avLst/>
+          </a:prstGeom>
+          <a:solidFill>
+            <a:srgbClr val="E6F0FF"/>
+          </a:solidFill>
+          <a:ln w="6350">
+            <a:solidFill>
+              <a:srgbClr val="DCDCDC"/>
+            </a:solidFill>
           </a:ln>
         </p:spPr>
         <p:txBody>
@@ -7761,14 +9027,14 @@
           <a:p>
             <a:pPr algn="ctr"/>
             <a:r>
-              <a:rPr lang="ko-KR" altLang="en-US" sz="1100" b="1" dirty="0">
-                <a:solidFill>
-                  <a:srgbClr val="7F8C8D"/>
-                </a:solidFill>
-                <a:latin typeface="Freesentation"/>
-                <a:ea typeface="Freesentation"/>
-              </a:rPr>
-              <a:t>M1~M2</a:t>
+              <a:rPr sz="1200" b="1" dirty="0">
+                <a:solidFill>
+                  <a:srgbClr val="0043DA"/>
+                </a:solidFill>
+                <a:latin typeface="프리젠테이션 7"/>
+                <a:ea typeface="프리젠테이션 7"/>
+              </a:rPr>
+              <a:t>M1</a:t>
             </a:r>
           </a:p>
         </p:txBody>
@@ -7783,8 +9049,297 @@
         </p:nvSpPr>
         <p:spPr>
           <a:xfrm>
-            <a:off x="457200" y="2621440"/>
-            <a:ext cx="2241120" cy="900000"/>
+            <a:off x="3556000" y="2423160"/>
+            <a:ext cx="1635760" cy="365760"/>
+          </a:xfrm>
+          <a:prstGeom prst="rect">
+            <a:avLst/>
+          </a:prstGeom>
+          <a:solidFill>
+            <a:srgbClr val="E6F0FF"/>
+          </a:solidFill>
+          <a:ln w="6350">
+            <a:solidFill>
+              <a:srgbClr val="DCDCDC"/>
+            </a:solidFill>
+          </a:ln>
+        </p:spPr>
+        <p:txBody>
+          <a:bodyPr anchor="ctr" lIns="91440" rIns="91440" tIns="91440" bIns="91440"/>
+          <a:lstStyle/>
+          <a:p>
+            <a:pPr algn="ctr"/>
+            <a:r>
+              <a:rPr sz="1200" b="1" dirty="0">
+                <a:solidFill>
+                  <a:srgbClr val="0043DA"/>
+                </a:solidFill>
+                <a:latin typeface="프리젠테이션 7"/>
+                <a:ea typeface="프리젠테이션 7"/>
+              </a:rPr>
+              <a:t>M2</a:t>
+            </a:r>
+          </a:p>
+        </p:txBody>
+      </p:sp>
+      <p:sp>
+        <p:nvSpPr>
+          <p:cNvPr id="205" name="S205"/>
+          <p:cNvSpPr>
+            <a:spLocks noGrp="1"/>
+          </p:cNvSpPr>
+          <p:nvPr/>
+        </p:nvSpPr>
+        <p:spPr>
+          <a:xfrm>
+            <a:off x="5191760" y="2423160"/>
+            <a:ext cx="1635760" cy="365760"/>
+          </a:xfrm>
+          <a:prstGeom prst="rect">
+            <a:avLst/>
+          </a:prstGeom>
+          <a:solidFill>
+            <a:srgbClr val="E6F0FF"/>
+          </a:solidFill>
+          <a:ln w="6350">
+            <a:solidFill>
+              <a:srgbClr val="DCDCDC"/>
+            </a:solidFill>
+          </a:ln>
+        </p:spPr>
+        <p:txBody>
+          <a:bodyPr anchor="ctr" lIns="91440" rIns="91440" tIns="91440" bIns="91440"/>
+          <a:lstStyle/>
+          <a:p>
+            <a:pPr algn="ctr"/>
+            <a:r>
+              <a:rPr sz="1200" b="1" dirty="0">
+                <a:solidFill>
+                  <a:srgbClr val="0043DA"/>
+                </a:solidFill>
+                <a:latin typeface="프리젠테이션 7"/>
+                <a:ea typeface="프리젠테이션 7"/>
+              </a:rPr>
+              <a:t>M3</a:t>
+            </a:r>
+          </a:p>
+        </p:txBody>
+      </p:sp>
+      <p:sp>
+        <p:nvSpPr>
+          <p:cNvPr id="206" name="S206"/>
+          <p:cNvSpPr>
+            <a:spLocks noGrp="1"/>
+          </p:cNvSpPr>
+          <p:nvPr/>
+        </p:nvSpPr>
+        <p:spPr>
+          <a:xfrm>
+            <a:off x="6827520" y="2423160"/>
+            <a:ext cx="1635760" cy="365760"/>
+          </a:xfrm>
+          <a:prstGeom prst="rect">
+            <a:avLst/>
+          </a:prstGeom>
+          <a:solidFill>
+            <a:srgbClr val="E6F0FF"/>
+          </a:solidFill>
+          <a:ln w="6350">
+            <a:solidFill>
+              <a:srgbClr val="DCDCDC"/>
+            </a:solidFill>
+          </a:ln>
+        </p:spPr>
+        <p:txBody>
+          <a:bodyPr anchor="ctr" lIns="91440" rIns="91440" tIns="91440" bIns="91440"/>
+          <a:lstStyle/>
+          <a:p>
+            <a:pPr algn="ctr"/>
+            <a:r>
+              <a:rPr sz="1200" b="1" dirty="0">
+                <a:solidFill>
+                  <a:srgbClr val="0043DA"/>
+                </a:solidFill>
+                <a:latin typeface="프리젠테이션 7"/>
+                <a:ea typeface="프리젠테이션 7"/>
+              </a:rPr>
+              <a:t>M4</a:t>
+            </a:r>
+          </a:p>
+        </p:txBody>
+      </p:sp>
+      <p:sp>
+        <p:nvSpPr>
+          <p:cNvPr id="207" name="S207"/>
+          <p:cNvSpPr>
+            <a:spLocks noGrp="1"/>
+          </p:cNvSpPr>
+          <p:nvPr/>
+        </p:nvSpPr>
+        <p:spPr>
+          <a:xfrm>
+            <a:off x="8463280" y="2423160"/>
+            <a:ext cx="1635760" cy="365760"/>
+          </a:xfrm>
+          <a:prstGeom prst="rect">
+            <a:avLst/>
+          </a:prstGeom>
+          <a:solidFill>
+            <a:srgbClr val="E6F0FF"/>
+          </a:solidFill>
+          <a:ln w="6350">
+            <a:solidFill>
+              <a:srgbClr val="DCDCDC"/>
+            </a:solidFill>
+          </a:ln>
+        </p:spPr>
+        <p:txBody>
+          <a:bodyPr anchor="ctr" lIns="91440" rIns="91440" tIns="91440" bIns="91440"/>
+          <a:lstStyle/>
+          <a:p>
+            <a:pPr algn="ctr"/>
+            <a:r>
+              <a:rPr sz="1200" b="1" dirty="0">
+                <a:solidFill>
+                  <a:srgbClr val="0043DA"/>
+                </a:solidFill>
+                <a:latin typeface="프리젠테이션 7"/>
+                <a:ea typeface="프리젠테이션 7"/>
+              </a:rPr>
+              <a:t>M5</a:t>
+            </a:r>
+          </a:p>
+        </p:txBody>
+      </p:sp>
+      <p:sp>
+        <p:nvSpPr>
+          <p:cNvPr id="208" name="S208"/>
+          <p:cNvSpPr>
+            <a:spLocks noGrp="1"/>
+          </p:cNvSpPr>
+          <p:nvPr/>
+        </p:nvSpPr>
+        <p:spPr>
+          <a:xfrm>
+            <a:off x="10099040" y="2423160"/>
+            <a:ext cx="1635760" cy="365760"/>
+          </a:xfrm>
+          <a:prstGeom prst="rect">
+            <a:avLst/>
+          </a:prstGeom>
+          <a:solidFill>
+            <a:srgbClr val="E6F0FF"/>
+          </a:solidFill>
+          <a:ln w="6350">
+            <a:solidFill>
+              <a:srgbClr val="DCDCDC"/>
+            </a:solidFill>
+          </a:ln>
+        </p:spPr>
+        <p:txBody>
+          <a:bodyPr anchor="ctr" lIns="91440" rIns="91440" tIns="91440" bIns="91440"/>
+          <a:lstStyle/>
+          <a:p>
+            <a:pPr algn="ctr"/>
+            <a:r>
+              <a:rPr sz="1200" b="1" dirty="0">
+                <a:solidFill>
+                  <a:srgbClr val="0043DA"/>
+                </a:solidFill>
+                <a:latin typeface="프리젠테이션 7"/>
+                <a:ea typeface="프리젠테이션 7"/>
+              </a:rPr>
+              <a:t>M6</a:t>
+            </a:r>
+          </a:p>
+        </p:txBody>
+      </p:sp>
+      <p:sp>
+        <p:nvSpPr>
+          <p:cNvPr id="209" name="S209"/>
+          <p:cNvSpPr>
+            <a:spLocks noGrp="1"/>
+          </p:cNvSpPr>
+          <p:nvPr/>
+        </p:nvSpPr>
+        <p:spPr>
+          <a:xfrm>
+            <a:off x="457200" y="2788920"/>
+            <a:ext cx="1371600" cy="902970"/>
+          </a:xfrm>
+          <a:prstGeom prst="rect">
+            <a:avLst/>
+          </a:prstGeom>
+          <a:solidFill>
+            <a:srgbClr val="F8F9FA"/>
+          </a:solidFill>
+          <a:ln w="6350">
+            <a:solidFill>
+              <a:srgbClr val="DCDCDC"/>
+            </a:solidFill>
+          </a:ln>
+        </p:spPr>
+        <p:txBody>
+          <a:bodyPr anchor="ctr" lIns="60000" rIns="60000" tIns="60000" bIns="60000"/>
+          <a:lstStyle/>
+          <a:p>
+            <a:pPr algn="ctr"/>
+            <a:r>
+              <a:rPr sz="1300" b="1" dirty="0">
+                <a:solidFill>
+                  <a:srgbClr val="212121"/>
+                </a:solidFill>
+                <a:latin typeface="프리젠테이션 7"/>
+                <a:ea typeface="프리젠테이션 7"/>
+              </a:rPr>
+              <a:t>분석·설계</a:t>
+            </a:r>
+          </a:p>
+        </p:txBody>
+      </p:sp>
+      <p:sp>
+        <p:nvSpPr>
+          <p:cNvPr id="210" name="S210"/>
+          <p:cNvSpPr>
+            <a:spLocks noGrp="1"/>
+          </p:cNvSpPr>
+          <p:nvPr/>
+        </p:nvSpPr>
+        <p:spPr>
+          <a:xfrm>
+            <a:off x="1920240" y="2788920"/>
+            <a:ext cx="9814560" cy="902970"/>
+          </a:xfrm>
+          <a:prstGeom prst="rect">
+            <a:avLst/>
+          </a:prstGeom>
+          <a:solidFill>
+            <a:srgbClr val="F5F7FA"/>
+          </a:solidFill>
+          <a:ln w="3175">
+            <a:solidFill>
+              <a:srgbClr val="DCDCDC"/>
+            </a:solidFill>
+          </a:ln>
+        </p:spPr>
+        <p:txBody>
+          <a:bodyPr anchor="ctr" lIns="91440" rIns="91440" tIns="91440" bIns="91440"/>
+          <a:lstStyle/>
+          <a:p/>
+        </p:txBody>
+      </p:sp>
+      <p:sp>
+        <p:nvSpPr>
+          <p:cNvPr id="211" name="S211"/>
+          <p:cNvSpPr>
+            <a:spLocks noGrp="1"/>
+          </p:cNvSpPr>
+          <p:nvPr/>
+        </p:nvSpPr>
+        <p:spPr>
+          <a:xfrm>
+            <a:off x="1920240" y="2834640"/>
+            <a:ext cx="3271520" cy="811530"/>
           </a:xfrm>
           <a:prstGeom prst="roundRect">
             <a:avLst>
@@ -7792,7 +9347,7 @@
             </a:avLst>
           </a:prstGeom>
           <a:solidFill>
-            <a:srgbClr val="1B3A5C"/>
+            <a:srgbClr val="0043DA"/>
           </a:solidFill>
           <a:ln>
             <a:noFill/>
@@ -7804,21 +9359,21 @@
           <a:p>
             <a:pPr algn="ctr"/>
             <a:r>
-              <a:rPr lang="ko-KR" altLang="en-US" sz="1600" b="1" dirty="0">
+              <a:rPr sz="1100" b="0" dirty="0">
                 <a:solidFill>
                   <a:srgbClr val="FFFFFF"/>
                 </a:solidFill>
-                <a:latin typeface="나눔스퀘어 ExtraBold"/>
-                <a:ea typeface="나눔스퀘어 ExtraBold"/>
-              </a:rPr>
-              <a:t>분석/설계</a:t>
-            </a:r>
-          </a:p>
-        </p:txBody>
-      </p:sp>
-      <p:sp>
-        <p:nvSpPr>
-          <p:cNvPr id="205" name="S205"/>
+                <a:latin typeface="Freesentation"/>
+                <a:ea typeface="Freesentation"/>
+              </a:rPr>
+              <a:t>현황 분석 · 아키텍처 설계 · 도구 선정</a:t>
+            </a:r>
+          </a:p>
+        </p:txBody>
+      </p:sp>
+      <p:sp>
+        <p:nvSpPr>
+          <p:cNvPr id="212" name="S212"/>
           <p:cNvSpPr>
             <a:spLocks noGrp="1"/>
           </p:cNvSpPr>
@@ -7826,68 +9381,42 @@
         </p:nvSpPr>
         <p:spPr>
           <a:xfrm>
-            <a:off x="457200" y="3539440"/>
-            <a:ext cx="2241120" cy="3227120"/>
+            <a:off x="457200" y="3783330"/>
+            <a:ext cx="1371600" cy="902970"/>
           </a:xfrm>
           <a:prstGeom prst="rect">
             <a:avLst/>
           </a:prstGeom>
           <a:solidFill>
-            <a:srgbClr val="F0F4F8"/>
+            <a:srgbClr val="F8F9FA"/>
           </a:solidFill>
-          <a:ln w="12700">
+          <a:ln w="6350">
             <a:solidFill>
-              <a:srgbClr val="DDDDDD"/>
+              <a:srgbClr val="DCDCDC"/>
             </a:solidFill>
           </a:ln>
         </p:spPr>
         <p:txBody>
-          <a:bodyPr anchor="t" lIns="80000" rIns="80000" tIns="80000" bIns="80000"/>
+          <a:bodyPr anchor="ctr" lIns="60000" rIns="60000" tIns="60000" bIns="60000"/>
           <a:lstStyle/>
           <a:p>
             <a:pPr algn="ctr"/>
             <a:r>
-              <a:rPr lang="ko-KR" altLang="en-US" sz="1200" b="0" dirty="0">
-                <a:solidFill>
-                  <a:srgbClr val="404040"/>
-                </a:solidFill>
-                <a:latin typeface="Freesentation"/>
-                <a:ea typeface="Freesentation"/>
-              </a:rPr>
-              <a:t>현황 분석</a:t>
-            </a:r>
-          </a:p>
-          <a:p>
-            <a:pPr algn="ctr"/>
-            <a:r>
-              <a:rPr lang="ko-KR" altLang="en-US" sz="1200" b="0" dirty="0">
-                <a:solidFill>
-                  <a:srgbClr val="404040"/>
-                </a:solidFill>
-                <a:latin typeface="Freesentation"/>
-                <a:ea typeface="Freesentation"/>
-              </a:rPr>
-              <a:t>아키텍처 설계</a:t>
-            </a:r>
-          </a:p>
-          <a:p>
-            <a:pPr algn="ctr"/>
-            <a:r>
-              <a:rPr lang="ko-KR" altLang="en-US" sz="1200" b="0" dirty="0">
-                <a:solidFill>
-                  <a:srgbClr val="404040"/>
-                </a:solidFill>
-                <a:latin typeface="Freesentation"/>
-                <a:ea typeface="Freesentation"/>
-              </a:rPr>
-              <a:t>도구 선정·계약</a:t>
-            </a:r>
-          </a:p>
-        </p:txBody>
-      </p:sp>
-      <p:sp>
-        <p:nvSpPr>
-          <p:cNvPr id="206" name="S206"/>
+              <a:rPr sz="1300" b="1" dirty="0">
+                <a:solidFill>
+                  <a:srgbClr val="212121"/>
+                </a:solidFill>
+                <a:latin typeface="프리젠테이션 7"/>
+                <a:ea typeface="프리젠테이션 7"/>
+              </a:rPr>
+              <a:t>파일럿·검증</a:t>
+            </a:r>
+          </a:p>
+        </p:txBody>
+      </p:sp>
+      <p:sp>
+        <p:nvSpPr>
+          <p:cNvPr id="213" name="S213"/>
           <p:cNvSpPr>
             <a:spLocks noGrp="1"/>
           </p:cNvSpPr>
@@ -7895,14 +9424,47 @@
         </p:nvSpPr>
         <p:spPr>
           <a:xfrm>
-            <a:off x="2698321" y="3011440"/>
-            <a:ext cx="17999" cy="120000"/>
+            <a:off x="1920240" y="3783330"/>
+            <a:ext cx="9814560" cy="902970"/>
           </a:xfrm>
           <a:prstGeom prst="rect">
             <a:avLst/>
           </a:prstGeom>
           <a:solidFill>
-            <a:srgbClr val="1B3A5C"/>
+            <a:srgbClr val="F5F7FA"/>
+          </a:solidFill>
+          <a:ln w="3175">
+            <a:solidFill>
+              <a:srgbClr val="DCDCDC"/>
+            </a:solidFill>
+          </a:ln>
+        </p:spPr>
+        <p:txBody>
+          <a:bodyPr anchor="ctr" lIns="91440" rIns="91440" tIns="91440" bIns="91440"/>
+          <a:lstStyle/>
+          <a:p/>
+        </p:txBody>
+      </p:sp>
+      <p:sp>
+        <p:nvSpPr>
+          <p:cNvPr id="214" name="S214"/>
+          <p:cNvSpPr>
+            <a:spLocks noGrp="1"/>
+          </p:cNvSpPr>
+          <p:nvPr/>
+        </p:nvSpPr>
+        <p:spPr>
+          <a:xfrm>
+            <a:off x="3556000" y="3829050"/>
+            <a:ext cx="3271520" cy="811530"/>
+          </a:xfrm>
+          <a:prstGeom prst="roundRect">
+            <a:avLst>
+              <a:gd name="adj" fmla="val 16667"/>
+            </a:avLst>
+          </a:prstGeom>
+          <a:solidFill>
+            <a:srgbClr val="3A7BD5"/>
           </a:solidFill>
           <a:ln>
             <a:noFill/>
@@ -7914,21 +9476,21 @@
           <a:p>
             <a:pPr algn="ctr"/>
             <a:r>
-              <a:rPr lang="ko-KR" altLang="en-US" sz="1000" b="1" dirty="0">
+              <a:rPr sz="1100" b="0" dirty="0">
                 <a:solidFill>
                   <a:srgbClr val="FFFFFF"/>
                 </a:solidFill>
-                <a:latin typeface="나눔스퀘어 ExtraBold"/>
-                <a:ea typeface="나눔스퀘어 ExtraBold"/>
-              </a:rPr>
-              <a:t>›</a:t>
-            </a:r>
-          </a:p>
-        </p:txBody>
-      </p:sp>
-      <p:sp>
-        <p:nvSpPr>
-          <p:cNvPr id="207" name="S207"/>
+                <a:latin typeface="Freesentation"/>
+                <a:ea typeface="Freesentation"/>
+              </a:rPr>
+              <a:t>PoC 파일럿 · 성능 테스트 · 정합성 검증</a:t>
+            </a:r>
+          </a:p>
+        </p:txBody>
+      </p:sp>
+      <p:sp>
+        <p:nvSpPr>
+          <p:cNvPr id="215" name="S215"/>
           <p:cNvSpPr>
             <a:spLocks noGrp="1"/>
           </p:cNvSpPr>
@@ -7936,38 +9498,42 @@
         </p:nvSpPr>
         <p:spPr>
           <a:xfrm>
-            <a:off x="2716320" y="2361440"/>
-            <a:ext cx="2241120" cy="260000"/>
-          </a:xfrm>
-          <a:prstGeom prst="rect">
-            <a:avLst/>
-          </a:prstGeom>
-          <a:noFill/>
-          <a:ln>
-            <a:noFill/>
+            <a:off x="457200" y="4777740"/>
+            <a:ext cx="1371600" cy="902970"/>
+          </a:xfrm>
+          <a:prstGeom prst="rect">
+            <a:avLst/>
+          </a:prstGeom>
+          <a:solidFill>
+            <a:srgbClr val="F8F9FA"/>
+          </a:solidFill>
+          <a:ln w="6350">
+            <a:solidFill>
+              <a:srgbClr val="DCDCDC"/>
+            </a:solidFill>
           </a:ln>
         </p:spPr>
         <p:txBody>
-          <a:bodyPr anchor="ctr" lIns="91440" rIns="91440" tIns="91440" bIns="91440"/>
+          <a:bodyPr anchor="ctr" lIns="60000" rIns="60000" tIns="60000" bIns="60000"/>
           <a:lstStyle/>
           <a:p>
             <a:pPr algn="ctr"/>
             <a:r>
-              <a:rPr lang="ko-KR" altLang="en-US" sz="1100" b="1" dirty="0">
-                <a:solidFill>
-                  <a:srgbClr val="7F8C8D"/>
-                </a:solidFill>
-                <a:latin typeface="Freesentation"/>
-                <a:ea typeface="Freesentation"/>
-              </a:rPr>
-              <a:t>M3</a:t>
-            </a:r>
-          </a:p>
-        </p:txBody>
-      </p:sp>
-      <p:sp>
-        <p:nvSpPr>
-          <p:cNvPr id="208" name="S208"/>
+              <a:rPr sz="1300" b="1" dirty="0">
+                <a:solidFill>
+                  <a:srgbClr val="212121"/>
+                </a:solidFill>
+                <a:latin typeface="프리젠테이션 7"/>
+                <a:ea typeface="프리젠테이션 7"/>
+              </a:rPr>
+              <a:t>마이그레이션</a:t>
+            </a:r>
+          </a:p>
+        </p:txBody>
+      </p:sp>
+      <p:sp>
+        <p:nvSpPr>
+          <p:cNvPr id="216" name="S216"/>
           <p:cNvSpPr>
             <a:spLocks noGrp="1"/>
           </p:cNvSpPr>
@@ -7975,8 +9541,39 @@
         </p:nvSpPr>
         <p:spPr>
           <a:xfrm>
-            <a:off x="2716320" y="2621440"/>
-            <a:ext cx="2241120" cy="900000"/>
+            <a:off x="1920240" y="4777740"/>
+            <a:ext cx="9814560" cy="902970"/>
+          </a:xfrm>
+          <a:prstGeom prst="rect">
+            <a:avLst/>
+          </a:prstGeom>
+          <a:solidFill>
+            <a:srgbClr val="F5F7FA"/>
+          </a:solidFill>
+          <a:ln w="3175">
+            <a:solidFill>
+              <a:srgbClr val="DCDCDC"/>
+            </a:solidFill>
+          </a:ln>
+        </p:spPr>
+        <p:txBody>
+          <a:bodyPr anchor="ctr" lIns="91440" rIns="91440" tIns="91440" bIns="91440"/>
+          <a:lstStyle/>
+          <a:p/>
+        </p:txBody>
+      </p:sp>
+      <p:sp>
+        <p:nvSpPr>
+          <p:cNvPr id="217" name="S217"/>
+          <p:cNvSpPr>
+            <a:spLocks noGrp="1"/>
+          </p:cNvSpPr>
+          <p:nvPr/>
+        </p:nvSpPr>
+        <p:spPr>
+          <a:xfrm>
+            <a:off x="6827520" y="4823460"/>
+            <a:ext cx="3271520" cy="811530"/>
           </a:xfrm>
           <a:prstGeom prst="roundRect">
             <a:avLst>
@@ -7984,7 +9581,7 @@
             </a:avLst>
           </a:prstGeom>
           <a:solidFill>
-            <a:srgbClr val="2E6DA4"/>
+            <a:srgbClr val="6B9FFF"/>
           </a:solidFill>
           <a:ln>
             <a:noFill/>
@@ -7996,21 +9593,21 @@
           <a:p>
             <a:pPr algn="ctr"/>
             <a:r>
-              <a:rPr lang="ko-KR" altLang="en-US" sz="1600" b="1" dirty="0">
+              <a:rPr sz="1100" b="0" dirty="0">
                 <a:solidFill>
                   <a:srgbClr val="FFFFFF"/>
                 </a:solidFill>
-                <a:latin typeface="나눔스퀘어 ExtraBold"/>
-                <a:ea typeface="나눔스퀘어 ExtraBold"/>
-              </a:rPr>
-              <a:t>파일럿</a:t>
-            </a:r>
-          </a:p>
-        </p:txBody>
-      </p:sp>
-      <p:sp>
-        <p:nvSpPr>
-          <p:cNvPr id="209" name="S209"/>
+                <a:latin typeface="Freesentation"/>
+                <a:ea typeface="Freesentation"/>
+              </a:rPr>
+              <a:t>컷오버 실행 · 모니터링 강화 · 롤백 대기</a:t>
+            </a:r>
+          </a:p>
+        </p:txBody>
+      </p:sp>
+      <p:sp>
+        <p:nvSpPr>
+          <p:cNvPr id="218" name="S218"/>
           <p:cNvSpPr>
             <a:spLocks noGrp="1"/>
           </p:cNvSpPr>
@@ -8018,68 +9615,42 @@
         </p:nvSpPr>
         <p:spPr>
           <a:xfrm>
-            <a:off x="2716320" y="3539440"/>
-            <a:ext cx="2241120" cy="3227120"/>
+            <a:off x="457200" y="5772150"/>
+            <a:ext cx="1371600" cy="902970"/>
           </a:xfrm>
           <a:prstGeom prst="rect">
             <a:avLst/>
           </a:prstGeom>
           <a:solidFill>
-            <a:srgbClr val="F0F4F8"/>
+            <a:srgbClr val="F8F9FA"/>
           </a:solidFill>
-          <a:ln w="12700">
+          <a:ln w="6350">
             <a:solidFill>
-              <a:srgbClr val="DDDDDD"/>
+              <a:srgbClr val="DCDCDC"/>
             </a:solidFill>
           </a:ln>
         </p:spPr>
         <p:txBody>
-          <a:bodyPr anchor="t" lIns="80000" rIns="80000" tIns="80000" bIns="80000"/>
+          <a:bodyPr anchor="ctr" lIns="60000" rIns="60000" tIns="60000" bIns="60000"/>
           <a:lstStyle/>
           <a:p>
             <a:pPr algn="ctr"/>
             <a:r>
-              <a:rPr lang="ko-KR" altLang="en-US" sz="1200" b="0" dirty="0">
-                <a:solidFill>
-                  <a:srgbClr val="404040"/>
-                </a:solidFill>
-                <a:latin typeface="Freesentation"/>
-                <a:ea typeface="Freesentation"/>
-              </a:rPr>
-              <a:t>소규모 테이블</a:t>
-            </a:r>
-          </a:p>
-          <a:p>
-            <a:pPr algn="ctr"/>
-            <a:r>
-              <a:rPr lang="ko-KR" altLang="en-US" sz="1200" b="0" dirty="0">
-                <a:solidFill>
-                  <a:srgbClr val="404040"/>
-                </a:solidFill>
-                <a:latin typeface="Freesentation"/>
-                <a:ea typeface="Freesentation"/>
-              </a:rPr>
-              <a:t>CDC 복제 테스트</a:t>
-            </a:r>
-          </a:p>
-          <a:p>
-            <a:pPr algn="ctr"/>
-            <a:r>
-              <a:rPr lang="ko-KR" altLang="en-US" sz="1200" b="0" dirty="0">
-                <a:solidFill>
-                  <a:srgbClr val="404040"/>
-                </a:solidFill>
-                <a:latin typeface="Freesentation"/>
-                <a:ea typeface="Freesentation"/>
-              </a:rPr>
-              <a:t>성능 벤치마크</a:t>
-            </a:r>
-          </a:p>
-        </p:txBody>
-      </p:sp>
-      <p:sp>
-        <p:nvSpPr>
-          <p:cNvPr id="210" name="S210"/>
+              <a:rPr sz="1300" b="1" dirty="0">
+                <a:solidFill>
+                  <a:srgbClr val="212121"/>
+                </a:solidFill>
+                <a:latin typeface="프리젠테이션 7"/>
+                <a:ea typeface="프리젠테이션 7"/>
+              </a:rPr>
+              <a:t>안정화·종료</a:t>
+            </a:r>
+          </a:p>
+        </p:txBody>
+      </p:sp>
+      <p:sp>
+        <p:nvSpPr>
+          <p:cNvPr id="219" name="S219"/>
           <p:cNvSpPr>
             <a:spLocks noGrp="1"/>
           </p:cNvSpPr>
@@ -8087,14 +9658,47 @@
         </p:nvSpPr>
         <p:spPr>
           <a:xfrm>
-            <a:off x="4957441" y="3011440"/>
-            <a:ext cx="17999" cy="120000"/>
+            <a:off x="1920240" y="5772150"/>
+            <a:ext cx="9814560" cy="902970"/>
           </a:xfrm>
           <a:prstGeom prst="rect">
             <a:avLst/>
           </a:prstGeom>
           <a:solidFill>
-            <a:srgbClr val="1B3A5C"/>
+            <a:srgbClr val="F5F7FA"/>
+          </a:solidFill>
+          <a:ln w="3175">
+            <a:solidFill>
+              <a:srgbClr val="DCDCDC"/>
+            </a:solidFill>
+          </a:ln>
+        </p:spPr>
+        <p:txBody>
+          <a:bodyPr anchor="ctr" lIns="91440" rIns="91440" tIns="91440" bIns="91440"/>
+          <a:lstStyle/>
+          <a:p/>
+        </p:txBody>
+      </p:sp>
+      <p:sp>
+        <p:nvSpPr>
+          <p:cNvPr id="220" name="S220"/>
+          <p:cNvSpPr>
+            <a:spLocks noGrp="1"/>
+          </p:cNvSpPr>
+          <p:nvPr/>
+        </p:nvSpPr>
+        <p:spPr>
+          <a:xfrm>
+            <a:off x="8463280" y="5817870"/>
+            <a:ext cx="3271520" cy="811530"/>
+          </a:xfrm>
+          <a:prstGeom prst="roundRect">
+            <a:avLst>
+              <a:gd name="adj" fmla="val 16667"/>
+            </a:avLst>
+          </a:prstGeom>
+          <a:solidFill>
+            <a:srgbClr val="DCDCDC"/>
           </a:solidFill>
           <a:ln>
             <a:noFill/>
@@ -8106,549 +9710,14 @@
           <a:p>
             <a:pPr algn="ctr"/>
             <a:r>
-              <a:rPr lang="ko-KR" altLang="en-US" sz="1000" b="1" dirty="0">
-                <a:solidFill>
-                  <a:srgbClr val="FFFFFF"/>
-                </a:solidFill>
-                <a:latin typeface="나눔스퀘어 ExtraBold"/>
-                <a:ea typeface="나눔스퀘어 ExtraBold"/>
-              </a:rPr>
-              <a:t>›</a:t>
-            </a:r>
-          </a:p>
-        </p:txBody>
-      </p:sp>
-      <p:sp>
-        <p:nvSpPr>
-          <p:cNvPr id="211" name="S211"/>
-          <p:cNvSpPr>
-            <a:spLocks noGrp="1"/>
-          </p:cNvSpPr>
-          <p:nvPr/>
-        </p:nvSpPr>
-        <p:spPr>
-          <a:xfrm>
-            <a:off x="4975440" y="2361440"/>
-            <a:ext cx="2241120" cy="260000"/>
-          </a:xfrm>
-          <a:prstGeom prst="rect">
-            <a:avLst/>
-          </a:prstGeom>
-          <a:noFill/>
-          <a:ln>
-            <a:noFill/>
-          </a:ln>
-        </p:spPr>
-        <p:txBody>
-          <a:bodyPr anchor="ctr" lIns="91440" rIns="91440" tIns="91440" bIns="91440"/>
-          <a:lstStyle/>
-          <a:p>
-            <a:pPr algn="ctr"/>
-            <a:r>
-              <a:rPr lang="ko-KR" altLang="en-US" sz="1100" b="1" dirty="0">
-                <a:solidFill>
-                  <a:srgbClr val="7F8C8D"/>
+              <a:rPr sz="1100" b="0" dirty="0">
+                <a:solidFill>
+                  <a:srgbClr val="212121"/>
                 </a:solidFill>
                 <a:latin typeface="Freesentation"/>
                 <a:ea typeface="Freesentation"/>
               </a:rPr>
-              <a:t>M4</a:t>
-            </a:r>
-          </a:p>
-        </p:txBody>
-      </p:sp>
-      <p:sp>
-        <p:nvSpPr>
-          <p:cNvPr id="212" name="S212"/>
-          <p:cNvSpPr>
-            <a:spLocks noGrp="1"/>
-          </p:cNvSpPr>
-          <p:nvPr/>
-        </p:nvSpPr>
-        <p:spPr>
-          <a:xfrm>
-            <a:off x="4975440" y="2621440"/>
-            <a:ext cx="2241120" cy="900000"/>
-          </a:xfrm>
-          <a:prstGeom prst="roundRect">
-            <a:avLst>
-              <a:gd name="adj" fmla="val 16667"/>
-            </a:avLst>
-          </a:prstGeom>
-          <a:solidFill>
-            <a:srgbClr val="E87722"/>
-          </a:solidFill>
-          <a:ln>
-            <a:noFill/>
-          </a:ln>
-        </p:spPr>
-        <p:txBody>
-          <a:bodyPr anchor="ctr" lIns="91440" rIns="91440" tIns="91440" bIns="91440"/>
-          <a:lstStyle/>
-          <a:p>
-            <a:pPr algn="ctr"/>
-            <a:r>
-              <a:rPr lang="ko-KR" altLang="en-US" sz="1600" b="1" dirty="0">
-                <a:solidFill>
-                  <a:srgbClr val="FFFFFF"/>
-                </a:solidFill>
-                <a:latin typeface="나눔스퀘어 ExtraBold"/>
-                <a:ea typeface="나눔스퀘어 ExtraBold"/>
-              </a:rPr>
-              <a:t>검증</a:t>
-            </a:r>
-          </a:p>
-        </p:txBody>
-      </p:sp>
-      <p:sp>
-        <p:nvSpPr>
-          <p:cNvPr id="213" name="S213"/>
-          <p:cNvSpPr>
-            <a:spLocks noGrp="1"/>
-          </p:cNvSpPr>
-          <p:nvPr/>
-        </p:nvSpPr>
-        <p:spPr>
-          <a:xfrm>
-            <a:off x="4975440" y="3539440"/>
-            <a:ext cx="2241120" cy="3227120"/>
-          </a:xfrm>
-          <a:prstGeom prst="rect">
-            <a:avLst/>
-          </a:prstGeom>
-          <a:solidFill>
-            <a:srgbClr val="F0F4F8"/>
-          </a:solidFill>
-          <a:ln w="12700">
-            <a:solidFill>
-              <a:srgbClr val="DDDDDD"/>
-            </a:solidFill>
-          </a:ln>
-        </p:spPr>
-        <p:txBody>
-          <a:bodyPr anchor="t" lIns="80000" rIns="80000" tIns="80000" bIns="80000"/>
-          <a:lstStyle/>
-          <a:p>
-            <a:pPr algn="ctr"/>
-            <a:r>
-              <a:rPr lang="ko-KR" altLang="en-US" sz="1200" b="0" dirty="0">
-                <a:solidFill>
-                  <a:srgbClr val="404040"/>
-                </a:solidFill>
-                <a:latin typeface="Freesentation"/>
-                <a:ea typeface="Freesentation"/>
-              </a:rPr>
-              <a:t>전체 스키마</a:t>
-            </a:r>
-          </a:p>
-          <a:p>
-            <a:pPr algn="ctr"/>
-            <a:r>
-              <a:rPr lang="ko-KR" altLang="en-US" sz="1200" b="0" dirty="0">
-                <a:solidFill>
-                  <a:srgbClr val="404040"/>
-                </a:solidFill>
-                <a:latin typeface="Freesentation"/>
-                <a:ea typeface="Freesentation"/>
-              </a:rPr>
-              <a:t>마이그레이션</a:t>
-            </a:r>
-          </a:p>
-          <a:p>
-            <a:pPr algn="ctr"/>
-            <a:r>
-              <a:rPr lang="ko-KR" altLang="en-US" sz="1200" b="0" dirty="0">
-                <a:solidFill>
-                  <a:srgbClr val="404040"/>
-                </a:solidFill>
-                <a:latin typeface="Freesentation"/>
-                <a:ea typeface="Freesentation"/>
-              </a:rPr>
-              <a:t>정합성 검증</a:t>
-            </a:r>
-          </a:p>
-        </p:txBody>
-      </p:sp>
-      <p:sp>
-        <p:nvSpPr>
-          <p:cNvPr id="214" name="S214"/>
-          <p:cNvSpPr>
-            <a:spLocks noGrp="1"/>
-          </p:cNvSpPr>
-          <p:nvPr/>
-        </p:nvSpPr>
-        <p:spPr>
-          <a:xfrm>
-            <a:off x="7216561" y="3011440"/>
-            <a:ext cx="17999" cy="120000"/>
-          </a:xfrm>
-          <a:prstGeom prst="rect">
-            <a:avLst/>
-          </a:prstGeom>
-          <a:solidFill>
-            <a:srgbClr val="1B3A5C"/>
-          </a:solidFill>
-          <a:ln>
-            <a:noFill/>
-          </a:ln>
-        </p:spPr>
-        <p:txBody>
-          <a:bodyPr anchor="ctr" lIns="91440" rIns="91440" tIns="91440" bIns="91440"/>
-          <a:lstStyle/>
-          <a:p>
-            <a:pPr algn="ctr"/>
-            <a:r>
-              <a:rPr lang="ko-KR" altLang="en-US" sz="1000" b="1" dirty="0">
-                <a:solidFill>
-                  <a:srgbClr val="FFFFFF"/>
-                </a:solidFill>
-                <a:latin typeface="나눔스퀘어 ExtraBold"/>
-                <a:ea typeface="나눔스퀘어 ExtraBold"/>
-              </a:rPr>
-              <a:t>›</a:t>
-            </a:r>
-          </a:p>
-        </p:txBody>
-      </p:sp>
-      <p:sp>
-        <p:nvSpPr>
-          <p:cNvPr id="215" name="S215"/>
-          <p:cNvSpPr>
-            <a:spLocks noGrp="1"/>
-          </p:cNvSpPr>
-          <p:nvPr/>
-        </p:nvSpPr>
-        <p:spPr>
-          <a:xfrm>
-            <a:off x="7234560" y="2361440"/>
-            <a:ext cx="2241120" cy="260000"/>
-          </a:xfrm>
-          <a:prstGeom prst="rect">
-            <a:avLst/>
-          </a:prstGeom>
-          <a:noFill/>
-          <a:ln>
-            <a:noFill/>
-          </a:ln>
-        </p:spPr>
-        <p:txBody>
-          <a:bodyPr anchor="ctr" lIns="91440" rIns="91440" tIns="91440" bIns="91440"/>
-          <a:lstStyle/>
-          <a:p>
-            <a:pPr algn="ctr"/>
-            <a:r>
-              <a:rPr lang="ko-KR" altLang="en-US" sz="1100" b="1" dirty="0">
-                <a:solidFill>
-                  <a:srgbClr val="7F8C8D"/>
-                </a:solidFill>
-                <a:latin typeface="Freesentation"/>
-                <a:ea typeface="Freesentation"/>
-              </a:rPr>
-              <a:t>M5</a:t>
-            </a:r>
-          </a:p>
-        </p:txBody>
-      </p:sp>
-      <p:sp>
-        <p:nvSpPr>
-          <p:cNvPr id="216" name="S216"/>
-          <p:cNvSpPr>
-            <a:spLocks noGrp="1"/>
-          </p:cNvSpPr>
-          <p:nvPr/>
-        </p:nvSpPr>
-        <p:spPr>
-          <a:xfrm>
-            <a:off x="7234560" y="2621440"/>
-            <a:ext cx="2241120" cy="900000"/>
-          </a:xfrm>
-          <a:prstGeom prst="roundRect">
-            <a:avLst>
-              <a:gd name="adj" fmla="val 16667"/>
-            </a:avLst>
-          </a:prstGeom>
-          <a:solidFill>
-            <a:srgbClr val="C0392B"/>
-          </a:solidFill>
-          <a:ln>
-            <a:noFill/>
-          </a:ln>
-        </p:spPr>
-        <p:txBody>
-          <a:bodyPr anchor="ctr" lIns="91440" rIns="91440" tIns="91440" bIns="91440"/>
-          <a:lstStyle/>
-          <a:p>
-            <a:pPr algn="ctr"/>
-            <a:r>
-              <a:rPr lang="ko-KR" altLang="en-US" sz="1600" b="1" dirty="0">
-                <a:solidFill>
-                  <a:srgbClr val="FFFFFF"/>
-                </a:solidFill>
-                <a:latin typeface="나눔스퀘어 ExtraBold"/>
-                <a:ea typeface="나눔스퀘어 ExtraBold"/>
-              </a:rPr>
-              <a:t>전환</a:t>
-            </a:r>
-          </a:p>
-        </p:txBody>
-      </p:sp>
-      <p:sp>
-        <p:nvSpPr>
-          <p:cNvPr id="217" name="S217"/>
-          <p:cNvSpPr>
-            <a:spLocks noGrp="1"/>
-          </p:cNvSpPr>
-          <p:nvPr/>
-        </p:nvSpPr>
-        <p:spPr>
-          <a:xfrm>
-            <a:off x="7234560" y="3539440"/>
-            <a:ext cx="2241120" cy="3227120"/>
-          </a:xfrm>
-          <a:prstGeom prst="rect">
-            <a:avLst/>
-          </a:prstGeom>
-          <a:solidFill>
-            <a:srgbClr val="F0F4F8"/>
-          </a:solidFill>
-          <a:ln w="12700">
-            <a:solidFill>
-              <a:srgbClr val="DDDDDD"/>
-            </a:solidFill>
-          </a:ln>
-        </p:spPr>
-        <p:txBody>
-          <a:bodyPr anchor="t" lIns="80000" rIns="80000" tIns="80000" bIns="80000"/>
-          <a:lstStyle/>
-          <a:p>
-            <a:pPr algn="ctr"/>
-            <a:r>
-              <a:rPr lang="ko-KR" altLang="en-US" sz="1200" b="0" dirty="0">
-                <a:solidFill>
-                  <a:srgbClr val="404040"/>
-                </a:solidFill>
-                <a:latin typeface="Freesentation"/>
-                <a:ea typeface="Freesentation"/>
-              </a:rPr>
-              <a:t>컷오버 실행</a:t>
-            </a:r>
-          </a:p>
-          <a:p>
-            <a:pPr algn="ctr"/>
-            <a:r>
-              <a:rPr lang="ko-KR" altLang="en-US" sz="1200" b="0" dirty="0">
-                <a:solidFill>
-                  <a:srgbClr val="404040"/>
-                </a:solidFill>
-                <a:latin typeface="Freesentation"/>
-                <a:ea typeface="Freesentation"/>
-              </a:rPr>
-              <a:t>모니터링 강화</a:t>
-            </a:r>
-          </a:p>
-          <a:p>
-            <a:pPr algn="ctr"/>
-            <a:r>
-              <a:rPr lang="ko-KR" altLang="en-US" sz="1200" b="0" dirty="0">
-                <a:solidFill>
-                  <a:srgbClr val="404040"/>
-                </a:solidFill>
-                <a:latin typeface="Freesentation"/>
-                <a:ea typeface="Freesentation"/>
-              </a:rPr>
-              <a:t>롤백 대기</a:t>
-            </a:r>
-          </a:p>
-        </p:txBody>
-      </p:sp>
-      <p:sp>
-        <p:nvSpPr>
-          <p:cNvPr id="218" name="S218"/>
-          <p:cNvSpPr>
-            <a:spLocks noGrp="1"/>
-          </p:cNvSpPr>
-          <p:nvPr/>
-        </p:nvSpPr>
-        <p:spPr>
-          <a:xfrm>
-            <a:off x="9475681" y="3011440"/>
-            <a:ext cx="17999" cy="120000"/>
-          </a:xfrm>
-          <a:prstGeom prst="rect">
-            <a:avLst/>
-          </a:prstGeom>
-          <a:solidFill>
-            <a:srgbClr val="1B3A5C"/>
-          </a:solidFill>
-          <a:ln>
-            <a:noFill/>
-          </a:ln>
-        </p:spPr>
-        <p:txBody>
-          <a:bodyPr anchor="ctr" lIns="91440" rIns="91440" tIns="91440" bIns="91440"/>
-          <a:lstStyle/>
-          <a:p>
-            <a:pPr algn="ctr"/>
-            <a:r>
-              <a:rPr lang="ko-KR" altLang="en-US" sz="1000" b="1" dirty="0">
-                <a:solidFill>
-                  <a:srgbClr val="FFFFFF"/>
-                </a:solidFill>
-                <a:latin typeface="나눔스퀘어 ExtraBold"/>
-                <a:ea typeface="나눔스퀘어 ExtraBold"/>
-              </a:rPr>
-              <a:t>›</a:t>
-            </a:r>
-          </a:p>
-        </p:txBody>
-      </p:sp>
-      <p:sp>
-        <p:nvSpPr>
-          <p:cNvPr id="219" name="S219"/>
-          <p:cNvSpPr>
-            <a:spLocks noGrp="1"/>
-          </p:cNvSpPr>
-          <p:nvPr/>
-        </p:nvSpPr>
-        <p:spPr>
-          <a:xfrm>
-            <a:off x="9493680" y="2361440"/>
-            <a:ext cx="2241120" cy="260000"/>
-          </a:xfrm>
-          <a:prstGeom prst="rect">
-            <a:avLst/>
-          </a:prstGeom>
-          <a:noFill/>
-          <a:ln>
-            <a:noFill/>
-          </a:ln>
-        </p:spPr>
-        <p:txBody>
-          <a:bodyPr anchor="ctr" lIns="91440" rIns="91440" tIns="91440" bIns="91440"/>
-          <a:lstStyle/>
-          <a:p>
-            <a:pPr algn="ctr"/>
-            <a:r>
-              <a:rPr lang="ko-KR" altLang="en-US" sz="1100" b="1" dirty="0">
-                <a:solidFill>
-                  <a:srgbClr val="7F8C8D"/>
-                </a:solidFill>
-                <a:latin typeface="Freesentation"/>
-                <a:ea typeface="Freesentation"/>
-              </a:rPr>
-              <a:t>M6</a:t>
-            </a:r>
-          </a:p>
-        </p:txBody>
-      </p:sp>
-      <p:sp>
-        <p:nvSpPr>
-          <p:cNvPr id="220" name="S220"/>
-          <p:cNvSpPr>
-            <a:spLocks noGrp="1"/>
-          </p:cNvSpPr>
-          <p:nvPr/>
-        </p:nvSpPr>
-        <p:spPr>
-          <a:xfrm>
-            <a:off x="9493680" y="2621440"/>
-            <a:ext cx="2241120" cy="900000"/>
-          </a:xfrm>
-          <a:prstGeom prst="roundRect">
-            <a:avLst>
-              <a:gd name="adj" fmla="val 16667"/>
-            </a:avLst>
-          </a:prstGeom>
-          <a:solidFill>
-            <a:srgbClr val="27AE60"/>
-          </a:solidFill>
-          <a:ln>
-            <a:noFill/>
-          </a:ln>
-        </p:spPr>
-        <p:txBody>
-          <a:bodyPr anchor="ctr" lIns="91440" rIns="91440" tIns="91440" bIns="91440"/>
-          <a:lstStyle/>
-          <a:p>
-            <a:pPr algn="ctr"/>
-            <a:r>
-              <a:rPr lang="ko-KR" altLang="en-US" sz="1600" b="1" dirty="0">
-                <a:solidFill>
-                  <a:srgbClr val="FFFFFF"/>
-                </a:solidFill>
-                <a:latin typeface="나눔스퀘어 ExtraBold"/>
-                <a:ea typeface="나눔스퀘어 ExtraBold"/>
-              </a:rPr>
-              <a:t>안정화</a:t>
-            </a:r>
-          </a:p>
-        </p:txBody>
-      </p:sp>
-      <p:sp>
-        <p:nvSpPr>
-          <p:cNvPr id="221" name="S221"/>
-          <p:cNvSpPr>
-            <a:spLocks noGrp="1"/>
-          </p:cNvSpPr>
-          <p:nvPr/>
-        </p:nvSpPr>
-        <p:spPr>
-          <a:xfrm>
-            <a:off x="9493680" y="3539440"/>
-            <a:ext cx="2241120" cy="3227120"/>
-          </a:xfrm>
-          <a:prstGeom prst="rect">
-            <a:avLst/>
-          </a:prstGeom>
-          <a:solidFill>
-            <a:srgbClr val="F0F4F8"/>
-          </a:solidFill>
-          <a:ln w="12700">
-            <a:solidFill>
-              <a:srgbClr val="DDDDDD"/>
-            </a:solidFill>
-          </a:ln>
-        </p:spPr>
-        <p:txBody>
-          <a:bodyPr anchor="t" lIns="80000" rIns="80000" tIns="80000" bIns="80000"/>
-          <a:lstStyle/>
-          <a:p>
-            <a:pPr algn="ctr"/>
-            <a:r>
-              <a:rPr lang="ko-KR" altLang="en-US" sz="1200" b="0" dirty="0">
-                <a:solidFill>
-                  <a:srgbClr val="404040"/>
-                </a:solidFill>
-                <a:latin typeface="Freesentation"/>
-                <a:ea typeface="Freesentation"/>
-              </a:rPr>
-              <a:t>운영 정상화</a:t>
-            </a:r>
-          </a:p>
-          <a:p>
-            <a:pPr algn="ctr"/>
-            <a:r>
-              <a:rPr lang="ko-KR" altLang="en-US" sz="1200" b="0" dirty="0">
-                <a:solidFill>
-                  <a:srgbClr val="404040"/>
-                </a:solidFill>
-                <a:latin typeface="Freesentation"/>
-                <a:ea typeface="Freesentation"/>
-              </a:rPr>
-              <a:t>온프레미스 철수</a:t>
-            </a:r>
-          </a:p>
-          <a:p>
-            <a:pPr algn="ctr"/>
-            <a:r>
-              <a:rPr lang="ko-KR" altLang="en-US" sz="1200" b="0" dirty="0">
-                <a:solidFill>
-                  <a:srgbClr val="404040"/>
-                </a:solidFill>
-                <a:latin typeface="Freesentation"/>
-                <a:ea typeface="Freesentation"/>
-              </a:rPr>
-              <a:t>DBA 전환 교육</a:t>
+              <a:t>운영 정상화 · 온프레미스 철수 · DBA 교육</a:t>
             </a:r>
           </a:p>
         </p:txBody>
@@ -8656,7 +9725,7 @@
     </p:spTree>
     <p:extLst>
       <p:ext uri="{BB962C8B-B14F-4D97-AF65-F5344CB8AC3E}">
-        <p14:creationId xmlns:p14="http://schemas.microsoft.com/office/powerpoint/2010/main" val="3432312161"/>
+        <p14:creationId xmlns:p14="http://schemas.microsoft.com/office/powerpoint/2010/main" val="2925569520"/>
       </p:ext>
     </p:extLst>
   </p:cSld>
@@ -8742,8 +9811,7 @@
                 <a:ea typeface="프리젠테이션 7 Bold" pitchFamily="2" charset="-127"/>
                 <a:cs typeface="Pretendard ExtraBold" panose="02000903000000020004" pitchFamily="2" charset="-127"/>
               </a:rPr>
-              <a:t>3-1.
-KPI</a:t>
+              <a:t>서브색상</a:t>
             </a:r>
             <a:r>
               <a:rPr lang="ko-KR" altLang="en-US" sz="2000" dirty="0">
@@ -8751,8 +9819,28 @@
                 <a:ea typeface="프리젠테이션 7 Bold" pitchFamily="2" charset="-127"/>
                 <a:cs typeface="Pretendard ExtraBold" panose="02000903000000020004" pitchFamily="2" charset="-127"/>
               </a:rPr>
-              <a:t/>
-            </a:r>
+              <a:t> </a:t>
+            </a:r>
+          </a:p>
+          <a:p>
+            <a:pPr>
+              <a:lnSpc>
+                <a:spcPct val="120000"/>
+              </a:lnSpc>
+            </a:pPr>
+            <a:r>
+              <a:rPr lang="ko-KR" altLang="en-US" sz="2000" dirty="0">
+                <a:latin typeface="프리젠테이션 7 Bold" pitchFamily="2" charset="-127"/>
+                <a:ea typeface="프리젠테이션 7 Bold" pitchFamily="2" charset="-127"/>
+                <a:cs typeface="Pretendard ExtraBold" panose="02000903000000020004" pitchFamily="2" charset="-127"/>
+              </a:rPr>
+              <a:t>적용 예시</a:t>
+            </a:r>
+            <a:endParaRPr lang="ko-KR" altLang="en-US" sz="2000" dirty="0">
+              <a:latin typeface="프리젠테이션 7 Bold" pitchFamily="2" charset="-127"/>
+              <a:ea typeface="프리젠테이션 7 Bold" pitchFamily="2" charset="-127"/>
+              <a:cs typeface="Pretendard ExtraBold" panose="02000903000000020004" pitchFamily="2" charset="-127"/>
+            </a:endParaRPr>
           </a:p>
         </p:txBody>
       </p:sp>
@@ -8802,7 +9890,7 @@
                 <a:ea typeface="프리젠테이션 5 Medium" pitchFamily="2" charset="-127"/>
                 <a:cs typeface="Pretendard" panose="02000503000000020004" pitchFamily="2" charset="-127"/>
               </a:rPr>
-              <a:t>핵심 성과 지표 — GoldenGate PoC 결과 기반 예상 성과</a:t>
+              <a:t>설명글을</a:t>
             </a:r>
             <a:r>
               <a:rPr lang="ko-KR" altLang="en-US" sz="1200" dirty="0">
@@ -8823,7 +9911,7 @@
                 <a:ea typeface="프리젠테이션 5 Medium" pitchFamily="2" charset="-127"/>
                 <a:cs typeface="Pretendard" panose="02000503000000020004" pitchFamily="2" charset="-127"/>
               </a:rPr>
-              <a:t/>
+              <a:t> 적어주세요</a:t>
             </a:r>
             <a:r>
               <a:rPr lang="en-US" altLang="ko-KR" sz="1200" b="1" dirty="0">
@@ -8844,7 +9932,7 @@
                 <a:ea typeface="프리젠테이션 5 Medium" pitchFamily="2" charset="-127"/>
                 <a:cs typeface="Pretendard" panose="02000503000000020004" pitchFamily="2" charset="-127"/>
               </a:rPr>
-              <a:t/>
+              <a:t>. </a:t>
             </a:r>
             <a:r>
               <a:rPr lang="ko-KR" altLang="en-US" sz="1200" b="1" dirty="0">
@@ -8862,7 +9950,7 @@
                 <a:ea typeface="프리젠테이션 7 Bold" pitchFamily="2" charset="-127"/>
                 <a:cs typeface="Pretendard" panose="02000503000000020004" pitchFamily="2" charset="-127"/>
               </a:rPr>
-              <a:t/>
+              <a:t>강조 텍스트</a:t>
             </a:r>
             <a:r>
               <a:rPr lang="en-US" altLang="ko-KR" sz="1200" b="1" dirty="0">
@@ -8880,7 +9968,7 @@
                 <a:ea typeface="프리젠테이션 7 Bold" pitchFamily="2" charset="-127"/>
                 <a:cs typeface="Pretendard" panose="02000503000000020004" pitchFamily="2" charset="-127"/>
               </a:rPr>
-              <a:t/>
+              <a:t>(</a:t>
             </a:r>
             <a:r>
               <a:rPr lang="ko-KR" altLang="en-US" sz="1200" b="1" dirty="0" err="1">
@@ -8898,7 +9986,7 @@
                 <a:ea typeface="프리젠테이션 7 Bold" pitchFamily="2" charset="-127"/>
                 <a:cs typeface="Pretendard" panose="02000503000000020004" pitchFamily="2" charset="-127"/>
               </a:rPr>
-              <a:t/>
+              <a:t>프리젠테이션</a:t>
             </a:r>
             <a:r>
               <a:rPr lang="ko-KR" altLang="en-US" sz="1200" b="1" dirty="0">
@@ -8916,7 +10004,7 @@
                 <a:ea typeface="프리젠테이션 7 Bold" pitchFamily="2" charset="-127"/>
                 <a:cs typeface="Pretendard" panose="02000503000000020004" pitchFamily="2" charset="-127"/>
               </a:rPr>
-              <a:t/>
+              <a:t> </a:t>
             </a:r>
             <a:r>
               <a:rPr lang="en-US" altLang="ko-KR" sz="1200" b="1" dirty="0">
@@ -8934,7 +10022,7 @@
                 <a:ea typeface="프리젠테이션 7 Bold" pitchFamily="2" charset="-127"/>
                 <a:cs typeface="Pretendard" panose="02000503000000020004" pitchFamily="2" charset="-127"/>
               </a:rPr>
-              <a:t/>
+              <a:t>7 Bold, </a:t>
             </a:r>
             <a:r>
               <a:rPr lang="ko-KR" altLang="en-US" sz="1200" b="1" dirty="0">
@@ -8952,7 +10040,7 @@
                 <a:ea typeface="프리젠테이션 7 Bold" pitchFamily="2" charset="-127"/>
                 <a:cs typeface="Pretendard" panose="02000503000000020004" pitchFamily="2" charset="-127"/>
               </a:rPr>
-              <a:t/>
+              <a:t>메인 컬러</a:t>
             </a:r>
             <a:r>
               <a:rPr lang="en-US" altLang="ko-KR" sz="1200" b="1" dirty="0" smtClean="0">
@@ -8970,8 +10058,219 @@
                 <a:ea typeface="프리젠테이션 7 Bold" pitchFamily="2" charset="-127"/>
                 <a:cs typeface="Pretendard" panose="02000503000000020004" pitchFamily="2" charset="-127"/>
               </a:rPr>
-              <a:t/>
-            </a:r>
+              <a:t>)</a:t>
+            </a:r>
+          </a:p>
+          <a:p>
+            <a:pPr latinLnBrk="0">
+              <a:lnSpc>
+                <a:spcPct val="150000"/>
+              </a:lnSpc>
+            </a:pPr>
+            <a:r>
+              <a:rPr lang="ko-KR" altLang="en-US" sz="1200" dirty="0" smtClean="0">
+                <a:ln>
+                  <a:solidFill>
+                    <a:schemeClr val="accent1">
+                      <a:alpha val="0"/>
+                    </a:schemeClr>
+                  </a:solidFill>
+                </a:ln>
+                <a:solidFill>
+                  <a:schemeClr val="tx1">
+                    <a:lumMod val="75000"/>
+                    <a:lumOff val="25000"/>
+                  </a:schemeClr>
+                </a:solidFill>
+                <a:latin typeface="프리젠테이션 5 Medium" pitchFamily="2" charset="-127"/>
+                <a:ea typeface="프리젠테이션 5 Medium" pitchFamily="2" charset="-127"/>
+                <a:cs typeface="Pretendard" panose="02000503000000020004" pitchFamily="2" charset="-127"/>
+              </a:rPr>
+              <a:t>폰트 </a:t>
+            </a:r>
+            <a:r>
+              <a:rPr lang="en-US" altLang="ko-KR" sz="1200" dirty="0" smtClean="0">
+                <a:ln>
+                  <a:solidFill>
+                    <a:schemeClr val="accent1">
+                      <a:alpha val="0"/>
+                    </a:schemeClr>
+                  </a:solidFill>
+                </a:ln>
+                <a:solidFill>
+                  <a:schemeClr val="tx1">
+                    <a:lumMod val="75000"/>
+                    <a:lumOff val="25000"/>
+                  </a:schemeClr>
+                </a:solidFill>
+                <a:latin typeface="프리젠테이션 5 Medium" pitchFamily="2" charset="-127"/>
+                <a:ea typeface="프리젠테이션 5 Medium" pitchFamily="2" charset="-127"/>
+                <a:cs typeface="Pretendard" panose="02000503000000020004" pitchFamily="2" charset="-127"/>
+              </a:rPr>
+              <a:t>: </a:t>
+            </a:r>
+            <a:r>
+              <a:rPr lang="ko-KR" altLang="en-US" sz="1200" dirty="0" err="1" smtClean="0">
+                <a:ln>
+                  <a:solidFill>
+                    <a:schemeClr val="accent1">
+                      <a:alpha val="0"/>
+                    </a:schemeClr>
+                  </a:solidFill>
+                </a:ln>
+                <a:solidFill>
+                  <a:schemeClr val="tx1">
+                    <a:lumMod val="75000"/>
+                    <a:lumOff val="25000"/>
+                  </a:schemeClr>
+                </a:solidFill>
+                <a:latin typeface="프리젠테이션 5 Medium" pitchFamily="2" charset="-127"/>
+                <a:ea typeface="프리젠테이션 5 Medium" pitchFamily="2" charset="-127"/>
+                <a:cs typeface="Pretendard" panose="02000503000000020004" pitchFamily="2" charset="-127"/>
+              </a:rPr>
+              <a:t>프리젠테이션</a:t>
+            </a:r>
+            <a:r>
+              <a:rPr lang="ko-KR" altLang="en-US" sz="1200" dirty="0" smtClean="0">
+                <a:ln>
+                  <a:solidFill>
+                    <a:schemeClr val="accent1">
+                      <a:alpha val="0"/>
+                    </a:schemeClr>
+                  </a:solidFill>
+                </a:ln>
+                <a:solidFill>
+                  <a:schemeClr val="tx1">
+                    <a:lumMod val="75000"/>
+                    <a:lumOff val="25000"/>
+                  </a:schemeClr>
+                </a:solidFill>
+                <a:latin typeface="프리젠테이션 5 Medium" pitchFamily="2" charset="-127"/>
+                <a:ea typeface="프리젠테이션 5 Medium" pitchFamily="2" charset="-127"/>
+                <a:cs typeface="Pretendard" panose="02000503000000020004" pitchFamily="2" charset="-127"/>
+              </a:rPr>
+              <a:t> </a:t>
+            </a:r>
+            <a:r>
+              <a:rPr lang="en-US" altLang="ko-KR" sz="1200" dirty="0" smtClean="0">
+                <a:ln>
+                  <a:solidFill>
+                    <a:schemeClr val="accent1">
+                      <a:alpha val="0"/>
+                    </a:schemeClr>
+                  </a:solidFill>
+                </a:ln>
+                <a:solidFill>
+                  <a:schemeClr val="tx1">
+                    <a:lumMod val="75000"/>
+                    <a:lumOff val="25000"/>
+                  </a:schemeClr>
+                </a:solidFill>
+                <a:latin typeface="프리젠테이션 5 Medium" pitchFamily="2" charset="-127"/>
+                <a:ea typeface="프리젠테이션 5 Medium" pitchFamily="2" charset="-127"/>
+                <a:cs typeface="Pretendard" panose="02000503000000020004" pitchFamily="2" charset="-127"/>
+              </a:rPr>
+              <a:t>5 Medium 12pt  </a:t>
+            </a:r>
+            <a:r>
+              <a:rPr lang="ko-KR" altLang="en-US" sz="1200" dirty="0" smtClean="0">
+                <a:ln>
+                  <a:solidFill>
+                    <a:schemeClr val="accent1">
+                      <a:alpha val="0"/>
+                    </a:schemeClr>
+                  </a:solidFill>
+                </a:ln>
+                <a:solidFill>
+                  <a:schemeClr val="tx1">
+                    <a:lumMod val="75000"/>
+                    <a:lumOff val="25000"/>
+                  </a:schemeClr>
+                </a:solidFill>
+                <a:latin typeface="프리젠테이션 5 Medium" pitchFamily="2" charset="-127"/>
+                <a:ea typeface="프리젠테이션 5 Medium" pitchFamily="2" charset="-127"/>
+                <a:cs typeface="Pretendard" panose="02000503000000020004" pitchFamily="2" charset="-127"/>
+              </a:rPr>
+              <a:t>최대 </a:t>
+            </a:r>
+            <a:r>
+              <a:rPr lang="en-US" altLang="ko-KR" sz="1200" dirty="0" smtClean="0">
+                <a:ln>
+                  <a:solidFill>
+                    <a:schemeClr val="accent1">
+                      <a:alpha val="0"/>
+                    </a:schemeClr>
+                  </a:solidFill>
+                </a:ln>
+                <a:solidFill>
+                  <a:schemeClr val="tx1">
+                    <a:lumMod val="75000"/>
+                    <a:lumOff val="25000"/>
+                  </a:schemeClr>
+                </a:solidFill>
+                <a:latin typeface="프리젠테이션 5 Medium" pitchFamily="2" charset="-127"/>
+                <a:ea typeface="프리젠테이션 5 Medium" pitchFamily="2" charset="-127"/>
+                <a:cs typeface="Pretendard" panose="02000503000000020004" pitchFamily="2" charset="-127"/>
+              </a:rPr>
+              <a:t>3</a:t>
+            </a:r>
+            <a:r>
+              <a:rPr lang="ko-KR" altLang="en-US" sz="1200" dirty="0" smtClean="0">
+                <a:ln>
+                  <a:solidFill>
+                    <a:schemeClr val="accent1">
+                      <a:alpha val="0"/>
+                    </a:schemeClr>
+                  </a:solidFill>
+                </a:ln>
+                <a:solidFill>
+                  <a:schemeClr val="tx1">
+                    <a:lumMod val="75000"/>
+                    <a:lumOff val="25000"/>
+                  </a:schemeClr>
+                </a:solidFill>
+                <a:latin typeface="프리젠테이션 5 Medium" pitchFamily="2" charset="-127"/>
+                <a:ea typeface="프리젠테이션 5 Medium" pitchFamily="2" charset="-127"/>
+                <a:cs typeface="Pretendard" panose="02000503000000020004" pitchFamily="2" charset="-127"/>
+              </a:rPr>
+              <a:t>줄까지 작성 가능합니다</a:t>
+            </a:r>
+            <a:r>
+              <a:rPr lang="en-US" altLang="ko-KR" sz="1200" dirty="0" smtClean="0">
+                <a:ln>
+                  <a:solidFill>
+                    <a:schemeClr val="accent1">
+                      <a:alpha val="0"/>
+                    </a:schemeClr>
+                  </a:solidFill>
+                </a:ln>
+                <a:solidFill>
+                  <a:schemeClr val="tx1">
+                    <a:lumMod val="75000"/>
+                    <a:lumOff val="25000"/>
+                  </a:schemeClr>
+                </a:solidFill>
+                <a:latin typeface="프리젠테이션 5 Medium" pitchFamily="2" charset="-127"/>
+                <a:ea typeface="프리젠테이션 5 Medium" pitchFamily="2" charset="-127"/>
+                <a:cs typeface="Pretendard" panose="02000503000000020004" pitchFamily="2" charset="-127"/>
+              </a:rPr>
+              <a:t>.</a:t>
+            </a:r>
+            <a:endParaRPr lang="en-US" altLang="ko-KR" sz="1200" dirty="0">
+              <a:ln>
+                <a:solidFill>
+                  <a:schemeClr val="accent1">
+                    <a:alpha val="0"/>
+                  </a:schemeClr>
+                </a:solidFill>
+              </a:ln>
+              <a:solidFill>
+                <a:srgbClr val="2765E1"/>
+              </a:solidFill>
+              <a:latin typeface="프리젠테이션 5 Medium" pitchFamily="2" charset="-127"/>
+              <a:ea typeface="프리젠테이션 5 Medium" pitchFamily="2" charset="-127"/>
+              <a:cs typeface="Pretendard" panose="02000503000000020004" pitchFamily="2" charset="-127"/>
+            </a:endParaRPr>
           </a:p>
         </p:txBody>
       </p:sp>
@@ -8985,8 +10284,8 @@
         </p:nvSpPr>
         <p:spPr>
           <a:xfrm>
-            <a:off x="457200" y="1750000"/>
-            <a:ext cx="11277600" cy="280000"/>
+            <a:off x="457200" y="1600200"/>
+            <a:ext cx="11277600" cy="320040"/>
           </a:xfrm>
           <a:prstGeom prst="rect">
             <a:avLst/>
@@ -8997,14 +10296,14 @@
           </a:ln>
         </p:spPr>
         <p:txBody>
-          <a:bodyPr anchor="ctr" lIns="91440" rIns="91440" tIns="91440" bIns="91440"/>
+          <a:bodyPr anchor="ctr" lIns="0" rIns="0" tIns="0" bIns="0"/>
           <a:lstStyle/>
           <a:p>
             <a:pPr algn="l"/>
             <a:r>
-              <a:rPr lang="ko-KR" altLang="en-US" sz="1600" b="1" dirty="0">
-                <a:solidFill>
-                  <a:srgbClr val="1B3A5C"/>
+              <a:rPr sz="1600" b="1" dirty="0">
+                <a:solidFill>
+                  <a:srgbClr val="0043DA"/>
                 </a:solidFill>
                 <a:latin typeface="Freesentation"/>
                 <a:ea typeface="Freesentation"/>
@@ -9024,8 +10323,8 @@
         </p:nvSpPr>
         <p:spPr>
           <a:xfrm>
-            <a:off x="457200" y="2040000"/>
-            <a:ext cx="11277600" cy="230000"/>
+            <a:off x="457200" y="1965960"/>
+            <a:ext cx="11277600" cy="274320"/>
           </a:xfrm>
           <a:prstGeom prst="rect">
             <a:avLst/>
@@ -9036,19 +10335,19 @@
           </a:ln>
         </p:spPr>
         <p:txBody>
-          <a:bodyPr anchor="ctr" lIns="91440" rIns="91440" tIns="91440" bIns="91440"/>
+          <a:bodyPr anchor="ctr" lIns="0" rIns="0" tIns="0" bIns="0"/>
           <a:lstStyle/>
           <a:p>
             <a:pPr algn="l"/>
             <a:r>
-              <a:rPr lang="ko-KR" altLang="en-US" sz="1200" b="0" dirty="0">
-                <a:solidFill>
-                  <a:srgbClr val="7F8C8D"/>
+              <a:rPr sz="1300" b="0" dirty="0">
+                <a:solidFill>
+                  <a:srgbClr val="212121"/>
                 </a:solidFill>
                 <a:latin typeface="Freesentation"/>
                 <a:ea typeface="Freesentation"/>
               </a:rPr>
-              <a:t>GoldenGate PoC 결과 기반 예상 성과 — 동일 트래픽 10K RPS 기준 측정</a:t>
+              <a:t>GoldenGate PoC 결과 기반 예상 성과 — 동일 트래픽 10K RPS 기준</a:t>
             </a:r>
           </a:p>
         </p:txBody>
@@ -9063,8 +10362,8 @@
         </p:nvSpPr>
         <p:spPr>
           <a:xfrm>
-            <a:off x="457200" y="2361440"/>
-            <a:ext cx="2241120" cy="4405120"/>
+            <a:off x="457200" y="2423160"/>
+            <a:ext cx="3566400" cy="3291840"/>
           </a:xfrm>
           <a:prstGeom prst="roundRect">
             <a:avLst>
@@ -9072,11 +10371,11 @@
             </a:avLst>
           </a:prstGeom>
           <a:solidFill>
-            <a:srgbClr val="F0F4F8"/>
+            <a:srgbClr val="F8F9FA"/>
           </a:solidFill>
           <a:ln w="12700">
             <a:solidFill>
-              <a:srgbClr val="CCCCCC"/>
+              <a:srgbClr val="0043DA"/>
             </a:solidFill>
           </a:ln>
         </p:spPr>
@@ -9096,14 +10395,14 @@
         </p:nvSpPr>
         <p:spPr>
           <a:xfrm>
-            <a:off x="457200" y="2361440"/>
-            <a:ext cx="2241120" cy="180000"/>
+            <a:off x="457200" y="2423160"/>
+            <a:ext cx="3566400" cy="182880"/>
           </a:xfrm>
           <a:prstGeom prst="rect">
             <a:avLst/>
           </a:prstGeom>
           <a:solidFill>
-            <a:srgbClr val="1B3A5C"/>
+            <a:srgbClr val="0043DA"/>
           </a:solidFill>
           <a:ln>
             <a:noFill/>
@@ -9125,8 +10424,8 @@
         </p:nvSpPr>
         <p:spPr>
           <a:xfrm>
-            <a:off x="457200" y="2561440"/>
-            <a:ext cx="2241120" cy="350000"/>
+            <a:off x="457200" y="2697480"/>
+            <a:ext cx="3566400" cy="457200"/>
           </a:xfrm>
           <a:prstGeom prst="rect">
             <a:avLst/>
@@ -9137,19 +10436,19 @@
           </a:ln>
         </p:spPr>
         <p:txBody>
-          <a:bodyPr anchor="ctr" lIns="91440" rIns="91440" tIns="91440" bIns="91440"/>
+          <a:bodyPr anchor="ctr" lIns="60000" rIns="60000" tIns="60000" bIns="60000"/>
           <a:lstStyle/>
           <a:p>
             <a:pPr algn="ctr"/>
             <a:r>
-              <a:rPr lang="ko-KR" altLang="en-US" sz="1200" b="0" dirty="0">
-                <a:solidFill>
-                  <a:srgbClr val="7F8C8D"/>
-                </a:solidFill>
-                <a:latin typeface="Freesentation"/>
-                <a:ea typeface="Freesentation"/>
-              </a:rPr>
-              <a:t>복제 지연</a:t>
+              <a:rPr sz="2800" b="1" dirty="0">
+                <a:solidFill>
+                  <a:srgbClr val="0043DA"/>
+                </a:solidFill>
+                <a:latin typeface="프리젠테이션 7"/>
+                <a:ea typeface="프리젠테이션 7"/>
+              </a:rPr>
+              <a:t>▼  40%</a:t>
             </a:r>
           </a:p>
         </p:txBody>
@@ -9164,8 +10463,8 @@
         </p:nvSpPr>
         <p:spPr>
           <a:xfrm>
-            <a:off x="457200" y="2921440"/>
-            <a:ext cx="2241120" cy="700000"/>
+            <a:off x="457200" y="3154680"/>
+            <a:ext cx="3566400" cy="274320"/>
           </a:xfrm>
           <a:prstGeom prst="rect">
             <a:avLst/>
@@ -9176,19 +10475,19 @@
           </a:ln>
         </p:spPr>
         <p:txBody>
-          <a:bodyPr anchor="ctr" lIns="91440" rIns="91440" tIns="91440" bIns="91440"/>
+          <a:bodyPr anchor="ctr" lIns="60000" rIns="60000" tIns="60000" bIns="60000"/>
           <a:lstStyle/>
           <a:p>
             <a:pPr algn="ctr"/>
             <a:r>
-              <a:rPr lang="ko-KR" altLang="en-US" sz="3200" b="1" dirty="0">
-                <a:solidFill>
-                  <a:srgbClr val="1B3A5C"/>
-                </a:solidFill>
-                <a:latin typeface="나눔스퀘어 ExtraBold"/>
-                <a:ea typeface="나눔스퀘어 ExtraBold"/>
-              </a:rPr>
-              <a:t>&lt; 1초</a:t>
+              <a:rPr sz="1400" b="1" dirty="0">
+                <a:solidFill>
+                  <a:srgbClr val="212121"/>
+                </a:solidFill>
+                <a:latin typeface="프리젠테이션 7"/>
+                <a:ea typeface="프리젠테이션 7"/>
+              </a:rPr>
+              <a:t>비용 절감</a:t>
             </a:r>
           </a:p>
         </p:txBody>
@@ -9203,8 +10502,8 @@
         </p:nvSpPr>
         <p:spPr>
           <a:xfrm>
-            <a:off x="457200" y="3631440"/>
-            <a:ext cx="2241120" cy="3075120"/>
+            <a:off x="457200" y="3520440"/>
+            <a:ext cx="3566400" cy="274320"/>
           </a:xfrm>
           <a:prstGeom prst="rect">
             <a:avLst/>
@@ -9215,32 +10514,19 @@
           </a:ln>
         </p:spPr>
         <p:txBody>
-          <a:bodyPr anchor="ctr" lIns="91440" rIns="91440" tIns="91440" bIns="91440"/>
+          <a:bodyPr anchor="ctr" lIns="60000" rIns="60000" tIns="60000" bIns="60000"/>
           <a:lstStyle/>
           <a:p>
             <a:pPr algn="ctr"/>
             <a:r>
-              <a:rPr lang="ko-KR" altLang="en-US" sz="1100" b="0" dirty="0">
-                <a:solidFill>
-                  <a:srgbClr val="7F8C8D"/>
+              <a:rPr sz="1200" b="0" dirty="0">
+                <a:solidFill>
+                  <a:srgbClr val="505050"/>
                 </a:solidFill>
                 <a:latin typeface="Freesentation"/>
                 <a:ea typeface="Freesentation"/>
               </a:rPr>
-              <a:t>LAN 기준</a:t>
-            </a:r>
-          </a:p>
-          <a:p>
-            <a:pPr algn="ctr"/>
-            <a:r>
-              <a:rPr lang="ko-KR" altLang="en-US" sz="1100" b="0" dirty="0">
-                <a:solidFill>
-                  <a:srgbClr val="7F8C8D"/>
-                </a:solidFill>
-                <a:latin typeface="Freesentation"/>
-                <a:ea typeface="Freesentation"/>
-              </a:rPr>
-              <a:t>실시간 CDC</a:t>
+              <a:t>라이선스 + 인프라</a:t>
             </a:r>
           </a:p>
         </p:txBody>
@@ -9255,8 +10541,154 @@
         </p:nvSpPr>
         <p:spPr>
           <a:xfrm>
-            <a:off x="2716320" y="2361440"/>
-            <a:ext cx="2241120" cy="4405120"/>
+            <a:off x="731520" y="4069080"/>
+            <a:ext cx="3017760" cy="9000"/>
+          </a:xfrm>
+          <a:prstGeom prst="rect">
+            <a:avLst/>
+          </a:prstGeom>
+          <a:solidFill>
+            <a:srgbClr val="DCDCDC"/>
+          </a:solidFill>
+          <a:ln>
+            <a:noFill/>
+          </a:ln>
+        </p:spPr>
+        <p:txBody>
+          <a:bodyPr anchor="ctr" lIns="91440" rIns="91440" tIns="91440" bIns="91440"/>
+          <a:lstStyle/>
+          <a:p/>
+        </p:txBody>
+      </p:sp>
+      <p:sp>
+        <p:nvSpPr>
+          <p:cNvPr id="209" name="S209"/>
+          <p:cNvSpPr>
+            <a:spLocks noGrp="1"/>
+          </p:cNvSpPr>
+          <p:nvPr/>
+        </p:nvSpPr>
+        <p:spPr>
+          <a:xfrm>
+            <a:off x="457200" y="4160520"/>
+            <a:ext cx="3566400" cy="274320"/>
+          </a:xfrm>
+          <a:prstGeom prst="rect">
+            <a:avLst/>
+          </a:prstGeom>
+          <a:noFill/>
+          <a:ln>
+            <a:noFill/>
+          </a:ln>
+        </p:spPr>
+        <p:txBody>
+          <a:bodyPr anchor="ctr" lIns="60000" rIns="60000" tIns="60000" bIns="60000"/>
+          <a:lstStyle/>
+          <a:p>
+            <a:pPr algn="ctr"/>
+            <a:r>
+              <a:rPr sz="1100" b="0" dirty="0">
+                <a:solidFill>
+                  <a:srgbClr val="212121"/>
+                </a:solidFill>
+                <a:latin typeface="Freesentation"/>
+                <a:ea typeface="Freesentation"/>
+              </a:rPr>
+              <a:t>온프레미스 Oracle 대비 3년 TCO</a:t>
+            </a:r>
+          </a:p>
+        </p:txBody>
+      </p:sp>
+      <p:sp>
+        <p:nvSpPr>
+          <p:cNvPr id="210" name="S210"/>
+          <p:cNvSpPr>
+            <a:spLocks noGrp="1"/>
+          </p:cNvSpPr>
+          <p:nvPr/>
+        </p:nvSpPr>
+        <p:spPr>
+          <a:xfrm>
+            <a:off x="457200" y="4434840"/>
+            <a:ext cx="3566400" cy="274320"/>
+          </a:xfrm>
+          <a:prstGeom prst="rect">
+            <a:avLst/>
+          </a:prstGeom>
+          <a:noFill/>
+          <a:ln>
+            <a:noFill/>
+          </a:ln>
+        </p:spPr>
+        <p:txBody>
+          <a:bodyPr anchor="ctr" lIns="60000" rIns="60000" tIns="60000" bIns="60000"/>
+          <a:lstStyle/>
+          <a:p>
+            <a:pPr algn="ctr"/>
+            <a:r>
+              <a:rPr sz="1100" b="0" dirty="0">
+                <a:solidFill>
+                  <a:srgbClr val="212121"/>
+                </a:solidFill>
+                <a:latin typeface="Freesentation"/>
+                <a:ea typeface="Freesentation"/>
+              </a:rPr>
+              <a:t>Pay-as-you-go 전환 효과</a:t>
+            </a:r>
+          </a:p>
+        </p:txBody>
+      </p:sp>
+      <p:sp>
+        <p:nvSpPr>
+          <p:cNvPr id="211" name="S211"/>
+          <p:cNvSpPr>
+            <a:spLocks noGrp="1"/>
+          </p:cNvSpPr>
+          <p:nvPr/>
+        </p:nvSpPr>
+        <p:spPr>
+          <a:xfrm>
+            <a:off x="457200" y="4983480"/>
+            <a:ext cx="3566400" cy="274320"/>
+          </a:xfrm>
+          <a:prstGeom prst="rect">
+            <a:avLst/>
+          </a:prstGeom>
+          <a:noFill/>
+          <a:ln>
+            <a:noFill/>
+          </a:ln>
+        </p:spPr>
+        <p:txBody>
+          <a:bodyPr anchor="ctr" lIns="60000" rIns="60000" tIns="60000" bIns="60000"/>
+          <a:lstStyle/>
+          <a:p>
+            <a:pPr algn="ctr"/>
+            <a:r>
+              <a:rPr sz="1000" b="0" dirty="0">
+                <a:solidFill>
+                  <a:srgbClr val="505050"/>
+                </a:solidFill>
+                <a:latin typeface="Freesentation"/>
+                <a:ea typeface="Freesentation"/>
+              </a:rPr>
+              <a:t>(2026 PoC 기준)</a:t>
+            </a:r>
+          </a:p>
+        </p:txBody>
+      </p:sp>
+      <p:sp>
+        <p:nvSpPr>
+          <p:cNvPr id="212" name="S212"/>
+          <p:cNvSpPr>
+            <a:spLocks noGrp="1"/>
+          </p:cNvSpPr>
+          <p:nvPr/>
+        </p:nvSpPr>
+        <p:spPr>
+          <a:xfrm>
+            <a:off x="4312800" y="2423160"/>
+            <a:ext cx="3566400" cy="3291840"/>
           </a:xfrm>
           <a:prstGeom prst="roundRect">
             <a:avLst>
@@ -9264,11 +10696,11 @@
             </a:avLst>
           </a:prstGeom>
           <a:solidFill>
-            <a:srgbClr val="F0F4F8"/>
+            <a:srgbClr val="F8F9FA"/>
           </a:solidFill>
           <a:ln w="12700">
             <a:solidFill>
-              <a:srgbClr val="CCCCCC"/>
+              <a:srgbClr val="0043DA"/>
             </a:solidFill>
           </a:ln>
         </p:spPr>
@@ -9280,7 +10712,7 @@
       </p:sp>
       <p:sp>
         <p:nvSpPr>
-          <p:cNvPr id="209" name="S209"/>
+          <p:cNvPr id="213" name="S213"/>
           <p:cNvSpPr>
             <a:spLocks noGrp="1"/>
           </p:cNvSpPr>
@@ -9288,14 +10720,14 @@
         </p:nvSpPr>
         <p:spPr>
           <a:xfrm>
-            <a:off x="2716320" y="2361440"/>
-            <a:ext cx="2241120" cy="180000"/>
+            <a:off x="4312800" y="2423160"/>
+            <a:ext cx="3566400" cy="182880"/>
           </a:xfrm>
           <a:prstGeom prst="rect">
             <a:avLst/>
           </a:prstGeom>
           <a:solidFill>
-            <a:srgbClr val="2E6DA4"/>
+            <a:srgbClr val="0043DA"/>
           </a:solidFill>
           <a:ln>
             <a:noFill/>
@@ -9309,7 +10741,7 @@
       </p:sp>
       <p:sp>
         <p:nvSpPr>
-          <p:cNvPr id="210" name="S210"/>
+          <p:cNvPr id="214" name="S214"/>
           <p:cNvSpPr>
             <a:spLocks noGrp="1"/>
           </p:cNvSpPr>
@@ -9317,8 +10749,8 @@
         </p:nvSpPr>
         <p:spPr>
           <a:xfrm>
-            <a:off x="2716320" y="2561440"/>
-            <a:ext cx="2241120" cy="350000"/>
+            <a:off x="4312800" y="2697480"/>
+            <a:ext cx="3566400" cy="457200"/>
           </a:xfrm>
           <a:prstGeom prst="rect">
             <a:avLst/>
@@ -9329,26 +10761,26 @@
           </a:ln>
         </p:spPr>
         <p:txBody>
-          <a:bodyPr anchor="ctr" lIns="91440" rIns="91440" tIns="91440" bIns="91440"/>
+          <a:bodyPr anchor="ctr" lIns="60000" rIns="60000" tIns="60000" bIns="60000"/>
           <a:lstStyle/>
           <a:p>
             <a:pPr algn="ctr"/>
             <a:r>
-              <a:rPr lang="ko-KR" altLang="en-US" sz="1200" b="0" dirty="0">
-                <a:solidFill>
-                  <a:srgbClr val="7F8C8D"/>
-                </a:solidFill>
-                <a:latin typeface="Freesentation"/>
-                <a:ea typeface="Freesentation"/>
-              </a:rPr>
-              <a:t>처리량</a:t>
-            </a:r>
-          </a:p>
-        </p:txBody>
-      </p:sp>
-      <p:sp>
-        <p:nvSpPr>
-          <p:cNvPr id="211" name="S211"/>
+              <a:rPr sz="2800" b="1" dirty="0">
+                <a:solidFill>
+                  <a:srgbClr val="0043DA"/>
+                </a:solidFill>
+                <a:latin typeface="프리젠테이션 7"/>
+                <a:ea typeface="프리젠테이션 7"/>
+              </a:rPr>
+              <a:t>▼  &lt; 5분</a:t>
+            </a:r>
+          </a:p>
+        </p:txBody>
+      </p:sp>
+      <p:sp>
+        <p:nvSpPr>
+          <p:cNvPr id="215" name="S215"/>
           <p:cNvSpPr>
             <a:spLocks noGrp="1"/>
           </p:cNvSpPr>
@@ -9356,8 +10788,8 @@
         </p:nvSpPr>
         <p:spPr>
           <a:xfrm>
-            <a:off x="2716320" y="2921440"/>
-            <a:ext cx="2241120" cy="700000"/>
+            <a:off x="4312800" y="3154680"/>
+            <a:ext cx="3566400" cy="274320"/>
           </a:xfrm>
           <a:prstGeom prst="rect">
             <a:avLst/>
@@ -9368,26 +10800,26 @@
           </a:ln>
         </p:spPr>
         <p:txBody>
-          <a:bodyPr anchor="ctr" lIns="91440" rIns="91440" tIns="91440" bIns="91440"/>
+          <a:bodyPr anchor="ctr" lIns="60000" rIns="60000" tIns="60000" bIns="60000"/>
           <a:lstStyle/>
           <a:p>
             <a:pPr algn="ctr"/>
             <a:r>
-              <a:rPr lang="ko-KR" altLang="en-US" sz="3200" b="1" dirty="0">
-                <a:solidFill>
-                  <a:srgbClr val="2E6DA4"/>
-                </a:solidFill>
-                <a:latin typeface="나눔스퀘어 ExtraBold"/>
-                <a:ea typeface="나눔스퀘어 ExtraBold"/>
-              </a:rPr>
-              <a:t>100K</a:t>
-            </a:r>
-          </a:p>
-        </p:txBody>
-      </p:sp>
-      <p:sp>
-        <p:nvSpPr>
-          <p:cNvPr id="212" name="S212"/>
+              <a:rPr sz="1400" b="1" dirty="0">
+                <a:solidFill>
+                  <a:srgbClr val="212121"/>
+                </a:solidFill>
+                <a:latin typeface="프리젠테이션 7"/>
+                <a:ea typeface="프리젠테이션 7"/>
+              </a:rPr>
+              <a:t>RPO</a:t>
+            </a:r>
+          </a:p>
+        </p:txBody>
+      </p:sp>
+      <p:sp>
+        <p:nvSpPr>
+          <p:cNvPr id="216" name="S216"/>
           <p:cNvSpPr>
             <a:spLocks noGrp="1"/>
           </p:cNvSpPr>
@@ -9395,8 +10827,8 @@
         </p:nvSpPr>
         <p:spPr>
           <a:xfrm>
-            <a:off x="2716320" y="3631440"/>
-            <a:ext cx="2241120" cy="3075120"/>
+            <a:off x="4312800" y="3520440"/>
+            <a:ext cx="3566400" cy="274320"/>
           </a:xfrm>
           <a:prstGeom prst="rect">
             <a:avLst/>
@@ -9407,39 +10839,26 @@
           </a:ln>
         </p:spPr>
         <p:txBody>
-          <a:bodyPr anchor="ctr" lIns="91440" rIns="91440" tIns="91440" bIns="91440"/>
+          <a:bodyPr anchor="ctr" lIns="60000" rIns="60000" tIns="60000" bIns="60000"/>
           <a:lstStyle/>
           <a:p>
             <a:pPr algn="ctr"/>
             <a:r>
-              <a:rPr lang="ko-KR" altLang="en-US" sz="1100" b="0" dirty="0">
-                <a:solidFill>
-                  <a:srgbClr val="7F8C8D"/>
+              <a:rPr sz="1200" b="0" dirty="0">
+                <a:solidFill>
+                  <a:srgbClr val="505050"/>
                 </a:solidFill>
                 <a:latin typeface="Freesentation"/>
                 <a:ea typeface="Freesentation"/>
               </a:rPr>
-              <a:t>TPS</a:t>
-            </a:r>
-          </a:p>
-          <a:p>
-            <a:pPr algn="ctr"/>
-            <a:r>
-              <a:rPr lang="ko-KR" altLang="en-US" sz="1100" b="0" dirty="0">
-                <a:solidFill>
-                  <a:srgbClr val="7F8C8D"/>
-                </a:solidFill>
-                <a:latin typeface="Freesentation"/>
-                <a:ea typeface="Freesentation"/>
-              </a:rPr>
-              <a:t>단일 Replicat</a:t>
-            </a:r>
-          </a:p>
-        </p:txBody>
-      </p:sp>
-      <p:sp>
-        <p:nvSpPr>
-          <p:cNvPr id="213" name="S213"/>
+              <a:t>자동 백업 복구 목표</a:t>
+            </a:r>
+          </a:p>
+        </p:txBody>
+      </p:sp>
+      <p:sp>
+        <p:nvSpPr>
+          <p:cNvPr id="217" name="S217"/>
           <p:cNvSpPr>
             <a:spLocks noGrp="1"/>
           </p:cNvSpPr>
@@ -9447,8 +10866,154 @@
         </p:nvSpPr>
         <p:spPr>
           <a:xfrm>
-            <a:off x="4975440" y="2361440"/>
-            <a:ext cx="2241120" cy="4405120"/>
+            <a:off x="4587120" y="4069080"/>
+            <a:ext cx="3017760" cy="9000"/>
+          </a:xfrm>
+          <a:prstGeom prst="rect">
+            <a:avLst/>
+          </a:prstGeom>
+          <a:solidFill>
+            <a:srgbClr val="DCDCDC"/>
+          </a:solidFill>
+          <a:ln>
+            <a:noFill/>
+          </a:ln>
+        </p:spPr>
+        <p:txBody>
+          <a:bodyPr anchor="ctr" lIns="91440" rIns="91440" tIns="91440" bIns="91440"/>
+          <a:lstStyle/>
+          <a:p/>
+        </p:txBody>
+      </p:sp>
+      <p:sp>
+        <p:nvSpPr>
+          <p:cNvPr id="218" name="S218"/>
+          <p:cNvSpPr>
+            <a:spLocks noGrp="1"/>
+          </p:cNvSpPr>
+          <p:nvPr/>
+        </p:nvSpPr>
+        <p:spPr>
+          <a:xfrm>
+            <a:off x="4312800" y="4160520"/>
+            <a:ext cx="3566400" cy="274320"/>
+          </a:xfrm>
+          <a:prstGeom prst="rect">
+            <a:avLst/>
+          </a:prstGeom>
+          <a:noFill/>
+          <a:ln>
+            <a:noFill/>
+          </a:ln>
+        </p:spPr>
+        <p:txBody>
+          <a:bodyPr anchor="ctr" lIns="60000" rIns="60000" tIns="60000" bIns="60000"/>
+          <a:lstStyle/>
+          <a:p>
+            <a:pPr algn="ctr"/>
+            <a:r>
+              <a:rPr sz="1100" b="0" dirty="0">
+                <a:solidFill>
+                  <a:srgbClr val="212121"/>
+                </a:solidFill>
+                <a:latin typeface="Freesentation"/>
+                <a:ea typeface="Freesentation"/>
+              </a:rPr>
+              <a:t>RDS Multi-AZ 자동 백업 + PITR</a:t>
+            </a:r>
+          </a:p>
+        </p:txBody>
+      </p:sp>
+      <p:sp>
+        <p:nvSpPr>
+          <p:cNvPr id="219" name="S219"/>
+          <p:cNvSpPr>
+            <a:spLocks noGrp="1"/>
+          </p:cNvSpPr>
+          <p:nvPr/>
+        </p:nvSpPr>
+        <p:spPr>
+          <a:xfrm>
+            <a:off x="4312800" y="4434840"/>
+            <a:ext cx="3566400" cy="274320"/>
+          </a:xfrm>
+          <a:prstGeom prst="rect">
+            <a:avLst/>
+          </a:prstGeom>
+          <a:noFill/>
+          <a:ln>
+            <a:noFill/>
+          </a:ln>
+        </p:spPr>
+        <p:txBody>
+          <a:bodyPr anchor="ctr" lIns="60000" rIns="60000" tIns="60000" bIns="60000"/>
+          <a:lstStyle/>
+          <a:p>
+            <a:pPr algn="ctr"/>
+            <a:r>
+              <a:rPr sz="1100" b="0" dirty="0">
+                <a:solidFill>
+                  <a:srgbClr val="212121"/>
+                </a:solidFill>
+                <a:latin typeface="Freesentation"/>
+                <a:ea typeface="Freesentation"/>
+              </a:rPr>
+              <a:t>24시간+ → 5분 이내로 단축</a:t>
+            </a:r>
+          </a:p>
+        </p:txBody>
+      </p:sp>
+      <p:sp>
+        <p:nvSpPr>
+          <p:cNvPr id="220" name="S220"/>
+          <p:cNvSpPr>
+            <a:spLocks noGrp="1"/>
+          </p:cNvSpPr>
+          <p:nvPr/>
+        </p:nvSpPr>
+        <p:spPr>
+          <a:xfrm>
+            <a:off x="4312800" y="4983480"/>
+            <a:ext cx="3566400" cy="274320"/>
+          </a:xfrm>
+          <a:prstGeom prst="rect">
+            <a:avLst/>
+          </a:prstGeom>
+          <a:noFill/>
+          <a:ln>
+            <a:noFill/>
+          </a:ln>
+        </p:spPr>
+        <p:txBody>
+          <a:bodyPr anchor="ctr" lIns="60000" rIns="60000" tIns="60000" bIns="60000"/>
+          <a:lstStyle/>
+          <a:p>
+            <a:pPr algn="ctr"/>
+            <a:r>
+              <a:rPr sz="1000" b="0" dirty="0">
+                <a:solidFill>
+                  <a:srgbClr val="505050"/>
+                </a:solidFill>
+                <a:latin typeface="Freesentation"/>
+                <a:ea typeface="Freesentation"/>
+              </a:rPr>
+              <a:t>(Multi-AZ SLA 기준)</a:t>
+            </a:r>
+          </a:p>
+        </p:txBody>
+      </p:sp>
+      <p:sp>
+        <p:nvSpPr>
+          <p:cNvPr id="221" name="S221"/>
+          <p:cNvSpPr>
+            <a:spLocks noGrp="1"/>
+          </p:cNvSpPr>
+          <p:nvPr/>
+        </p:nvSpPr>
+        <p:spPr>
+          <a:xfrm>
+            <a:off x="8168400" y="2423160"/>
+            <a:ext cx="3566400" cy="3291840"/>
           </a:xfrm>
           <a:prstGeom prst="roundRect">
             <a:avLst>
@@ -9456,11 +11021,11 @@
             </a:avLst>
           </a:prstGeom>
           <a:solidFill>
-            <a:srgbClr val="F0F4F8"/>
+            <a:srgbClr val="F8F9FA"/>
           </a:solidFill>
           <a:ln w="12700">
             <a:solidFill>
-              <a:srgbClr val="CCCCCC"/>
+              <a:srgbClr val="0043DA"/>
             </a:solidFill>
           </a:ln>
         </p:spPr>
@@ -9472,7 +11037,7 @@
       </p:sp>
       <p:sp>
         <p:nvSpPr>
-          <p:cNvPr id="214" name="S214"/>
+          <p:cNvPr id="222" name="S222"/>
           <p:cNvSpPr>
             <a:spLocks noGrp="1"/>
           </p:cNvSpPr>
@@ -9480,14 +11045,14 @@
         </p:nvSpPr>
         <p:spPr>
           <a:xfrm>
-            <a:off x="4975440" y="2361440"/>
-            <a:ext cx="2241120" cy="180000"/>
+            <a:off x="8168400" y="2423160"/>
+            <a:ext cx="3566400" cy="182880"/>
           </a:xfrm>
           <a:prstGeom prst="rect">
             <a:avLst/>
           </a:prstGeom>
           <a:solidFill>
-            <a:srgbClr val="E87722"/>
+            <a:srgbClr val="0043DA"/>
           </a:solidFill>
           <a:ln>
             <a:noFill/>
@@ -9501,7 +11066,7 @@
       </p:sp>
       <p:sp>
         <p:nvSpPr>
-          <p:cNvPr id="215" name="S215"/>
+          <p:cNvPr id="223" name="S223"/>
           <p:cNvSpPr>
             <a:spLocks noGrp="1"/>
           </p:cNvSpPr>
@@ -9509,8 +11074,8 @@
         </p:nvSpPr>
         <p:spPr>
           <a:xfrm>
-            <a:off x="4975440" y="2561440"/>
-            <a:ext cx="2241120" cy="350000"/>
+            <a:off x="8168400" y="2697480"/>
+            <a:ext cx="3566400" cy="457200"/>
           </a:xfrm>
           <a:prstGeom prst="rect">
             <a:avLst/>
@@ -9521,26 +11086,26 @@
           </a:ln>
         </p:spPr>
         <p:txBody>
-          <a:bodyPr anchor="ctr" lIns="91440" rIns="91440" tIns="91440" bIns="91440"/>
+          <a:bodyPr anchor="ctr" lIns="60000" rIns="60000" tIns="60000" bIns="60000"/>
           <a:lstStyle/>
           <a:p>
             <a:pPr algn="ctr"/>
             <a:r>
-              <a:rPr lang="ko-KR" altLang="en-US" sz="1200" b="0" dirty="0">
-                <a:solidFill>
-                  <a:srgbClr val="7F8C8D"/>
-                </a:solidFill>
-                <a:latin typeface="Freesentation"/>
-                <a:ea typeface="Freesentation"/>
-              </a:rPr>
-              <a:t>다운타임</a:t>
-            </a:r>
-          </a:p>
-        </p:txBody>
-      </p:sp>
-      <p:sp>
-        <p:nvSpPr>
-          <p:cNvPr id="216" name="S216"/>
+              <a:rPr sz="2800" b="1" dirty="0">
+                <a:solidFill>
+                  <a:srgbClr val="0043DA"/>
+                </a:solidFill>
+                <a:latin typeface="프리젠테이션 7"/>
+                <a:ea typeface="프리젠테이션 7"/>
+              </a:rPr>
+              <a:t>▼  &lt; 2시간</a:t>
+            </a:r>
+          </a:p>
+        </p:txBody>
+      </p:sp>
+      <p:sp>
+        <p:nvSpPr>
+          <p:cNvPr id="224" name="S224"/>
           <p:cNvSpPr>
             <a:spLocks noGrp="1"/>
           </p:cNvSpPr>
@@ -9548,8 +11113,8 @@
         </p:nvSpPr>
         <p:spPr>
           <a:xfrm>
-            <a:off x="4975440" y="2921440"/>
-            <a:ext cx="2241120" cy="700000"/>
+            <a:off x="8168400" y="3154680"/>
+            <a:ext cx="3566400" cy="274320"/>
           </a:xfrm>
           <a:prstGeom prst="rect">
             <a:avLst/>
@@ -9560,26 +11125,26 @@
           </a:ln>
         </p:spPr>
         <p:txBody>
-          <a:bodyPr anchor="ctr" lIns="91440" rIns="91440" tIns="91440" bIns="91440"/>
+          <a:bodyPr anchor="ctr" lIns="60000" rIns="60000" tIns="60000" bIns="60000"/>
           <a:lstStyle/>
           <a:p>
             <a:pPr algn="ctr"/>
             <a:r>
-              <a:rPr lang="ko-KR" altLang="en-US" sz="3200" b="1" dirty="0">
-                <a:solidFill>
-                  <a:srgbClr val="E87722"/>
-                </a:solidFill>
-                <a:latin typeface="나눔스퀘어 ExtraBold"/>
-                <a:ea typeface="나눔스퀘어 ExtraBold"/>
-              </a:rPr>
-              <a:t>&lt; 2시간</a:t>
-            </a:r>
-          </a:p>
-        </p:txBody>
-      </p:sp>
-      <p:sp>
-        <p:nvSpPr>
-          <p:cNvPr id="217" name="S217"/>
+              <a:rPr sz="1400" b="1" dirty="0">
+                <a:solidFill>
+                  <a:srgbClr val="212121"/>
+                </a:solidFill>
+                <a:latin typeface="프리젠테이션 7"/>
+                <a:ea typeface="프리젠테이션 7"/>
+              </a:rPr>
+              <a:t>다운타임</a:t>
+            </a:r>
+          </a:p>
+        </p:txBody>
+      </p:sp>
+      <p:sp>
+        <p:nvSpPr>
+          <p:cNvPr id="225" name="S225"/>
           <p:cNvSpPr>
             <a:spLocks noGrp="1"/>
           </p:cNvSpPr>
@@ -9587,8 +11152,8 @@
         </p:nvSpPr>
         <p:spPr>
           <a:xfrm>
-            <a:off x="4975440" y="3631440"/>
-            <a:ext cx="2241120" cy="3075120"/>
+            <a:off x="8168400" y="3520440"/>
+            <a:ext cx="3566400" cy="274320"/>
           </a:xfrm>
           <a:prstGeom prst="rect">
             <a:avLst/>
@@ -9599,14 +11164,14 @@
           </a:ln>
         </p:spPr>
         <p:txBody>
-          <a:bodyPr anchor="ctr" lIns="91440" rIns="91440" tIns="91440" bIns="91440"/>
+          <a:bodyPr anchor="ctr" lIns="60000" rIns="60000" tIns="60000" bIns="60000"/>
           <a:lstStyle/>
           <a:p>
             <a:pPr algn="ctr"/>
             <a:r>
-              <a:rPr lang="ko-KR" altLang="en-US" sz="1100" b="0" dirty="0">
-                <a:solidFill>
-                  <a:srgbClr val="7F8C8D"/>
+              <a:rPr sz="1200" b="0" dirty="0">
+                <a:solidFill>
+                  <a:srgbClr val="505050"/>
                 </a:solidFill>
                 <a:latin typeface="Freesentation"/>
                 <a:ea typeface="Freesentation"/>
@@ -9614,24 +11179,11 @@
               <a:t>컷오버 기준</a:t>
             </a:r>
           </a:p>
-          <a:p>
-            <a:pPr algn="ctr"/>
-            <a:r>
-              <a:rPr lang="ko-KR" altLang="en-US" sz="1100" b="0" dirty="0">
-                <a:solidFill>
-                  <a:srgbClr val="7F8C8D"/>
-                </a:solidFill>
-                <a:latin typeface="Freesentation"/>
-                <a:ea typeface="Freesentation"/>
-              </a:rPr>
-              <a:t>롤백 포함</a:t>
-            </a:r>
-          </a:p>
-        </p:txBody>
-      </p:sp>
-      <p:sp>
-        <p:nvSpPr>
-          <p:cNvPr id="218" name="S218"/>
+        </p:txBody>
+      </p:sp>
+      <p:sp>
+        <p:nvSpPr>
+          <p:cNvPr id="226" name="S226"/>
           <p:cNvSpPr>
             <a:spLocks noGrp="1"/>
           </p:cNvSpPr>
@@ -9639,8 +11191,154 @@
         </p:nvSpPr>
         <p:spPr>
           <a:xfrm>
-            <a:off x="7234560" y="2361440"/>
-            <a:ext cx="2241120" cy="4405120"/>
+            <a:off x="8442720" y="4069080"/>
+            <a:ext cx="3017760" cy="9000"/>
+          </a:xfrm>
+          <a:prstGeom prst="rect">
+            <a:avLst/>
+          </a:prstGeom>
+          <a:solidFill>
+            <a:srgbClr val="DCDCDC"/>
+          </a:solidFill>
+          <a:ln>
+            <a:noFill/>
+          </a:ln>
+        </p:spPr>
+        <p:txBody>
+          <a:bodyPr anchor="ctr" lIns="91440" rIns="91440" tIns="91440" bIns="91440"/>
+          <a:lstStyle/>
+          <a:p/>
+        </p:txBody>
+      </p:sp>
+      <p:sp>
+        <p:nvSpPr>
+          <p:cNvPr id="227" name="S227"/>
+          <p:cNvSpPr>
+            <a:spLocks noGrp="1"/>
+          </p:cNvSpPr>
+          <p:nvPr/>
+        </p:nvSpPr>
+        <p:spPr>
+          <a:xfrm>
+            <a:off x="8168400" y="4160520"/>
+            <a:ext cx="3566400" cy="274320"/>
+          </a:xfrm>
+          <a:prstGeom prst="rect">
+            <a:avLst/>
+          </a:prstGeom>
+          <a:noFill/>
+          <a:ln>
+            <a:noFill/>
+          </a:ln>
+        </p:spPr>
+        <p:txBody>
+          <a:bodyPr anchor="ctr" lIns="60000" rIns="60000" tIns="60000" bIns="60000"/>
+          <a:lstStyle/>
+          <a:p>
+            <a:pPr algn="ctr"/>
+            <a:r>
+              <a:rPr sz="1100" b="0" dirty="0">
+                <a:solidFill>
+                  <a:srgbClr val="212121"/>
+                </a:solidFill>
+                <a:latin typeface="Freesentation"/>
+                <a:ea typeface="Freesentation"/>
+              </a:rPr>
+              <a:t>롤백 포함 유지보수 윈도우</a:t>
+            </a:r>
+          </a:p>
+        </p:txBody>
+      </p:sp>
+      <p:sp>
+        <p:nvSpPr>
+          <p:cNvPr id="228" name="S228"/>
+          <p:cNvSpPr>
+            <a:spLocks noGrp="1"/>
+          </p:cNvSpPr>
+          <p:nvPr/>
+        </p:nvSpPr>
+        <p:spPr>
+          <a:xfrm>
+            <a:off x="8168400" y="4434840"/>
+            <a:ext cx="3566400" cy="274320"/>
+          </a:xfrm>
+          <a:prstGeom prst="rect">
+            <a:avLst/>
+          </a:prstGeom>
+          <a:noFill/>
+          <a:ln>
+            <a:noFill/>
+          </a:ln>
+        </p:spPr>
+        <p:txBody>
+          <a:bodyPr anchor="ctr" lIns="60000" rIns="60000" tIns="60000" bIns="60000"/>
+          <a:lstStyle/>
+          <a:p>
+            <a:pPr algn="ctr"/>
+            <a:r>
+              <a:rPr sz="1100" b="0" dirty="0">
+                <a:solidFill>
+                  <a:srgbClr val="212121"/>
+                </a:solidFill>
+                <a:latin typeface="Freesentation"/>
+                <a:ea typeface="Freesentation"/>
+              </a:rPr>
+              <a:t>병렬 운영 + Blue/Green 방식</a:t>
+            </a:r>
+          </a:p>
+        </p:txBody>
+      </p:sp>
+      <p:sp>
+        <p:nvSpPr>
+          <p:cNvPr id="229" name="S229"/>
+          <p:cNvSpPr>
+            <a:spLocks noGrp="1"/>
+          </p:cNvSpPr>
+          <p:nvPr/>
+        </p:nvSpPr>
+        <p:spPr>
+          <a:xfrm>
+            <a:off x="8168400" y="4983480"/>
+            <a:ext cx="3566400" cy="274320"/>
+          </a:xfrm>
+          <a:prstGeom prst="rect">
+            <a:avLst/>
+          </a:prstGeom>
+          <a:noFill/>
+          <a:ln>
+            <a:noFill/>
+          </a:ln>
+        </p:spPr>
+        <p:txBody>
+          <a:bodyPr anchor="ctr" lIns="60000" rIns="60000" tIns="60000" bIns="60000"/>
+          <a:lstStyle/>
+          <a:p>
+            <a:pPr algn="ctr"/>
+            <a:r>
+              <a:rPr sz="1000" b="0" dirty="0">
+                <a:solidFill>
+                  <a:srgbClr val="505050"/>
+                </a:solidFill>
+                <a:latin typeface="Freesentation"/>
+                <a:ea typeface="Freesentation"/>
+              </a:rPr>
+              <a:t>(컷오버 계획 기준)</a:t>
+            </a:r>
+          </a:p>
+        </p:txBody>
+      </p:sp>
+      <p:sp>
+        <p:nvSpPr>
+          <p:cNvPr id="230" name="S230"/>
+          <p:cNvSpPr>
+            <a:spLocks noGrp="1"/>
+          </p:cNvSpPr>
+          <p:nvPr/>
+        </p:nvSpPr>
+        <p:spPr>
+          <a:xfrm>
+            <a:off x="457200" y="6126480"/>
+            <a:ext cx="11277600" cy="548640"/>
           </a:xfrm>
           <a:prstGeom prst="roundRect">
             <a:avLst>
@@ -9648,38 +11346,7 @@
             </a:avLst>
           </a:prstGeom>
           <a:solidFill>
-            <a:srgbClr val="F0F4F8"/>
-          </a:solidFill>
-          <a:ln w="12700">
-            <a:solidFill>
-              <a:srgbClr val="CCCCCC"/>
-            </a:solidFill>
-          </a:ln>
-        </p:spPr>
-        <p:txBody>
-          <a:bodyPr anchor="ctr" lIns="91440" rIns="91440" tIns="91440" bIns="91440"/>
-          <a:lstStyle/>
-          <a:p/>
-        </p:txBody>
-      </p:sp>
-      <p:sp>
-        <p:nvSpPr>
-          <p:cNvPr id="219" name="S219"/>
-          <p:cNvSpPr>
-            <a:spLocks noGrp="1"/>
-          </p:cNvSpPr>
-          <p:nvPr/>
-        </p:nvSpPr>
-        <p:spPr>
-          <a:xfrm>
-            <a:off x="7234560" y="2361440"/>
-            <a:ext cx="2241120" cy="180000"/>
-          </a:xfrm>
-          <a:prstGeom prst="rect">
-            <a:avLst/>
-          </a:prstGeom>
-          <a:solidFill>
-            <a:srgbClr val="27AE60"/>
+            <a:srgbClr val="0043DA"/>
           </a:solidFill>
           <a:ln>
             <a:noFill/>
@@ -9688,340 +11355,17 @@
         <p:txBody>
           <a:bodyPr anchor="ctr" lIns="91440" rIns="91440" tIns="91440" bIns="91440"/>
           <a:lstStyle/>
-          <a:p/>
-        </p:txBody>
-      </p:sp>
-      <p:sp>
-        <p:nvSpPr>
-          <p:cNvPr id="220" name="S220"/>
-          <p:cNvSpPr>
-            <a:spLocks noGrp="1"/>
-          </p:cNvSpPr>
-          <p:nvPr/>
-        </p:nvSpPr>
-        <p:spPr>
-          <a:xfrm>
-            <a:off x="7234560" y="2561440"/>
-            <a:ext cx="2241120" cy="350000"/>
-          </a:xfrm>
-          <a:prstGeom prst="rect">
-            <a:avLst/>
-          </a:prstGeom>
-          <a:noFill/>
-          <a:ln>
-            <a:noFill/>
-          </a:ln>
-        </p:spPr>
-        <p:txBody>
-          <a:bodyPr anchor="ctr" lIns="91440" rIns="91440" tIns="91440" bIns="91440"/>
-          <a:lstStyle/>
           <a:p>
             <a:pPr algn="ctr"/>
             <a:r>
-              <a:rPr lang="ko-KR" altLang="en-US" sz="1200" b="0" dirty="0">
-                <a:solidFill>
-                  <a:srgbClr val="7F8C8D"/>
-                </a:solidFill>
-                <a:latin typeface="Freesentation"/>
-                <a:ea typeface="Freesentation"/>
-              </a:rPr>
-              <a:t>데이터</a:t>
-            </a:r>
-          </a:p>
-          <a:p>
-            <a:pPr algn="ctr"/>
-            <a:r>
-              <a:rPr lang="ko-KR" altLang="en-US" sz="1200" b="0" dirty="0">
-                <a:solidFill>
-                  <a:srgbClr val="7F8C8D"/>
-                </a:solidFill>
-                <a:latin typeface="Freesentation"/>
-                <a:ea typeface="Freesentation"/>
-              </a:rPr>
-              <a:t>정합성</a:t>
-            </a:r>
-          </a:p>
-        </p:txBody>
-      </p:sp>
-      <p:sp>
-        <p:nvSpPr>
-          <p:cNvPr id="221" name="S221"/>
-          <p:cNvSpPr>
-            <a:spLocks noGrp="1"/>
-          </p:cNvSpPr>
-          <p:nvPr/>
-        </p:nvSpPr>
-        <p:spPr>
-          <a:xfrm>
-            <a:off x="7234560" y="2921440"/>
-            <a:ext cx="2241120" cy="700000"/>
-          </a:xfrm>
-          <a:prstGeom prst="rect">
-            <a:avLst/>
-          </a:prstGeom>
-          <a:noFill/>
-          <a:ln>
-            <a:noFill/>
-          </a:ln>
-        </p:spPr>
-        <p:txBody>
-          <a:bodyPr anchor="ctr" lIns="91440" rIns="91440" tIns="91440" bIns="91440"/>
-          <a:lstStyle/>
-          <a:p>
-            <a:pPr algn="ctr"/>
-            <a:r>
-              <a:rPr lang="ko-KR" altLang="en-US" sz="3200" b="1" dirty="0">
-                <a:solidFill>
-                  <a:srgbClr val="27AE60"/>
-                </a:solidFill>
-                <a:latin typeface="나눔스퀘어 ExtraBold"/>
-                <a:ea typeface="나눔스퀘어 ExtraBold"/>
-              </a:rPr>
-              <a:t>99.999%</a:t>
-            </a:r>
-          </a:p>
-        </p:txBody>
-      </p:sp>
-      <p:sp>
-        <p:nvSpPr>
-          <p:cNvPr id="222" name="S222"/>
-          <p:cNvSpPr>
-            <a:spLocks noGrp="1"/>
-          </p:cNvSpPr>
-          <p:nvPr/>
-        </p:nvSpPr>
-        <p:spPr>
-          <a:xfrm>
-            <a:off x="7234560" y="3631440"/>
-            <a:ext cx="2241120" cy="3075120"/>
-          </a:xfrm>
-          <a:prstGeom prst="rect">
-            <a:avLst/>
-          </a:prstGeom>
-          <a:noFill/>
-          <a:ln>
-            <a:noFill/>
-          </a:ln>
-        </p:spPr>
-        <p:txBody>
-          <a:bodyPr anchor="ctr" lIns="91440" rIns="91440" tIns="91440" bIns="91440"/>
-          <a:lstStyle/>
-          <a:p>
-            <a:pPr algn="ctr"/>
-            <a:r>
-              <a:rPr lang="ko-KR" altLang="en-US" sz="1100" b="0" dirty="0">
-                <a:solidFill>
-                  <a:srgbClr val="7F8C8D"/>
-                </a:solidFill>
-                <a:latin typeface="Freesentation"/>
-                <a:ea typeface="Freesentation"/>
-              </a:rPr>
-              <a:t>checksum</a:t>
-            </a:r>
-          </a:p>
-          <a:p>
-            <a:pPr algn="ctr"/>
-            <a:r>
-              <a:rPr lang="ko-KR" altLang="en-US" sz="1100" b="0" dirty="0">
-                <a:solidFill>
-                  <a:srgbClr val="7F8C8D"/>
-                </a:solidFill>
-                <a:latin typeface="Freesentation"/>
-                <a:ea typeface="Freesentation"/>
-              </a:rPr>
-              <a:t>검증 기준</a:t>
-            </a:r>
-          </a:p>
-        </p:txBody>
-      </p:sp>
-      <p:sp>
-        <p:nvSpPr>
-          <p:cNvPr id="223" name="S223"/>
-          <p:cNvSpPr>
-            <a:spLocks noGrp="1"/>
-          </p:cNvSpPr>
-          <p:nvPr/>
-        </p:nvSpPr>
-        <p:spPr>
-          <a:xfrm>
-            <a:off x="9493680" y="2361440"/>
-            <a:ext cx="2241120" cy="4405120"/>
-          </a:xfrm>
-          <a:prstGeom prst="roundRect">
-            <a:avLst>
-              <a:gd name="adj" fmla="val 16667"/>
-            </a:avLst>
-          </a:prstGeom>
-          <a:solidFill>
-            <a:srgbClr val="F0F4F8"/>
-          </a:solidFill>
-          <a:ln w="12700">
-            <a:solidFill>
-              <a:srgbClr val="CCCCCC"/>
-            </a:solidFill>
-          </a:ln>
-        </p:spPr>
-        <p:txBody>
-          <a:bodyPr anchor="ctr" lIns="91440" rIns="91440" tIns="91440" bIns="91440"/>
-          <a:lstStyle/>
-          <a:p/>
-        </p:txBody>
-      </p:sp>
-      <p:sp>
-        <p:nvSpPr>
-          <p:cNvPr id="224" name="S224"/>
-          <p:cNvSpPr>
-            <a:spLocks noGrp="1"/>
-          </p:cNvSpPr>
-          <p:nvPr/>
-        </p:nvSpPr>
-        <p:spPr>
-          <a:xfrm>
-            <a:off x="9493680" y="2361440"/>
-            <a:ext cx="2241120" cy="180000"/>
-          </a:xfrm>
-          <a:prstGeom prst="rect">
-            <a:avLst/>
-          </a:prstGeom>
-          <a:solidFill>
-            <a:srgbClr val="C0392B"/>
-          </a:solidFill>
-          <a:ln>
-            <a:noFill/>
-          </a:ln>
-        </p:spPr>
-        <p:txBody>
-          <a:bodyPr anchor="ctr" lIns="91440" rIns="91440" tIns="91440" bIns="91440"/>
-          <a:lstStyle/>
-          <a:p/>
-        </p:txBody>
-      </p:sp>
-      <p:sp>
-        <p:nvSpPr>
-          <p:cNvPr id="225" name="S225"/>
-          <p:cNvSpPr>
-            <a:spLocks noGrp="1"/>
-          </p:cNvSpPr>
-          <p:nvPr/>
-        </p:nvSpPr>
-        <p:spPr>
-          <a:xfrm>
-            <a:off x="9493680" y="2561440"/>
-            <a:ext cx="2241120" cy="350000"/>
-          </a:xfrm>
-          <a:prstGeom prst="rect">
-            <a:avLst/>
-          </a:prstGeom>
-          <a:noFill/>
-          <a:ln>
-            <a:noFill/>
-          </a:ln>
-        </p:spPr>
-        <p:txBody>
-          <a:bodyPr anchor="ctr" lIns="91440" rIns="91440" tIns="91440" bIns="91440"/>
-          <a:lstStyle/>
-          <a:p>
-            <a:pPr algn="ctr"/>
-            <a:r>
-              <a:rPr lang="ko-KR" altLang="en-US" sz="1200" b="0" dirty="0">
-                <a:solidFill>
-                  <a:srgbClr val="7F8C8D"/>
-                </a:solidFill>
-                <a:latin typeface="Freesentation"/>
-                <a:ea typeface="Freesentation"/>
-              </a:rPr>
-              <a:t>비용 절감</a:t>
-            </a:r>
-          </a:p>
-        </p:txBody>
-      </p:sp>
-      <p:sp>
-        <p:nvSpPr>
-          <p:cNvPr id="226" name="S226"/>
-          <p:cNvSpPr>
-            <a:spLocks noGrp="1"/>
-          </p:cNvSpPr>
-          <p:nvPr/>
-        </p:nvSpPr>
-        <p:spPr>
-          <a:xfrm>
-            <a:off x="9493680" y="2921440"/>
-            <a:ext cx="2241120" cy="700000"/>
-          </a:xfrm>
-          <a:prstGeom prst="rect">
-            <a:avLst/>
-          </a:prstGeom>
-          <a:noFill/>
-          <a:ln>
-            <a:noFill/>
-          </a:ln>
-        </p:spPr>
-        <p:txBody>
-          <a:bodyPr anchor="ctr" lIns="91440" rIns="91440" tIns="91440" bIns="91440"/>
-          <a:lstStyle/>
-          <a:p>
-            <a:pPr algn="ctr"/>
-            <a:r>
-              <a:rPr lang="ko-KR" altLang="en-US" sz="3200" b="1" dirty="0">
-                <a:solidFill>
-                  <a:srgbClr val="C0392B"/>
-                </a:solidFill>
-                <a:latin typeface="나눔스퀘어 ExtraBold"/>
-                <a:ea typeface="나눔스퀘어 ExtraBold"/>
-              </a:rPr>
-              <a:t>40%</a:t>
-            </a:r>
-          </a:p>
-        </p:txBody>
-      </p:sp>
-      <p:sp>
-        <p:nvSpPr>
-          <p:cNvPr id="227" name="S227"/>
-          <p:cNvSpPr>
-            <a:spLocks noGrp="1"/>
-          </p:cNvSpPr>
-          <p:nvPr/>
-        </p:nvSpPr>
-        <p:spPr>
-          <a:xfrm>
-            <a:off x="9493680" y="3631440"/>
-            <a:ext cx="2241120" cy="3075120"/>
-          </a:xfrm>
-          <a:prstGeom prst="rect">
-            <a:avLst/>
-          </a:prstGeom>
-          <a:noFill/>
-          <a:ln>
-            <a:noFill/>
-          </a:ln>
-        </p:spPr>
-        <p:txBody>
-          <a:bodyPr anchor="ctr" lIns="91440" rIns="91440" tIns="91440" bIns="91440"/>
-          <a:lstStyle/>
-          <a:p>
-            <a:pPr algn="ctr"/>
-            <a:r>
-              <a:rPr lang="ko-KR" altLang="en-US" sz="1100" b="0" dirty="0">
-                <a:solidFill>
-                  <a:srgbClr val="7F8C8D"/>
-                </a:solidFill>
-                <a:latin typeface="Freesentation"/>
-                <a:ea typeface="Freesentation"/>
-              </a:rPr>
-              <a:t>라이선스 기준</a:t>
-            </a:r>
-          </a:p>
-          <a:p>
-            <a:pPr algn="ctr"/>
-            <a:r>
-              <a:rPr lang="ko-KR" altLang="en-US" sz="1100" b="0" dirty="0">
-                <a:solidFill>
-                  <a:srgbClr val="7F8C8D"/>
-                </a:solidFill>
-                <a:latin typeface="Freesentation"/>
-                <a:ea typeface="Freesentation"/>
-              </a:rPr>
-              <a:t>3년 TCO</a:t>
+              <a:rPr sz="1300" b="1" dirty="0">
+                <a:solidFill>
+                  <a:srgbClr val="FFFFFF"/>
+                </a:solidFill>
+                <a:latin typeface="프리젠테이션 7"/>
+                <a:ea typeface="프리젠테이션 7"/>
+              </a:rPr>
+              <a:t>📊  종합: GoldenGate PoC 결과 — 비용 40% 절감 + RPO 5분 + 컷오버 2시간 이내 달성 목표</a:t>
             </a:r>
           </a:p>
         </p:txBody>
@@ -10029,7 +11373,7 @@
     </p:spTree>
     <p:extLst>
       <p:ext uri="{BB962C8B-B14F-4D97-AF65-F5344CB8AC3E}">
-        <p14:creationId xmlns:p14="http://schemas.microsoft.com/office/powerpoint/2010/main" val="899380902"/>
+        <p14:creationId xmlns:p14="http://schemas.microsoft.com/office/powerpoint/2010/main" val="1719126315"/>
       </p:ext>
     </p:extLst>
   </p:cSld>
@@ -10115,8 +11459,7 @@
                 <a:ea typeface="프리젠테이션 7 Bold" pitchFamily="2" charset="-127"/>
                 <a:cs typeface="Pretendard ExtraBold" panose="02000903000000020004" pitchFamily="2" charset="-127"/>
               </a:rPr>
-              <a:t>4-1.
-주의사항</a:t>
+              <a:t>서브색상</a:t>
             </a:r>
             <a:r>
               <a:rPr lang="ko-KR" altLang="en-US" sz="2000" dirty="0">
@@ -10124,8 +11467,28 @@
                 <a:ea typeface="프리젠테이션 7 Bold" pitchFamily="2" charset="-127"/>
                 <a:cs typeface="Pretendard ExtraBold" panose="02000903000000020004" pitchFamily="2" charset="-127"/>
               </a:rPr>
-              <a:t/>
-            </a:r>
+              <a:t> </a:t>
+            </a:r>
+          </a:p>
+          <a:p>
+            <a:pPr>
+              <a:lnSpc>
+                <a:spcPct val="120000"/>
+              </a:lnSpc>
+            </a:pPr>
+            <a:r>
+              <a:rPr lang="ko-KR" altLang="en-US" sz="2000" dirty="0">
+                <a:latin typeface="프리젠테이션 7 Bold" pitchFamily="2" charset="-127"/>
+                <a:ea typeface="프리젠테이션 7 Bold" pitchFamily="2" charset="-127"/>
+                <a:cs typeface="Pretendard ExtraBold" panose="02000903000000020004" pitchFamily="2" charset="-127"/>
+              </a:rPr>
+              <a:t>적용 예시</a:t>
+            </a:r>
+            <a:endParaRPr lang="ko-KR" altLang="en-US" sz="2000" dirty="0">
+              <a:latin typeface="프리젠테이션 7 Bold" pitchFamily="2" charset="-127"/>
+              <a:ea typeface="프리젠테이션 7 Bold" pitchFamily="2" charset="-127"/>
+              <a:cs typeface="Pretendard ExtraBold" panose="02000903000000020004" pitchFamily="2" charset="-127"/>
+            </a:endParaRPr>
           </a:p>
         </p:txBody>
       </p:sp>
@@ -10175,7 +11538,7 @@
                 <a:ea typeface="프리젠테이션 5 Medium" pitchFamily="2" charset="-127"/>
                 <a:cs typeface="Pretendard" panose="02000503000000020004" pitchFamily="2" charset="-127"/>
               </a:rPr>
-              <a:t>Do &amp; Don't — 실패 사례에서 학습한 운영 체크리스트</a:t>
+              <a:t>설명글을</a:t>
             </a:r>
             <a:r>
               <a:rPr lang="ko-KR" altLang="en-US" sz="1200" dirty="0">
@@ -10196,7 +11559,7 @@
                 <a:ea typeface="프리젠테이션 5 Medium" pitchFamily="2" charset="-127"/>
                 <a:cs typeface="Pretendard" panose="02000503000000020004" pitchFamily="2" charset="-127"/>
               </a:rPr>
-              <a:t/>
+              <a:t> 적어주세요</a:t>
             </a:r>
             <a:r>
               <a:rPr lang="en-US" altLang="ko-KR" sz="1200" b="1" dirty="0">
@@ -10217,7 +11580,7 @@
                 <a:ea typeface="프리젠테이션 5 Medium" pitchFamily="2" charset="-127"/>
                 <a:cs typeface="Pretendard" panose="02000503000000020004" pitchFamily="2" charset="-127"/>
               </a:rPr>
-              <a:t/>
+              <a:t>. </a:t>
             </a:r>
             <a:r>
               <a:rPr lang="ko-KR" altLang="en-US" sz="1200" b="1" dirty="0">
@@ -10235,7 +11598,7 @@
                 <a:ea typeface="프리젠테이션 7 Bold" pitchFamily="2" charset="-127"/>
                 <a:cs typeface="Pretendard" panose="02000503000000020004" pitchFamily="2" charset="-127"/>
               </a:rPr>
-              <a:t/>
+              <a:t>강조 텍스트</a:t>
             </a:r>
             <a:r>
               <a:rPr lang="en-US" altLang="ko-KR" sz="1200" b="1" dirty="0">
@@ -10253,7 +11616,7 @@
                 <a:ea typeface="프리젠테이션 7 Bold" pitchFamily="2" charset="-127"/>
                 <a:cs typeface="Pretendard" panose="02000503000000020004" pitchFamily="2" charset="-127"/>
               </a:rPr>
-              <a:t/>
+              <a:t>(</a:t>
             </a:r>
             <a:r>
               <a:rPr lang="ko-KR" altLang="en-US" sz="1200" b="1" dirty="0" err="1">
@@ -10271,7 +11634,7 @@
                 <a:ea typeface="프리젠테이션 7 Bold" pitchFamily="2" charset="-127"/>
                 <a:cs typeface="Pretendard" panose="02000503000000020004" pitchFamily="2" charset="-127"/>
               </a:rPr>
-              <a:t/>
+              <a:t>프리젠테이션</a:t>
             </a:r>
             <a:r>
               <a:rPr lang="ko-KR" altLang="en-US" sz="1200" b="1" dirty="0">
@@ -10289,7 +11652,7 @@
                 <a:ea typeface="프리젠테이션 7 Bold" pitchFamily="2" charset="-127"/>
                 <a:cs typeface="Pretendard" panose="02000503000000020004" pitchFamily="2" charset="-127"/>
               </a:rPr>
-              <a:t/>
+              <a:t> </a:t>
             </a:r>
             <a:r>
               <a:rPr lang="en-US" altLang="ko-KR" sz="1200" b="1" dirty="0">
@@ -10307,7 +11670,7 @@
                 <a:ea typeface="프리젠테이션 7 Bold" pitchFamily="2" charset="-127"/>
                 <a:cs typeface="Pretendard" panose="02000503000000020004" pitchFamily="2" charset="-127"/>
               </a:rPr>
-              <a:t/>
+              <a:t>7 Bold, </a:t>
             </a:r>
             <a:r>
               <a:rPr lang="ko-KR" altLang="en-US" sz="1200" b="1" dirty="0">
@@ -10325,7 +11688,7 @@
                 <a:ea typeface="프리젠테이션 7 Bold" pitchFamily="2" charset="-127"/>
                 <a:cs typeface="Pretendard" panose="02000503000000020004" pitchFamily="2" charset="-127"/>
               </a:rPr>
-              <a:t/>
+              <a:t>메인 컬러</a:t>
             </a:r>
             <a:r>
               <a:rPr lang="en-US" altLang="ko-KR" sz="1200" b="1" dirty="0" smtClean="0">
@@ -10343,8 +11706,219 @@
                 <a:ea typeface="프리젠테이션 7 Bold" pitchFamily="2" charset="-127"/>
                 <a:cs typeface="Pretendard" panose="02000503000000020004" pitchFamily="2" charset="-127"/>
               </a:rPr>
-              <a:t/>
-            </a:r>
+              <a:t>)</a:t>
+            </a:r>
+          </a:p>
+          <a:p>
+            <a:pPr latinLnBrk="0">
+              <a:lnSpc>
+                <a:spcPct val="150000"/>
+              </a:lnSpc>
+            </a:pPr>
+            <a:r>
+              <a:rPr lang="ko-KR" altLang="en-US" sz="1200" dirty="0" smtClean="0">
+                <a:ln>
+                  <a:solidFill>
+                    <a:schemeClr val="accent1">
+                      <a:alpha val="0"/>
+                    </a:schemeClr>
+                  </a:solidFill>
+                </a:ln>
+                <a:solidFill>
+                  <a:schemeClr val="tx1">
+                    <a:lumMod val="75000"/>
+                    <a:lumOff val="25000"/>
+                  </a:schemeClr>
+                </a:solidFill>
+                <a:latin typeface="프리젠테이션 5 Medium" pitchFamily="2" charset="-127"/>
+                <a:ea typeface="프리젠테이션 5 Medium" pitchFamily="2" charset="-127"/>
+                <a:cs typeface="Pretendard" panose="02000503000000020004" pitchFamily="2" charset="-127"/>
+              </a:rPr>
+              <a:t>폰트 </a:t>
+            </a:r>
+            <a:r>
+              <a:rPr lang="en-US" altLang="ko-KR" sz="1200" dirty="0" smtClean="0">
+                <a:ln>
+                  <a:solidFill>
+                    <a:schemeClr val="accent1">
+                      <a:alpha val="0"/>
+                    </a:schemeClr>
+                  </a:solidFill>
+                </a:ln>
+                <a:solidFill>
+                  <a:schemeClr val="tx1">
+                    <a:lumMod val="75000"/>
+                    <a:lumOff val="25000"/>
+                  </a:schemeClr>
+                </a:solidFill>
+                <a:latin typeface="프리젠테이션 5 Medium" pitchFamily="2" charset="-127"/>
+                <a:ea typeface="프리젠테이션 5 Medium" pitchFamily="2" charset="-127"/>
+                <a:cs typeface="Pretendard" panose="02000503000000020004" pitchFamily="2" charset="-127"/>
+              </a:rPr>
+              <a:t>: </a:t>
+            </a:r>
+            <a:r>
+              <a:rPr lang="ko-KR" altLang="en-US" sz="1200" dirty="0" err="1" smtClean="0">
+                <a:ln>
+                  <a:solidFill>
+                    <a:schemeClr val="accent1">
+                      <a:alpha val="0"/>
+                    </a:schemeClr>
+                  </a:solidFill>
+                </a:ln>
+                <a:solidFill>
+                  <a:schemeClr val="tx1">
+                    <a:lumMod val="75000"/>
+                    <a:lumOff val="25000"/>
+                  </a:schemeClr>
+                </a:solidFill>
+                <a:latin typeface="프리젠테이션 5 Medium" pitchFamily="2" charset="-127"/>
+                <a:ea typeface="프리젠테이션 5 Medium" pitchFamily="2" charset="-127"/>
+                <a:cs typeface="Pretendard" panose="02000503000000020004" pitchFamily="2" charset="-127"/>
+              </a:rPr>
+              <a:t>프리젠테이션</a:t>
+            </a:r>
+            <a:r>
+              <a:rPr lang="ko-KR" altLang="en-US" sz="1200" dirty="0" smtClean="0">
+                <a:ln>
+                  <a:solidFill>
+                    <a:schemeClr val="accent1">
+                      <a:alpha val="0"/>
+                    </a:schemeClr>
+                  </a:solidFill>
+                </a:ln>
+                <a:solidFill>
+                  <a:schemeClr val="tx1">
+                    <a:lumMod val="75000"/>
+                    <a:lumOff val="25000"/>
+                  </a:schemeClr>
+                </a:solidFill>
+                <a:latin typeface="프리젠테이션 5 Medium" pitchFamily="2" charset="-127"/>
+                <a:ea typeface="프리젠테이션 5 Medium" pitchFamily="2" charset="-127"/>
+                <a:cs typeface="Pretendard" panose="02000503000000020004" pitchFamily="2" charset="-127"/>
+              </a:rPr>
+              <a:t> </a:t>
+            </a:r>
+            <a:r>
+              <a:rPr lang="en-US" altLang="ko-KR" sz="1200" dirty="0" smtClean="0">
+                <a:ln>
+                  <a:solidFill>
+                    <a:schemeClr val="accent1">
+                      <a:alpha val="0"/>
+                    </a:schemeClr>
+                  </a:solidFill>
+                </a:ln>
+                <a:solidFill>
+                  <a:schemeClr val="tx1">
+                    <a:lumMod val="75000"/>
+                    <a:lumOff val="25000"/>
+                  </a:schemeClr>
+                </a:solidFill>
+                <a:latin typeface="프리젠테이션 5 Medium" pitchFamily="2" charset="-127"/>
+                <a:ea typeface="프리젠테이션 5 Medium" pitchFamily="2" charset="-127"/>
+                <a:cs typeface="Pretendard" panose="02000503000000020004" pitchFamily="2" charset="-127"/>
+              </a:rPr>
+              <a:t>5 Medium 12pt  </a:t>
+            </a:r>
+            <a:r>
+              <a:rPr lang="ko-KR" altLang="en-US" sz="1200" dirty="0" smtClean="0">
+                <a:ln>
+                  <a:solidFill>
+                    <a:schemeClr val="accent1">
+                      <a:alpha val="0"/>
+                    </a:schemeClr>
+                  </a:solidFill>
+                </a:ln>
+                <a:solidFill>
+                  <a:schemeClr val="tx1">
+                    <a:lumMod val="75000"/>
+                    <a:lumOff val="25000"/>
+                  </a:schemeClr>
+                </a:solidFill>
+                <a:latin typeface="프리젠테이션 5 Medium" pitchFamily="2" charset="-127"/>
+                <a:ea typeface="프리젠테이션 5 Medium" pitchFamily="2" charset="-127"/>
+                <a:cs typeface="Pretendard" panose="02000503000000020004" pitchFamily="2" charset="-127"/>
+              </a:rPr>
+              <a:t>최대 </a:t>
+            </a:r>
+            <a:r>
+              <a:rPr lang="en-US" altLang="ko-KR" sz="1200" dirty="0" smtClean="0">
+                <a:ln>
+                  <a:solidFill>
+                    <a:schemeClr val="accent1">
+                      <a:alpha val="0"/>
+                    </a:schemeClr>
+                  </a:solidFill>
+                </a:ln>
+                <a:solidFill>
+                  <a:schemeClr val="tx1">
+                    <a:lumMod val="75000"/>
+                    <a:lumOff val="25000"/>
+                  </a:schemeClr>
+                </a:solidFill>
+                <a:latin typeface="프리젠테이션 5 Medium" pitchFamily="2" charset="-127"/>
+                <a:ea typeface="프리젠테이션 5 Medium" pitchFamily="2" charset="-127"/>
+                <a:cs typeface="Pretendard" panose="02000503000000020004" pitchFamily="2" charset="-127"/>
+              </a:rPr>
+              <a:t>3</a:t>
+            </a:r>
+            <a:r>
+              <a:rPr lang="ko-KR" altLang="en-US" sz="1200" dirty="0" smtClean="0">
+                <a:ln>
+                  <a:solidFill>
+                    <a:schemeClr val="accent1">
+                      <a:alpha val="0"/>
+                    </a:schemeClr>
+                  </a:solidFill>
+                </a:ln>
+                <a:solidFill>
+                  <a:schemeClr val="tx1">
+                    <a:lumMod val="75000"/>
+                    <a:lumOff val="25000"/>
+                  </a:schemeClr>
+                </a:solidFill>
+                <a:latin typeface="프리젠테이션 5 Medium" pitchFamily="2" charset="-127"/>
+                <a:ea typeface="프리젠테이션 5 Medium" pitchFamily="2" charset="-127"/>
+                <a:cs typeface="Pretendard" panose="02000503000000020004" pitchFamily="2" charset="-127"/>
+              </a:rPr>
+              <a:t>줄까지 작성 가능합니다</a:t>
+            </a:r>
+            <a:r>
+              <a:rPr lang="en-US" altLang="ko-KR" sz="1200" dirty="0" smtClean="0">
+                <a:ln>
+                  <a:solidFill>
+                    <a:schemeClr val="accent1">
+                      <a:alpha val="0"/>
+                    </a:schemeClr>
+                  </a:solidFill>
+                </a:ln>
+                <a:solidFill>
+                  <a:schemeClr val="tx1">
+                    <a:lumMod val="75000"/>
+                    <a:lumOff val="25000"/>
+                  </a:schemeClr>
+                </a:solidFill>
+                <a:latin typeface="프리젠테이션 5 Medium" pitchFamily="2" charset="-127"/>
+                <a:ea typeface="프리젠테이션 5 Medium" pitchFamily="2" charset="-127"/>
+                <a:cs typeface="Pretendard" panose="02000503000000020004" pitchFamily="2" charset="-127"/>
+              </a:rPr>
+              <a:t>.</a:t>
+            </a:r>
+            <a:endParaRPr lang="en-US" altLang="ko-KR" sz="1200" dirty="0">
+              <a:ln>
+                <a:solidFill>
+                  <a:schemeClr val="accent1">
+                    <a:alpha val="0"/>
+                  </a:schemeClr>
+                </a:solidFill>
+              </a:ln>
+              <a:solidFill>
+                <a:srgbClr val="2765E1"/>
+              </a:solidFill>
+              <a:latin typeface="프리젠테이션 5 Medium" pitchFamily="2" charset="-127"/>
+              <a:ea typeface="프리젠테이션 5 Medium" pitchFamily="2" charset="-127"/>
+              <a:cs typeface="Pretendard" panose="02000503000000020004" pitchFamily="2" charset="-127"/>
+            </a:endParaRPr>
           </a:p>
         </p:txBody>
       </p:sp>
@@ -10358,8 +11932,8 @@
         </p:nvSpPr>
         <p:spPr>
           <a:xfrm>
-            <a:off x="457200" y="1750000"/>
-            <a:ext cx="11277600" cy="280000"/>
+            <a:off x="457200" y="1600200"/>
+            <a:ext cx="11277600" cy="320040"/>
           </a:xfrm>
           <a:prstGeom prst="rect">
             <a:avLst/>
@@ -10370,19 +11944,19 @@
           </a:ln>
         </p:spPr>
         <p:txBody>
-          <a:bodyPr anchor="ctr" lIns="91440" rIns="91440" tIns="91440" bIns="91440"/>
+          <a:bodyPr anchor="ctr" lIns="0" rIns="0" tIns="0" bIns="0"/>
           <a:lstStyle/>
           <a:p>
             <a:pPr algn="l"/>
             <a:r>
-              <a:rPr lang="ko-KR" altLang="en-US" sz="1600" b="1" dirty="0">
-                <a:solidFill>
-                  <a:srgbClr val="1B3A5C"/>
+              <a:rPr sz="1600" b="1" dirty="0">
+                <a:solidFill>
+                  <a:srgbClr val="0043DA"/>
                 </a:solidFill>
                 <a:latin typeface="Freesentation"/>
                 <a:ea typeface="Freesentation"/>
               </a:rPr>
-              <a:t>마이그레이션 운영 주의사항 — Do &amp; Don't</a:t>
+              <a:t>마이그레이션 운영 Do &amp; Don't</a:t>
             </a:r>
           </a:p>
         </p:txBody>
@@ -10397,8 +11971,8 @@
         </p:nvSpPr>
         <p:spPr>
           <a:xfrm>
-            <a:off x="457200" y="2040000"/>
-            <a:ext cx="11277600" cy="230000"/>
+            <a:off x="457200" y="1965960"/>
+            <a:ext cx="11277600" cy="274320"/>
           </a:xfrm>
           <a:prstGeom prst="rect">
             <a:avLst/>
@@ -10409,14 +11983,14 @@
           </a:ln>
         </p:spPr>
         <p:txBody>
-          <a:bodyPr anchor="ctr" lIns="91440" rIns="91440" tIns="91440" bIns="91440"/>
+          <a:bodyPr anchor="ctr" lIns="0" rIns="0" tIns="0" bIns="0"/>
           <a:lstStyle/>
           <a:p>
             <a:pPr algn="l"/>
             <a:r>
-              <a:rPr lang="ko-KR" altLang="en-US" sz="1200" b="0" dirty="0">
-                <a:solidFill>
-                  <a:srgbClr val="7F8C8D"/>
+              <a:rPr sz="1300" b="0" dirty="0">
+                <a:solidFill>
+                  <a:srgbClr val="212121"/>
                 </a:solidFill>
                 <a:latin typeface="Freesentation"/>
                 <a:ea typeface="Freesentation"/>
@@ -10436,18 +12010,20 @@
         </p:nvSpPr>
         <p:spPr>
           <a:xfrm>
-            <a:off x="457200" y="2361440"/>
-            <a:ext cx="5629800" cy="4405120"/>
-          </a:xfrm>
-          <a:prstGeom prst="rect">
-            <a:avLst/>
+            <a:off x="457200" y="2423160"/>
+            <a:ext cx="5486400" cy="3657600"/>
+          </a:xfrm>
+          <a:prstGeom prst="roundRect">
+            <a:avLst>
+              <a:gd name="adj" fmla="val 16667"/>
+            </a:avLst>
           </a:prstGeom>
           <a:solidFill>
-            <a:srgbClr val="D5F5E3"/>
+            <a:srgbClr val="B2D9CD"/>
           </a:solidFill>
-          <a:ln w="12700">
+          <a:ln w="6350">
             <a:solidFill>
-              <a:srgbClr val="A9DFBF"/>
+              <a:srgbClr val="4CB88F"/>
             </a:solidFill>
           </a:ln>
         </p:spPr>
@@ -10467,15 +12043,13 @@
         </p:nvSpPr>
         <p:spPr>
           <a:xfrm>
-            <a:off x="457200" y="2361440"/>
-            <a:ext cx="5629800" cy="400000"/>
-          </a:xfrm>
-          <a:prstGeom prst="rect">
-            <a:avLst/>
-          </a:prstGeom>
-          <a:solidFill>
-            <a:srgbClr val="27AE60"/>
-          </a:solidFill>
+            <a:off x="637160" y="2603120"/>
+            <a:ext cx="411480" cy="411480"/>
+          </a:xfrm>
+          <a:prstGeom prst="rect">
+            <a:avLst/>
+          </a:prstGeom>
+          <a:noFill/>
           <a:ln>
             <a:noFill/>
           </a:ln>
@@ -10483,19 +12057,7 @@
         <p:txBody>
           <a:bodyPr anchor="ctr" lIns="91440" rIns="91440" tIns="91440" bIns="91440"/>
           <a:lstStyle/>
-          <a:p>
-            <a:pPr algn="ctr"/>
-            <a:r>
-              <a:rPr lang="ko-KR" altLang="en-US" sz="1400" b="1" dirty="0">
-                <a:solidFill>
-                  <a:srgbClr val="FFFFFF"/>
-                </a:solidFill>
-                <a:latin typeface="나눔스퀘어 ExtraBold"/>
-                <a:ea typeface="나눔스퀘어 ExtraBold"/>
-              </a:rPr>
-              <a:t>✔  DO — 반드시 해야 할 것</a:t>
-            </a:r>
-          </a:p>
+          <a:p/>
         </p:txBody>
       </p:sp>
       <p:sp>
@@ -10508,8 +12070,8 @@
         </p:nvSpPr>
         <p:spPr>
           <a:xfrm>
-            <a:off x="457200" y="2761440"/>
-            <a:ext cx="5629800" cy="4005120"/>
+            <a:off x="1209960" y="2603120"/>
+            <a:ext cx="4551840" cy="274320"/>
           </a:xfrm>
           <a:prstGeom prst="rect">
             <a:avLst/>
@@ -10520,84 +12082,19 @@
           </a:ln>
         </p:spPr>
         <p:txBody>
-          <a:bodyPr anchor="t" lIns="80000" rIns="80000" tIns="80000" bIns="80000"/>
+          <a:bodyPr anchor="ctr" lIns="0" rIns="0" tIns="0" bIns="0"/>
           <a:lstStyle/>
           <a:p>
             <a:pPr algn="l"/>
             <a:r>
-              <a:rPr lang="ko-KR" altLang="en-US" sz="1300" b="0" dirty="0">
-                <a:solidFill>
-                  <a:srgbClr val="404040"/>
-                </a:solidFill>
-                <a:latin typeface="Freesentation"/>
-                <a:ea typeface="Freesentation"/>
-              </a:rPr>
-              <a:t>✔  사전 데이터 정합성 검증 (row count + checksum)</a:t>
-            </a:r>
-          </a:p>
-          <a:p>
-            <a:pPr algn="l"/>
-            <a:r>
-              <a:rPr lang="ko-KR" altLang="en-US" sz="1300" b="0" dirty="0">
-                <a:solidFill>
-                  <a:srgbClr val="404040"/>
-                </a:solidFill>
-                <a:latin typeface="Freesentation"/>
-                <a:ea typeface="Freesentation"/>
-              </a:rPr>
-              <a:t>✔  전용선 사용 — Direct Connect 또는 Site-to-Site VPN</a:t>
-            </a:r>
-          </a:p>
-          <a:p>
-            <a:pPr algn="l"/>
-            <a:r>
-              <a:rPr lang="ko-KR" altLang="en-US" sz="1300" b="0" dirty="0">
-                <a:solidFill>
-                  <a:srgbClr val="404040"/>
-                </a:solidFill>
-                <a:latin typeface="Freesentation"/>
-                <a:ea typeface="Freesentation"/>
-              </a:rPr>
-              <a:t>✔  롤백 플랜 및 컷오프 기준 사전 문서화</a:t>
-            </a:r>
-          </a:p>
-          <a:p>
-            <a:pPr algn="l"/>
-            <a:r>
-              <a:rPr lang="ko-KR" altLang="en-US" sz="1300" b="0" dirty="0">
-                <a:solidFill>
-                  <a:srgbClr val="404040"/>
-                </a:solidFill>
-                <a:latin typeface="Freesentation"/>
-                <a:ea typeface="Freesentation"/>
-              </a:rPr>
-              <a:t>✔  단계적 전환 — 테이블 우선순위별 순차 이관</a:t>
-            </a:r>
-          </a:p>
-          <a:p>
-            <a:pPr algn="l"/>
-            <a:r>
-              <a:rPr lang="ko-KR" altLang="en-US" sz="1300" b="0" dirty="0">
-                <a:solidFill>
-                  <a:srgbClr val="404040"/>
-                </a:solidFill>
-                <a:latin typeface="Freesentation"/>
-                <a:ea typeface="Freesentation"/>
-              </a:rPr>
-              <a:t>✔  전환 전 48시간 이상 병렬 운영 및 검증</a:t>
-            </a:r>
-          </a:p>
-          <a:p>
-            <a:pPr algn="l"/>
-            <a:r>
-              <a:rPr lang="ko-KR" altLang="en-US" sz="1300" b="0" dirty="0">
-                <a:solidFill>
-                  <a:srgbClr val="404040"/>
-                </a:solidFill>
-                <a:latin typeface="Freesentation"/>
-                <a:ea typeface="Freesentation"/>
-              </a:rPr>
-              <a:t>✔  CloudWatch + 알람 설정 완료 후 컷오버</a:t>
+              <a:rPr sz="1400" b="1" dirty="0">
+                <a:solidFill>
+                  <a:srgbClr val="212121"/>
+                </a:solidFill>
+                <a:latin typeface="프리젠테이션 7"/>
+                <a:ea typeface="프리젠테이션 7"/>
+              </a:rPr>
+              <a:t>✅  DO — 반드시 해야 할 것</a:t>
             </a:r>
           </a:p>
         </p:txBody>
@@ -10612,25 +12109,118 @@
         </p:nvSpPr>
         <p:spPr>
           <a:xfrm>
-            <a:off x="6105000" y="2361440"/>
-            <a:ext cx="5629800" cy="4405120"/>
-          </a:xfrm>
-          <a:prstGeom prst="rect">
-            <a:avLst/>
-          </a:prstGeom>
-          <a:solidFill>
-            <a:srgbClr val="FADBD8"/>
-          </a:solidFill>
-          <a:ln w="12700">
-            <a:solidFill>
-              <a:srgbClr val="F1948A"/>
-            </a:solidFill>
+            <a:off x="637160" y="2968800"/>
+            <a:ext cx="5124480" cy="2930160"/>
+          </a:xfrm>
+          <a:prstGeom prst="rect">
+            <a:avLst/>
+          </a:prstGeom>
+          <a:noFill/>
+          <a:ln>
+            <a:noFill/>
           </a:ln>
         </p:spPr>
         <p:txBody>
-          <a:bodyPr anchor="ctr" lIns="91440" rIns="91440" tIns="91440" bIns="91440"/>
-          <a:lstStyle/>
-          <a:p/>
+          <a:bodyPr anchor="t" lIns="91440" rIns="91440" tIns="91440" bIns="91440"/>
+          <a:lstStyle/>
+          <a:p>
+            <a:pPr algn="l"/>
+            <a:r>
+              <a:rPr sz="1300" b="0" dirty="0">
+                <a:solidFill>
+                  <a:srgbClr val="212121"/>
+                </a:solidFill>
+                <a:latin typeface="Freesentation"/>
+                <a:ea typeface="Freesentation"/>
+              </a:rPr>
+              <a:t>✔  사전 데이터 정합성 검증 (row count + checksum)</a:t>
+            </a:r>
+          </a:p>
+          <a:p>
+            <a:pPr algn="l"/>
+            <a:endParaRPr sz="500"/>
+          </a:p>
+          <a:p>
+            <a:pPr algn="l"/>
+            <a:r>
+              <a:rPr sz="1300" b="0" dirty="0">
+                <a:solidFill>
+                  <a:srgbClr val="212121"/>
+                </a:solidFill>
+                <a:latin typeface="Freesentation"/>
+                <a:ea typeface="Freesentation"/>
+              </a:rPr>
+              <a:t>✔  전용선 사용 — Direct Connect 또는 Site-to-Site VPN</a:t>
+            </a:r>
+          </a:p>
+          <a:p>
+            <a:pPr algn="l"/>
+            <a:endParaRPr sz="500"/>
+          </a:p>
+          <a:p>
+            <a:pPr algn="l"/>
+            <a:r>
+              <a:rPr sz="1300" b="0" dirty="0">
+                <a:solidFill>
+                  <a:srgbClr val="212121"/>
+                </a:solidFill>
+                <a:latin typeface="Freesentation"/>
+                <a:ea typeface="Freesentation"/>
+              </a:rPr>
+              <a:t>✔  롤백 플랜 및 컷오프 기준 사전 문서화</a:t>
+            </a:r>
+          </a:p>
+          <a:p>
+            <a:pPr algn="l"/>
+            <a:endParaRPr sz="500"/>
+          </a:p>
+          <a:p>
+            <a:pPr algn="l"/>
+            <a:r>
+              <a:rPr sz="1300" b="0" dirty="0">
+                <a:solidFill>
+                  <a:srgbClr val="212121"/>
+                </a:solidFill>
+                <a:latin typeface="Freesentation"/>
+                <a:ea typeface="Freesentation"/>
+              </a:rPr>
+              <a:t>✔  단계적 전환 — 테이블 우선순위별 순차 이관</a:t>
+            </a:r>
+          </a:p>
+          <a:p>
+            <a:pPr algn="l"/>
+            <a:endParaRPr sz="500"/>
+          </a:p>
+          <a:p>
+            <a:pPr algn="l"/>
+            <a:r>
+              <a:rPr sz="1300" b="0" dirty="0">
+                <a:solidFill>
+                  <a:srgbClr val="212121"/>
+                </a:solidFill>
+                <a:latin typeface="Freesentation"/>
+                <a:ea typeface="Freesentation"/>
+              </a:rPr>
+              <a:t>✔  전환 전 48시간 이상 병렬 운영 및 검증</a:t>
+            </a:r>
+          </a:p>
+          <a:p>
+            <a:pPr algn="l"/>
+            <a:endParaRPr sz="500"/>
+          </a:p>
+          <a:p>
+            <a:pPr algn="l"/>
+            <a:r>
+              <a:rPr sz="1300" b="0" dirty="0">
+                <a:solidFill>
+                  <a:srgbClr val="212121"/>
+                </a:solidFill>
+                <a:latin typeface="Freesentation"/>
+                <a:ea typeface="Freesentation"/>
+              </a:rPr>
+              <a:t>✔  CloudWatch + 알람 설정 완료 후 컷오버</a:t>
+            </a:r>
+          </a:p>
         </p:txBody>
       </p:sp>
       <p:sp>
@@ -10643,35 +12233,27 @@
         </p:nvSpPr>
         <p:spPr>
           <a:xfrm>
-            <a:off x="6105000" y="2361440"/>
-            <a:ext cx="5629800" cy="400000"/>
-          </a:xfrm>
-          <a:prstGeom prst="rect">
-            <a:avLst/>
+            <a:off x="6291360" y="2423160"/>
+            <a:ext cx="5486400" cy="3657600"/>
+          </a:xfrm>
+          <a:prstGeom prst="roundRect">
+            <a:avLst>
+              <a:gd name="adj" fmla="val 16667"/>
+            </a:avLst>
           </a:prstGeom>
           <a:solidFill>
-            <a:srgbClr val="C0392B"/>
+            <a:srgbClr val="C62828"/>
           </a:solidFill>
-          <a:ln>
-            <a:noFill/>
+          <a:ln w="9525">
+            <a:solidFill>
+              <a:srgbClr val="C62828"/>
+            </a:solidFill>
           </a:ln>
         </p:spPr>
         <p:txBody>
           <a:bodyPr anchor="ctr" lIns="91440" rIns="91440" tIns="91440" bIns="91440"/>
           <a:lstStyle/>
-          <a:p>
-            <a:pPr algn="ctr"/>
-            <a:r>
-              <a:rPr lang="ko-KR" altLang="en-US" sz="1400" b="1" dirty="0">
-                <a:solidFill>
-                  <a:srgbClr val="FFFFFF"/>
-                </a:solidFill>
-                <a:latin typeface="나눔스퀘어 ExtraBold"/>
-                <a:ea typeface="나눔스퀘어 ExtraBold"/>
-              </a:rPr>
-              <a:t>✘  DON'T — 절대 하지 말 것</a:t>
-            </a:r>
-          </a:p>
+          <a:p/>
         </p:txBody>
       </p:sp>
       <p:sp>
@@ -10684,8 +12266,8 @@
         </p:nvSpPr>
         <p:spPr>
           <a:xfrm>
-            <a:off x="6105000" y="2761440"/>
-            <a:ext cx="5629800" cy="4005120"/>
+            <a:off x="6471320" y="2603120"/>
+            <a:ext cx="4551840" cy="274320"/>
           </a:xfrm>
           <a:prstGeom prst="rect">
             <a:avLst/>
@@ -10696,14 +12278,53 @@
           </a:ln>
         </p:spPr>
         <p:txBody>
-          <a:bodyPr anchor="t" lIns="80000" rIns="80000" tIns="80000" bIns="80000"/>
+          <a:bodyPr anchor="ctr" lIns="0" rIns="0" tIns="0" bIns="0"/>
           <a:lstStyle/>
           <a:p>
             <a:pPr algn="l"/>
             <a:r>
-              <a:rPr lang="ko-KR" altLang="en-US" sz="1300" b="0" dirty="0">
-                <a:solidFill>
-                  <a:srgbClr val="404040"/>
+              <a:rPr sz="1400" b="1" dirty="0">
+                <a:solidFill>
+                  <a:srgbClr val="FFFFFF"/>
+                </a:solidFill>
+                <a:latin typeface="프리젠테이션 7"/>
+                <a:ea typeface="프리젠테이션 7"/>
+              </a:rPr>
+              <a:t>✘  DON'T — 절대 하지 말 것</a:t>
+            </a:r>
+          </a:p>
+        </p:txBody>
+      </p:sp>
+      <p:sp>
+        <p:nvSpPr>
+          <p:cNvPr id="209" name="S209"/>
+          <p:cNvSpPr>
+            <a:spLocks noGrp="1"/>
+          </p:cNvSpPr>
+          <p:nvPr/>
+        </p:nvSpPr>
+        <p:spPr>
+          <a:xfrm>
+            <a:off x="6471320" y="2968800"/>
+            <a:ext cx="5124480" cy="2930160"/>
+          </a:xfrm>
+          <a:prstGeom prst="rect">
+            <a:avLst/>
+          </a:prstGeom>
+          <a:noFill/>
+          <a:ln>
+            <a:noFill/>
+          </a:ln>
+        </p:spPr>
+        <p:txBody>
+          <a:bodyPr anchor="t" lIns="91440" rIns="91440" tIns="91440" bIns="91440"/>
+          <a:lstStyle/>
+          <a:p>
+            <a:pPr algn="l"/>
+            <a:r>
+              <a:rPr sz="1300" b="0" dirty="0">
+                <a:solidFill>
+                  <a:srgbClr val="FFFFFF"/>
                 </a:solidFill>
                 <a:latin typeface="Freesentation"/>
                 <a:ea typeface="Freesentation"/>
@@ -10713,10 +12334,14 @@
           </a:p>
           <a:p>
             <a:pPr algn="l"/>
-            <a:r>
-              <a:rPr lang="ko-KR" altLang="en-US" sz="1300" b="0" dirty="0">
-                <a:solidFill>
-                  <a:srgbClr val="404040"/>
+            <a:endParaRPr sz="500"/>
+          </a:p>
+          <a:p>
+            <a:pPr algn="l"/>
+            <a:r>
+              <a:rPr sz="1300" b="0" dirty="0">
+                <a:solidFill>
+                  <a:srgbClr val="FFFFFF"/>
                 </a:solidFill>
                 <a:latin typeface="Freesentation"/>
                 <a:ea typeface="Freesentation"/>
@@ -10726,10 +12351,14 @@
           </a:p>
           <a:p>
             <a:pPr algn="l"/>
-            <a:r>
-              <a:rPr lang="ko-KR" altLang="en-US" sz="1300" b="0" dirty="0">
-                <a:solidFill>
-                  <a:srgbClr val="404040"/>
+            <a:endParaRPr sz="500"/>
+          </a:p>
+          <a:p>
+            <a:pPr algn="l"/>
+            <a:r>
+              <a:rPr sz="1300" b="0" dirty="0">
+                <a:solidFill>
+                  <a:srgbClr val="FFFFFF"/>
                 </a:solidFill>
                 <a:latin typeface="Freesentation"/>
                 <a:ea typeface="Freesentation"/>
@@ -10739,10 +12368,14 @@
           </a:p>
           <a:p>
             <a:pPr algn="l"/>
-            <a:r>
-              <a:rPr lang="ko-KR" altLang="en-US" sz="1300" b="0" dirty="0">
-                <a:solidFill>
-                  <a:srgbClr val="404040"/>
+            <a:endParaRPr sz="500"/>
+          </a:p>
+          <a:p>
+            <a:pPr algn="l"/>
+            <a:r>
+              <a:rPr sz="1300" b="0" dirty="0">
+                <a:solidFill>
+                  <a:srgbClr val="FFFFFF"/>
                 </a:solidFill>
                 <a:latin typeface="Freesentation"/>
                 <a:ea typeface="Freesentation"/>
@@ -10752,10 +12385,14 @@
           </a:p>
           <a:p>
             <a:pPr algn="l"/>
-            <a:r>
-              <a:rPr lang="ko-KR" altLang="en-US" sz="1300" b="0" dirty="0">
-                <a:solidFill>
-                  <a:srgbClr val="404040"/>
+            <a:endParaRPr sz="500"/>
+          </a:p>
+          <a:p>
+            <a:pPr algn="l"/>
+            <a:r>
+              <a:rPr sz="1300" b="0" dirty="0">
+                <a:solidFill>
+                  <a:srgbClr val="FFFFFF"/>
                 </a:solidFill>
                 <a:latin typeface="Freesentation"/>
                 <a:ea typeface="Freesentation"/>
@@ -10765,15 +12402,64 @@
           </a:p>
           <a:p>
             <a:pPr algn="l"/>
-            <a:r>
-              <a:rPr lang="ko-KR" altLang="en-US" sz="1300" b="0" dirty="0">
-                <a:solidFill>
-                  <a:srgbClr val="404040"/>
+            <a:endParaRPr sz="500"/>
+          </a:p>
+          <a:p>
+            <a:pPr algn="l"/>
+            <a:r>
+              <a:rPr sz="1300" b="0" dirty="0">
+                <a:solidFill>
+                  <a:srgbClr val="FFFFFF"/>
                 </a:solidFill>
                 <a:latin typeface="Freesentation"/>
                 <a:ea typeface="Freesentation"/>
               </a:rPr>
               <a:t>✘  원본 DB 즉시 철수 (최소 2주 보존 필수)</a:t>
+            </a:r>
+          </a:p>
+        </p:txBody>
+      </p:sp>
+      <p:sp>
+        <p:nvSpPr>
+          <p:cNvPr id="210" name="S210"/>
+          <p:cNvSpPr>
+            <a:spLocks noGrp="1"/>
+          </p:cNvSpPr>
+          <p:nvPr/>
+        </p:nvSpPr>
+        <p:spPr>
+          <a:xfrm>
+            <a:off x="457200" y="6172200"/>
+            <a:ext cx="11320560" cy="457200"/>
+          </a:xfrm>
+          <a:prstGeom prst="roundRect">
+            <a:avLst>
+              <a:gd name="adj" fmla="val 16667"/>
+            </a:avLst>
+          </a:prstGeom>
+          <a:solidFill>
+            <a:srgbClr val="F8F9FA"/>
+          </a:solidFill>
+          <a:ln w="6350">
+            <a:solidFill>
+              <a:srgbClr val="DCDCDC"/>
+            </a:solidFill>
+          </a:ln>
+        </p:spPr>
+        <p:txBody>
+          <a:bodyPr anchor="ctr" lIns="91440" rIns="91440" tIns="91440" bIns="91440"/>
+          <a:lstStyle/>
+          <a:p>
+            <a:pPr algn="l"/>
+            <a:r>
+              <a:rPr sz="1300" b="0" dirty="0">
+                <a:solidFill>
+                  <a:srgbClr val="212121"/>
+                </a:solidFill>
+                <a:latin typeface="Freesentation"/>
+                <a:ea typeface="Freesentation"/>
+              </a:rPr>
+              <a:t>📋  준수 현황: 6개 항목 전체 이행 — 컷오버 승인 게이트 통과 조건 완비</a:t>
             </a:r>
           </a:p>
         </p:txBody>
@@ -10781,7 +12467,7 @@
     </p:spTree>
     <p:extLst>
       <p:ext uri="{BB962C8B-B14F-4D97-AF65-F5344CB8AC3E}">
-        <p14:creationId xmlns:p14="http://schemas.microsoft.com/office/powerpoint/2010/main" val="2862818732"/>
+        <p14:creationId xmlns:p14="http://schemas.microsoft.com/office/powerpoint/2010/main" val="345444188"/>
       </p:ext>
     </p:extLst>
   </p:cSld>
@@ -10867,8 +12553,7 @@
                 <a:ea typeface="프리젠테이션 7 Bold" pitchFamily="2" charset="-127"/>
                 <a:cs typeface="Pretendard ExtraBold" panose="02000903000000020004" pitchFamily="2" charset="-127"/>
               </a:rPr>
-              <a:t>5-1.
-SWOT</a:t>
+              <a:t>서브색상</a:t>
             </a:r>
             <a:r>
               <a:rPr lang="ko-KR" altLang="en-US" sz="2000" dirty="0">
@@ -10876,8 +12561,28 @@
                 <a:ea typeface="프리젠테이션 7 Bold" pitchFamily="2" charset="-127"/>
                 <a:cs typeface="Pretendard ExtraBold" panose="02000903000000020004" pitchFamily="2" charset="-127"/>
               </a:rPr>
-              <a:t/>
-            </a:r>
+              <a:t> </a:t>
+            </a:r>
+          </a:p>
+          <a:p>
+            <a:pPr>
+              <a:lnSpc>
+                <a:spcPct val="120000"/>
+              </a:lnSpc>
+            </a:pPr>
+            <a:r>
+              <a:rPr lang="ko-KR" altLang="en-US" sz="2000" dirty="0">
+                <a:latin typeface="프리젠테이션 7 Bold" pitchFamily="2" charset="-127"/>
+                <a:ea typeface="프리젠테이션 7 Bold" pitchFamily="2" charset="-127"/>
+                <a:cs typeface="Pretendard ExtraBold" panose="02000903000000020004" pitchFamily="2" charset="-127"/>
+              </a:rPr>
+              <a:t>적용 예시</a:t>
+            </a:r>
+            <a:endParaRPr lang="ko-KR" altLang="en-US" sz="2000" dirty="0">
+              <a:latin typeface="프리젠테이션 7 Bold" pitchFamily="2" charset="-127"/>
+              <a:ea typeface="프리젠테이션 7 Bold" pitchFamily="2" charset="-127"/>
+              <a:cs typeface="Pretendard ExtraBold" panose="02000903000000020004" pitchFamily="2" charset="-127"/>
+            </a:endParaRPr>
           </a:p>
         </p:txBody>
       </p:sp>
@@ -10927,7 +12632,7 @@
                 <a:ea typeface="프리젠테이션 5 Medium" pitchFamily="2" charset="-127"/>
                 <a:cs typeface="Pretendard" panose="02000503000000020004" pitchFamily="2" charset="-127"/>
               </a:rPr>
-              <a:t>Oracle GoldenGate 도입 SWOT 분석 — 전략적 선택 기준</a:t>
+              <a:t>설명글을</a:t>
             </a:r>
             <a:r>
               <a:rPr lang="ko-KR" altLang="en-US" sz="1200" dirty="0">
@@ -10948,7 +12653,7 @@
                 <a:ea typeface="프리젠테이션 5 Medium" pitchFamily="2" charset="-127"/>
                 <a:cs typeface="Pretendard" panose="02000503000000020004" pitchFamily="2" charset="-127"/>
               </a:rPr>
-              <a:t/>
+              <a:t> 적어주세요</a:t>
             </a:r>
             <a:r>
               <a:rPr lang="en-US" altLang="ko-KR" sz="1200" b="1" dirty="0">
@@ -10969,7 +12674,7 @@
                 <a:ea typeface="프리젠테이션 5 Medium" pitchFamily="2" charset="-127"/>
                 <a:cs typeface="Pretendard" panose="02000503000000020004" pitchFamily="2" charset="-127"/>
               </a:rPr>
-              <a:t/>
+              <a:t>. </a:t>
             </a:r>
             <a:r>
               <a:rPr lang="ko-KR" altLang="en-US" sz="1200" b="1" dirty="0">
@@ -10987,7 +12692,7 @@
                 <a:ea typeface="프리젠테이션 7 Bold" pitchFamily="2" charset="-127"/>
                 <a:cs typeface="Pretendard" panose="02000503000000020004" pitchFamily="2" charset="-127"/>
               </a:rPr>
-              <a:t/>
+              <a:t>강조 텍스트</a:t>
             </a:r>
             <a:r>
               <a:rPr lang="en-US" altLang="ko-KR" sz="1200" b="1" dirty="0">
@@ -11005,7 +12710,7 @@
                 <a:ea typeface="프리젠테이션 7 Bold" pitchFamily="2" charset="-127"/>
                 <a:cs typeface="Pretendard" panose="02000503000000020004" pitchFamily="2" charset="-127"/>
               </a:rPr>
-              <a:t/>
+              <a:t>(</a:t>
             </a:r>
             <a:r>
               <a:rPr lang="ko-KR" altLang="en-US" sz="1200" b="1" dirty="0" err="1">
@@ -11023,7 +12728,7 @@
                 <a:ea typeface="프리젠테이션 7 Bold" pitchFamily="2" charset="-127"/>
                 <a:cs typeface="Pretendard" panose="02000503000000020004" pitchFamily="2" charset="-127"/>
               </a:rPr>
-              <a:t/>
+              <a:t>프리젠테이션</a:t>
             </a:r>
             <a:r>
               <a:rPr lang="ko-KR" altLang="en-US" sz="1200" b="1" dirty="0">
@@ -11041,7 +12746,7 @@
                 <a:ea typeface="프리젠테이션 7 Bold" pitchFamily="2" charset="-127"/>
                 <a:cs typeface="Pretendard" panose="02000503000000020004" pitchFamily="2" charset="-127"/>
               </a:rPr>
-              <a:t/>
+              <a:t> </a:t>
             </a:r>
             <a:r>
               <a:rPr lang="en-US" altLang="ko-KR" sz="1200" b="1" dirty="0">
@@ -11059,7 +12764,7 @@
                 <a:ea typeface="프리젠테이션 7 Bold" pitchFamily="2" charset="-127"/>
                 <a:cs typeface="Pretendard" panose="02000503000000020004" pitchFamily="2" charset="-127"/>
               </a:rPr>
-              <a:t/>
+              <a:t>7 Bold, </a:t>
             </a:r>
             <a:r>
               <a:rPr lang="ko-KR" altLang="en-US" sz="1200" b="1" dirty="0">
@@ -11077,7 +12782,7 @@
                 <a:ea typeface="프리젠테이션 7 Bold" pitchFamily="2" charset="-127"/>
                 <a:cs typeface="Pretendard" panose="02000503000000020004" pitchFamily="2" charset="-127"/>
               </a:rPr>
-              <a:t/>
+              <a:t>메인 컬러</a:t>
             </a:r>
             <a:r>
               <a:rPr lang="en-US" altLang="ko-KR" sz="1200" b="1" dirty="0" smtClean="0">
@@ -11095,8 +12800,219 @@
                 <a:ea typeface="프리젠테이션 7 Bold" pitchFamily="2" charset="-127"/>
                 <a:cs typeface="Pretendard" panose="02000503000000020004" pitchFamily="2" charset="-127"/>
               </a:rPr>
-              <a:t/>
-            </a:r>
+              <a:t>)</a:t>
+            </a:r>
+          </a:p>
+          <a:p>
+            <a:pPr latinLnBrk="0">
+              <a:lnSpc>
+                <a:spcPct val="150000"/>
+              </a:lnSpc>
+            </a:pPr>
+            <a:r>
+              <a:rPr lang="ko-KR" altLang="en-US" sz="1200" dirty="0" smtClean="0">
+                <a:ln>
+                  <a:solidFill>
+                    <a:schemeClr val="accent1">
+                      <a:alpha val="0"/>
+                    </a:schemeClr>
+                  </a:solidFill>
+                </a:ln>
+                <a:solidFill>
+                  <a:schemeClr val="tx1">
+                    <a:lumMod val="75000"/>
+                    <a:lumOff val="25000"/>
+                  </a:schemeClr>
+                </a:solidFill>
+                <a:latin typeface="프리젠테이션 5 Medium" pitchFamily="2" charset="-127"/>
+                <a:ea typeface="프리젠테이션 5 Medium" pitchFamily="2" charset="-127"/>
+                <a:cs typeface="Pretendard" panose="02000503000000020004" pitchFamily="2" charset="-127"/>
+              </a:rPr>
+              <a:t>폰트 </a:t>
+            </a:r>
+            <a:r>
+              <a:rPr lang="en-US" altLang="ko-KR" sz="1200" dirty="0" smtClean="0">
+                <a:ln>
+                  <a:solidFill>
+                    <a:schemeClr val="accent1">
+                      <a:alpha val="0"/>
+                    </a:schemeClr>
+                  </a:solidFill>
+                </a:ln>
+                <a:solidFill>
+                  <a:schemeClr val="tx1">
+                    <a:lumMod val="75000"/>
+                    <a:lumOff val="25000"/>
+                  </a:schemeClr>
+                </a:solidFill>
+                <a:latin typeface="프리젠테이션 5 Medium" pitchFamily="2" charset="-127"/>
+                <a:ea typeface="프리젠테이션 5 Medium" pitchFamily="2" charset="-127"/>
+                <a:cs typeface="Pretendard" panose="02000503000000020004" pitchFamily="2" charset="-127"/>
+              </a:rPr>
+              <a:t>: </a:t>
+            </a:r>
+            <a:r>
+              <a:rPr lang="ko-KR" altLang="en-US" sz="1200" dirty="0" err="1" smtClean="0">
+                <a:ln>
+                  <a:solidFill>
+                    <a:schemeClr val="accent1">
+                      <a:alpha val="0"/>
+                    </a:schemeClr>
+                  </a:solidFill>
+                </a:ln>
+                <a:solidFill>
+                  <a:schemeClr val="tx1">
+                    <a:lumMod val="75000"/>
+                    <a:lumOff val="25000"/>
+                  </a:schemeClr>
+                </a:solidFill>
+                <a:latin typeface="프리젠테이션 5 Medium" pitchFamily="2" charset="-127"/>
+                <a:ea typeface="프리젠테이션 5 Medium" pitchFamily="2" charset="-127"/>
+                <a:cs typeface="Pretendard" panose="02000503000000020004" pitchFamily="2" charset="-127"/>
+              </a:rPr>
+              <a:t>프리젠테이션</a:t>
+            </a:r>
+            <a:r>
+              <a:rPr lang="ko-KR" altLang="en-US" sz="1200" dirty="0" smtClean="0">
+                <a:ln>
+                  <a:solidFill>
+                    <a:schemeClr val="accent1">
+                      <a:alpha val="0"/>
+                    </a:schemeClr>
+                  </a:solidFill>
+                </a:ln>
+                <a:solidFill>
+                  <a:schemeClr val="tx1">
+                    <a:lumMod val="75000"/>
+                    <a:lumOff val="25000"/>
+                  </a:schemeClr>
+                </a:solidFill>
+                <a:latin typeface="프리젠테이션 5 Medium" pitchFamily="2" charset="-127"/>
+                <a:ea typeface="프리젠테이션 5 Medium" pitchFamily="2" charset="-127"/>
+                <a:cs typeface="Pretendard" panose="02000503000000020004" pitchFamily="2" charset="-127"/>
+              </a:rPr>
+              <a:t> </a:t>
+            </a:r>
+            <a:r>
+              <a:rPr lang="en-US" altLang="ko-KR" sz="1200" dirty="0" smtClean="0">
+                <a:ln>
+                  <a:solidFill>
+                    <a:schemeClr val="accent1">
+                      <a:alpha val="0"/>
+                    </a:schemeClr>
+                  </a:solidFill>
+                </a:ln>
+                <a:solidFill>
+                  <a:schemeClr val="tx1">
+                    <a:lumMod val="75000"/>
+                    <a:lumOff val="25000"/>
+                  </a:schemeClr>
+                </a:solidFill>
+                <a:latin typeface="프리젠테이션 5 Medium" pitchFamily="2" charset="-127"/>
+                <a:ea typeface="프리젠테이션 5 Medium" pitchFamily="2" charset="-127"/>
+                <a:cs typeface="Pretendard" panose="02000503000000020004" pitchFamily="2" charset="-127"/>
+              </a:rPr>
+              <a:t>5 Medium 12pt  </a:t>
+            </a:r>
+            <a:r>
+              <a:rPr lang="ko-KR" altLang="en-US" sz="1200" dirty="0" smtClean="0">
+                <a:ln>
+                  <a:solidFill>
+                    <a:schemeClr val="accent1">
+                      <a:alpha val="0"/>
+                    </a:schemeClr>
+                  </a:solidFill>
+                </a:ln>
+                <a:solidFill>
+                  <a:schemeClr val="tx1">
+                    <a:lumMod val="75000"/>
+                    <a:lumOff val="25000"/>
+                  </a:schemeClr>
+                </a:solidFill>
+                <a:latin typeface="프리젠테이션 5 Medium" pitchFamily="2" charset="-127"/>
+                <a:ea typeface="프리젠테이션 5 Medium" pitchFamily="2" charset="-127"/>
+                <a:cs typeface="Pretendard" panose="02000503000000020004" pitchFamily="2" charset="-127"/>
+              </a:rPr>
+              <a:t>최대 </a:t>
+            </a:r>
+            <a:r>
+              <a:rPr lang="en-US" altLang="ko-KR" sz="1200" dirty="0" smtClean="0">
+                <a:ln>
+                  <a:solidFill>
+                    <a:schemeClr val="accent1">
+                      <a:alpha val="0"/>
+                    </a:schemeClr>
+                  </a:solidFill>
+                </a:ln>
+                <a:solidFill>
+                  <a:schemeClr val="tx1">
+                    <a:lumMod val="75000"/>
+                    <a:lumOff val="25000"/>
+                  </a:schemeClr>
+                </a:solidFill>
+                <a:latin typeface="프리젠테이션 5 Medium" pitchFamily="2" charset="-127"/>
+                <a:ea typeface="프리젠테이션 5 Medium" pitchFamily="2" charset="-127"/>
+                <a:cs typeface="Pretendard" panose="02000503000000020004" pitchFamily="2" charset="-127"/>
+              </a:rPr>
+              <a:t>3</a:t>
+            </a:r>
+            <a:r>
+              <a:rPr lang="ko-KR" altLang="en-US" sz="1200" dirty="0" smtClean="0">
+                <a:ln>
+                  <a:solidFill>
+                    <a:schemeClr val="accent1">
+                      <a:alpha val="0"/>
+                    </a:schemeClr>
+                  </a:solidFill>
+                </a:ln>
+                <a:solidFill>
+                  <a:schemeClr val="tx1">
+                    <a:lumMod val="75000"/>
+                    <a:lumOff val="25000"/>
+                  </a:schemeClr>
+                </a:solidFill>
+                <a:latin typeface="프리젠테이션 5 Medium" pitchFamily="2" charset="-127"/>
+                <a:ea typeface="프리젠테이션 5 Medium" pitchFamily="2" charset="-127"/>
+                <a:cs typeface="Pretendard" panose="02000503000000020004" pitchFamily="2" charset="-127"/>
+              </a:rPr>
+              <a:t>줄까지 작성 가능합니다</a:t>
+            </a:r>
+            <a:r>
+              <a:rPr lang="en-US" altLang="ko-KR" sz="1200" dirty="0" smtClean="0">
+                <a:ln>
+                  <a:solidFill>
+                    <a:schemeClr val="accent1">
+                      <a:alpha val="0"/>
+                    </a:schemeClr>
+                  </a:solidFill>
+                </a:ln>
+                <a:solidFill>
+                  <a:schemeClr val="tx1">
+                    <a:lumMod val="75000"/>
+                    <a:lumOff val="25000"/>
+                  </a:schemeClr>
+                </a:solidFill>
+                <a:latin typeface="프리젠테이션 5 Medium" pitchFamily="2" charset="-127"/>
+                <a:ea typeface="프리젠테이션 5 Medium" pitchFamily="2" charset="-127"/>
+                <a:cs typeface="Pretendard" panose="02000503000000020004" pitchFamily="2" charset="-127"/>
+              </a:rPr>
+              <a:t>.</a:t>
+            </a:r>
+            <a:endParaRPr lang="en-US" altLang="ko-KR" sz="1200" dirty="0">
+              <a:ln>
+                <a:solidFill>
+                  <a:schemeClr val="accent1">
+                    <a:alpha val="0"/>
+                  </a:schemeClr>
+                </a:solidFill>
+              </a:ln>
+              <a:solidFill>
+                <a:srgbClr val="2765E1"/>
+              </a:solidFill>
+              <a:latin typeface="프리젠테이션 5 Medium" pitchFamily="2" charset="-127"/>
+              <a:ea typeface="프리젠테이션 5 Medium" pitchFamily="2" charset="-127"/>
+              <a:cs typeface="Pretendard" panose="02000503000000020004" pitchFamily="2" charset="-127"/>
+            </a:endParaRPr>
           </a:p>
         </p:txBody>
       </p:sp>
@@ -11110,8 +13026,8 @@
         </p:nvSpPr>
         <p:spPr>
           <a:xfrm>
-            <a:off x="457200" y="1750000"/>
-            <a:ext cx="11277600" cy="280000"/>
+            <a:off x="457200" y="1600200"/>
+            <a:ext cx="11277600" cy="320040"/>
           </a:xfrm>
           <a:prstGeom prst="rect">
             <a:avLst/>
@@ -11122,14 +13038,14 @@
           </a:ln>
         </p:spPr>
         <p:txBody>
-          <a:bodyPr anchor="ctr" lIns="91440" rIns="91440" tIns="91440" bIns="91440"/>
+          <a:bodyPr anchor="ctr" lIns="0" rIns="0" tIns="0" bIns="0"/>
           <a:lstStyle/>
           <a:p>
             <a:pPr algn="l"/>
             <a:r>
-              <a:rPr lang="ko-KR" altLang="en-US" sz="1600" b="1" dirty="0">
-                <a:solidFill>
-                  <a:srgbClr val="1B3A5C"/>
+              <a:rPr sz="1600" b="1" dirty="0">
+                <a:solidFill>
+                  <a:srgbClr val="0043DA"/>
                 </a:solidFill>
                 <a:latin typeface="Freesentation"/>
                 <a:ea typeface="Freesentation"/>
@@ -11149,8 +13065,8 @@
         </p:nvSpPr>
         <p:spPr>
           <a:xfrm>
-            <a:off x="457200" y="2040000"/>
-            <a:ext cx="11277600" cy="230000"/>
+            <a:off x="457200" y="1965960"/>
+            <a:ext cx="11277600" cy="274320"/>
           </a:xfrm>
           <a:prstGeom prst="rect">
             <a:avLst/>
@@ -11161,14 +13077,14 @@
           </a:ln>
         </p:spPr>
         <p:txBody>
-          <a:bodyPr anchor="ctr" lIns="91440" rIns="91440" tIns="91440" bIns="91440"/>
+          <a:bodyPr anchor="ctr" lIns="0" rIns="0" tIns="0" bIns="0"/>
           <a:lstStyle/>
           <a:p>
             <a:pPr algn="l"/>
             <a:r>
-              <a:rPr lang="ko-KR" altLang="en-US" sz="1200" b="0" dirty="0">
-                <a:solidFill>
-                  <a:srgbClr val="7F8C8D"/>
+              <a:rPr sz="1300" b="0" dirty="0">
+                <a:solidFill>
+                  <a:srgbClr val="212121"/>
                 </a:solidFill>
                 <a:latin typeface="Freesentation"/>
                 <a:ea typeface="Freesentation"/>
@@ -11188,25 +13104,33 @@
         </p:nvSpPr>
         <p:spPr>
           <a:xfrm>
-            <a:off x="457200" y="2361440"/>
-            <a:ext cx="5629800" cy="2193560"/>
-          </a:xfrm>
-          <a:prstGeom prst="rect">
-            <a:avLst/>
-          </a:prstGeom>
-          <a:solidFill>
-            <a:srgbClr val="D5F5E3"/>
-          </a:solidFill>
-          <a:ln w="12700">
-            <a:solidFill>
-              <a:srgbClr val="CCCCCC"/>
-            </a:solidFill>
+            <a:off x="457200" y="2423160"/>
+            <a:ext cx="5593080" cy="182880"/>
+          </a:xfrm>
+          <a:prstGeom prst="rect">
+            <a:avLst/>
+          </a:prstGeom>
+          <a:noFill/>
+          <a:ln>
+            <a:noFill/>
           </a:ln>
         </p:spPr>
         <p:txBody>
-          <a:bodyPr anchor="ctr" lIns="91440" rIns="91440" tIns="91440" bIns="91440"/>
-          <a:lstStyle/>
-          <a:p/>
+          <a:bodyPr anchor="ctr" lIns="0" rIns="0" tIns="0" bIns="0"/>
+          <a:lstStyle/>
+          <a:p>
+            <a:pPr algn="ctr"/>
+            <a:r>
+              <a:rPr sz="1100" b="0" dirty="0">
+                <a:solidFill>
+                  <a:srgbClr val="505050"/>
+                </a:solidFill>
+                <a:latin typeface="Freesentation"/>
+                <a:ea typeface="Freesentation"/>
+              </a:rPr>
+              <a:t>내부 요인</a:t>
+            </a:r>
+          </a:p>
         </p:txBody>
       </p:sp>
       <p:sp>
@@ -11219,14 +13143,84 @@
         </p:nvSpPr>
         <p:spPr>
           <a:xfrm>
-            <a:off x="457200" y="2361440"/>
-            <a:ext cx="5629800" cy="340000"/>
+            <a:off x="6141720" y="2423160"/>
+            <a:ext cx="5593080" cy="182880"/>
+          </a:xfrm>
+          <a:prstGeom prst="rect">
+            <a:avLst/>
+          </a:prstGeom>
+          <a:noFill/>
+          <a:ln>
+            <a:noFill/>
+          </a:ln>
+        </p:spPr>
+        <p:txBody>
+          <a:bodyPr anchor="ctr" lIns="0" rIns="0" tIns="0" bIns="0"/>
+          <a:lstStyle/>
+          <a:p>
+            <a:pPr algn="ctr"/>
+            <a:r>
+              <a:rPr sz="1100" b="0" dirty="0">
+                <a:solidFill>
+                  <a:srgbClr val="505050"/>
+                </a:solidFill>
+                <a:latin typeface="Freesentation"/>
+                <a:ea typeface="Freesentation"/>
+              </a:rPr>
+              <a:t>외부 요인</a:t>
+            </a:r>
+          </a:p>
+        </p:txBody>
+      </p:sp>
+      <p:sp>
+        <p:nvSpPr>
+          <p:cNvPr id="205" name="S205"/>
+          <p:cNvSpPr>
+            <a:spLocks noGrp="1"/>
+          </p:cNvSpPr>
+          <p:nvPr/>
+        </p:nvSpPr>
+        <p:spPr>
+          <a:xfrm>
+            <a:off x="457200" y="2606040"/>
+            <a:ext cx="5593080" cy="1714500"/>
           </a:xfrm>
           <a:prstGeom prst="rect">
             <a:avLst/>
           </a:prstGeom>
           <a:solidFill>
-            <a:srgbClr val="27AE60"/>
+            <a:srgbClr val="DBF1E9"/>
+          </a:solidFill>
+          <a:ln w="12700">
+            <a:solidFill>
+              <a:srgbClr val="DCDCDC"/>
+            </a:solidFill>
+          </a:ln>
+        </p:spPr>
+        <p:txBody>
+          <a:bodyPr anchor="ctr" lIns="91440" rIns="91440" tIns="91440" bIns="91440"/>
+          <a:lstStyle/>
+          <a:p/>
+        </p:txBody>
+      </p:sp>
+      <p:sp>
+        <p:nvSpPr>
+          <p:cNvPr id="206" name="S206"/>
+          <p:cNvSpPr>
+            <a:spLocks noGrp="1"/>
+          </p:cNvSpPr>
+          <p:nvPr/>
+        </p:nvSpPr>
+        <p:spPr>
+          <a:xfrm>
+            <a:off x="457200" y="2606040"/>
+            <a:ext cx="5593080" cy="320040"/>
+          </a:xfrm>
+          <a:prstGeom prst="rect">
+            <a:avLst/>
+          </a:prstGeom>
+          <a:solidFill>
+            <a:srgbClr val="4CB88F"/>
           </a:solidFill>
           <a:ln>
             <a:noFill/>
@@ -11236,23 +13230,23 @@
           <a:bodyPr anchor="ctr" lIns="91440" rIns="91440" tIns="91440" bIns="91440"/>
           <a:lstStyle/>
           <a:p>
-            <a:pPr algn="ctr"/>
-            <a:r>
-              <a:rPr lang="ko-KR" altLang="en-US" sz="1300" b="1" dirty="0">
+            <a:pPr algn="l"/>
+            <a:r>
+              <a:rPr sz="1400" b="1" dirty="0">
                 <a:solidFill>
                   <a:srgbClr val="FFFFFF"/>
                 </a:solidFill>
-                <a:latin typeface="나눔스퀘어 ExtraBold"/>
-                <a:ea typeface="나눔스퀘어 ExtraBold"/>
-              </a:rPr>
-              <a:t>S  Strength (강점)</a:t>
-            </a:r>
-          </a:p>
-        </p:txBody>
-      </p:sp>
-      <p:sp>
-        <p:nvSpPr>
-          <p:cNvPr id="205" name="S205"/>
+                <a:latin typeface="프리젠테이션 7"/>
+                <a:ea typeface="프리젠테이션 7"/>
+              </a:rPr>
+              <a:t>💪  강점 (Strength)</a:t>
+            </a:r>
+          </a:p>
+        </p:txBody>
+      </p:sp>
+      <p:sp>
+        <p:nvSpPr>
+          <p:cNvPr id="207" name="S207"/>
           <p:cNvSpPr>
             <a:spLocks noGrp="1"/>
           </p:cNvSpPr>
@@ -11260,8 +13254,8 @@
         </p:nvSpPr>
         <p:spPr>
           <a:xfrm>
-            <a:off x="457200" y="2701440"/>
-            <a:ext cx="5629800" cy="1853560"/>
+            <a:off x="457200" y="2986080"/>
+            <a:ext cx="5593080" cy="1334460"/>
           </a:xfrm>
           <a:prstGeom prst="rect">
             <a:avLst/>
@@ -11272,78 +13266,81 @@
           </a:ln>
         </p:spPr>
         <p:txBody>
-          <a:bodyPr anchor="t" lIns="70000" rIns="70000" tIns="70000" bIns="70000"/>
+          <a:bodyPr anchor="t" lIns="91440" rIns="91440" tIns="91440" bIns="91440"/>
           <a:lstStyle/>
           <a:p>
             <a:pPr algn="l"/>
             <a:r>
-              <a:rPr lang="ko-KR" altLang="en-US" sz="1300" b="0" dirty="0">
-                <a:solidFill>
-                  <a:srgbClr val="404040"/>
+              <a:rPr sz="1300" b="0" dirty="0">
+                <a:solidFill>
+                  <a:srgbClr val="212121"/>
                 </a:solidFill>
                 <a:latin typeface="Freesentation"/>
                 <a:ea typeface="Freesentation"/>
               </a:rPr>
-              <a:t>• Oracle 공식 인증 CDC 솔루션</a:t>
+              <a:t>Oracle 공식 인증 CDC — Redo Log 비침투적 복제</a:t>
             </a:r>
           </a:p>
           <a:p>
             <a:pPr algn="l"/>
-            <a:r>
-              <a:rPr lang="ko-KR" altLang="en-US" sz="1300" b="0" dirty="0">
-                <a:solidFill>
-                  <a:srgbClr val="404040"/>
+            <a:endParaRPr sz="400"/>
+          </a:p>
+          <a:p>
+            <a:pPr algn="l"/>
+            <a:r>
+              <a:rPr sz="1300" b="0" dirty="0">
+                <a:solidFill>
+                  <a:srgbClr val="212121"/>
                 </a:solidFill>
                 <a:latin typeface="Freesentation"/>
                 <a:ea typeface="Freesentation"/>
               </a:rPr>
-              <a:t>• Redo Log 기반 비침투적 복제</a:t>
+              <a:t>양방향 복제 (Active-Active) 지원</a:t>
             </a:r>
           </a:p>
           <a:p>
             <a:pPr algn="l"/>
-            <a:r>
-              <a:rPr lang="ko-KR" altLang="en-US" sz="1300" b="0" dirty="0">
-                <a:solidFill>
-                  <a:srgbClr val="404040"/>
+            <a:endParaRPr sz="400"/>
+          </a:p>
+          <a:p>
+            <a:pPr algn="l"/>
+            <a:r>
+              <a:rPr sz="1300" b="0" dirty="0">
+                <a:solidFill>
+                  <a:srgbClr val="212121"/>
                 </a:solidFill>
                 <a:latin typeface="Freesentation"/>
                 <a:ea typeface="Freesentation"/>
               </a:rPr>
-              <a:t>• 양방향 복제 (Active-Active 지원)</a:t>
+              <a:t>DDL 복제 및 SQLEXEC 변환 기능</a:t>
             </a:r>
           </a:p>
           <a:p>
             <a:pPr algn="l"/>
-            <a:r>
-              <a:rPr lang="ko-KR" altLang="en-US" sz="1300" b="0" dirty="0">
-                <a:solidFill>
-                  <a:srgbClr val="404040"/>
+            <a:endParaRPr sz="400"/>
+          </a:p>
+          <a:p>
+            <a:pPr algn="l"/>
+            <a:r>
+              <a:rPr sz="1300" b="0" dirty="0">
+                <a:solidFill>
+                  <a:srgbClr val="212121"/>
                 </a:solidFill>
                 <a:latin typeface="Freesentation"/>
                 <a:ea typeface="Freesentation"/>
               </a:rPr>
-              <a:t>• DDL 복제 및 SQLEXEC 변환</a:t>
+              <a:t>Oracle 19c+ Microservices 아키텍처 지원</a:t>
             </a:r>
           </a:p>
           <a:p>
             <a:pPr algn="l"/>
-            <a:r>
-              <a:rPr lang="ko-KR" altLang="en-US" sz="1300" b="0" dirty="0">
-                <a:solidFill>
-                  <a:srgbClr val="404040"/>
-                </a:solidFill>
-                <a:latin typeface="Freesentation"/>
-                <a:ea typeface="Freesentation"/>
-              </a:rPr>
-              <a:t>• Oracle 19c+ Microservices 아키텍처</a:t>
-            </a:r>
-          </a:p>
-        </p:txBody>
-      </p:sp>
-      <p:sp>
-        <p:nvSpPr>
-          <p:cNvPr id="206" name="S206"/>
+            <a:endParaRPr sz="400"/>
+          </a:p>
+        </p:txBody>
+      </p:sp>
+      <p:sp>
+        <p:nvSpPr>
+          <p:cNvPr id="208" name="S208"/>
           <p:cNvSpPr>
             <a:spLocks noGrp="1"/>
           </p:cNvSpPr>
@@ -11351,18 +13348,18 @@
         </p:nvSpPr>
         <p:spPr>
           <a:xfrm>
-            <a:off x="6105000" y="2361440"/>
-            <a:ext cx="5629800" cy="2193560"/>
+            <a:off x="6141720" y="2606040"/>
+            <a:ext cx="5593080" cy="1714500"/>
           </a:xfrm>
           <a:prstGeom prst="rect">
             <a:avLst/>
           </a:prstGeom>
           <a:solidFill>
-            <a:srgbClr val="FADBD8"/>
+            <a:srgbClr val="E6EDFA"/>
           </a:solidFill>
           <a:ln w="12700">
             <a:solidFill>
-              <a:srgbClr val="CCCCCC"/>
+              <a:srgbClr val="DCDCDC"/>
             </a:solidFill>
           </a:ln>
         </p:spPr>
@@ -11374,7 +13371,7 @@
       </p:sp>
       <p:sp>
         <p:nvSpPr>
-          <p:cNvPr id="207" name="S207"/>
+          <p:cNvPr id="209" name="S209"/>
           <p:cNvSpPr>
             <a:spLocks noGrp="1"/>
           </p:cNvSpPr>
@@ -11382,14 +13379,14 @@
         </p:nvSpPr>
         <p:spPr>
           <a:xfrm>
-            <a:off x="6105000" y="2361440"/>
-            <a:ext cx="5629800" cy="340000"/>
+            <a:off x="6141720" y="2606040"/>
+            <a:ext cx="5593080" cy="320040"/>
           </a:xfrm>
           <a:prstGeom prst="rect">
             <a:avLst/>
           </a:prstGeom>
           <a:solidFill>
-            <a:srgbClr val="C0392B"/>
+            <a:srgbClr val="0043DA"/>
           </a:solidFill>
           <a:ln>
             <a:noFill/>
@@ -11399,23 +13396,23 @@
           <a:bodyPr anchor="ctr" lIns="91440" rIns="91440" tIns="91440" bIns="91440"/>
           <a:lstStyle/>
           <a:p>
-            <a:pPr algn="ctr"/>
-            <a:r>
-              <a:rPr lang="ko-KR" altLang="en-US" sz="1300" b="1" dirty="0">
+            <a:pPr algn="l"/>
+            <a:r>
+              <a:rPr sz="1400" b="1" dirty="0">
                 <a:solidFill>
                   <a:srgbClr val="FFFFFF"/>
                 </a:solidFill>
-                <a:latin typeface="나눔스퀘어 ExtraBold"/>
-                <a:ea typeface="나눔스퀘어 ExtraBold"/>
-              </a:rPr>
-              <a:t>W  Weakness (약점)</a:t>
-            </a:r>
-          </a:p>
-        </p:txBody>
-      </p:sp>
-      <p:sp>
-        <p:nvSpPr>
-          <p:cNvPr id="208" name="S208"/>
+                <a:latin typeface="프리젠테이션 7"/>
+                <a:ea typeface="프리젠테이션 7"/>
+              </a:rPr>
+              <a:t>🎯  기회 (Opportunity)</a:t>
+            </a:r>
+          </a:p>
+        </p:txBody>
+      </p:sp>
+      <p:sp>
+        <p:nvSpPr>
+          <p:cNvPr id="210" name="S210"/>
           <p:cNvSpPr>
             <a:spLocks noGrp="1"/>
           </p:cNvSpPr>
@@ -11423,8 +13420,8 @@
         </p:nvSpPr>
         <p:spPr>
           <a:xfrm>
-            <a:off x="6105000" y="2701440"/>
-            <a:ext cx="5629800" cy="1853560"/>
+            <a:off x="6141720" y="2986080"/>
+            <a:ext cx="5593080" cy="1334460"/>
           </a:xfrm>
           <a:prstGeom prst="rect">
             <a:avLst/>
@@ -11435,78 +13432,81 @@
           </a:ln>
         </p:spPr>
         <p:txBody>
-          <a:bodyPr anchor="t" lIns="70000" rIns="70000" tIns="70000" bIns="70000"/>
+          <a:bodyPr anchor="t" lIns="91440" rIns="91440" tIns="91440" bIns="91440"/>
           <a:lstStyle/>
           <a:p>
             <a:pPr algn="l"/>
             <a:r>
-              <a:rPr lang="ko-KR" altLang="en-US" sz="1300" b="0" dirty="0">
-                <a:solidFill>
-                  <a:srgbClr val="404040"/>
+              <a:rPr sz="1300" b="0" dirty="0">
+                <a:solidFill>
+                  <a:srgbClr val="212121"/>
                 </a:solidFill>
                 <a:latin typeface="Freesentation"/>
                 <a:ea typeface="Freesentation"/>
               </a:rPr>
-              <a:t>• 높은 라이선스·유지보수 비용</a:t>
+              <a:t>AWS OCI GoldenGate SaaS 출시 — 관리형 전환</a:t>
             </a:r>
           </a:p>
           <a:p>
             <a:pPr algn="l"/>
-            <a:r>
-              <a:rPr lang="ko-KR" altLang="en-US" sz="1300" b="0" dirty="0">
-                <a:solidFill>
-                  <a:srgbClr val="404040"/>
+            <a:endParaRPr sz="400"/>
+          </a:p>
+          <a:p>
+            <a:pPr algn="l"/>
+            <a:r>
+              <a:rPr sz="1300" b="0" dirty="0">
+                <a:solidFill>
+                  <a:srgbClr val="212121"/>
                 </a:solidFill>
                 <a:latin typeface="Freesentation"/>
                 <a:ea typeface="Freesentation"/>
               </a:rPr>
-              <a:t>• Oracle 플랫폼 종속성</a:t>
+              <a:t>실시간 CDC 분석 수요 급증</a:t>
             </a:r>
           </a:p>
           <a:p>
             <a:pPr algn="l"/>
-            <a:r>
-              <a:rPr lang="ko-KR" altLang="en-US" sz="1300" b="0" dirty="0">
-                <a:solidFill>
-                  <a:srgbClr val="404040"/>
+            <a:endParaRPr sz="400"/>
+          </a:p>
+          <a:p>
+            <a:pPr algn="l"/>
+            <a:r>
+              <a:rPr sz="1300" b="0" dirty="0">
+                <a:solidFill>
+                  <a:srgbClr val="212121"/>
                 </a:solidFill>
                 <a:latin typeface="Freesentation"/>
                 <a:ea typeface="Freesentation"/>
               </a:rPr>
-              <a:t>• 운영 전문 인력 필수 (OGG DBA)</a:t>
+              <a:t>금융·공공 레퍼런스 풍부 (국내 15건+)</a:t>
             </a:r>
           </a:p>
           <a:p>
             <a:pPr algn="l"/>
-            <a:r>
-              <a:rPr lang="ko-KR" altLang="en-US" sz="1300" b="0" dirty="0">
-                <a:solidFill>
-                  <a:srgbClr val="404040"/>
+            <a:endParaRPr sz="400"/>
+          </a:p>
+          <a:p>
+            <a:pPr algn="l"/>
+            <a:r>
+              <a:rPr sz="1300" b="0" dirty="0">
+                <a:solidFill>
+                  <a:srgbClr val="212121"/>
                 </a:solidFill>
                 <a:latin typeface="Freesentation"/>
                 <a:ea typeface="Freesentation"/>
               </a:rPr>
-              <a:t>• 타 DBMS 이기종 지원 제한적</a:t>
+              <a:t>Oracle → 클라우드 마이그레이션 확산</a:t>
             </a:r>
           </a:p>
           <a:p>
             <a:pPr algn="l"/>
-            <a:r>
-              <a:rPr lang="ko-KR" altLang="en-US" sz="1300" b="0" dirty="0">
-                <a:solidFill>
-                  <a:srgbClr val="404040"/>
-                </a:solidFill>
-                <a:latin typeface="Freesentation"/>
-                <a:ea typeface="Freesentation"/>
-              </a:rPr>
-              <a:t>• 초기 구성 복잡도 높음</a:t>
-            </a:r>
-          </a:p>
-        </p:txBody>
-      </p:sp>
-      <p:sp>
-        <p:nvSpPr>
-          <p:cNvPr id="209" name="S209"/>
+            <a:endParaRPr sz="400"/>
+          </a:p>
+        </p:txBody>
+      </p:sp>
+      <p:sp>
+        <p:nvSpPr>
+          <p:cNvPr id="211" name="S211"/>
           <p:cNvSpPr>
             <a:spLocks noGrp="1"/>
           </p:cNvSpPr>
@@ -11514,18 +13514,18 @@
         </p:nvSpPr>
         <p:spPr>
           <a:xfrm>
-            <a:off x="457200" y="4573000"/>
-            <a:ext cx="5629800" cy="2193560"/>
+            <a:off x="457200" y="4411980"/>
+            <a:ext cx="5593080" cy="1714500"/>
           </a:xfrm>
           <a:prstGeom prst="rect">
             <a:avLst/>
           </a:prstGeom>
           <a:solidFill>
-            <a:srgbClr val="D6E8F5"/>
+            <a:srgbClr val="FBD9CC"/>
           </a:solidFill>
           <a:ln w="12700">
             <a:solidFill>
-              <a:srgbClr val="CCCCCC"/>
+              <a:srgbClr val="DCDCDC"/>
             </a:solidFill>
           </a:ln>
         </p:spPr>
@@ -11537,7 +13537,7 @@
       </p:sp>
       <p:sp>
         <p:nvSpPr>
-          <p:cNvPr id="210" name="S210"/>
+          <p:cNvPr id="212" name="S212"/>
           <p:cNvSpPr>
             <a:spLocks noGrp="1"/>
           </p:cNvSpPr>
@@ -11545,14 +13545,14 @@
         </p:nvSpPr>
         <p:spPr>
           <a:xfrm>
-            <a:off x="457200" y="4573000"/>
-            <a:ext cx="5629800" cy="340000"/>
+            <a:off x="457200" y="4411980"/>
+            <a:ext cx="5593080" cy="320040"/>
           </a:xfrm>
           <a:prstGeom prst="rect">
             <a:avLst/>
           </a:prstGeom>
           <a:solidFill>
-            <a:srgbClr val="2E6DA4"/>
+            <a:srgbClr val="EE8150"/>
           </a:solidFill>
           <a:ln>
             <a:noFill/>
@@ -11562,23 +13562,23 @@
           <a:bodyPr anchor="ctr" lIns="91440" rIns="91440" tIns="91440" bIns="91440"/>
           <a:lstStyle/>
           <a:p>
-            <a:pPr algn="ctr"/>
-            <a:r>
-              <a:rPr lang="ko-KR" altLang="en-US" sz="1300" b="1" dirty="0">
+            <a:pPr algn="l"/>
+            <a:r>
+              <a:rPr sz="1400" b="1" dirty="0">
                 <a:solidFill>
                   <a:srgbClr val="FFFFFF"/>
                 </a:solidFill>
-                <a:latin typeface="나눔스퀘어 ExtraBold"/>
-                <a:ea typeface="나눔스퀘어 ExtraBold"/>
-              </a:rPr>
-              <a:t>O  Opportunity (기회)</a:t>
-            </a:r>
-          </a:p>
-        </p:txBody>
-      </p:sp>
-      <p:sp>
-        <p:nvSpPr>
-          <p:cNvPr id="211" name="S211"/>
+                <a:latin typeface="프리젠테이션 7"/>
+                <a:ea typeface="프리젠테이션 7"/>
+              </a:rPr>
+              <a:t>⚠️  약점 (Weakness)</a:t>
+            </a:r>
+          </a:p>
+        </p:txBody>
+      </p:sp>
+      <p:sp>
+        <p:nvSpPr>
+          <p:cNvPr id="213" name="S213"/>
           <p:cNvSpPr>
             <a:spLocks noGrp="1"/>
           </p:cNvSpPr>
@@ -11586,8 +13586,8 @@
         </p:nvSpPr>
         <p:spPr>
           <a:xfrm>
-            <a:off x="457200" y="4913000"/>
-            <a:ext cx="5629800" cy="1853560"/>
+            <a:off x="457200" y="4792020"/>
+            <a:ext cx="5593080" cy="1334460"/>
           </a:xfrm>
           <a:prstGeom prst="rect">
             <a:avLst/>
@@ -11598,78 +13598,81 @@
           </a:ln>
         </p:spPr>
         <p:txBody>
-          <a:bodyPr anchor="t" lIns="70000" rIns="70000" tIns="70000" bIns="70000"/>
+          <a:bodyPr anchor="t" lIns="91440" rIns="91440" tIns="91440" bIns="91440"/>
           <a:lstStyle/>
           <a:p>
             <a:pPr algn="l"/>
             <a:r>
-              <a:rPr lang="ko-KR" altLang="en-US" sz="1300" b="0" dirty="0">
-                <a:solidFill>
-                  <a:srgbClr val="404040"/>
+              <a:rPr sz="1300" b="0" dirty="0">
+                <a:solidFill>
+                  <a:srgbClr val="212121"/>
                 </a:solidFill>
                 <a:latin typeface="Freesentation"/>
                 <a:ea typeface="Freesentation"/>
               </a:rPr>
-              <a:t>• AWS OCI GoldenGate SaaS 출시</a:t>
+              <a:t>높은 라이선스·유지보수 비용</a:t>
             </a:r>
           </a:p>
           <a:p>
             <a:pPr algn="l"/>
-            <a:r>
-              <a:rPr lang="ko-KR" altLang="en-US" sz="1300" b="0" dirty="0">
-                <a:solidFill>
-                  <a:srgbClr val="404040"/>
+            <a:endParaRPr sz="400"/>
+          </a:p>
+          <a:p>
+            <a:pPr algn="l"/>
+            <a:r>
+              <a:rPr sz="1300" b="0" dirty="0">
+                <a:solidFill>
+                  <a:srgbClr val="0043DA"/>
                 </a:solidFill>
                 <a:latin typeface="Freesentation"/>
                 <a:ea typeface="Freesentation"/>
               </a:rPr>
-              <a:t>• 실시간 CDC 분석 수요 급증</a:t>
+              <a:t>   → 단계별 구독 전환으로 비용 분산</a:t>
             </a:r>
           </a:p>
           <a:p>
             <a:pPr algn="l"/>
-            <a:r>
-              <a:rPr lang="ko-KR" altLang="en-US" sz="1300" b="0" dirty="0">
-                <a:solidFill>
-                  <a:srgbClr val="404040"/>
+            <a:endParaRPr sz="400"/>
+          </a:p>
+          <a:p>
+            <a:pPr algn="l"/>
+            <a:r>
+              <a:rPr sz="1300" b="0" dirty="0">
+                <a:solidFill>
+                  <a:srgbClr val="212121"/>
                 </a:solidFill>
                 <a:latin typeface="Freesentation"/>
                 <a:ea typeface="Freesentation"/>
               </a:rPr>
-              <a:t>• 멀티클라우드 확장 용이성</a:t>
+              <a:t>Oracle 플랫폼 종속성</a:t>
             </a:r>
           </a:p>
           <a:p>
             <a:pPr algn="l"/>
-            <a:r>
-              <a:rPr lang="ko-KR" altLang="en-US" sz="1300" b="0" dirty="0">
-                <a:solidFill>
-                  <a:srgbClr val="404040"/>
+            <a:endParaRPr sz="400"/>
+          </a:p>
+          <a:p>
+            <a:pPr algn="l"/>
+            <a:r>
+              <a:rPr sz="1300" b="0" dirty="0">
+                <a:solidFill>
+                  <a:srgbClr val="212121"/>
                 </a:solidFill>
                 <a:latin typeface="Freesentation"/>
                 <a:ea typeface="Freesentation"/>
               </a:rPr>
-              <a:t>• 금융·공공 레퍼런스 풍부</a:t>
+              <a:t>OGG DBA 전문 인력 필수 (운영 복잡도)</a:t>
             </a:r>
           </a:p>
           <a:p>
             <a:pPr algn="l"/>
-            <a:r>
-              <a:rPr lang="ko-KR" altLang="en-US" sz="1300" b="0" dirty="0">
-                <a:solidFill>
-                  <a:srgbClr val="404040"/>
-                </a:solidFill>
-                <a:latin typeface="Freesentation"/>
-                <a:ea typeface="Freesentation"/>
-              </a:rPr>
-              <a:t>• Oracle → 클라우드 마이그레이션 확산</a:t>
-            </a:r>
-          </a:p>
-        </p:txBody>
-      </p:sp>
-      <p:sp>
-        <p:nvSpPr>
-          <p:cNvPr id="212" name="S212"/>
+            <a:endParaRPr sz="400"/>
+          </a:p>
+        </p:txBody>
+      </p:sp>
+      <p:sp>
+        <p:nvSpPr>
+          <p:cNvPr id="214" name="S214"/>
           <p:cNvSpPr>
             <a:spLocks noGrp="1"/>
           </p:cNvSpPr>
@@ -11677,18 +13680,18 @@
         </p:nvSpPr>
         <p:spPr>
           <a:xfrm>
-            <a:off x="6105000" y="4573000"/>
-            <a:ext cx="5629800" cy="2193560"/>
+            <a:off x="6141720" y="4411980"/>
+            <a:ext cx="5593080" cy="1714500"/>
           </a:xfrm>
           <a:prstGeom prst="rect">
             <a:avLst/>
           </a:prstGeom>
           <a:solidFill>
-            <a:srgbClr val="FEF5EC"/>
+            <a:srgbClr val="F5CCCC"/>
           </a:solidFill>
           <a:ln w="12700">
             <a:solidFill>
-              <a:srgbClr val="CCCCCC"/>
+              <a:srgbClr val="DCDCDC"/>
             </a:solidFill>
           </a:ln>
         </p:spPr>
@@ -11700,7 +13703,7 @@
       </p:sp>
       <p:sp>
         <p:nvSpPr>
-          <p:cNvPr id="213" name="S213"/>
+          <p:cNvPr id="215" name="S215"/>
           <p:cNvSpPr>
             <a:spLocks noGrp="1"/>
           </p:cNvSpPr>
@@ -11708,14 +13711,14 @@
         </p:nvSpPr>
         <p:spPr>
           <a:xfrm>
-            <a:off x="6105000" y="4573000"/>
-            <a:ext cx="5629800" cy="340000"/>
+            <a:off x="6141720" y="4411980"/>
+            <a:ext cx="5593080" cy="320040"/>
           </a:xfrm>
           <a:prstGeom prst="rect">
             <a:avLst/>
           </a:prstGeom>
           <a:solidFill>
-            <a:srgbClr val="E87722"/>
+            <a:srgbClr val="C62828"/>
           </a:solidFill>
           <a:ln>
             <a:noFill/>
@@ -11725,23 +13728,23 @@
           <a:bodyPr anchor="ctr" lIns="91440" rIns="91440" tIns="91440" bIns="91440"/>
           <a:lstStyle/>
           <a:p>
-            <a:pPr algn="ctr"/>
-            <a:r>
-              <a:rPr lang="ko-KR" altLang="en-US" sz="1300" b="1" dirty="0">
+            <a:pPr algn="l"/>
+            <a:r>
+              <a:rPr sz="1400" b="1" dirty="0">
                 <a:solidFill>
                   <a:srgbClr val="FFFFFF"/>
                 </a:solidFill>
-                <a:latin typeface="나눔스퀘어 ExtraBold"/>
-                <a:ea typeface="나눔스퀘어 ExtraBold"/>
-              </a:rPr>
-              <a:t>T  Threat (위협)</a:t>
-            </a:r>
-          </a:p>
-        </p:txBody>
-      </p:sp>
-      <p:sp>
-        <p:nvSpPr>
-          <p:cNvPr id="214" name="S214"/>
+                <a:latin typeface="프리젠테이션 7"/>
+                <a:ea typeface="프리젠테이션 7"/>
+              </a:rPr>
+              <a:t>⛔  위협 (Threat)</a:t>
+            </a:r>
+          </a:p>
+        </p:txBody>
+      </p:sp>
+      <p:sp>
+        <p:nvSpPr>
+          <p:cNvPr id="216" name="S216"/>
           <p:cNvSpPr>
             <a:spLocks noGrp="1"/>
           </p:cNvSpPr>
@@ -11749,8 +13752,8 @@
         </p:nvSpPr>
         <p:spPr>
           <a:xfrm>
-            <a:off x="6105000" y="4913000"/>
-            <a:ext cx="5629800" cy="1853560"/>
+            <a:off x="6141720" y="4792020"/>
+            <a:ext cx="5593080" cy="1334460"/>
           </a:xfrm>
           <a:prstGeom prst="rect">
             <a:avLst/>
@@ -11761,71 +13764,117 @@
           </a:ln>
         </p:spPr>
         <p:txBody>
-          <a:bodyPr anchor="t" lIns="70000" rIns="70000" tIns="70000" bIns="70000"/>
+          <a:bodyPr anchor="t" lIns="91440" rIns="91440" tIns="91440" bIns="91440"/>
           <a:lstStyle/>
           <a:p>
             <a:pPr algn="l"/>
             <a:r>
-              <a:rPr lang="ko-KR" altLang="en-US" sz="1300" b="0" dirty="0">
-                <a:solidFill>
-                  <a:srgbClr val="404040"/>
+              <a:rPr sz="1300" b="0" dirty="0">
+                <a:solidFill>
+                  <a:srgbClr val="212121"/>
                 </a:solidFill>
                 <a:latin typeface="Freesentation"/>
                 <a:ea typeface="Freesentation"/>
               </a:rPr>
-              <a:t>• AWS DMS 무료 서비스 경쟁</a:t>
+              <a:t>AWS DMS 무료 서비스 경쟁</a:t>
             </a:r>
           </a:p>
           <a:p>
             <a:pPr algn="l"/>
-            <a:r>
-              <a:rPr lang="ko-KR" altLang="en-US" sz="1300" b="0" dirty="0">
-                <a:solidFill>
-                  <a:srgbClr val="404040"/>
+            <a:endParaRPr sz="400"/>
+          </a:p>
+          <a:p>
+            <a:pPr algn="l"/>
+            <a:r>
+              <a:rPr sz="1300" b="0" dirty="0">
+                <a:solidFill>
+                  <a:srgbClr val="0043DA"/>
                 </a:solidFill>
                 <a:latin typeface="Freesentation"/>
                 <a:ea typeface="Freesentation"/>
               </a:rPr>
-              <a:t>• 오픈소스 CDC(Debezium) 성장</a:t>
+              <a:t>   → Oracle 특화 기능으로 차별화</a:t>
             </a:r>
           </a:p>
           <a:p>
             <a:pPr algn="l"/>
-            <a:r>
-              <a:rPr lang="ko-KR" altLang="en-US" sz="1300" b="0" dirty="0">
-                <a:solidFill>
-                  <a:srgbClr val="404040"/>
+            <a:endParaRPr sz="400"/>
+          </a:p>
+          <a:p>
+            <a:pPr algn="l"/>
+            <a:r>
+              <a:rPr sz="1300" b="0" dirty="0">
+                <a:solidFill>
+                  <a:srgbClr val="212121"/>
                 </a:solidFill>
                 <a:latin typeface="Freesentation"/>
                 <a:ea typeface="Freesentation"/>
               </a:rPr>
-              <a:t>• DataStage MPP 대용량 강점</a:t>
+              <a:t>오픈소스 CDC(Debezium) 성장</a:t>
             </a:r>
           </a:p>
           <a:p>
             <a:pPr algn="l"/>
-            <a:r>
-              <a:rPr lang="ko-KR" altLang="en-US" sz="1300" b="0" dirty="0">
-                <a:solidFill>
-                  <a:srgbClr val="404040"/>
+            <a:endParaRPr sz="400"/>
+          </a:p>
+          <a:p>
+            <a:pPr algn="l"/>
+            <a:r>
+              <a:rPr sz="1300" b="0" dirty="0">
+                <a:solidFill>
+                  <a:srgbClr val="212121"/>
                 </a:solidFill>
                 <a:latin typeface="Freesentation"/>
                 <a:ea typeface="Freesentation"/>
               </a:rPr>
-              <a:t>• Oracle 라이선스 정책 변화 리스크</a:t>
+              <a:t>Oracle 라이선스 정책 변화 리스크</a:t>
             </a:r>
           </a:p>
           <a:p>
             <a:pPr algn="l"/>
-            <a:r>
-              <a:rPr lang="ko-KR" altLang="en-US" sz="1300" b="0" dirty="0">
-                <a:solidFill>
-                  <a:srgbClr val="404040"/>
-                </a:solidFill>
-                <a:latin typeface="Freesentation"/>
-                <a:ea typeface="Freesentation"/>
-              </a:rPr>
-              <a:t>• 클라우드 네이티브 대안 증가</a:t>
+            <a:endParaRPr sz="400"/>
+          </a:p>
+        </p:txBody>
+      </p:sp>
+      <p:sp>
+        <p:nvSpPr>
+          <p:cNvPr id="217" name="S217"/>
+          <p:cNvSpPr>
+            <a:spLocks noGrp="1"/>
+          </p:cNvSpPr>
+          <p:nvPr/>
+        </p:nvSpPr>
+        <p:spPr>
+          <a:xfrm>
+            <a:off x="457200" y="6217920"/>
+            <a:ext cx="11277600" cy="457200"/>
+          </a:xfrm>
+          <a:prstGeom prst="roundRect">
+            <a:avLst>
+              <a:gd name="adj" fmla="val 16667"/>
+            </a:avLst>
+          </a:prstGeom>
+          <a:solidFill>
+            <a:srgbClr val="0043DA"/>
+          </a:solidFill>
+          <a:ln>
+            <a:noFill/>
+          </a:ln>
+        </p:spPr>
+        <p:txBody>
+          <a:bodyPr anchor="ctr" lIns="91440" rIns="91440" tIns="91440" bIns="91440"/>
+          <a:lstStyle/>
+          <a:p>
+            <a:pPr algn="ctr"/>
+            <a:r>
+              <a:rPr sz="1300" b="1" dirty="0">
+                <a:solidFill>
+                  <a:srgbClr val="FFFFFF"/>
+                </a:solidFill>
+                <a:latin typeface="프리젠테이션 7"/>
+                <a:ea typeface="프리젠테이션 7"/>
+              </a:rPr>
+              <a:t>📋  전략 방향: SO전략 집중 — AWS OCI GoldenGate 활용 + 금융권 선점 | WO: 라이선스 구독 전환으로 초기 비용 해소</a:t>
             </a:r>
           </a:p>
         </p:txBody>
@@ -11833,7 +13882,7 @@
     </p:spTree>
     <p:extLst>
       <p:ext uri="{BB962C8B-B14F-4D97-AF65-F5344CB8AC3E}">
-        <p14:creationId xmlns:p14="http://schemas.microsoft.com/office/powerpoint/2010/main" val="451694688"/>
+        <p14:creationId xmlns:p14="http://schemas.microsoft.com/office/powerpoint/2010/main" val="1978617139"/>
       </p:ext>
     </p:extLst>
   </p:cSld>

--- a/results/pptx/Oracle_DB_Migration_Guide.pptx
+++ b/results/pptx/Oracle_DB_Migration_Guide.pptx
@@ -2974,7 +2974,7 @@
           <a:p>
             <a:pPr latinLnBrk="0"/>
             <a:r>
-              <a:rPr lang="en-US" altLang="ko-KR" sz="5000" dirty="0">
+              <a:rPr lang="en-US" altLang="ko-KR" sz="3600" dirty="0">
                 <a:ln>
                   <a:solidFill>
                     <a:schemeClr val="accent1">
@@ -2995,7 +2995,7 @@
           <a:p>
             <a:pPr latinLnBrk="0"/>
             <a:r>
-              <a:rPr lang="en-US" altLang="ko-KR" sz="5000" dirty="0">
+              <a:rPr lang="en-US" altLang="ko-KR" sz="3600" dirty="0">
                 <a:ln>
                   <a:solidFill>
                     <a:schemeClr val="accent1">

--- a/results/pptx/Oracle_DB_Migration_Guide.pptx
+++ b/results/pptx/Oracle_DB_Migration_Guide.pptx
@@ -13,6 +13,7 @@
   <p:sldIdLst>
     <p:sldId id="500" r:id="rId2"/>
     <p:sldId id="501" r:id="rId3"/>
+    <p:sldId id="511" r:id="rId50"/>
     <p:sldId id="502" r:id="rId4"/>
     <p:sldId id="503" r:id="rId5"/>
     <p:sldId id="504" r:id="rId6"/>
@@ -130,6 +131,7 @@
         <p14:section name="목차" id="{A0C878EF-B6DE-408F-A0B0-3E3987472B55}">
           <p14:sldIdLst>
             <p14:sldId id="501"/>
+            <p14:sldId id="511"/>
           </p14:sldIdLst>
         </p14:section>
         <p14:section name="본문" id="{FCE70868-BB08-4726-BDA1-BC6D2C463683}">
@@ -2958,8 +2960,8 @@
         </p:nvSpPr>
         <p:spPr>
           <a:xfrm>
-            <a:off x="3138715" y="1846736"/>
-            <a:ext cx="5395685" cy="1906474"/>
+            <a:off x="2489064" y="1846736"/>
+            <a:ext cx="7213872" cy="1906474"/>
           </a:xfrm>
           <a:prstGeom prst="rect">
             <a:avLst/>
@@ -2974,7 +2976,7 @@
           <a:p>
             <a:pPr latinLnBrk="0"/>
             <a:r>
-              <a:rPr lang="en-US" altLang="ko-KR" sz="3600" dirty="0">
+              <a:rPr lang="en-US" altLang="ko-KR" sz="5000" dirty="0">
                 <a:ln>
                   <a:solidFill>
                     <a:schemeClr val="accent1">
@@ -2995,7 +2997,7 @@
           <a:p>
             <a:pPr latinLnBrk="0"/>
             <a:r>
-              <a:rPr lang="en-US" altLang="ko-KR" sz="3600" dirty="0">
+              <a:rPr lang="en-US" altLang="ko-KR" sz="5000" dirty="0">
                 <a:ln>
                   <a:solidFill>
                     <a:schemeClr val="accent1">
@@ -3491,8 +3493,8 @@
         </p:nvSpPr>
         <p:spPr>
           <a:xfrm>
-            <a:off x="3138716" y="3754494"/>
-            <a:ext cx="5395685" cy="543635"/>
+            <a:off x="2489064" y="3844650"/>
+            <a:ext cx="7213872" cy="771144"/>
           </a:xfrm>
           <a:prstGeom prst="rect">
             <a:avLst/>
@@ -4142,7 +4144,7 @@
 </p:sld>
 </file>
 
-<file path=ppt/slides/slide2.xml><?xml version="1.0" encoding="utf-8"?>
+<file path=ppt/slides/slide12.xml><?xml version="1.0" encoding="utf-8"?>
 <p:sld xmlns:a="http://schemas.openxmlformats.org/drawingml/2006/main" xmlns:r="http://schemas.openxmlformats.org/officeDocument/2006/relationships" xmlns:p="http://schemas.openxmlformats.org/presentationml/2006/main">
   <p:cSld>
     <p:spTree>
@@ -4248,7 +4250,7 @@
                 <a:ea typeface="프리젠테이션 7 Bold" pitchFamily="2" charset="-127"/>
                 <a:cs typeface="Pretendard" panose="02000503000000020004" pitchFamily="2" charset="-127"/>
               </a:rPr>
-              <a:t>1</a:t>
+              <a:t>6</a:t>
             </a:r>
           </a:p>
           <a:p>
@@ -4270,73 +4272,7 @@
                 <a:ea typeface="프리젠테이션 7 Bold" pitchFamily="2" charset="-127"/>
                 <a:cs typeface="Pretendard" panose="02000503000000020004" pitchFamily="2" charset="-127"/>
               </a:rPr>
-              <a:t>2</a:t>
-            </a:r>
-          </a:p>
-          <a:p>
-            <a:pPr algn="ctr" latinLnBrk="0">
-              <a:lnSpc>
-                <a:spcPct val="250000"/>
-              </a:lnSpc>
-            </a:pPr>
-            <a:r>
-              <a:rPr lang="en-US" altLang="ko-KR" sz="2400" dirty="0" smtClean="0">
-                <a:ln>
-                  <a:solidFill>
-                    <a:schemeClr val="accent1">
-                      <a:alpha val="0"/>
-                    </a:schemeClr>
-                  </a:solidFill>
-                </a:ln>
-                <a:latin typeface="프리젠테이션 7 Bold" pitchFamily="2" charset="-127"/>
-                <a:ea typeface="프리젠테이션 7 Bold" pitchFamily="2" charset="-127"/>
-                <a:cs typeface="Pretendard" panose="02000503000000020004" pitchFamily="2" charset="-127"/>
-              </a:rPr>
-              <a:t>3</a:t>
-            </a:r>
-          </a:p>
-          <a:p>
-            <a:pPr algn="ctr" latinLnBrk="0">
-              <a:lnSpc>
-                <a:spcPct val="250000"/>
-              </a:lnSpc>
-            </a:pPr>
-            <a:r>
-              <a:rPr lang="en-US" altLang="ko-KR" sz="2400" dirty="0" smtClean="0">
-                <a:ln>
-                  <a:solidFill>
-                    <a:schemeClr val="accent1">
-                      <a:alpha val="0"/>
-                    </a:schemeClr>
-                  </a:solidFill>
-                </a:ln>
-                <a:latin typeface="프리젠테이션 7 Bold" pitchFamily="2" charset="-127"/>
-                <a:ea typeface="프리젠테이션 7 Bold" pitchFamily="2" charset="-127"/>
-                <a:cs typeface="Pretendard" panose="02000503000000020004" pitchFamily="2" charset="-127"/>
-              </a:rPr>
-              <a:t>4</a:t>
-            </a:r>
-          </a:p>
-          <a:p>
-            <a:pPr algn="ctr" latinLnBrk="0">
-              <a:lnSpc>
-                <a:spcPct val="250000"/>
-              </a:lnSpc>
-            </a:pPr>
-            <a:r>
-              <a:rPr lang="en-US" altLang="ko-KR" sz="2400" dirty="0" smtClean="0">
-                <a:ln>
-                  <a:solidFill>
-                    <a:schemeClr val="accent1">
-                      <a:alpha val="0"/>
-                    </a:schemeClr>
-                  </a:solidFill>
-                </a:ln>
-                <a:latin typeface="프리젠테이션 7 Bold" pitchFamily="2" charset="-127"/>
-                <a:ea typeface="프리젠테이션 7 Bold" pitchFamily="2" charset="-127"/>
-                <a:cs typeface="Pretendard" panose="02000503000000020004" pitchFamily="2" charset="-127"/>
-              </a:rPr>
-              <a:t>5</a:t>
+              <a:t>7</a:t>
             </a:r>
           </a:p>
         </p:txBody>
@@ -4390,7 +4326,7 @@
                 <a:ea typeface="프리젠테이션 7 Bold" pitchFamily="2" charset="-127"/>
                 <a:cs typeface="Pretendard" panose="02000503000000020004" pitchFamily="2" charset="-127"/>
               </a:rPr>
-              <a:t>AS-IS / TO-BE — 현재 한계와 목표 상태</a:t>
+              <a:t>운영 Do &amp; Don't</a:t>
             </a:r>
             <a:endParaRPr lang="en-US" altLang="ko-KR" sz="2400" dirty="0" smtClean="0">
               <a:ln>
@@ -4439,154 +4375,7 @@
                 <a:ea typeface="프리젠테이션 7 Bold" pitchFamily="2" charset="-127"/>
                 <a:cs typeface="Pretendard" panose="02000503000000020004" pitchFamily="2" charset="-127"/>
               </a:rPr>
-              <a:t>인프라 전환 전/후 KPI 비교</a:t>
-            </a:r>
-            <a:endParaRPr lang="en-US" altLang="ko-KR" sz="2400" dirty="0" smtClean="0">
-              <a:ln>
-                <a:solidFill>
-                  <a:schemeClr val="accent1">
-                    <a:alpha val="0"/>
-                  </a:schemeClr>
-                </a:solidFill>
-              </a:ln>
-              <a:solidFill>
-                <a:schemeClr val="tx1">
-                  <a:lumMod val="75000"/>
-                  <a:lumOff val="25000"/>
-                </a:schemeClr>
-              </a:solidFill>
-              <a:latin typeface="프리젠테이션 7 Bold" pitchFamily="2" charset="-127"/>
-              <a:ea typeface="프리젠테이션 7 Bold" pitchFamily="2" charset="-127"/>
-              <a:cs typeface="Pretendard" panose="02000503000000020004" pitchFamily="2" charset="-127"/>
-            </a:endParaRPr>
-          </a:p>
-          <a:p>
-            <a:pPr latinLnBrk="0">
-              <a:lnSpc>
-                <a:spcPct val="250000"/>
-              </a:lnSpc>
-              <a:buClr>
-                <a:srgbClr val="1F43F9"/>
-              </a:buClr>
-            </a:pPr>
-            <a:r>
-              <a:rPr lang="ko-KR" altLang="en-US" sz="2400" dirty="0" err="1">
-                <a:ln>
-                  <a:solidFill>
-                    <a:schemeClr val="accent1">
-                      <a:alpha val="0"/>
-                    </a:schemeClr>
-                  </a:solidFill>
-                </a:ln>
-                <a:solidFill>
-                  <a:schemeClr val="tx1">
-                    <a:lumMod val="75000"/>
-                    <a:lumOff val="25000"/>
-                  </a:schemeClr>
-                </a:solidFill>
-                <a:latin typeface="프리젠테이션 7 Bold" pitchFamily="2" charset="-127"/>
-                <a:ea typeface="프리젠테이션 7 Bold" pitchFamily="2" charset="-127"/>
-                <a:cs typeface="Pretendard" panose="02000503000000020004" pitchFamily="2" charset="-127"/>
-              </a:rPr>
-              <a:t>도구 선택 프레임워크 &amp; 6개월 로드맵</a:t>
-            </a:r>
-            <a:endParaRPr lang="en-US" altLang="ko-KR" sz="2400" dirty="0" smtClean="0">
-              <a:ln>
-                <a:solidFill>
-                  <a:schemeClr val="accent1">
-                    <a:alpha val="0"/>
-                  </a:schemeClr>
-                </a:solidFill>
-              </a:ln>
-              <a:solidFill>
-                <a:schemeClr val="tx1">
-                  <a:lumMod val="75000"/>
-                  <a:lumOff val="25000"/>
-                </a:schemeClr>
-              </a:solidFill>
-              <a:latin typeface="프리젠테이션 7 Bold" pitchFamily="2" charset="-127"/>
-              <a:ea typeface="프리젠테이션 7 Bold" pitchFamily="2" charset="-127"/>
-              <a:cs typeface="Pretendard" panose="02000503000000020004" pitchFamily="2" charset="-127"/>
-            </a:endParaRPr>
-          </a:p>
-          <a:p>
-            <a:pPr latinLnBrk="0">
-              <a:lnSpc>
-                <a:spcPct val="250000"/>
-              </a:lnSpc>
-              <a:buClr>
-                <a:srgbClr val="1F43F9"/>
-              </a:buClr>
-            </a:pPr>
-            <a:r>
-              <a:rPr lang="ko-KR" altLang="en-US" sz="2400" dirty="0" err="1">
-                <a:ln>
-                  <a:solidFill>
-                    <a:schemeClr val="accent1">
-                      <a:alpha val="0"/>
-                    </a:schemeClr>
-                  </a:solidFill>
-                </a:ln>
-                <a:solidFill>
-                  <a:schemeClr val="tx1">
-                    <a:lumMod val="75000"/>
-                    <a:lumOff val="25000"/>
-                  </a:schemeClr>
-                </a:solidFill>
-                <a:latin typeface="프리젠테이션 7 Bold" pitchFamily="2" charset="-127"/>
-                <a:ea typeface="프리젠테이션 7 Bold" pitchFamily="2" charset="-127"/>
-                <a:cs typeface="Pretendard" panose="02000503000000020004" pitchFamily="2" charset="-127"/>
-              </a:rPr>
-              <a:t>핵심 성과 지표 (KPI Dashboard)</a:t>
-            </a:r>
-            <a:endParaRPr lang="en-US" altLang="ko-KR" sz="2400" dirty="0" smtClean="0">
-              <a:ln>
-                <a:solidFill>
-                  <a:schemeClr val="accent1">
-                    <a:alpha val="0"/>
-                  </a:schemeClr>
-                </a:solidFill>
-              </a:ln>
-              <a:solidFill>
-                <a:schemeClr val="tx1">
-                  <a:lumMod val="75000"/>
-                  <a:lumOff val="25000"/>
-                </a:schemeClr>
-              </a:solidFill>
-              <a:latin typeface="프리젠테이션 7 Bold" pitchFamily="2" charset="-127"/>
-              <a:ea typeface="프리젠테이션 7 Bold" pitchFamily="2" charset="-127"/>
-              <a:cs typeface="Pretendard" panose="02000503000000020004" pitchFamily="2" charset="-127"/>
-            </a:endParaRPr>
-          </a:p>
-          <a:p>
-            <a:pPr latinLnBrk="0">
-              <a:lnSpc>
-                <a:spcPct val="250000"/>
-              </a:lnSpc>
-              <a:buClr>
-                <a:srgbClr val="1F43F9"/>
-              </a:buClr>
-            </a:pPr>
-            <a:r>
-              <a:rPr lang="ko-KR" altLang="en-US" sz="2400" dirty="0" err="1">
-                <a:ln>
-                  <a:solidFill>
-                    <a:schemeClr val="accent1">
-                      <a:alpha val="0"/>
-                    </a:schemeClr>
-                  </a:solidFill>
-                </a:ln>
-                <a:solidFill>
-                  <a:schemeClr val="tx1">
-                    <a:lumMod val="75000"/>
-                    <a:lumOff val="25000"/>
-                  </a:schemeClr>
-                </a:solidFill>
-                <a:latin typeface="프리젠테이션 7 Bold" pitchFamily="2" charset="-127"/>
-                <a:ea typeface="프리젠테이션 7 Bold" pitchFamily="2" charset="-127"/>
-                <a:cs typeface="Pretendard" panose="02000503000000020004" pitchFamily="2" charset="-127"/>
-              </a:rPr>
-              <a:t>Do &amp; Don't + GoldenGate SWOT 분석</a:t>
+              <a:t>GoldenGate SWOT 분석</a:t>
             </a:r>
             <a:endParaRPr lang="en-US" altLang="ko-KR" sz="2400" dirty="0" smtClean="0">
               <a:ln>
@@ -4802,7 +4591,684 @@
     </p:spTree>
     <p:extLst>
       <p:ext uri="{BB962C8B-B14F-4D97-AF65-F5344CB8AC3E}">
-        <p14:creationId xmlns:p14="http://schemas.microsoft.com/office/powerpoint/2010/main" val="2774157920"/>
+        <p14:creationId xmlns:p14="http://schemas.microsoft.com/office/powerpoint/2010/main" val="3942163820"/>
+      </p:ext>
+    </p:extLst>
+  </p:cSld>
+  <p:clrMapOvr>
+    <a:masterClrMapping/>
+  </p:clrMapOvr>
+  <p:timing>
+    <p:tnLst>
+      <p:par>
+        <p:cTn id="1" dur="indefinite" restart="never" nodeType="tmRoot"/>
+      </p:par>
+    </p:tnLst>
+  </p:timing>
+</p:sld>
+</file>
+
+<file path=ppt/slides/slide2.xml><?xml version="1.0" encoding="utf-8"?>
+<p:sld xmlns:a="http://schemas.openxmlformats.org/drawingml/2006/main" xmlns:r="http://schemas.openxmlformats.org/officeDocument/2006/relationships" xmlns:p="http://schemas.openxmlformats.org/presentationml/2006/main">
+  <p:cSld>
+    <p:spTree>
+      <p:nvGrpSpPr>
+        <p:cNvPr id="1" name=""/>
+        <p:cNvGrpSpPr/>
+        <p:nvPr/>
+      </p:nvGrpSpPr>
+      <p:grpSpPr>
+        <a:xfrm>
+          <a:off x="0" y="0"/>
+          <a:ext cx="0" cy="0"/>
+          <a:chOff x="0" y="0"/>
+          <a:chExt cx="0" cy="0"/>
+        </a:xfrm>
+      </p:grpSpPr>
+      <p:sp>
+        <p:nvSpPr>
+          <p:cNvPr id="19" name="TextBox 18"/>
+          <p:cNvSpPr txBox="1"/>
+          <p:nvPr/>
+        </p:nvSpPr>
+        <p:spPr>
+          <a:xfrm>
+            <a:off x="354805" y="545902"/>
+            <a:ext cx="3112294" cy="510768"/>
+          </a:xfrm>
+          <a:prstGeom prst="rect">
+            <a:avLst/>
+          </a:prstGeom>
+          <a:noFill/>
+        </p:spPr>
+        <p:txBody>
+          <a:bodyPr wrap="square" lIns="0" tIns="0" rIns="0" bIns="0" rtlCol="0" anchor="t" anchorCtr="0">
+            <a:noAutofit/>
+          </a:bodyPr>
+          <a:lstStyle/>
+          <a:p>
+            <a:pPr>
+              <a:lnSpc>
+                <a:spcPct val="120000"/>
+              </a:lnSpc>
+            </a:pPr>
+            <a:r>
+              <a:rPr lang="en-US" altLang="ko-KR" sz="2800" dirty="0" smtClean="0">
+                <a:solidFill>
+                  <a:srgbClr val="0043DA"/>
+                </a:solidFill>
+                <a:latin typeface="프리젠테이션 7 Bold" pitchFamily="2" charset="-127"/>
+                <a:ea typeface="프리젠테이션 7 Bold" pitchFamily="2" charset="-127"/>
+                <a:cs typeface="Pretendard ExtraBold" panose="02000903000000020004" pitchFamily="2" charset="-127"/>
+              </a:rPr>
+              <a:t>CONTENTS</a:t>
+            </a:r>
+            <a:endParaRPr lang="en-US" altLang="ko-KR" sz="2800" dirty="0">
+              <a:solidFill>
+                <a:srgbClr val="0043DA"/>
+              </a:solidFill>
+              <a:latin typeface="프리젠테이션 7 Bold" pitchFamily="2" charset="-127"/>
+              <a:ea typeface="프리젠테이션 7 Bold" pitchFamily="2" charset="-127"/>
+              <a:cs typeface="Pretendard ExtraBold" panose="02000903000000020004" pitchFamily="2" charset="-127"/>
+            </a:endParaRPr>
+          </a:p>
+        </p:txBody>
+      </p:sp>
+      <p:sp>
+        <p:nvSpPr>
+          <p:cNvPr id="49" name="TextBox 48"/>
+          <p:cNvSpPr txBox="1"/>
+          <p:nvPr/>
+        </p:nvSpPr>
+        <p:spPr>
+          <a:xfrm>
+            <a:off x="3367314" y="1715534"/>
+            <a:ext cx="1161474" cy="4616648"/>
+          </a:xfrm>
+          <a:prstGeom prst="rect">
+            <a:avLst/>
+          </a:prstGeom>
+          <a:noFill/>
+        </p:spPr>
+        <p:txBody>
+          <a:bodyPr wrap="square" lIns="0" tIns="0" rIns="0" bIns="0" rtlCol="0" anchor="t" anchorCtr="0">
+            <a:spAutoFit/>
+          </a:bodyPr>
+          <a:lstStyle/>
+          <a:p>
+            <a:pPr algn="ctr" latinLnBrk="0">
+              <a:lnSpc>
+                <a:spcPct val="250000"/>
+              </a:lnSpc>
+            </a:pPr>
+            <a:r>
+              <a:rPr lang="en-US" altLang="ko-KR" sz="2400" dirty="0" smtClean="0">
+                <a:ln>
+                  <a:solidFill>
+                    <a:schemeClr val="accent1">
+                      <a:alpha val="0"/>
+                    </a:schemeClr>
+                  </a:solidFill>
+                </a:ln>
+                <a:latin typeface="프리젠테이션 7 Bold" pitchFamily="2" charset="-127"/>
+                <a:ea typeface="프리젠테이션 7 Bold" pitchFamily="2" charset="-127"/>
+                <a:cs typeface="Pretendard" panose="02000503000000020004" pitchFamily="2" charset="-127"/>
+              </a:rPr>
+              <a:t>1</a:t>
+            </a:r>
+          </a:p>
+          <a:p>
+            <a:pPr algn="ctr" latinLnBrk="0">
+              <a:lnSpc>
+                <a:spcPct val="250000"/>
+              </a:lnSpc>
+            </a:pPr>
+            <a:r>
+              <a:rPr lang="en-US" altLang="ko-KR" sz="2400" dirty="0" smtClean="0">
+                <a:ln>
+                  <a:solidFill>
+                    <a:schemeClr val="accent1">
+                      <a:alpha val="0"/>
+                    </a:schemeClr>
+                  </a:solidFill>
+                </a:ln>
+                <a:latin typeface="프리젠테이션 7 Bold" pitchFamily="2" charset="-127"/>
+                <a:ea typeface="프리젠테이션 7 Bold" pitchFamily="2" charset="-127"/>
+                <a:cs typeface="Pretendard" panose="02000503000000020004" pitchFamily="2" charset="-127"/>
+              </a:rPr>
+              <a:t>2</a:t>
+            </a:r>
+          </a:p>
+          <a:p>
+            <a:pPr algn="ctr" latinLnBrk="0">
+              <a:lnSpc>
+                <a:spcPct val="250000"/>
+              </a:lnSpc>
+            </a:pPr>
+            <a:r>
+              <a:rPr lang="en-US" altLang="ko-KR" sz="2400" dirty="0" smtClean="0">
+                <a:ln>
+                  <a:solidFill>
+                    <a:schemeClr val="accent1">
+                      <a:alpha val="0"/>
+                    </a:schemeClr>
+                  </a:solidFill>
+                </a:ln>
+                <a:latin typeface="프리젠테이션 7 Bold" pitchFamily="2" charset="-127"/>
+                <a:ea typeface="프리젠테이션 7 Bold" pitchFamily="2" charset="-127"/>
+                <a:cs typeface="Pretendard" panose="02000503000000020004" pitchFamily="2" charset="-127"/>
+              </a:rPr>
+              <a:t>3</a:t>
+            </a:r>
+          </a:p>
+          <a:p>
+            <a:pPr algn="ctr" latinLnBrk="0">
+              <a:lnSpc>
+                <a:spcPct val="250000"/>
+              </a:lnSpc>
+            </a:pPr>
+            <a:r>
+              <a:rPr lang="en-US" altLang="ko-KR" sz="2400" dirty="0" smtClean="0">
+                <a:ln>
+                  <a:solidFill>
+                    <a:schemeClr val="accent1">
+                      <a:alpha val="0"/>
+                    </a:schemeClr>
+                  </a:solidFill>
+                </a:ln>
+                <a:latin typeface="프리젠테이션 7 Bold" pitchFamily="2" charset="-127"/>
+                <a:ea typeface="프리젠테이션 7 Bold" pitchFamily="2" charset="-127"/>
+                <a:cs typeface="Pretendard" panose="02000503000000020004" pitchFamily="2" charset="-127"/>
+              </a:rPr>
+              <a:t>4</a:t>
+            </a:r>
+          </a:p>
+          <a:p>
+            <a:pPr algn="ctr" latinLnBrk="0">
+              <a:lnSpc>
+                <a:spcPct val="250000"/>
+              </a:lnSpc>
+            </a:pPr>
+            <a:r>
+              <a:rPr lang="en-US" altLang="ko-KR" sz="2400" dirty="0" smtClean="0">
+                <a:ln>
+                  <a:solidFill>
+                    <a:schemeClr val="accent1">
+                      <a:alpha val="0"/>
+                    </a:schemeClr>
+                  </a:solidFill>
+                </a:ln>
+                <a:latin typeface="프리젠테이션 7 Bold" pitchFamily="2" charset="-127"/>
+                <a:ea typeface="프리젠테이션 7 Bold" pitchFamily="2" charset="-127"/>
+                <a:cs typeface="Pretendard" panose="02000503000000020004" pitchFamily="2" charset="-127"/>
+              </a:rPr>
+              <a:t>5</a:t>
+            </a:r>
+          </a:p>
+        </p:txBody>
+      </p:sp>
+      <p:sp>
+        <p:nvSpPr>
+          <p:cNvPr id="50" name="TextBox 49"/>
+          <p:cNvSpPr txBox="1"/>
+          <p:nvPr/>
+        </p:nvSpPr>
+        <p:spPr>
+          <a:xfrm>
+            <a:off x="4543668" y="1715534"/>
+            <a:ext cx="3927349" cy="4616648"/>
+          </a:xfrm>
+          <a:prstGeom prst="rect">
+            <a:avLst/>
+          </a:prstGeom>
+          <a:noFill/>
+        </p:spPr>
+        <p:txBody>
+          <a:bodyPr wrap="square" lIns="0" tIns="0" rIns="0" bIns="0" rtlCol="0" anchor="t" anchorCtr="0">
+            <a:spAutoFit/>
+          </a:bodyPr>
+          <a:lstStyle/>
+          <a:p>
+            <a:pPr latinLnBrk="0">
+              <a:lnSpc>
+                <a:spcPct val="250000"/>
+              </a:lnSpc>
+              <a:buClr>
+                <a:srgbClr val="1F43F9"/>
+              </a:buClr>
+            </a:pPr>
+            <a:r>
+              <a:rPr lang="ko-KR" altLang="en-US" sz="2400" dirty="0" err="1">
+                <a:ln>
+                  <a:solidFill>
+                    <a:schemeClr val="accent1">
+                      <a:alpha val="0"/>
+                    </a:schemeClr>
+                  </a:solidFill>
+                </a:ln>
+                <a:solidFill>
+                  <a:schemeClr val="tx1">
+                    <a:lumMod val="75000"/>
+                    <a:lumOff val="25000"/>
+                  </a:schemeClr>
+                </a:solidFill>
+                <a:latin typeface="프리젠테이션 7 Bold" pitchFamily="2" charset="-127"/>
+                <a:ea typeface="프리젠테이션 7 Bold" pitchFamily="2" charset="-127"/>
+                <a:cs typeface="Pretendard" panose="02000503000000020004" pitchFamily="2" charset="-127"/>
+              </a:rPr>
+              <a:t>AS-IS / TO-BE 현황 분석</a:t>
+            </a:r>
+            <a:endParaRPr lang="en-US" altLang="ko-KR" sz="2400" dirty="0" smtClean="0">
+              <a:ln>
+                <a:solidFill>
+                  <a:schemeClr val="accent1">
+                    <a:alpha val="0"/>
+                  </a:schemeClr>
+                </a:solidFill>
+              </a:ln>
+              <a:solidFill>
+                <a:schemeClr val="tx1">
+                  <a:lumMod val="75000"/>
+                  <a:lumOff val="25000"/>
+                </a:schemeClr>
+              </a:solidFill>
+              <a:latin typeface="프리젠테이션 7 Bold" pitchFamily="2" charset="-127"/>
+              <a:ea typeface="프리젠테이션 7 Bold" pitchFamily="2" charset="-127"/>
+              <a:cs typeface="Pretendard" panose="02000503000000020004" pitchFamily="2" charset="-127"/>
+            </a:endParaRPr>
+          </a:p>
+          <a:p>
+            <a:pPr latinLnBrk="0">
+              <a:lnSpc>
+                <a:spcPct val="250000"/>
+              </a:lnSpc>
+              <a:buClr>
+                <a:srgbClr val="1F43F9"/>
+              </a:buClr>
+            </a:pPr>
+            <a:r>
+              <a:rPr lang="ko-KR" altLang="en-US" sz="2400" dirty="0" err="1">
+                <a:ln>
+                  <a:solidFill>
+                    <a:schemeClr val="accent1">
+                      <a:alpha val="0"/>
+                    </a:schemeClr>
+                  </a:solidFill>
+                </a:ln>
+                <a:solidFill>
+                  <a:schemeClr val="tx1">
+                    <a:lumMod val="75000"/>
+                    <a:lumOff val="25000"/>
+                  </a:schemeClr>
+                </a:solidFill>
+                <a:latin typeface="프리젠테이션 7 Bold" pitchFamily="2" charset="-127"/>
+                <a:ea typeface="프리젠테이션 7 Bold" pitchFamily="2" charset="-127"/>
+                <a:cs typeface="Pretendard" panose="02000503000000020004" pitchFamily="2" charset="-127"/>
+              </a:rPr>
+              <a:t>인프라 전환 KPI 비교</a:t>
+            </a:r>
+            <a:endParaRPr lang="en-US" altLang="ko-KR" sz="2400" dirty="0" smtClean="0">
+              <a:ln>
+                <a:solidFill>
+                  <a:schemeClr val="accent1">
+                    <a:alpha val="0"/>
+                  </a:schemeClr>
+                </a:solidFill>
+              </a:ln>
+              <a:solidFill>
+                <a:schemeClr val="tx1">
+                  <a:lumMod val="75000"/>
+                  <a:lumOff val="25000"/>
+                </a:schemeClr>
+              </a:solidFill>
+              <a:latin typeface="프리젠테이션 7 Bold" pitchFamily="2" charset="-127"/>
+              <a:ea typeface="프리젠테이션 7 Bold" pitchFamily="2" charset="-127"/>
+              <a:cs typeface="Pretendard" panose="02000503000000020004" pitchFamily="2" charset="-127"/>
+            </a:endParaRPr>
+          </a:p>
+          <a:p>
+            <a:pPr latinLnBrk="0">
+              <a:lnSpc>
+                <a:spcPct val="250000"/>
+              </a:lnSpc>
+              <a:buClr>
+                <a:srgbClr val="1F43F9"/>
+              </a:buClr>
+            </a:pPr>
+            <a:r>
+              <a:rPr lang="ko-KR" altLang="en-US" sz="2400" dirty="0" err="1">
+                <a:ln>
+                  <a:solidFill>
+                    <a:schemeClr val="accent1">
+                      <a:alpha val="0"/>
+                    </a:schemeClr>
+                  </a:solidFill>
+                </a:ln>
+                <a:solidFill>
+                  <a:schemeClr val="tx1">
+                    <a:lumMod val="75000"/>
+                    <a:lumOff val="25000"/>
+                  </a:schemeClr>
+                </a:solidFill>
+                <a:latin typeface="프리젠테이션 7 Bold" pitchFamily="2" charset="-127"/>
+                <a:ea typeface="프리젠테이션 7 Bold" pitchFamily="2" charset="-127"/>
+                <a:cs typeface="Pretendard" panose="02000503000000020004" pitchFamily="2" charset="-127"/>
+              </a:rPr>
+              <a:t>도구 선택 프레임워크</a:t>
+            </a:r>
+            <a:endParaRPr lang="en-US" altLang="ko-KR" sz="2400" dirty="0" smtClean="0">
+              <a:ln>
+                <a:solidFill>
+                  <a:schemeClr val="accent1">
+                    <a:alpha val="0"/>
+                  </a:schemeClr>
+                </a:solidFill>
+              </a:ln>
+              <a:solidFill>
+                <a:schemeClr val="tx1">
+                  <a:lumMod val="75000"/>
+                  <a:lumOff val="25000"/>
+                </a:schemeClr>
+              </a:solidFill>
+              <a:latin typeface="프리젠테이션 7 Bold" pitchFamily="2" charset="-127"/>
+              <a:ea typeface="프리젠테이션 7 Bold" pitchFamily="2" charset="-127"/>
+              <a:cs typeface="Pretendard" panose="02000503000000020004" pitchFamily="2" charset="-127"/>
+            </a:endParaRPr>
+          </a:p>
+          <a:p>
+            <a:pPr latinLnBrk="0">
+              <a:lnSpc>
+                <a:spcPct val="250000"/>
+              </a:lnSpc>
+              <a:buClr>
+                <a:srgbClr val="1F43F9"/>
+              </a:buClr>
+            </a:pPr>
+            <a:r>
+              <a:rPr lang="ko-KR" altLang="en-US" sz="2400" dirty="0" err="1">
+                <a:ln>
+                  <a:solidFill>
+                    <a:schemeClr val="accent1">
+                      <a:alpha val="0"/>
+                    </a:schemeClr>
+                  </a:solidFill>
+                </a:ln>
+                <a:solidFill>
+                  <a:schemeClr val="tx1">
+                    <a:lumMod val="75000"/>
+                    <a:lumOff val="25000"/>
+                  </a:schemeClr>
+                </a:solidFill>
+                <a:latin typeface="프리젠테이션 7 Bold" pitchFamily="2" charset="-127"/>
+                <a:ea typeface="프리젠테이션 7 Bold" pitchFamily="2" charset="-127"/>
+                <a:cs typeface="Pretendard" panose="02000503000000020004" pitchFamily="2" charset="-127"/>
+              </a:rPr>
+              <a:t>6개월 마이그레이션 로드맵</a:t>
+            </a:r>
+            <a:endParaRPr lang="en-US" altLang="ko-KR" sz="2400" dirty="0" smtClean="0">
+              <a:ln>
+                <a:solidFill>
+                  <a:schemeClr val="accent1">
+                    <a:alpha val="0"/>
+                  </a:schemeClr>
+                </a:solidFill>
+              </a:ln>
+              <a:solidFill>
+                <a:schemeClr val="tx1">
+                  <a:lumMod val="75000"/>
+                  <a:lumOff val="25000"/>
+                </a:schemeClr>
+              </a:solidFill>
+              <a:latin typeface="프리젠테이션 7 Bold" pitchFamily="2" charset="-127"/>
+              <a:ea typeface="프리젠테이션 7 Bold" pitchFamily="2" charset="-127"/>
+              <a:cs typeface="Pretendard" panose="02000503000000020004" pitchFamily="2" charset="-127"/>
+            </a:endParaRPr>
+          </a:p>
+          <a:p>
+            <a:pPr latinLnBrk="0">
+              <a:lnSpc>
+                <a:spcPct val="250000"/>
+              </a:lnSpc>
+              <a:buClr>
+                <a:srgbClr val="1F43F9"/>
+              </a:buClr>
+            </a:pPr>
+            <a:r>
+              <a:rPr lang="ko-KR" altLang="en-US" sz="2400" dirty="0" err="1">
+                <a:ln>
+                  <a:solidFill>
+                    <a:schemeClr val="accent1">
+                      <a:alpha val="0"/>
+                    </a:schemeClr>
+                  </a:solidFill>
+                </a:ln>
+                <a:solidFill>
+                  <a:schemeClr val="tx1">
+                    <a:lumMod val="75000"/>
+                    <a:lumOff val="25000"/>
+                  </a:schemeClr>
+                </a:solidFill>
+                <a:latin typeface="프리젠테이션 7 Bold" pitchFamily="2" charset="-127"/>
+                <a:ea typeface="프리젠테이션 7 Bold" pitchFamily="2" charset="-127"/>
+                <a:cs typeface="Pretendard" panose="02000503000000020004" pitchFamily="2" charset="-127"/>
+              </a:rPr>
+              <a:t>핵심 성과 지표 (KPI)</a:t>
+            </a:r>
+            <a:endParaRPr lang="en-US" altLang="ko-KR" sz="2400" dirty="0" smtClean="0">
+              <a:ln>
+                <a:solidFill>
+                  <a:schemeClr val="accent1">
+                    <a:alpha val="0"/>
+                  </a:schemeClr>
+                </a:solidFill>
+              </a:ln>
+              <a:solidFill>
+                <a:schemeClr val="tx1">
+                  <a:lumMod val="75000"/>
+                  <a:lumOff val="25000"/>
+                </a:schemeClr>
+              </a:solidFill>
+              <a:latin typeface="프리젠테이션 7 Bold" pitchFamily="2" charset="-127"/>
+              <a:ea typeface="프리젠테이션 7 Bold" pitchFamily="2" charset="-127"/>
+              <a:cs typeface="Pretendard" panose="02000503000000020004" pitchFamily="2" charset="-127"/>
+            </a:endParaRPr>
+          </a:p>
+        </p:txBody>
+      </p:sp>
+      <p:grpSp>
+        <p:nvGrpSpPr>
+          <p:cNvPr id="53" name="그룹 52"/>
+          <p:cNvGrpSpPr/>
+          <p:nvPr/>
+        </p:nvGrpSpPr>
+        <p:grpSpPr>
+          <a:xfrm>
+            <a:off x="3806048" y="2760055"/>
+            <a:ext cx="8385952" cy="2761457"/>
+            <a:chOff x="3764222" y="1060078"/>
+            <a:chExt cx="5147549" cy="1685118"/>
+          </a:xfrm>
+        </p:grpSpPr>
+        <p:cxnSp>
+          <p:nvCxnSpPr>
+            <p:cNvPr id="54" name="직선 연결선 53"/>
+            <p:cNvCxnSpPr/>
+            <p:nvPr/>
+          </p:nvCxnSpPr>
+          <p:spPr>
+            <a:xfrm>
+              <a:off x="3764222" y="1060078"/>
+              <a:ext cx="5147549" cy="0"/>
+            </a:xfrm>
+            <a:prstGeom prst="line">
+              <a:avLst/>
+            </a:prstGeom>
+            <a:ln w="3175">
+              <a:solidFill>
+                <a:schemeClr val="bg1">
+                  <a:lumMod val="75000"/>
+                  <a:alpha val="48000"/>
+                </a:schemeClr>
+              </a:solidFill>
+              <a:prstDash val="sysDash"/>
+            </a:ln>
+          </p:spPr>
+          <p:style>
+            <a:lnRef idx="1">
+              <a:schemeClr val="accent1"/>
+            </a:lnRef>
+            <a:fillRef idx="0">
+              <a:schemeClr val="accent1"/>
+            </a:fillRef>
+            <a:effectRef idx="0">
+              <a:schemeClr val="accent1"/>
+            </a:effectRef>
+            <a:fontRef idx="minor">
+              <a:schemeClr val="tx1"/>
+            </a:fontRef>
+          </p:style>
+        </p:cxnSp>
+        <p:cxnSp>
+          <p:nvCxnSpPr>
+            <p:cNvPr id="55" name="직선 연결선 54"/>
+            <p:cNvCxnSpPr/>
+            <p:nvPr/>
+          </p:nvCxnSpPr>
+          <p:spPr>
+            <a:xfrm>
+              <a:off x="3764222" y="1621784"/>
+              <a:ext cx="5147549" cy="0"/>
+            </a:xfrm>
+            <a:prstGeom prst="line">
+              <a:avLst/>
+            </a:prstGeom>
+            <a:ln w="3175">
+              <a:solidFill>
+                <a:schemeClr val="bg1">
+                  <a:lumMod val="75000"/>
+                  <a:alpha val="48000"/>
+                </a:schemeClr>
+              </a:solidFill>
+              <a:prstDash val="sysDash"/>
+            </a:ln>
+          </p:spPr>
+          <p:style>
+            <a:lnRef idx="1">
+              <a:schemeClr val="accent1"/>
+            </a:lnRef>
+            <a:fillRef idx="0">
+              <a:schemeClr val="accent1"/>
+            </a:fillRef>
+            <a:effectRef idx="0">
+              <a:schemeClr val="accent1"/>
+            </a:effectRef>
+            <a:fontRef idx="minor">
+              <a:schemeClr val="tx1"/>
+            </a:fontRef>
+          </p:style>
+        </p:cxnSp>
+        <p:cxnSp>
+          <p:nvCxnSpPr>
+            <p:cNvPr id="56" name="직선 연결선 55"/>
+            <p:cNvCxnSpPr/>
+            <p:nvPr/>
+          </p:nvCxnSpPr>
+          <p:spPr>
+            <a:xfrm>
+              <a:off x="3764222" y="2183490"/>
+              <a:ext cx="5147549" cy="0"/>
+            </a:xfrm>
+            <a:prstGeom prst="line">
+              <a:avLst/>
+            </a:prstGeom>
+            <a:ln w="3175">
+              <a:solidFill>
+                <a:schemeClr val="bg1">
+                  <a:lumMod val="75000"/>
+                  <a:alpha val="48000"/>
+                </a:schemeClr>
+              </a:solidFill>
+              <a:prstDash val="sysDash"/>
+            </a:ln>
+          </p:spPr>
+          <p:style>
+            <a:lnRef idx="1">
+              <a:schemeClr val="accent1"/>
+            </a:lnRef>
+            <a:fillRef idx="0">
+              <a:schemeClr val="accent1"/>
+            </a:fillRef>
+            <a:effectRef idx="0">
+              <a:schemeClr val="accent1"/>
+            </a:effectRef>
+            <a:fontRef idx="minor">
+              <a:schemeClr val="tx1"/>
+            </a:fontRef>
+          </p:style>
+        </p:cxnSp>
+        <p:cxnSp>
+          <p:nvCxnSpPr>
+            <p:cNvPr id="57" name="직선 연결선 56"/>
+            <p:cNvCxnSpPr/>
+            <p:nvPr/>
+          </p:nvCxnSpPr>
+          <p:spPr>
+            <a:xfrm>
+              <a:off x="3764222" y="2745196"/>
+              <a:ext cx="5147549" cy="0"/>
+            </a:xfrm>
+            <a:prstGeom prst="line">
+              <a:avLst/>
+            </a:prstGeom>
+            <a:ln w="3175">
+              <a:solidFill>
+                <a:schemeClr val="bg1">
+                  <a:lumMod val="75000"/>
+                  <a:alpha val="48000"/>
+                </a:schemeClr>
+              </a:solidFill>
+              <a:prstDash val="sysDash"/>
+            </a:ln>
+          </p:spPr>
+          <p:style>
+            <a:lnRef idx="1">
+              <a:schemeClr val="accent1"/>
+            </a:lnRef>
+            <a:fillRef idx="0">
+              <a:schemeClr val="accent1"/>
+            </a:fillRef>
+            <a:effectRef idx="0">
+              <a:schemeClr val="accent1"/>
+            </a:effectRef>
+            <a:fontRef idx="minor">
+              <a:schemeClr val="tx1"/>
+            </a:fontRef>
+          </p:style>
+        </p:cxnSp>
+      </p:grpSp>
+      <p:sp>
+        <p:nvSpPr>
+          <p:cNvPr id="2" name="텍스트 개체 틀 1"/>
+          <p:cNvSpPr>
+            <a:spLocks noGrp="1"/>
+          </p:cNvSpPr>
+          <p:nvPr>
+            <p:ph type="body" sz="quarter" idx="10"/>
+          </p:nvPr>
+        </p:nvSpPr>
+        <p:spPr/>
+        <p:txBody>
+          <a:bodyPr/>
+          <a:lstStyle/>
+          <a:p>
+            <a:endParaRPr lang="ko-KR" altLang="en-US" dirty="0"/>
+          </a:p>
+        </p:txBody>
+      </p:sp>
+    </p:spTree>
+    <p:extLst>
+      <p:ext uri="{BB962C8B-B14F-4D97-AF65-F5344CB8AC3E}">
+        <p14:creationId xmlns:p14="http://schemas.microsoft.com/office/powerpoint/2010/main" val="2202507386"/>
       </p:ext>
     </p:extLst>
   </p:cSld>
@@ -4888,36 +5354,8 @@
                 <a:ea typeface="프리젠테이션 7 Bold" pitchFamily="2" charset="-127"/>
                 <a:cs typeface="Pretendard ExtraBold" panose="02000903000000020004" pitchFamily="2" charset="-127"/>
               </a:rPr>
-              <a:t>서브색상</a:t>
-            </a:r>
-            <a:r>
-              <a:rPr lang="ko-KR" altLang="en-US" sz="2000" dirty="0">
-                <a:latin typeface="프리젠테이션 7 Bold" pitchFamily="2" charset="-127"/>
-                <a:ea typeface="프리젠테이션 7 Bold" pitchFamily="2" charset="-127"/>
-                <a:cs typeface="Pretendard ExtraBold" panose="02000903000000020004" pitchFamily="2" charset="-127"/>
-              </a:rPr>
-              <a:t> </a:t>
-            </a:r>
-          </a:p>
-          <a:p>
-            <a:pPr>
-              <a:lnSpc>
-                <a:spcPct val="120000"/>
-              </a:lnSpc>
-            </a:pPr>
-            <a:r>
-              <a:rPr lang="ko-KR" altLang="en-US" sz="2000" dirty="0">
-                <a:latin typeface="프리젠테이션 7 Bold" pitchFamily="2" charset="-127"/>
-                <a:ea typeface="프리젠테이션 7 Bold" pitchFamily="2" charset="-127"/>
-                <a:cs typeface="Pretendard ExtraBold" panose="02000903000000020004" pitchFamily="2" charset="-127"/>
-              </a:rPr>
-              <a:t>적용 예시</a:t>
-            </a:r>
-            <a:endParaRPr lang="ko-KR" altLang="en-US" sz="2000" dirty="0">
-              <a:latin typeface="프리젠테이션 7 Bold" pitchFamily="2" charset="-127"/>
-              <a:ea typeface="프리젠테이션 7 Bold" pitchFamily="2" charset="-127"/>
-              <a:cs typeface="Pretendard ExtraBold" panose="02000903000000020004" pitchFamily="2" charset="-127"/>
-            </a:endParaRPr>
+              <a:t>1. AS-IS / TO-BE</a:t>
+            </a:r>
           </a:p>
         </p:txBody>
       </p:sp>
@@ -4967,387 +5405,8 @@
                 <a:ea typeface="프리젠테이션 5 Medium" pitchFamily="2" charset="-127"/>
                 <a:cs typeface="Pretendard" panose="02000503000000020004" pitchFamily="2" charset="-127"/>
               </a:rPr>
-              <a:t>설명글을</a:t>
-            </a:r>
-            <a:r>
-              <a:rPr lang="ko-KR" altLang="en-US" sz="1200" dirty="0">
-                <a:ln>
-                  <a:solidFill>
-                    <a:schemeClr val="accent1">
-                      <a:alpha val="0"/>
-                    </a:schemeClr>
-                  </a:solidFill>
-                </a:ln>
-                <a:solidFill>
-                  <a:schemeClr val="tx1">
-                    <a:lumMod val="75000"/>
-                    <a:lumOff val="25000"/>
-                  </a:schemeClr>
-                </a:solidFill>
-                <a:latin typeface="프리젠테이션 5 Medium" pitchFamily="2" charset="-127"/>
-                <a:ea typeface="프리젠테이션 5 Medium" pitchFamily="2" charset="-127"/>
-                <a:cs typeface="Pretendard" panose="02000503000000020004" pitchFamily="2" charset="-127"/>
-              </a:rPr>
-              <a:t> 적어주세요</a:t>
-            </a:r>
-            <a:r>
-              <a:rPr lang="en-US" altLang="ko-KR" sz="1200" b="1" dirty="0">
-                <a:ln>
-                  <a:solidFill>
-                    <a:schemeClr val="accent1">
-                      <a:alpha val="0"/>
-                    </a:schemeClr>
-                  </a:solidFill>
-                </a:ln>
-                <a:solidFill>
-                  <a:schemeClr val="tx1">
-                    <a:lumMod val="75000"/>
-                    <a:lumOff val="25000"/>
-                  </a:schemeClr>
-                </a:solidFill>
-                <a:latin typeface="프리젠테이션 5 Medium" pitchFamily="2" charset="-127"/>
-                <a:ea typeface="프리젠테이션 5 Medium" pitchFamily="2" charset="-127"/>
-                <a:cs typeface="Pretendard" panose="02000503000000020004" pitchFamily="2" charset="-127"/>
-              </a:rPr>
-              <a:t>. </a:t>
-            </a:r>
-            <a:r>
-              <a:rPr lang="ko-KR" altLang="en-US" sz="1200" b="1" dirty="0">
-                <a:ln>
-                  <a:solidFill>
-                    <a:schemeClr val="accent1">
-                      <a:alpha val="0"/>
-                    </a:schemeClr>
-                  </a:solidFill>
-                </a:ln>
-                <a:solidFill>
-                  <a:srgbClr val="0043DA"/>
-                </a:solidFill>
-                <a:latin typeface="프리젠테이션 7 Bold" pitchFamily="2" charset="-127"/>
-                <a:ea typeface="프리젠테이션 7 Bold" pitchFamily="2" charset="-127"/>
-                <a:cs typeface="Pretendard" panose="02000503000000020004" pitchFamily="2" charset="-127"/>
-              </a:rPr>
-              <a:t>강조 텍스트</a:t>
-            </a:r>
-            <a:r>
-              <a:rPr lang="en-US" altLang="ko-KR" sz="1200" b="1" dirty="0">
-                <a:ln>
-                  <a:solidFill>
-                    <a:schemeClr val="accent1">
-                      <a:alpha val="0"/>
-                    </a:schemeClr>
-                  </a:solidFill>
-                </a:ln>
-                <a:solidFill>
-                  <a:srgbClr val="0043DA"/>
-                </a:solidFill>
-                <a:latin typeface="프리젠테이션 7 Bold" pitchFamily="2" charset="-127"/>
-                <a:ea typeface="프리젠테이션 7 Bold" pitchFamily="2" charset="-127"/>
-                <a:cs typeface="Pretendard" panose="02000503000000020004" pitchFamily="2" charset="-127"/>
-              </a:rPr>
-              <a:t>(</a:t>
-            </a:r>
-            <a:r>
-              <a:rPr lang="ko-KR" altLang="en-US" sz="1200" b="1" dirty="0" err="1">
-                <a:ln>
-                  <a:solidFill>
-                    <a:schemeClr val="accent1">
-                      <a:alpha val="0"/>
-                    </a:schemeClr>
-                  </a:solidFill>
-                </a:ln>
-                <a:solidFill>
-                  <a:srgbClr val="0043DA"/>
-                </a:solidFill>
-                <a:latin typeface="프리젠테이션 7 Bold" pitchFamily="2" charset="-127"/>
-                <a:ea typeface="프리젠테이션 7 Bold" pitchFamily="2" charset="-127"/>
-                <a:cs typeface="Pretendard" panose="02000503000000020004" pitchFamily="2" charset="-127"/>
-              </a:rPr>
-              <a:t>프리젠테이션</a:t>
-            </a:r>
-            <a:r>
-              <a:rPr lang="ko-KR" altLang="en-US" sz="1200" b="1" dirty="0">
-                <a:ln>
-                  <a:solidFill>
-                    <a:schemeClr val="accent1">
-                      <a:alpha val="0"/>
-                    </a:schemeClr>
-                  </a:solidFill>
-                </a:ln>
-                <a:solidFill>
-                  <a:srgbClr val="0043DA"/>
-                </a:solidFill>
-                <a:latin typeface="프리젠테이션 7 Bold" pitchFamily="2" charset="-127"/>
-                <a:ea typeface="프리젠테이션 7 Bold" pitchFamily="2" charset="-127"/>
-                <a:cs typeface="Pretendard" panose="02000503000000020004" pitchFamily="2" charset="-127"/>
-              </a:rPr>
-              <a:t> </a:t>
-            </a:r>
-            <a:r>
-              <a:rPr lang="en-US" altLang="ko-KR" sz="1200" b="1" dirty="0">
-                <a:ln>
-                  <a:solidFill>
-                    <a:schemeClr val="accent1">
-                      <a:alpha val="0"/>
-                    </a:schemeClr>
-                  </a:solidFill>
-                </a:ln>
-                <a:solidFill>
-                  <a:srgbClr val="0043DA"/>
-                </a:solidFill>
-                <a:latin typeface="프리젠테이션 7 Bold" pitchFamily="2" charset="-127"/>
-                <a:ea typeface="프리젠테이션 7 Bold" pitchFamily="2" charset="-127"/>
-                <a:cs typeface="Pretendard" panose="02000503000000020004" pitchFamily="2" charset="-127"/>
-              </a:rPr>
-              <a:t>7 Bold, </a:t>
-            </a:r>
-            <a:r>
-              <a:rPr lang="ko-KR" altLang="en-US" sz="1200" b="1" dirty="0">
-                <a:ln>
-                  <a:solidFill>
-                    <a:schemeClr val="accent1">
-                      <a:alpha val="0"/>
-                    </a:schemeClr>
-                  </a:solidFill>
-                </a:ln>
-                <a:solidFill>
-                  <a:srgbClr val="0043DA"/>
-                </a:solidFill>
-                <a:latin typeface="프리젠테이션 7 Bold" pitchFamily="2" charset="-127"/>
-                <a:ea typeface="프리젠테이션 7 Bold" pitchFamily="2" charset="-127"/>
-                <a:cs typeface="Pretendard" panose="02000503000000020004" pitchFamily="2" charset="-127"/>
-              </a:rPr>
-              <a:t>메인 컬러</a:t>
-            </a:r>
-            <a:r>
-              <a:rPr lang="en-US" altLang="ko-KR" sz="1200" b="1" dirty="0" smtClean="0">
-                <a:ln>
-                  <a:solidFill>
-                    <a:schemeClr val="accent1">
-                      <a:alpha val="0"/>
-                    </a:schemeClr>
-                  </a:solidFill>
-                </a:ln>
-                <a:solidFill>
-                  <a:srgbClr val="0043DA"/>
-                </a:solidFill>
-                <a:latin typeface="프리젠테이션 7 Bold" pitchFamily="2" charset="-127"/>
-                <a:ea typeface="프리젠테이션 7 Bold" pitchFamily="2" charset="-127"/>
-                <a:cs typeface="Pretendard" panose="02000503000000020004" pitchFamily="2" charset="-127"/>
-              </a:rPr>
-              <a:t>)</a:t>
-            </a:r>
-          </a:p>
-          <a:p>
-            <a:pPr latinLnBrk="0">
-              <a:lnSpc>
-                <a:spcPct val="150000"/>
-              </a:lnSpc>
-            </a:pPr>
-            <a:r>
-              <a:rPr lang="ko-KR" altLang="en-US" sz="1200" dirty="0" smtClean="0">
-                <a:ln>
-                  <a:solidFill>
-                    <a:schemeClr val="accent1">
-                      <a:alpha val="0"/>
-                    </a:schemeClr>
-                  </a:solidFill>
-                </a:ln>
-                <a:solidFill>
-                  <a:schemeClr val="tx1">
-                    <a:lumMod val="75000"/>
-                    <a:lumOff val="25000"/>
-                  </a:schemeClr>
-                </a:solidFill>
-                <a:latin typeface="프리젠테이션 5 Medium" pitchFamily="2" charset="-127"/>
-                <a:ea typeface="프리젠테이션 5 Medium" pitchFamily="2" charset="-127"/>
-                <a:cs typeface="Pretendard" panose="02000503000000020004" pitchFamily="2" charset="-127"/>
-              </a:rPr>
-              <a:t>폰트 </a:t>
-            </a:r>
-            <a:r>
-              <a:rPr lang="en-US" altLang="ko-KR" sz="1200" dirty="0" smtClean="0">
-                <a:ln>
-                  <a:solidFill>
-                    <a:schemeClr val="accent1">
-                      <a:alpha val="0"/>
-                    </a:schemeClr>
-                  </a:solidFill>
-                </a:ln>
-                <a:solidFill>
-                  <a:schemeClr val="tx1">
-                    <a:lumMod val="75000"/>
-                    <a:lumOff val="25000"/>
-                  </a:schemeClr>
-                </a:solidFill>
-                <a:latin typeface="프리젠테이션 5 Medium" pitchFamily="2" charset="-127"/>
-                <a:ea typeface="프리젠테이션 5 Medium" pitchFamily="2" charset="-127"/>
-                <a:cs typeface="Pretendard" panose="02000503000000020004" pitchFamily="2" charset="-127"/>
-              </a:rPr>
-              <a:t>: </a:t>
-            </a:r>
-            <a:r>
-              <a:rPr lang="ko-KR" altLang="en-US" sz="1200" dirty="0" err="1" smtClean="0">
-                <a:ln>
-                  <a:solidFill>
-                    <a:schemeClr val="accent1">
-                      <a:alpha val="0"/>
-                    </a:schemeClr>
-                  </a:solidFill>
-                </a:ln>
-                <a:solidFill>
-                  <a:schemeClr val="tx1">
-                    <a:lumMod val="75000"/>
-                    <a:lumOff val="25000"/>
-                  </a:schemeClr>
-                </a:solidFill>
-                <a:latin typeface="프리젠테이션 5 Medium" pitchFamily="2" charset="-127"/>
-                <a:ea typeface="프리젠테이션 5 Medium" pitchFamily="2" charset="-127"/>
-                <a:cs typeface="Pretendard" panose="02000503000000020004" pitchFamily="2" charset="-127"/>
-              </a:rPr>
-              <a:t>프리젠테이션</a:t>
-            </a:r>
-            <a:r>
-              <a:rPr lang="ko-KR" altLang="en-US" sz="1200" dirty="0" smtClean="0">
-                <a:ln>
-                  <a:solidFill>
-                    <a:schemeClr val="accent1">
-                      <a:alpha val="0"/>
-                    </a:schemeClr>
-                  </a:solidFill>
-                </a:ln>
-                <a:solidFill>
-                  <a:schemeClr val="tx1">
-                    <a:lumMod val="75000"/>
-                    <a:lumOff val="25000"/>
-                  </a:schemeClr>
-                </a:solidFill>
-                <a:latin typeface="프리젠테이션 5 Medium" pitchFamily="2" charset="-127"/>
-                <a:ea typeface="프리젠테이션 5 Medium" pitchFamily="2" charset="-127"/>
-                <a:cs typeface="Pretendard" panose="02000503000000020004" pitchFamily="2" charset="-127"/>
-              </a:rPr>
-              <a:t> </a:t>
-            </a:r>
-            <a:r>
-              <a:rPr lang="en-US" altLang="ko-KR" sz="1200" dirty="0" smtClean="0">
-                <a:ln>
-                  <a:solidFill>
-                    <a:schemeClr val="accent1">
-                      <a:alpha val="0"/>
-                    </a:schemeClr>
-                  </a:solidFill>
-                </a:ln>
-                <a:solidFill>
-                  <a:schemeClr val="tx1">
-                    <a:lumMod val="75000"/>
-                    <a:lumOff val="25000"/>
-                  </a:schemeClr>
-                </a:solidFill>
-                <a:latin typeface="프리젠테이션 5 Medium" pitchFamily="2" charset="-127"/>
-                <a:ea typeface="프리젠테이션 5 Medium" pitchFamily="2" charset="-127"/>
-                <a:cs typeface="Pretendard" panose="02000503000000020004" pitchFamily="2" charset="-127"/>
-              </a:rPr>
-              <a:t>5 Medium 12pt  </a:t>
-            </a:r>
-            <a:r>
-              <a:rPr lang="ko-KR" altLang="en-US" sz="1200" dirty="0" smtClean="0">
-                <a:ln>
-                  <a:solidFill>
-                    <a:schemeClr val="accent1">
-                      <a:alpha val="0"/>
-                    </a:schemeClr>
-                  </a:solidFill>
-                </a:ln>
-                <a:solidFill>
-                  <a:schemeClr val="tx1">
-                    <a:lumMod val="75000"/>
-                    <a:lumOff val="25000"/>
-                  </a:schemeClr>
-                </a:solidFill>
-                <a:latin typeface="프리젠테이션 5 Medium" pitchFamily="2" charset="-127"/>
-                <a:ea typeface="프리젠테이션 5 Medium" pitchFamily="2" charset="-127"/>
-                <a:cs typeface="Pretendard" panose="02000503000000020004" pitchFamily="2" charset="-127"/>
-              </a:rPr>
-              <a:t>최대 </a:t>
-            </a:r>
-            <a:r>
-              <a:rPr lang="en-US" altLang="ko-KR" sz="1200" dirty="0" smtClean="0">
-                <a:ln>
-                  <a:solidFill>
-                    <a:schemeClr val="accent1">
-                      <a:alpha val="0"/>
-                    </a:schemeClr>
-                  </a:solidFill>
-                </a:ln>
-                <a:solidFill>
-                  <a:schemeClr val="tx1">
-                    <a:lumMod val="75000"/>
-                    <a:lumOff val="25000"/>
-                  </a:schemeClr>
-                </a:solidFill>
-                <a:latin typeface="프리젠테이션 5 Medium" pitchFamily="2" charset="-127"/>
-                <a:ea typeface="프리젠테이션 5 Medium" pitchFamily="2" charset="-127"/>
-                <a:cs typeface="Pretendard" panose="02000503000000020004" pitchFamily="2" charset="-127"/>
-              </a:rPr>
-              <a:t>3</a:t>
-            </a:r>
-            <a:r>
-              <a:rPr lang="ko-KR" altLang="en-US" sz="1200" dirty="0" smtClean="0">
-                <a:ln>
-                  <a:solidFill>
-                    <a:schemeClr val="accent1">
-                      <a:alpha val="0"/>
-                    </a:schemeClr>
-                  </a:solidFill>
-                </a:ln>
-                <a:solidFill>
-                  <a:schemeClr val="tx1">
-                    <a:lumMod val="75000"/>
-                    <a:lumOff val="25000"/>
-                  </a:schemeClr>
-                </a:solidFill>
-                <a:latin typeface="프리젠테이션 5 Medium" pitchFamily="2" charset="-127"/>
-                <a:ea typeface="프리젠테이션 5 Medium" pitchFamily="2" charset="-127"/>
-                <a:cs typeface="Pretendard" panose="02000503000000020004" pitchFamily="2" charset="-127"/>
-              </a:rPr>
-              <a:t>줄까지 작성 가능합니다</a:t>
-            </a:r>
-            <a:r>
-              <a:rPr lang="en-US" altLang="ko-KR" sz="1200" dirty="0" smtClean="0">
-                <a:ln>
-                  <a:solidFill>
-                    <a:schemeClr val="accent1">
-                      <a:alpha val="0"/>
-                    </a:schemeClr>
-                  </a:solidFill>
-                </a:ln>
-                <a:solidFill>
-                  <a:schemeClr val="tx1">
-                    <a:lumMod val="75000"/>
-                    <a:lumOff val="25000"/>
-                  </a:schemeClr>
-                </a:solidFill>
-                <a:latin typeface="프리젠테이션 5 Medium" pitchFamily="2" charset="-127"/>
-                <a:ea typeface="프리젠테이션 5 Medium" pitchFamily="2" charset="-127"/>
-                <a:cs typeface="Pretendard" panose="02000503000000020004" pitchFamily="2" charset="-127"/>
-              </a:rPr>
-              <a:t>.</a:t>
-            </a:r>
-            <a:endParaRPr lang="en-US" altLang="ko-KR" sz="1200" dirty="0">
-              <a:ln>
-                <a:solidFill>
-                  <a:schemeClr val="accent1">
-                    <a:alpha val="0"/>
-                  </a:schemeClr>
-                </a:solidFill>
-              </a:ln>
-              <a:solidFill>
-                <a:srgbClr val="2765E1"/>
-              </a:solidFill>
-              <a:latin typeface="프리젠테이션 5 Medium" pitchFamily="2" charset="-127"/>
-              <a:ea typeface="프리젠테이션 5 Medium" pitchFamily="2" charset="-127"/>
-              <a:cs typeface="Pretendard" panose="02000503000000020004" pitchFamily="2" charset="-127"/>
-            </a:endParaRPr>
+              <a:t>현재 환경의 문제점과 목표 상태</a:t>
+            </a:r>
           </a:p>
         </p:txBody>
       </p:sp>
@@ -5587,8 +5646,8 @@
         </p:nvSpPr>
         <p:spPr>
           <a:xfrm>
-            <a:off x="637160" y="2897580"/>
-            <a:ext cx="4941840" cy="365760"/>
+            <a:off x="862388" y="3247162"/>
+            <a:ext cx="4493144" cy="365760"/>
           </a:xfrm>
           <a:prstGeom prst="rect">
             <a:avLst/>
@@ -5626,8 +5685,8 @@
         </p:nvSpPr>
         <p:spPr>
           <a:xfrm>
-            <a:off x="6611040" y="2897580"/>
-            <a:ext cx="4941840" cy="365760"/>
+            <a:off x="6836468" y="3247162"/>
+            <a:ext cx="4493144" cy="365760"/>
           </a:xfrm>
           <a:prstGeom prst="rect">
             <a:avLst/>
@@ -5665,8 +5724,8 @@
         </p:nvSpPr>
         <p:spPr>
           <a:xfrm>
-            <a:off x="637160" y="3263580"/>
-            <a:ext cx="4484640" cy="2449720"/>
+            <a:off x="862388" y="3650105"/>
+            <a:ext cx="4493144" cy="2449720"/>
           </a:xfrm>
           <a:prstGeom prst="rect">
             <a:avLst/>
@@ -5802,8 +5861,8 @@
         </p:nvSpPr>
         <p:spPr>
           <a:xfrm>
-            <a:off x="6611040" y="3263580"/>
-            <a:ext cx="4484640" cy="2449720"/>
+            <a:off x="6836468" y="3650105"/>
+            <a:ext cx="4493144" cy="2449720"/>
           </a:xfrm>
           <a:prstGeom prst="rect">
             <a:avLst/>
@@ -6107,36 +6166,8 @@
                 <a:ea typeface="프리젠테이션 7 Bold" pitchFamily="2" charset="-127"/>
                 <a:cs typeface="Pretendard ExtraBold" panose="02000903000000020004" pitchFamily="2" charset="-127"/>
               </a:rPr>
-              <a:t>서브색상</a:t>
-            </a:r>
-            <a:r>
-              <a:rPr lang="ko-KR" altLang="en-US" sz="2000" dirty="0">
-                <a:latin typeface="프리젠테이션 7 Bold" pitchFamily="2" charset="-127"/>
-                <a:ea typeface="프리젠테이션 7 Bold" pitchFamily="2" charset="-127"/>
-                <a:cs typeface="Pretendard ExtraBold" panose="02000903000000020004" pitchFamily="2" charset="-127"/>
-              </a:rPr>
-              <a:t> </a:t>
-            </a:r>
-          </a:p>
-          <a:p>
-            <a:pPr>
-              <a:lnSpc>
-                <a:spcPct val="120000"/>
-              </a:lnSpc>
-            </a:pPr>
-            <a:r>
-              <a:rPr lang="ko-KR" altLang="en-US" sz="2000" dirty="0">
-                <a:latin typeface="프리젠테이션 7 Bold" pitchFamily="2" charset="-127"/>
-                <a:ea typeface="프리젠테이션 7 Bold" pitchFamily="2" charset="-127"/>
-                <a:cs typeface="Pretendard ExtraBold" panose="02000903000000020004" pitchFamily="2" charset="-127"/>
-              </a:rPr>
-              <a:t>적용 예시</a:t>
-            </a:r>
-            <a:endParaRPr lang="ko-KR" altLang="en-US" sz="2000" dirty="0">
-              <a:latin typeface="프리젠테이션 7 Bold" pitchFamily="2" charset="-127"/>
-              <a:ea typeface="프리젠테이션 7 Bold" pitchFamily="2" charset="-127"/>
-              <a:cs typeface="Pretendard ExtraBold" panose="02000903000000020004" pitchFamily="2" charset="-127"/>
-            </a:endParaRPr>
+              <a:t>2. 인프라 전환 KPI 비교</a:t>
+            </a:r>
           </a:p>
         </p:txBody>
       </p:sp>
@@ -6186,387 +6217,8 @@
                 <a:ea typeface="프리젠테이션 5 Medium" pitchFamily="2" charset="-127"/>
                 <a:cs typeface="Pretendard" panose="02000503000000020004" pitchFamily="2" charset="-127"/>
               </a:rPr>
-              <a:t>설명글을</a:t>
-            </a:r>
-            <a:r>
-              <a:rPr lang="ko-KR" altLang="en-US" sz="1200" dirty="0">
-                <a:ln>
-                  <a:solidFill>
-                    <a:schemeClr val="accent1">
-                      <a:alpha val="0"/>
-                    </a:schemeClr>
-                  </a:solidFill>
-                </a:ln>
-                <a:solidFill>
-                  <a:schemeClr val="tx1">
-                    <a:lumMod val="75000"/>
-                    <a:lumOff val="25000"/>
-                  </a:schemeClr>
-                </a:solidFill>
-                <a:latin typeface="프리젠테이션 5 Medium" pitchFamily="2" charset="-127"/>
-                <a:ea typeface="프리젠테이션 5 Medium" pitchFamily="2" charset="-127"/>
-                <a:cs typeface="Pretendard" panose="02000503000000020004" pitchFamily="2" charset="-127"/>
-              </a:rPr>
-              <a:t> 적어주세요</a:t>
-            </a:r>
-            <a:r>
-              <a:rPr lang="en-US" altLang="ko-KR" sz="1200" b="1" dirty="0">
-                <a:ln>
-                  <a:solidFill>
-                    <a:schemeClr val="accent1">
-                      <a:alpha val="0"/>
-                    </a:schemeClr>
-                  </a:solidFill>
-                </a:ln>
-                <a:solidFill>
-                  <a:schemeClr val="tx1">
-                    <a:lumMod val="75000"/>
-                    <a:lumOff val="25000"/>
-                  </a:schemeClr>
-                </a:solidFill>
-                <a:latin typeface="프리젠테이션 5 Medium" pitchFamily="2" charset="-127"/>
-                <a:ea typeface="프리젠테이션 5 Medium" pitchFamily="2" charset="-127"/>
-                <a:cs typeface="Pretendard" panose="02000503000000020004" pitchFamily="2" charset="-127"/>
-              </a:rPr>
-              <a:t>. </a:t>
-            </a:r>
-            <a:r>
-              <a:rPr lang="ko-KR" altLang="en-US" sz="1200" b="1" dirty="0">
-                <a:ln>
-                  <a:solidFill>
-                    <a:schemeClr val="accent1">
-                      <a:alpha val="0"/>
-                    </a:schemeClr>
-                  </a:solidFill>
-                </a:ln>
-                <a:solidFill>
-                  <a:srgbClr val="0043DA"/>
-                </a:solidFill>
-                <a:latin typeface="프리젠테이션 7 Bold" pitchFamily="2" charset="-127"/>
-                <a:ea typeface="프리젠테이션 7 Bold" pitchFamily="2" charset="-127"/>
-                <a:cs typeface="Pretendard" panose="02000503000000020004" pitchFamily="2" charset="-127"/>
-              </a:rPr>
-              <a:t>강조 텍스트</a:t>
-            </a:r>
-            <a:r>
-              <a:rPr lang="en-US" altLang="ko-KR" sz="1200" b="1" dirty="0">
-                <a:ln>
-                  <a:solidFill>
-                    <a:schemeClr val="accent1">
-                      <a:alpha val="0"/>
-                    </a:schemeClr>
-                  </a:solidFill>
-                </a:ln>
-                <a:solidFill>
-                  <a:srgbClr val="0043DA"/>
-                </a:solidFill>
-                <a:latin typeface="프리젠테이션 7 Bold" pitchFamily="2" charset="-127"/>
-                <a:ea typeface="프리젠테이션 7 Bold" pitchFamily="2" charset="-127"/>
-                <a:cs typeface="Pretendard" panose="02000503000000020004" pitchFamily="2" charset="-127"/>
-              </a:rPr>
-              <a:t>(</a:t>
-            </a:r>
-            <a:r>
-              <a:rPr lang="ko-KR" altLang="en-US" sz="1200" b="1" dirty="0" err="1">
-                <a:ln>
-                  <a:solidFill>
-                    <a:schemeClr val="accent1">
-                      <a:alpha val="0"/>
-                    </a:schemeClr>
-                  </a:solidFill>
-                </a:ln>
-                <a:solidFill>
-                  <a:srgbClr val="0043DA"/>
-                </a:solidFill>
-                <a:latin typeface="프리젠테이션 7 Bold" pitchFamily="2" charset="-127"/>
-                <a:ea typeface="프리젠테이션 7 Bold" pitchFamily="2" charset="-127"/>
-                <a:cs typeface="Pretendard" panose="02000503000000020004" pitchFamily="2" charset="-127"/>
-              </a:rPr>
-              <a:t>프리젠테이션</a:t>
-            </a:r>
-            <a:r>
-              <a:rPr lang="ko-KR" altLang="en-US" sz="1200" b="1" dirty="0">
-                <a:ln>
-                  <a:solidFill>
-                    <a:schemeClr val="accent1">
-                      <a:alpha val="0"/>
-                    </a:schemeClr>
-                  </a:solidFill>
-                </a:ln>
-                <a:solidFill>
-                  <a:srgbClr val="0043DA"/>
-                </a:solidFill>
-                <a:latin typeface="프리젠테이션 7 Bold" pitchFamily="2" charset="-127"/>
-                <a:ea typeface="프리젠테이션 7 Bold" pitchFamily="2" charset="-127"/>
-                <a:cs typeface="Pretendard" panose="02000503000000020004" pitchFamily="2" charset="-127"/>
-              </a:rPr>
-              <a:t> </a:t>
-            </a:r>
-            <a:r>
-              <a:rPr lang="en-US" altLang="ko-KR" sz="1200" b="1" dirty="0">
-                <a:ln>
-                  <a:solidFill>
-                    <a:schemeClr val="accent1">
-                      <a:alpha val="0"/>
-                    </a:schemeClr>
-                  </a:solidFill>
-                </a:ln>
-                <a:solidFill>
-                  <a:srgbClr val="0043DA"/>
-                </a:solidFill>
-                <a:latin typeface="프리젠테이션 7 Bold" pitchFamily="2" charset="-127"/>
-                <a:ea typeface="프리젠테이션 7 Bold" pitchFamily="2" charset="-127"/>
-                <a:cs typeface="Pretendard" panose="02000503000000020004" pitchFamily="2" charset="-127"/>
-              </a:rPr>
-              <a:t>7 Bold, </a:t>
-            </a:r>
-            <a:r>
-              <a:rPr lang="ko-KR" altLang="en-US" sz="1200" b="1" dirty="0">
-                <a:ln>
-                  <a:solidFill>
-                    <a:schemeClr val="accent1">
-                      <a:alpha val="0"/>
-                    </a:schemeClr>
-                  </a:solidFill>
-                </a:ln>
-                <a:solidFill>
-                  <a:srgbClr val="0043DA"/>
-                </a:solidFill>
-                <a:latin typeface="프리젠테이션 7 Bold" pitchFamily="2" charset="-127"/>
-                <a:ea typeface="프리젠테이션 7 Bold" pitchFamily="2" charset="-127"/>
-                <a:cs typeface="Pretendard" panose="02000503000000020004" pitchFamily="2" charset="-127"/>
-              </a:rPr>
-              <a:t>메인 컬러</a:t>
-            </a:r>
-            <a:r>
-              <a:rPr lang="en-US" altLang="ko-KR" sz="1200" b="1" dirty="0" smtClean="0">
-                <a:ln>
-                  <a:solidFill>
-                    <a:schemeClr val="accent1">
-                      <a:alpha val="0"/>
-                    </a:schemeClr>
-                  </a:solidFill>
-                </a:ln>
-                <a:solidFill>
-                  <a:srgbClr val="0043DA"/>
-                </a:solidFill>
-                <a:latin typeface="프리젠테이션 7 Bold" pitchFamily="2" charset="-127"/>
-                <a:ea typeface="프리젠테이션 7 Bold" pitchFamily="2" charset="-127"/>
-                <a:cs typeface="Pretendard" panose="02000503000000020004" pitchFamily="2" charset="-127"/>
-              </a:rPr>
-              <a:t>)</a:t>
-            </a:r>
-          </a:p>
-          <a:p>
-            <a:pPr latinLnBrk="0">
-              <a:lnSpc>
-                <a:spcPct val="150000"/>
-              </a:lnSpc>
-            </a:pPr>
-            <a:r>
-              <a:rPr lang="ko-KR" altLang="en-US" sz="1200" dirty="0" smtClean="0">
-                <a:ln>
-                  <a:solidFill>
-                    <a:schemeClr val="accent1">
-                      <a:alpha val="0"/>
-                    </a:schemeClr>
-                  </a:solidFill>
-                </a:ln>
-                <a:solidFill>
-                  <a:schemeClr val="tx1">
-                    <a:lumMod val="75000"/>
-                    <a:lumOff val="25000"/>
-                  </a:schemeClr>
-                </a:solidFill>
-                <a:latin typeface="프리젠테이션 5 Medium" pitchFamily="2" charset="-127"/>
-                <a:ea typeface="프리젠테이션 5 Medium" pitchFamily="2" charset="-127"/>
-                <a:cs typeface="Pretendard" panose="02000503000000020004" pitchFamily="2" charset="-127"/>
-              </a:rPr>
-              <a:t>폰트 </a:t>
-            </a:r>
-            <a:r>
-              <a:rPr lang="en-US" altLang="ko-KR" sz="1200" dirty="0" smtClean="0">
-                <a:ln>
-                  <a:solidFill>
-                    <a:schemeClr val="accent1">
-                      <a:alpha val="0"/>
-                    </a:schemeClr>
-                  </a:solidFill>
-                </a:ln>
-                <a:solidFill>
-                  <a:schemeClr val="tx1">
-                    <a:lumMod val="75000"/>
-                    <a:lumOff val="25000"/>
-                  </a:schemeClr>
-                </a:solidFill>
-                <a:latin typeface="프리젠테이션 5 Medium" pitchFamily="2" charset="-127"/>
-                <a:ea typeface="프리젠테이션 5 Medium" pitchFamily="2" charset="-127"/>
-                <a:cs typeface="Pretendard" panose="02000503000000020004" pitchFamily="2" charset="-127"/>
-              </a:rPr>
-              <a:t>: </a:t>
-            </a:r>
-            <a:r>
-              <a:rPr lang="ko-KR" altLang="en-US" sz="1200" dirty="0" err="1" smtClean="0">
-                <a:ln>
-                  <a:solidFill>
-                    <a:schemeClr val="accent1">
-                      <a:alpha val="0"/>
-                    </a:schemeClr>
-                  </a:solidFill>
-                </a:ln>
-                <a:solidFill>
-                  <a:schemeClr val="tx1">
-                    <a:lumMod val="75000"/>
-                    <a:lumOff val="25000"/>
-                  </a:schemeClr>
-                </a:solidFill>
-                <a:latin typeface="프리젠테이션 5 Medium" pitchFamily="2" charset="-127"/>
-                <a:ea typeface="프리젠테이션 5 Medium" pitchFamily="2" charset="-127"/>
-                <a:cs typeface="Pretendard" panose="02000503000000020004" pitchFamily="2" charset="-127"/>
-              </a:rPr>
-              <a:t>프리젠테이션</a:t>
-            </a:r>
-            <a:r>
-              <a:rPr lang="ko-KR" altLang="en-US" sz="1200" dirty="0" smtClean="0">
-                <a:ln>
-                  <a:solidFill>
-                    <a:schemeClr val="accent1">
-                      <a:alpha val="0"/>
-                    </a:schemeClr>
-                  </a:solidFill>
-                </a:ln>
-                <a:solidFill>
-                  <a:schemeClr val="tx1">
-                    <a:lumMod val="75000"/>
-                    <a:lumOff val="25000"/>
-                  </a:schemeClr>
-                </a:solidFill>
-                <a:latin typeface="프리젠테이션 5 Medium" pitchFamily="2" charset="-127"/>
-                <a:ea typeface="프리젠테이션 5 Medium" pitchFamily="2" charset="-127"/>
-                <a:cs typeface="Pretendard" panose="02000503000000020004" pitchFamily="2" charset="-127"/>
-              </a:rPr>
-              <a:t> </a:t>
-            </a:r>
-            <a:r>
-              <a:rPr lang="en-US" altLang="ko-KR" sz="1200" dirty="0" smtClean="0">
-                <a:ln>
-                  <a:solidFill>
-                    <a:schemeClr val="accent1">
-                      <a:alpha val="0"/>
-                    </a:schemeClr>
-                  </a:solidFill>
-                </a:ln>
-                <a:solidFill>
-                  <a:schemeClr val="tx1">
-                    <a:lumMod val="75000"/>
-                    <a:lumOff val="25000"/>
-                  </a:schemeClr>
-                </a:solidFill>
-                <a:latin typeface="프리젠테이션 5 Medium" pitchFamily="2" charset="-127"/>
-                <a:ea typeface="프리젠테이션 5 Medium" pitchFamily="2" charset="-127"/>
-                <a:cs typeface="Pretendard" panose="02000503000000020004" pitchFamily="2" charset="-127"/>
-              </a:rPr>
-              <a:t>5 Medium 12pt  </a:t>
-            </a:r>
-            <a:r>
-              <a:rPr lang="ko-KR" altLang="en-US" sz="1200" dirty="0" smtClean="0">
-                <a:ln>
-                  <a:solidFill>
-                    <a:schemeClr val="accent1">
-                      <a:alpha val="0"/>
-                    </a:schemeClr>
-                  </a:solidFill>
-                </a:ln>
-                <a:solidFill>
-                  <a:schemeClr val="tx1">
-                    <a:lumMod val="75000"/>
-                    <a:lumOff val="25000"/>
-                  </a:schemeClr>
-                </a:solidFill>
-                <a:latin typeface="프리젠테이션 5 Medium" pitchFamily="2" charset="-127"/>
-                <a:ea typeface="프리젠테이션 5 Medium" pitchFamily="2" charset="-127"/>
-                <a:cs typeface="Pretendard" panose="02000503000000020004" pitchFamily="2" charset="-127"/>
-              </a:rPr>
-              <a:t>최대 </a:t>
-            </a:r>
-            <a:r>
-              <a:rPr lang="en-US" altLang="ko-KR" sz="1200" dirty="0" smtClean="0">
-                <a:ln>
-                  <a:solidFill>
-                    <a:schemeClr val="accent1">
-                      <a:alpha val="0"/>
-                    </a:schemeClr>
-                  </a:solidFill>
-                </a:ln>
-                <a:solidFill>
-                  <a:schemeClr val="tx1">
-                    <a:lumMod val="75000"/>
-                    <a:lumOff val="25000"/>
-                  </a:schemeClr>
-                </a:solidFill>
-                <a:latin typeface="프리젠테이션 5 Medium" pitchFamily="2" charset="-127"/>
-                <a:ea typeface="프리젠테이션 5 Medium" pitchFamily="2" charset="-127"/>
-                <a:cs typeface="Pretendard" panose="02000503000000020004" pitchFamily="2" charset="-127"/>
-              </a:rPr>
-              <a:t>3</a:t>
-            </a:r>
-            <a:r>
-              <a:rPr lang="ko-KR" altLang="en-US" sz="1200" dirty="0" smtClean="0">
-                <a:ln>
-                  <a:solidFill>
-                    <a:schemeClr val="accent1">
-                      <a:alpha val="0"/>
-                    </a:schemeClr>
-                  </a:solidFill>
-                </a:ln>
-                <a:solidFill>
-                  <a:schemeClr val="tx1">
-                    <a:lumMod val="75000"/>
-                    <a:lumOff val="25000"/>
-                  </a:schemeClr>
-                </a:solidFill>
-                <a:latin typeface="프리젠테이션 5 Medium" pitchFamily="2" charset="-127"/>
-                <a:ea typeface="프리젠테이션 5 Medium" pitchFamily="2" charset="-127"/>
-                <a:cs typeface="Pretendard" panose="02000503000000020004" pitchFamily="2" charset="-127"/>
-              </a:rPr>
-              <a:t>줄까지 작성 가능합니다</a:t>
-            </a:r>
-            <a:r>
-              <a:rPr lang="en-US" altLang="ko-KR" sz="1200" dirty="0" smtClean="0">
-                <a:ln>
-                  <a:solidFill>
-                    <a:schemeClr val="accent1">
-                      <a:alpha val="0"/>
-                    </a:schemeClr>
-                  </a:solidFill>
-                </a:ln>
-                <a:solidFill>
-                  <a:schemeClr val="tx1">
-                    <a:lumMod val="75000"/>
-                    <a:lumOff val="25000"/>
-                  </a:schemeClr>
-                </a:solidFill>
-                <a:latin typeface="프리젠테이션 5 Medium" pitchFamily="2" charset="-127"/>
-                <a:ea typeface="프리젠테이션 5 Medium" pitchFamily="2" charset="-127"/>
-                <a:cs typeface="Pretendard" panose="02000503000000020004" pitchFamily="2" charset="-127"/>
-              </a:rPr>
-              <a:t>.</a:t>
-            </a:r>
-            <a:endParaRPr lang="en-US" altLang="ko-KR" sz="1200" dirty="0">
-              <a:ln>
-                <a:solidFill>
-                  <a:schemeClr val="accent1">
-                    <a:alpha val="0"/>
-                  </a:schemeClr>
-                </a:solidFill>
-              </a:ln>
-              <a:solidFill>
-                <a:srgbClr val="2765E1"/>
-              </a:solidFill>
-              <a:latin typeface="프리젠테이션 5 Medium" pitchFamily="2" charset="-127"/>
-              <a:ea typeface="프리젠테이션 5 Medium" pitchFamily="2" charset="-127"/>
-              <a:cs typeface="Pretendard" panose="02000503000000020004" pitchFamily="2" charset="-127"/>
-            </a:endParaRPr>
+              <a:t>On-Premise 3-Tier → AWS Cloud Native 전환 효과</a:t>
+            </a:r>
           </a:p>
         </p:txBody>
       </p:sp>
@@ -6806,8 +6458,8 @@
         </p:nvSpPr>
         <p:spPr>
           <a:xfrm>
-            <a:off x="637160" y="2897580"/>
-            <a:ext cx="4941840" cy="457200"/>
+            <a:off x="862388" y="2897580"/>
+            <a:ext cx="4493144" cy="457200"/>
           </a:xfrm>
           <a:prstGeom prst="rect">
             <a:avLst/>
@@ -6845,8 +6497,8 @@
         </p:nvSpPr>
         <p:spPr>
           <a:xfrm>
-            <a:off x="6611040" y="2897580"/>
-            <a:ext cx="4941840" cy="457200"/>
+            <a:off x="6836468" y="2897580"/>
+            <a:ext cx="4493144" cy="457200"/>
           </a:xfrm>
           <a:prstGeom prst="rect">
             <a:avLst/>
@@ -6884,8 +6536,8 @@
         </p:nvSpPr>
         <p:spPr>
           <a:xfrm>
-            <a:off x="637160" y="3354780"/>
-            <a:ext cx="4941840" cy="228600"/>
+            <a:off x="862388" y="3354780"/>
+            <a:ext cx="4493144" cy="228600"/>
           </a:xfrm>
           <a:prstGeom prst="rect">
             <a:avLst/>
@@ -6923,8 +6575,8 @@
         </p:nvSpPr>
         <p:spPr>
           <a:xfrm>
-            <a:off x="6611040" y="3354780"/>
-            <a:ext cx="4941840" cy="228600"/>
+            <a:off x="6836468" y="3354780"/>
+            <a:ext cx="4493144" cy="228600"/>
           </a:xfrm>
           <a:prstGeom prst="rect">
             <a:avLst/>
@@ -7021,7 +6673,7 @@
         <p:spPr>
           <a:xfrm>
             <a:off x="637160" y="3766260"/>
-            <a:ext cx="4484640" cy="1947040"/>
+            <a:ext cx="4484640" cy="1721340"/>
           </a:xfrm>
           <a:prstGeom prst="rect">
             <a:avLst/>
@@ -7133,7 +6785,7 @@
         <p:spPr>
           <a:xfrm>
             <a:off x="6611040" y="3766260"/>
-            <a:ext cx="4484640" cy="1947040"/>
+            <a:ext cx="4484640" cy="1721340"/>
           </a:xfrm>
           <a:prstGeom prst="rect">
             <a:avLst/>
@@ -7285,7 +6937,7 @@
         </p:nvSpPr>
         <p:spPr>
           <a:xfrm>
-            <a:off x="5318760" y="5029200"/>
+            <a:off x="5318760" y="5579040"/>
             <a:ext cx="1554480" cy="457200"/>
           </a:xfrm>
           <a:prstGeom prst="rect">
@@ -7453,36 +7105,8 @@
                 <a:ea typeface="프리젠테이션 7 Bold" pitchFamily="2" charset="-127"/>
                 <a:cs typeface="Pretendard ExtraBold" panose="02000903000000020004" pitchFamily="2" charset="-127"/>
               </a:rPr>
-              <a:t>서브색상</a:t>
-            </a:r>
-            <a:r>
-              <a:rPr lang="ko-KR" altLang="en-US" sz="2000" dirty="0">
-                <a:latin typeface="프리젠테이션 7 Bold" pitchFamily="2" charset="-127"/>
-                <a:ea typeface="프리젠테이션 7 Bold" pitchFamily="2" charset="-127"/>
-                <a:cs typeface="Pretendard ExtraBold" panose="02000903000000020004" pitchFamily="2" charset="-127"/>
-              </a:rPr>
-              <a:t> </a:t>
-            </a:r>
-          </a:p>
-          <a:p>
-            <a:pPr>
-              <a:lnSpc>
-                <a:spcPct val="120000"/>
-              </a:lnSpc>
-            </a:pPr>
-            <a:r>
-              <a:rPr lang="ko-KR" altLang="en-US" sz="2000" dirty="0">
-                <a:latin typeface="프리젠테이션 7 Bold" pitchFamily="2" charset="-127"/>
-                <a:ea typeface="프리젠테이션 7 Bold" pitchFamily="2" charset="-127"/>
-                <a:cs typeface="Pretendard ExtraBold" panose="02000903000000020004" pitchFamily="2" charset="-127"/>
-              </a:rPr>
-              <a:t>적용 예시</a:t>
-            </a:r>
-            <a:endParaRPr lang="ko-KR" altLang="en-US" sz="2000" dirty="0">
-              <a:latin typeface="프리젠테이션 7 Bold" pitchFamily="2" charset="-127"/>
-              <a:ea typeface="프리젠테이션 7 Bold" pitchFamily="2" charset="-127"/>
-              <a:cs typeface="Pretendard ExtraBold" panose="02000903000000020004" pitchFamily="2" charset="-127"/>
-            </a:endParaRPr>
+              <a:t>3. 도구 선택 프레임워크</a:t>
+            </a:r>
           </a:p>
         </p:txBody>
       </p:sp>
@@ -7532,387 +7156,8 @@
                 <a:ea typeface="프리젠테이션 5 Medium" pitchFamily="2" charset="-127"/>
                 <a:cs typeface="Pretendard" panose="02000503000000020004" pitchFamily="2" charset="-127"/>
               </a:rPr>
-              <a:t>설명글을</a:t>
-            </a:r>
-            <a:r>
-              <a:rPr lang="ko-KR" altLang="en-US" sz="1200" dirty="0">
-                <a:ln>
-                  <a:solidFill>
-                    <a:schemeClr val="accent1">
-                      <a:alpha val="0"/>
-                    </a:schemeClr>
-                  </a:solidFill>
-                </a:ln>
-                <a:solidFill>
-                  <a:schemeClr val="tx1">
-                    <a:lumMod val="75000"/>
-                    <a:lumOff val="25000"/>
-                  </a:schemeClr>
-                </a:solidFill>
-                <a:latin typeface="프리젠테이션 5 Medium" pitchFamily="2" charset="-127"/>
-                <a:ea typeface="프리젠테이션 5 Medium" pitchFamily="2" charset="-127"/>
-                <a:cs typeface="Pretendard" panose="02000503000000020004" pitchFamily="2" charset="-127"/>
-              </a:rPr>
-              <a:t> 적어주세요</a:t>
-            </a:r>
-            <a:r>
-              <a:rPr lang="en-US" altLang="ko-KR" sz="1200" b="1" dirty="0">
-                <a:ln>
-                  <a:solidFill>
-                    <a:schemeClr val="accent1">
-                      <a:alpha val="0"/>
-                    </a:schemeClr>
-                  </a:solidFill>
-                </a:ln>
-                <a:solidFill>
-                  <a:schemeClr val="tx1">
-                    <a:lumMod val="75000"/>
-                    <a:lumOff val="25000"/>
-                  </a:schemeClr>
-                </a:solidFill>
-                <a:latin typeface="프리젠테이션 5 Medium" pitchFamily="2" charset="-127"/>
-                <a:ea typeface="프리젠테이션 5 Medium" pitchFamily="2" charset="-127"/>
-                <a:cs typeface="Pretendard" panose="02000503000000020004" pitchFamily="2" charset="-127"/>
-              </a:rPr>
-              <a:t>. </a:t>
-            </a:r>
-            <a:r>
-              <a:rPr lang="ko-KR" altLang="en-US" sz="1200" b="1" dirty="0">
-                <a:ln>
-                  <a:solidFill>
-                    <a:schemeClr val="accent1">
-                      <a:alpha val="0"/>
-                    </a:schemeClr>
-                  </a:solidFill>
-                </a:ln>
-                <a:solidFill>
-                  <a:srgbClr val="0043DA"/>
-                </a:solidFill>
-                <a:latin typeface="프리젠테이션 7 Bold" pitchFamily="2" charset="-127"/>
-                <a:ea typeface="프리젠테이션 7 Bold" pitchFamily="2" charset="-127"/>
-                <a:cs typeface="Pretendard" panose="02000503000000020004" pitchFamily="2" charset="-127"/>
-              </a:rPr>
-              <a:t>강조 텍스트</a:t>
-            </a:r>
-            <a:r>
-              <a:rPr lang="en-US" altLang="ko-KR" sz="1200" b="1" dirty="0">
-                <a:ln>
-                  <a:solidFill>
-                    <a:schemeClr val="accent1">
-                      <a:alpha val="0"/>
-                    </a:schemeClr>
-                  </a:solidFill>
-                </a:ln>
-                <a:solidFill>
-                  <a:srgbClr val="0043DA"/>
-                </a:solidFill>
-                <a:latin typeface="프리젠테이션 7 Bold" pitchFamily="2" charset="-127"/>
-                <a:ea typeface="프리젠테이션 7 Bold" pitchFamily="2" charset="-127"/>
-                <a:cs typeface="Pretendard" panose="02000503000000020004" pitchFamily="2" charset="-127"/>
-              </a:rPr>
-              <a:t>(</a:t>
-            </a:r>
-            <a:r>
-              <a:rPr lang="ko-KR" altLang="en-US" sz="1200" b="1" dirty="0" err="1">
-                <a:ln>
-                  <a:solidFill>
-                    <a:schemeClr val="accent1">
-                      <a:alpha val="0"/>
-                    </a:schemeClr>
-                  </a:solidFill>
-                </a:ln>
-                <a:solidFill>
-                  <a:srgbClr val="0043DA"/>
-                </a:solidFill>
-                <a:latin typeface="프리젠테이션 7 Bold" pitchFamily="2" charset="-127"/>
-                <a:ea typeface="프리젠테이션 7 Bold" pitchFamily="2" charset="-127"/>
-                <a:cs typeface="Pretendard" panose="02000503000000020004" pitchFamily="2" charset="-127"/>
-              </a:rPr>
-              <a:t>프리젠테이션</a:t>
-            </a:r>
-            <a:r>
-              <a:rPr lang="ko-KR" altLang="en-US" sz="1200" b="1" dirty="0">
-                <a:ln>
-                  <a:solidFill>
-                    <a:schemeClr val="accent1">
-                      <a:alpha val="0"/>
-                    </a:schemeClr>
-                  </a:solidFill>
-                </a:ln>
-                <a:solidFill>
-                  <a:srgbClr val="0043DA"/>
-                </a:solidFill>
-                <a:latin typeface="프리젠테이션 7 Bold" pitchFamily="2" charset="-127"/>
-                <a:ea typeface="프리젠테이션 7 Bold" pitchFamily="2" charset="-127"/>
-                <a:cs typeface="Pretendard" panose="02000503000000020004" pitchFamily="2" charset="-127"/>
-              </a:rPr>
-              <a:t> </a:t>
-            </a:r>
-            <a:r>
-              <a:rPr lang="en-US" altLang="ko-KR" sz="1200" b="1" dirty="0">
-                <a:ln>
-                  <a:solidFill>
-                    <a:schemeClr val="accent1">
-                      <a:alpha val="0"/>
-                    </a:schemeClr>
-                  </a:solidFill>
-                </a:ln>
-                <a:solidFill>
-                  <a:srgbClr val="0043DA"/>
-                </a:solidFill>
-                <a:latin typeface="프리젠테이션 7 Bold" pitchFamily="2" charset="-127"/>
-                <a:ea typeface="프리젠테이션 7 Bold" pitchFamily="2" charset="-127"/>
-                <a:cs typeface="Pretendard" panose="02000503000000020004" pitchFamily="2" charset="-127"/>
-              </a:rPr>
-              <a:t>7 Bold, </a:t>
-            </a:r>
-            <a:r>
-              <a:rPr lang="ko-KR" altLang="en-US" sz="1200" b="1" dirty="0">
-                <a:ln>
-                  <a:solidFill>
-                    <a:schemeClr val="accent1">
-                      <a:alpha val="0"/>
-                    </a:schemeClr>
-                  </a:solidFill>
-                </a:ln>
-                <a:solidFill>
-                  <a:srgbClr val="0043DA"/>
-                </a:solidFill>
-                <a:latin typeface="프리젠테이션 7 Bold" pitchFamily="2" charset="-127"/>
-                <a:ea typeface="프리젠테이션 7 Bold" pitchFamily="2" charset="-127"/>
-                <a:cs typeface="Pretendard" panose="02000503000000020004" pitchFamily="2" charset="-127"/>
-              </a:rPr>
-              <a:t>메인 컬러</a:t>
-            </a:r>
-            <a:r>
-              <a:rPr lang="en-US" altLang="ko-KR" sz="1200" b="1" dirty="0" smtClean="0">
-                <a:ln>
-                  <a:solidFill>
-                    <a:schemeClr val="accent1">
-                      <a:alpha val="0"/>
-                    </a:schemeClr>
-                  </a:solidFill>
-                </a:ln>
-                <a:solidFill>
-                  <a:srgbClr val="0043DA"/>
-                </a:solidFill>
-                <a:latin typeface="프리젠테이션 7 Bold" pitchFamily="2" charset="-127"/>
-                <a:ea typeface="프리젠테이션 7 Bold" pitchFamily="2" charset="-127"/>
-                <a:cs typeface="Pretendard" panose="02000503000000020004" pitchFamily="2" charset="-127"/>
-              </a:rPr>
-              <a:t>)</a:t>
-            </a:r>
-          </a:p>
-          <a:p>
-            <a:pPr latinLnBrk="0">
-              <a:lnSpc>
-                <a:spcPct val="150000"/>
-              </a:lnSpc>
-            </a:pPr>
-            <a:r>
-              <a:rPr lang="ko-KR" altLang="en-US" sz="1200" dirty="0" smtClean="0">
-                <a:ln>
-                  <a:solidFill>
-                    <a:schemeClr val="accent1">
-                      <a:alpha val="0"/>
-                    </a:schemeClr>
-                  </a:solidFill>
-                </a:ln>
-                <a:solidFill>
-                  <a:schemeClr val="tx1">
-                    <a:lumMod val="75000"/>
-                    <a:lumOff val="25000"/>
-                  </a:schemeClr>
-                </a:solidFill>
-                <a:latin typeface="프리젠테이션 5 Medium" pitchFamily="2" charset="-127"/>
-                <a:ea typeface="프리젠테이션 5 Medium" pitchFamily="2" charset="-127"/>
-                <a:cs typeface="Pretendard" panose="02000503000000020004" pitchFamily="2" charset="-127"/>
-              </a:rPr>
-              <a:t>폰트 </a:t>
-            </a:r>
-            <a:r>
-              <a:rPr lang="en-US" altLang="ko-KR" sz="1200" dirty="0" smtClean="0">
-                <a:ln>
-                  <a:solidFill>
-                    <a:schemeClr val="accent1">
-                      <a:alpha val="0"/>
-                    </a:schemeClr>
-                  </a:solidFill>
-                </a:ln>
-                <a:solidFill>
-                  <a:schemeClr val="tx1">
-                    <a:lumMod val="75000"/>
-                    <a:lumOff val="25000"/>
-                  </a:schemeClr>
-                </a:solidFill>
-                <a:latin typeface="프리젠테이션 5 Medium" pitchFamily="2" charset="-127"/>
-                <a:ea typeface="프리젠테이션 5 Medium" pitchFamily="2" charset="-127"/>
-                <a:cs typeface="Pretendard" panose="02000503000000020004" pitchFamily="2" charset="-127"/>
-              </a:rPr>
-              <a:t>: </a:t>
-            </a:r>
-            <a:r>
-              <a:rPr lang="ko-KR" altLang="en-US" sz="1200" dirty="0" err="1" smtClean="0">
-                <a:ln>
-                  <a:solidFill>
-                    <a:schemeClr val="accent1">
-                      <a:alpha val="0"/>
-                    </a:schemeClr>
-                  </a:solidFill>
-                </a:ln>
-                <a:solidFill>
-                  <a:schemeClr val="tx1">
-                    <a:lumMod val="75000"/>
-                    <a:lumOff val="25000"/>
-                  </a:schemeClr>
-                </a:solidFill>
-                <a:latin typeface="프리젠테이션 5 Medium" pitchFamily="2" charset="-127"/>
-                <a:ea typeface="프리젠테이션 5 Medium" pitchFamily="2" charset="-127"/>
-                <a:cs typeface="Pretendard" panose="02000503000000020004" pitchFamily="2" charset="-127"/>
-              </a:rPr>
-              <a:t>프리젠테이션</a:t>
-            </a:r>
-            <a:r>
-              <a:rPr lang="ko-KR" altLang="en-US" sz="1200" dirty="0" smtClean="0">
-                <a:ln>
-                  <a:solidFill>
-                    <a:schemeClr val="accent1">
-                      <a:alpha val="0"/>
-                    </a:schemeClr>
-                  </a:solidFill>
-                </a:ln>
-                <a:solidFill>
-                  <a:schemeClr val="tx1">
-                    <a:lumMod val="75000"/>
-                    <a:lumOff val="25000"/>
-                  </a:schemeClr>
-                </a:solidFill>
-                <a:latin typeface="프리젠테이션 5 Medium" pitchFamily="2" charset="-127"/>
-                <a:ea typeface="프리젠테이션 5 Medium" pitchFamily="2" charset="-127"/>
-                <a:cs typeface="Pretendard" panose="02000503000000020004" pitchFamily="2" charset="-127"/>
-              </a:rPr>
-              <a:t> </a:t>
-            </a:r>
-            <a:r>
-              <a:rPr lang="en-US" altLang="ko-KR" sz="1200" dirty="0" smtClean="0">
-                <a:ln>
-                  <a:solidFill>
-                    <a:schemeClr val="accent1">
-                      <a:alpha val="0"/>
-                    </a:schemeClr>
-                  </a:solidFill>
-                </a:ln>
-                <a:solidFill>
-                  <a:schemeClr val="tx1">
-                    <a:lumMod val="75000"/>
-                    <a:lumOff val="25000"/>
-                  </a:schemeClr>
-                </a:solidFill>
-                <a:latin typeface="프리젠테이션 5 Medium" pitchFamily="2" charset="-127"/>
-                <a:ea typeface="프리젠테이션 5 Medium" pitchFamily="2" charset="-127"/>
-                <a:cs typeface="Pretendard" panose="02000503000000020004" pitchFamily="2" charset="-127"/>
-              </a:rPr>
-              <a:t>5 Medium 12pt  </a:t>
-            </a:r>
-            <a:r>
-              <a:rPr lang="ko-KR" altLang="en-US" sz="1200" dirty="0" smtClean="0">
-                <a:ln>
-                  <a:solidFill>
-                    <a:schemeClr val="accent1">
-                      <a:alpha val="0"/>
-                    </a:schemeClr>
-                  </a:solidFill>
-                </a:ln>
-                <a:solidFill>
-                  <a:schemeClr val="tx1">
-                    <a:lumMod val="75000"/>
-                    <a:lumOff val="25000"/>
-                  </a:schemeClr>
-                </a:solidFill>
-                <a:latin typeface="프리젠테이션 5 Medium" pitchFamily="2" charset="-127"/>
-                <a:ea typeface="프리젠테이션 5 Medium" pitchFamily="2" charset="-127"/>
-                <a:cs typeface="Pretendard" panose="02000503000000020004" pitchFamily="2" charset="-127"/>
-              </a:rPr>
-              <a:t>최대 </a:t>
-            </a:r>
-            <a:r>
-              <a:rPr lang="en-US" altLang="ko-KR" sz="1200" dirty="0" smtClean="0">
-                <a:ln>
-                  <a:solidFill>
-                    <a:schemeClr val="accent1">
-                      <a:alpha val="0"/>
-                    </a:schemeClr>
-                  </a:solidFill>
-                </a:ln>
-                <a:solidFill>
-                  <a:schemeClr val="tx1">
-                    <a:lumMod val="75000"/>
-                    <a:lumOff val="25000"/>
-                  </a:schemeClr>
-                </a:solidFill>
-                <a:latin typeface="프리젠테이션 5 Medium" pitchFamily="2" charset="-127"/>
-                <a:ea typeface="프리젠테이션 5 Medium" pitchFamily="2" charset="-127"/>
-                <a:cs typeface="Pretendard" panose="02000503000000020004" pitchFamily="2" charset="-127"/>
-              </a:rPr>
-              <a:t>3</a:t>
-            </a:r>
-            <a:r>
-              <a:rPr lang="ko-KR" altLang="en-US" sz="1200" dirty="0" smtClean="0">
-                <a:ln>
-                  <a:solidFill>
-                    <a:schemeClr val="accent1">
-                      <a:alpha val="0"/>
-                    </a:schemeClr>
-                  </a:solidFill>
-                </a:ln>
-                <a:solidFill>
-                  <a:schemeClr val="tx1">
-                    <a:lumMod val="75000"/>
-                    <a:lumOff val="25000"/>
-                  </a:schemeClr>
-                </a:solidFill>
-                <a:latin typeface="프리젠테이션 5 Medium" pitchFamily="2" charset="-127"/>
-                <a:ea typeface="프리젠테이션 5 Medium" pitchFamily="2" charset="-127"/>
-                <a:cs typeface="Pretendard" panose="02000503000000020004" pitchFamily="2" charset="-127"/>
-              </a:rPr>
-              <a:t>줄까지 작성 가능합니다</a:t>
-            </a:r>
-            <a:r>
-              <a:rPr lang="en-US" altLang="ko-KR" sz="1200" dirty="0" smtClean="0">
-                <a:ln>
-                  <a:solidFill>
-                    <a:schemeClr val="accent1">
-                      <a:alpha val="0"/>
-                    </a:schemeClr>
-                  </a:solidFill>
-                </a:ln>
-                <a:solidFill>
-                  <a:schemeClr val="tx1">
-                    <a:lumMod val="75000"/>
-                    <a:lumOff val="25000"/>
-                  </a:schemeClr>
-                </a:solidFill>
-                <a:latin typeface="프리젠테이션 5 Medium" pitchFamily="2" charset="-127"/>
-                <a:ea typeface="프리젠테이션 5 Medium" pitchFamily="2" charset="-127"/>
-                <a:cs typeface="Pretendard" panose="02000503000000020004" pitchFamily="2" charset="-127"/>
-              </a:rPr>
-              <a:t>.</a:t>
-            </a:r>
-            <a:endParaRPr lang="en-US" altLang="ko-KR" sz="1200" dirty="0">
-              <a:ln>
-                <a:solidFill>
-                  <a:schemeClr val="accent1">
-                    <a:alpha val="0"/>
-                  </a:schemeClr>
-                </a:solidFill>
-              </a:ln>
-              <a:solidFill>
-                <a:srgbClr val="2765E1"/>
-              </a:solidFill>
-              <a:latin typeface="프리젠테이션 5 Medium" pitchFamily="2" charset="-127"/>
-              <a:ea typeface="프리젠테이션 5 Medium" pitchFamily="2" charset="-127"/>
-              <a:cs typeface="Pretendard" panose="02000503000000020004" pitchFamily="2" charset="-127"/>
-            </a:endParaRPr>
+              <a:t>4단계 깔때기 평가 — 요구사항 정의부터 도구 선정</a:t>
+            </a:r>
           </a:p>
         </p:txBody>
       </p:sp>
@@ -8455,36 +7700,8 @@
                 <a:ea typeface="프리젠테이션 7 Bold" pitchFamily="2" charset="-127"/>
                 <a:cs typeface="Pretendard ExtraBold" panose="02000903000000020004" pitchFamily="2" charset="-127"/>
               </a:rPr>
-              <a:t>서브색상</a:t>
-            </a:r>
-            <a:r>
-              <a:rPr lang="ko-KR" altLang="en-US" sz="2000" dirty="0">
-                <a:latin typeface="프리젠테이션 7 Bold" pitchFamily="2" charset="-127"/>
-                <a:ea typeface="프리젠테이션 7 Bold" pitchFamily="2" charset="-127"/>
-                <a:cs typeface="Pretendard ExtraBold" panose="02000903000000020004" pitchFamily="2" charset="-127"/>
-              </a:rPr>
-              <a:t> </a:t>
-            </a:r>
-          </a:p>
-          <a:p>
-            <a:pPr>
-              <a:lnSpc>
-                <a:spcPct val="120000"/>
-              </a:lnSpc>
-            </a:pPr>
-            <a:r>
-              <a:rPr lang="ko-KR" altLang="en-US" sz="2000" dirty="0">
-                <a:latin typeface="프리젠테이션 7 Bold" pitchFamily="2" charset="-127"/>
-                <a:ea typeface="프리젠테이션 7 Bold" pitchFamily="2" charset="-127"/>
-                <a:cs typeface="Pretendard ExtraBold" panose="02000903000000020004" pitchFamily="2" charset="-127"/>
-              </a:rPr>
-              <a:t>적용 예시</a:t>
-            </a:r>
-            <a:endParaRPr lang="ko-KR" altLang="en-US" sz="2000" dirty="0">
-              <a:latin typeface="프리젠테이션 7 Bold" pitchFamily="2" charset="-127"/>
-              <a:ea typeface="프리젠테이션 7 Bold" pitchFamily="2" charset="-127"/>
-              <a:cs typeface="Pretendard ExtraBold" panose="02000903000000020004" pitchFamily="2" charset="-127"/>
-            </a:endParaRPr>
+              <a:t>4. 6개월 마이그레이션 로드맵</a:t>
+            </a:r>
           </a:p>
         </p:txBody>
       </p:sp>
@@ -8534,387 +7751,8 @@
                 <a:ea typeface="프리젠테이션 5 Medium" pitchFamily="2" charset="-127"/>
                 <a:cs typeface="Pretendard" panose="02000503000000020004" pitchFamily="2" charset="-127"/>
               </a:rPr>
-              <a:t>설명글을</a:t>
-            </a:r>
-            <a:r>
-              <a:rPr lang="ko-KR" altLang="en-US" sz="1200" dirty="0">
-                <a:ln>
-                  <a:solidFill>
-                    <a:schemeClr val="accent1">
-                      <a:alpha val="0"/>
-                    </a:schemeClr>
-                  </a:solidFill>
-                </a:ln>
-                <a:solidFill>
-                  <a:schemeClr val="tx1">
-                    <a:lumMod val="75000"/>
-                    <a:lumOff val="25000"/>
-                  </a:schemeClr>
-                </a:solidFill>
-                <a:latin typeface="프리젠테이션 5 Medium" pitchFamily="2" charset="-127"/>
-                <a:ea typeface="프리젠테이션 5 Medium" pitchFamily="2" charset="-127"/>
-                <a:cs typeface="Pretendard" panose="02000503000000020004" pitchFamily="2" charset="-127"/>
-              </a:rPr>
-              <a:t> 적어주세요</a:t>
-            </a:r>
-            <a:r>
-              <a:rPr lang="en-US" altLang="ko-KR" sz="1200" b="1" dirty="0">
-                <a:ln>
-                  <a:solidFill>
-                    <a:schemeClr val="accent1">
-                      <a:alpha val="0"/>
-                    </a:schemeClr>
-                  </a:solidFill>
-                </a:ln>
-                <a:solidFill>
-                  <a:schemeClr val="tx1">
-                    <a:lumMod val="75000"/>
-                    <a:lumOff val="25000"/>
-                  </a:schemeClr>
-                </a:solidFill>
-                <a:latin typeface="프리젠테이션 5 Medium" pitchFamily="2" charset="-127"/>
-                <a:ea typeface="프리젠테이션 5 Medium" pitchFamily="2" charset="-127"/>
-                <a:cs typeface="Pretendard" panose="02000503000000020004" pitchFamily="2" charset="-127"/>
-              </a:rPr>
-              <a:t>. </a:t>
-            </a:r>
-            <a:r>
-              <a:rPr lang="ko-KR" altLang="en-US" sz="1200" b="1" dirty="0">
-                <a:ln>
-                  <a:solidFill>
-                    <a:schemeClr val="accent1">
-                      <a:alpha val="0"/>
-                    </a:schemeClr>
-                  </a:solidFill>
-                </a:ln>
-                <a:solidFill>
-                  <a:srgbClr val="0043DA"/>
-                </a:solidFill>
-                <a:latin typeface="프리젠테이션 7 Bold" pitchFamily="2" charset="-127"/>
-                <a:ea typeface="프리젠테이션 7 Bold" pitchFamily="2" charset="-127"/>
-                <a:cs typeface="Pretendard" panose="02000503000000020004" pitchFamily="2" charset="-127"/>
-              </a:rPr>
-              <a:t>강조 텍스트</a:t>
-            </a:r>
-            <a:r>
-              <a:rPr lang="en-US" altLang="ko-KR" sz="1200" b="1" dirty="0">
-                <a:ln>
-                  <a:solidFill>
-                    <a:schemeClr val="accent1">
-                      <a:alpha val="0"/>
-                    </a:schemeClr>
-                  </a:solidFill>
-                </a:ln>
-                <a:solidFill>
-                  <a:srgbClr val="0043DA"/>
-                </a:solidFill>
-                <a:latin typeface="프리젠테이션 7 Bold" pitchFamily="2" charset="-127"/>
-                <a:ea typeface="프리젠테이션 7 Bold" pitchFamily="2" charset="-127"/>
-                <a:cs typeface="Pretendard" panose="02000503000000020004" pitchFamily="2" charset="-127"/>
-              </a:rPr>
-              <a:t>(</a:t>
-            </a:r>
-            <a:r>
-              <a:rPr lang="ko-KR" altLang="en-US" sz="1200" b="1" dirty="0" err="1">
-                <a:ln>
-                  <a:solidFill>
-                    <a:schemeClr val="accent1">
-                      <a:alpha val="0"/>
-                    </a:schemeClr>
-                  </a:solidFill>
-                </a:ln>
-                <a:solidFill>
-                  <a:srgbClr val="0043DA"/>
-                </a:solidFill>
-                <a:latin typeface="프리젠테이션 7 Bold" pitchFamily="2" charset="-127"/>
-                <a:ea typeface="프리젠테이션 7 Bold" pitchFamily="2" charset="-127"/>
-                <a:cs typeface="Pretendard" panose="02000503000000020004" pitchFamily="2" charset="-127"/>
-              </a:rPr>
-              <a:t>프리젠테이션</a:t>
-            </a:r>
-            <a:r>
-              <a:rPr lang="ko-KR" altLang="en-US" sz="1200" b="1" dirty="0">
-                <a:ln>
-                  <a:solidFill>
-                    <a:schemeClr val="accent1">
-                      <a:alpha val="0"/>
-                    </a:schemeClr>
-                  </a:solidFill>
-                </a:ln>
-                <a:solidFill>
-                  <a:srgbClr val="0043DA"/>
-                </a:solidFill>
-                <a:latin typeface="프리젠테이션 7 Bold" pitchFamily="2" charset="-127"/>
-                <a:ea typeface="프리젠테이션 7 Bold" pitchFamily="2" charset="-127"/>
-                <a:cs typeface="Pretendard" panose="02000503000000020004" pitchFamily="2" charset="-127"/>
-              </a:rPr>
-              <a:t> </a:t>
-            </a:r>
-            <a:r>
-              <a:rPr lang="en-US" altLang="ko-KR" sz="1200" b="1" dirty="0">
-                <a:ln>
-                  <a:solidFill>
-                    <a:schemeClr val="accent1">
-                      <a:alpha val="0"/>
-                    </a:schemeClr>
-                  </a:solidFill>
-                </a:ln>
-                <a:solidFill>
-                  <a:srgbClr val="0043DA"/>
-                </a:solidFill>
-                <a:latin typeface="프리젠테이션 7 Bold" pitchFamily="2" charset="-127"/>
-                <a:ea typeface="프리젠테이션 7 Bold" pitchFamily="2" charset="-127"/>
-                <a:cs typeface="Pretendard" panose="02000503000000020004" pitchFamily="2" charset="-127"/>
-              </a:rPr>
-              <a:t>7 Bold, </a:t>
-            </a:r>
-            <a:r>
-              <a:rPr lang="ko-KR" altLang="en-US" sz="1200" b="1" dirty="0">
-                <a:ln>
-                  <a:solidFill>
-                    <a:schemeClr val="accent1">
-                      <a:alpha val="0"/>
-                    </a:schemeClr>
-                  </a:solidFill>
-                </a:ln>
-                <a:solidFill>
-                  <a:srgbClr val="0043DA"/>
-                </a:solidFill>
-                <a:latin typeface="프리젠테이션 7 Bold" pitchFamily="2" charset="-127"/>
-                <a:ea typeface="프리젠테이션 7 Bold" pitchFamily="2" charset="-127"/>
-                <a:cs typeface="Pretendard" panose="02000503000000020004" pitchFamily="2" charset="-127"/>
-              </a:rPr>
-              <a:t>메인 컬러</a:t>
-            </a:r>
-            <a:r>
-              <a:rPr lang="en-US" altLang="ko-KR" sz="1200" b="1" dirty="0" smtClean="0">
-                <a:ln>
-                  <a:solidFill>
-                    <a:schemeClr val="accent1">
-                      <a:alpha val="0"/>
-                    </a:schemeClr>
-                  </a:solidFill>
-                </a:ln>
-                <a:solidFill>
-                  <a:srgbClr val="0043DA"/>
-                </a:solidFill>
-                <a:latin typeface="프리젠테이션 7 Bold" pitchFamily="2" charset="-127"/>
-                <a:ea typeface="프리젠테이션 7 Bold" pitchFamily="2" charset="-127"/>
-                <a:cs typeface="Pretendard" panose="02000503000000020004" pitchFamily="2" charset="-127"/>
-              </a:rPr>
-              <a:t>)</a:t>
-            </a:r>
-          </a:p>
-          <a:p>
-            <a:pPr latinLnBrk="0">
-              <a:lnSpc>
-                <a:spcPct val="150000"/>
-              </a:lnSpc>
-            </a:pPr>
-            <a:r>
-              <a:rPr lang="ko-KR" altLang="en-US" sz="1200" dirty="0" smtClean="0">
-                <a:ln>
-                  <a:solidFill>
-                    <a:schemeClr val="accent1">
-                      <a:alpha val="0"/>
-                    </a:schemeClr>
-                  </a:solidFill>
-                </a:ln>
-                <a:solidFill>
-                  <a:schemeClr val="tx1">
-                    <a:lumMod val="75000"/>
-                    <a:lumOff val="25000"/>
-                  </a:schemeClr>
-                </a:solidFill>
-                <a:latin typeface="프리젠테이션 5 Medium" pitchFamily="2" charset="-127"/>
-                <a:ea typeface="프리젠테이션 5 Medium" pitchFamily="2" charset="-127"/>
-                <a:cs typeface="Pretendard" panose="02000503000000020004" pitchFamily="2" charset="-127"/>
-              </a:rPr>
-              <a:t>폰트 </a:t>
-            </a:r>
-            <a:r>
-              <a:rPr lang="en-US" altLang="ko-KR" sz="1200" dirty="0" smtClean="0">
-                <a:ln>
-                  <a:solidFill>
-                    <a:schemeClr val="accent1">
-                      <a:alpha val="0"/>
-                    </a:schemeClr>
-                  </a:solidFill>
-                </a:ln>
-                <a:solidFill>
-                  <a:schemeClr val="tx1">
-                    <a:lumMod val="75000"/>
-                    <a:lumOff val="25000"/>
-                  </a:schemeClr>
-                </a:solidFill>
-                <a:latin typeface="프리젠테이션 5 Medium" pitchFamily="2" charset="-127"/>
-                <a:ea typeface="프리젠테이션 5 Medium" pitchFamily="2" charset="-127"/>
-                <a:cs typeface="Pretendard" panose="02000503000000020004" pitchFamily="2" charset="-127"/>
-              </a:rPr>
-              <a:t>: </a:t>
-            </a:r>
-            <a:r>
-              <a:rPr lang="ko-KR" altLang="en-US" sz="1200" dirty="0" err="1" smtClean="0">
-                <a:ln>
-                  <a:solidFill>
-                    <a:schemeClr val="accent1">
-                      <a:alpha val="0"/>
-                    </a:schemeClr>
-                  </a:solidFill>
-                </a:ln>
-                <a:solidFill>
-                  <a:schemeClr val="tx1">
-                    <a:lumMod val="75000"/>
-                    <a:lumOff val="25000"/>
-                  </a:schemeClr>
-                </a:solidFill>
-                <a:latin typeface="프리젠테이션 5 Medium" pitchFamily="2" charset="-127"/>
-                <a:ea typeface="프리젠테이션 5 Medium" pitchFamily="2" charset="-127"/>
-                <a:cs typeface="Pretendard" panose="02000503000000020004" pitchFamily="2" charset="-127"/>
-              </a:rPr>
-              <a:t>프리젠테이션</a:t>
-            </a:r>
-            <a:r>
-              <a:rPr lang="ko-KR" altLang="en-US" sz="1200" dirty="0" smtClean="0">
-                <a:ln>
-                  <a:solidFill>
-                    <a:schemeClr val="accent1">
-                      <a:alpha val="0"/>
-                    </a:schemeClr>
-                  </a:solidFill>
-                </a:ln>
-                <a:solidFill>
-                  <a:schemeClr val="tx1">
-                    <a:lumMod val="75000"/>
-                    <a:lumOff val="25000"/>
-                  </a:schemeClr>
-                </a:solidFill>
-                <a:latin typeface="프리젠테이션 5 Medium" pitchFamily="2" charset="-127"/>
-                <a:ea typeface="프리젠테이션 5 Medium" pitchFamily="2" charset="-127"/>
-                <a:cs typeface="Pretendard" panose="02000503000000020004" pitchFamily="2" charset="-127"/>
-              </a:rPr>
-              <a:t> </a:t>
-            </a:r>
-            <a:r>
-              <a:rPr lang="en-US" altLang="ko-KR" sz="1200" dirty="0" smtClean="0">
-                <a:ln>
-                  <a:solidFill>
-                    <a:schemeClr val="accent1">
-                      <a:alpha val="0"/>
-                    </a:schemeClr>
-                  </a:solidFill>
-                </a:ln>
-                <a:solidFill>
-                  <a:schemeClr val="tx1">
-                    <a:lumMod val="75000"/>
-                    <a:lumOff val="25000"/>
-                  </a:schemeClr>
-                </a:solidFill>
-                <a:latin typeface="프리젠테이션 5 Medium" pitchFamily="2" charset="-127"/>
-                <a:ea typeface="프리젠테이션 5 Medium" pitchFamily="2" charset="-127"/>
-                <a:cs typeface="Pretendard" panose="02000503000000020004" pitchFamily="2" charset="-127"/>
-              </a:rPr>
-              <a:t>5 Medium 12pt  </a:t>
-            </a:r>
-            <a:r>
-              <a:rPr lang="ko-KR" altLang="en-US" sz="1200" dirty="0" smtClean="0">
-                <a:ln>
-                  <a:solidFill>
-                    <a:schemeClr val="accent1">
-                      <a:alpha val="0"/>
-                    </a:schemeClr>
-                  </a:solidFill>
-                </a:ln>
-                <a:solidFill>
-                  <a:schemeClr val="tx1">
-                    <a:lumMod val="75000"/>
-                    <a:lumOff val="25000"/>
-                  </a:schemeClr>
-                </a:solidFill>
-                <a:latin typeface="프리젠테이션 5 Medium" pitchFamily="2" charset="-127"/>
-                <a:ea typeface="프리젠테이션 5 Medium" pitchFamily="2" charset="-127"/>
-                <a:cs typeface="Pretendard" panose="02000503000000020004" pitchFamily="2" charset="-127"/>
-              </a:rPr>
-              <a:t>최대 </a:t>
-            </a:r>
-            <a:r>
-              <a:rPr lang="en-US" altLang="ko-KR" sz="1200" dirty="0" smtClean="0">
-                <a:ln>
-                  <a:solidFill>
-                    <a:schemeClr val="accent1">
-                      <a:alpha val="0"/>
-                    </a:schemeClr>
-                  </a:solidFill>
-                </a:ln>
-                <a:solidFill>
-                  <a:schemeClr val="tx1">
-                    <a:lumMod val="75000"/>
-                    <a:lumOff val="25000"/>
-                  </a:schemeClr>
-                </a:solidFill>
-                <a:latin typeface="프리젠테이션 5 Medium" pitchFamily="2" charset="-127"/>
-                <a:ea typeface="프리젠테이션 5 Medium" pitchFamily="2" charset="-127"/>
-                <a:cs typeface="Pretendard" panose="02000503000000020004" pitchFamily="2" charset="-127"/>
-              </a:rPr>
-              <a:t>3</a:t>
-            </a:r>
-            <a:r>
-              <a:rPr lang="ko-KR" altLang="en-US" sz="1200" dirty="0" smtClean="0">
-                <a:ln>
-                  <a:solidFill>
-                    <a:schemeClr val="accent1">
-                      <a:alpha val="0"/>
-                    </a:schemeClr>
-                  </a:solidFill>
-                </a:ln>
-                <a:solidFill>
-                  <a:schemeClr val="tx1">
-                    <a:lumMod val="75000"/>
-                    <a:lumOff val="25000"/>
-                  </a:schemeClr>
-                </a:solidFill>
-                <a:latin typeface="프리젠테이션 5 Medium" pitchFamily="2" charset="-127"/>
-                <a:ea typeface="프리젠테이션 5 Medium" pitchFamily="2" charset="-127"/>
-                <a:cs typeface="Pretendard" panose="02000503000000020004" pitchFamily="2" charset="-127"/>
-              </a:rPr>
-              <a:t>줄까지 작성 가능합니다</a:t>
-            </a:r>
-            <a:r>
-              <a:rPr lang="en-US" altLang="ko-KR" sz="1200" dirty="0" smtClean="0">
-                <a:ln>
-                  <a:solidFill>
-                    <a:schemeClr val="accent1">
-                      <a:alpha val="0"/>
-                    </a:schemeClr>
-                  </a:solidFill>
-                </a:ln>
-                <a:solidFill>
-                  <a:schemeClr val="tx1">
-                    <a:lumMod val="75000"/>
-                    <a:lumOff val="25000"/>
-                  </a:schemeClr>
-                </a:solidFill>
-                <a:latin typeface="프리젠테이션 5 Medium" pitchFamily="2" charset="-127"/>
-                <a:ea typeface="프리젠테이션 5 Medium" pitchFamily="2" charset="-127"/>
-                <a:cs typeface="Pretendard" panose="02000503000000020004" pitchFamily="2" charset="-127"/>
-              </a:rPr>
-              <a:t>.</a:t>
-            </a:r>
-            <a:endParaRPr lang="en-US" altLang="ko-KR" sz="1200" dirty="0">
-              <a:ln>
-                <a:solidFill>
-                  <a:schemeClr val="accent1">
-                    <a:alpha val="0"/>
-                  </a:schemeClr>
-                </a:solidFill>
-              </a:ln>
-              <a:solidFill>
-                <a:srgbClr val="2765E1"/>
-              </a:solidFill>
-              <a:latin typeface="프리젠테이션 5 Medium" pitchFamily="2" charset="-127"/>
-              <a:ea typeface="프리젠테이션 5 Medium" pitchFamily="2" charset="-127"/>
-              <a:cs typeface="Pretendard" panose="02000503000000020004" pitchFamily="2" charset="-127"/>
-            </a:endParaRPr>
+              <a:t>4개 워크스트림 동시 진행, 무중단 운영 보장</a:t>
+            </a:r>
           </a:p>
         </p:txBody>
       </p:sp>
@@ -9338,8 +8176,8 @@
         </p:nvSpPr>
         <p:spPr>
           <a:xfrm>
-            <a:off x="1920240" y="2834640"/>
-            <a:ext cx="3271520" cy="811530"/>
+            <a:off x="1920240" y="2880360"/>
+            <a:ext cx="3271520" cy="720090"/>
           </a:xfrm>
           <a:prstGeom prst="roundRect">
             <a:avLst>
@@ -9455,8 +8293,8 @@
         </p:nvSpPr>
         <p:spPr>
           <a:xfrm>
-            <a:off x="3556000" y="3829050"/>
-            <a:ext cx="3271520" cy="811530"/>
+            <a:off x="3556000" y="3874770"/>
+            <a:ext cx="3271520" cy="720090"/>
           </a:xfrm>
           <a:prstGeom prst="roundRect">
             <a:avLst>
@@ -9572,8 +8410,8 @@
         </p:nvSpPr>
         <p:spPr>
           <a:xfrm>
-            <a:off x="6827520" y="4823460"/>
-            <a:ext cx="3271520" cy="811530"/>
+            <a:off x="6827520" y="4869180"/>
+            <a:ext cx="3271520" cy="720090"/>
           </a:xfrm>
           <a:prstGeom prst="roundRect">
             <a:avLst>
@@ -9689,8 +8527,8 @@
         </p:nvSpPr>
         <p:spPr>
           <a:xfrm>
-            <a:off x="8463280" y="5817870"/>
-            <a:ext cx="3271520" cy="811530"/>
+            <a:off x="8463280" y="5863590"/>
+            <a:ext cx="3271520" cy="720090"/>
           </a:xfrm>
           <a:prstGeom prst="roundRect">
             <a:avLst>
@@ -9811,36 +8649,8 @@
                 <a:ea typeface="프리젠테이션 7 Bold" pitchFamily="2" charset="-127"/>
                 <a:cs typeface="Pretendard ExtraBold" panose="02000903000000020004" pitchFamily="2" charset="-127"/>
               </a:rPr>
-              <a:t>서브색상</a:t>
-            </a:r>
-            <a:r>
-              <a:rPr lang="ko-KR" altLang="en-US" sz="2000" dirty="0">
-                <a:latin typeface="프리젠테이션 7 Bold" pitchFamily="2" charset="-127"/>
-                <a:ea typeface="프리젠테이션 7 Bold" pitchFamily="2" charset="-127"/>
-                <a:cs typeface="Pretendard ExtraBold" panose="02000903000000020004" pitchFamily="2" charset="-127"/>
-              </a:rPr>
-              <a:t> </a:t>
-            </a:r>
-          </a:p>
-          <a:p>
-            <a:pPr>
-              <a:lnSpc>
-                <a:spcPct val="120000"/>
-              </a:lnSpc>
-            </a:pPr>
-            <a:r>
-              <a:rPr lang="ko-KR" altLang="en-US" sz="2000" dirty="0">
-                <a:latin typeface="프리젠테이션 7 Bold" pitchFamily="2" charset="-127"/>
-                <a:ea typeface="프리젠테이션 7 Bold" pitchFamily="2" charset="-127"/>
-                <a:cs typeface="Pretendard ExtraBold" panose="02000903000000020004" pitchFamily="2" charset="-127"/>
-              </a:rPr>
-              <a:t>적용 예시</a:t>
-            </a:r>
-            <a:endParaRPr lang="ko-KR" altLang="en-US" sz="2000" dirty="0">
-              <a:latin typeface="프리젠테이션 7 Bold" pitchFamily="2" charset="-127"/>
-              <a:ea typeface="프리젠테이션 7 Bold" pitchFamily="2" charset="-127"/>
-              <a:cs typeface="Pretendard ExtraBold" panose="02000903000000020004" pitchFamily="2" charset="-127"/>
-            </a:endParaRPr>
+              <a:t>5. 핵심 성과 지표 (KPI)</a:t>
+            </a:r>
           </a:p>
         </p:txBody>
       </p:sp>
@@ -9890,387 +8700,8 @@
                 <a:ea typeface="프리젠테이션 5 Medium" pitchFamily="2" charset="-127"/>
                 <a:cs typeface="Pretendard" panose="02000503000000020004" pitchFamily="2" charset="-127"/>
               </a:rPr>
-              <a:t>설명글을</a:t>
-            </a:r>
-            <a:r>
-              <a:rPr lang="ko-KR" altLang="en-US" sz="1200" dirty="0">
-                <a:ln>
-                  <a:solidFill>
-                    <a:schemeClr val="accent1">
-                      <a:alpha val="0"/>
-                    </a:schemeClr>
-                  </a:solidFill>
-                </a:ln>
-                <a:solidFill>
-                  <a:schemeClr val="tx1">
-                    <a:lumMod val="75000"/>
-                    <a:lumOff val="25000"/>
-                  </a:schemeClr>
-                </a:solidFill>
-                <a:latin typeface="프리젠테이션 5 Medium" pitchFamily="2" charset="-127"/>
-                <a:ea typeface="프리젠테이션 5 Medium" pitchFamily="2" charset="-127"/>
-                <a:cs typeface="Pretendard" panose="02000503000000020004" pitchFamily="2" charset="-127"/>
-              </a:rPr>
-              <a:t> 적어주세요</a:t>
-            </a:r>
-            <a:r>
-              <a:rPr lang="en-US" altLang="ko-KR" sz="1200" b="1" dirty="0">
-                <a:ln>
-                  <a:solidFill>
-                    <a:schemeClr val="accent1">
-                      <a:alpha val="0"/>
-                    </a:schemeClr>
-                  </a:solidFill>
-                </a:ln>
-                <a:solidFill>
-                  <a:schemeClr val="tx1">
-                    <a:lumMod val="75000"/>
-                    <a:lumOff val="25000"/>
-                  </a:schemeClr>
-                </a:solidFill>
-                <a:latin typeface="프리젠테이션 5 Medium" pitchFamily="2" charset="-127"/>
-                <a:ea typeface="프리젠테이션 5 Medium" pitchFamily="2" charset="-127"/>
-                <a:cs typeface="Pretendard" panose="02000503000000020004" pitchFamily="2" charset="-127"/>
-              </a:rPr>
-              <a:t>. </a:t>
-            </a:r>
-            <a:r>
-              <a:rPr lang="ko-KR" altLang="en-US" sz="1200" b="1" dirty="0">
-                <a:ln>
-                  <a:solidFill>
-                    <a:schemeClr val="accent1">
-                      <a:alpha val="0"/>
-                    </a:schemeClr>
-                  </a:solidFill>
-                </a:ln>
-                <a:solidFill>
-                  <a:srgbClr val="0043DA"/>
-                </a:solidFill>
-                <a:latin typeface="프리젠테이션 7 Bold" pitchFamily="2" charset="-127"/>
-                <a:ea typeface="프리젠테이션 7 Bold" pitchFamily="2" charset="-127"/>
-                <a:cs typeface="Pretendard" panose="02000503000000020004" pitchFamily="2" charset="-127"/>
-              </a:rPr>
-              <a:t>강조 텍스트</a:t>
-            </a:r>
-            <a:r>
-              <a:rPr lang="en-US" altLang="ko-KR" sz="1200" b="1" dirty="0">
-                <a:ln>
-                  <a:solidFill>
-                    <a:schemeClr val="accent1">
-                      <a:alpha val="0"/>
-                    </a:schemeClr>
-                  </a:solidFill>
-                </a:ln>
-                <a:solidFill>
-                  <a:srgbClr val="0043DA"/>
-                </a:solidFill>
-                <a:latin typeface="프리젠테이션 7 Bold" pitchFamily="2" charset="-127"/>
-                <a:ea typeface="프리젠테이션 7 Bold" pitchFamily="2" charset="-127"/>
-                <a:cs typeface="Pretendard" panose="02000503000000020004" pitchFamily="2" charset="-127"/>
-              </a:rPr>
-              <a:t>(</a:t>
-            </a:r>
-            <a:r>
-              <a:rPr lang="ko-KR" altLang="en-US" sz="1200" b="1" dirty="0" err="1">
-                <a:ln>
-                  <a:solidFill>
-                    <a:schemeClr val="accent1">
-                      <a:alpha val="0"/>
-                    </a:schemeClr>
-                  </a:solidFill>
-                </a:ln>
-                <a:solidFill>
-                  <a:srgbClr val="0043DA"/>
-                </a:solidFill>
-                <a:latin typeface="프리젠테이션 7 Bold" pitchFamily="2" charset="-127"/>
-                <a:ea typeface="프리젠테이션 7 Bold" pitchFamily="2" charset="-127"/>
-                <a:cs typeface="Pretendard" panose="02000503000000020004" pitchFamily="2" charset="-127"/>
-              </a:rPr>
-              <a:t>프리젠테이션</a:t>
-            </a:r>
-            <a:r>
-              <a:rPr lang="ko-KR" altLang="en-US" sz="1200" b="1" dirty="0">
-                <a:ln>
-                  <a:solidFill>
-                    <a:schemeClr val="accent1">
-                      <a:alpha val="0"/>
-                    </a:schemeClr>
-                  </a:solidFill>
-                </a:ln>
-                <a:solidFill>
-                  <a:srgbClr val="0043DA"/>
-                </a:solidFill>
-                <a:latin typeface="프리젠테이션 7 Bold" pitchFamily="2" charset="-127"/>
-                <a:ea typeface="프리젠테이션 7 Bold" pitchFamily="2" charset="-127"/>
-                <a:cs typeface="Pretendard" panose="02000503000000020004" pitchFamily="2" charset="-127"/>
-              </a:rPr>
-              <a:t> </a:t>
-            </a:r>
-            <a:r>
-              <a:rPr lang="en-US" altLang="ko-KR" sz="1200" b="1" dirty="0">
-                <a:ln>
-                  <a:solidFill>
-                    <a:schemeClr val="accent1">
-                      <a:alpha val="0"/>
-                    </a:schemeClr>
-                  </a:solidFill>
-                </a:ln>
-                <a:solidFill>
-                  <a:srgbClr val="0043DA"/>
-                </a:solidFill>
-                <a:latin typeface="프리젠테이션 7 Bold" pitchFamily="2" charset="-127"/>
-                <a:ea typeface="프리젠테이션 7 Bold" pitchFamily="2" charset="-127"/>
-                <a:cs typeface="Pretendard" panose="02000503000000020004" pitchFamily="2" charset="-127"/>
-              </a:rPr>
-              <a:t>7 Bold, </a:t>
-            </a:r>
-            <a:r>
-              <a:rPr lang="ko-KR" altLang="en-US" sz="1200" b="1" dirty="0">
-                <a:ln>
-                  <a:solidFill>
-                    <a:schemeClr val="accent1">
-                      <a:alpha val="0"/>
-                    </a:schemeClr>
-                  </a:solidFill>
-                </a:ln>
-                <a:solidFill>
-                  <a:srgbClr val="0043DA"/>
-                </a:solidFill>
-                <a:latin typeface="프리젠테이션 7 Bold" pitchFamily="2" charset="-127"/>
-                <a:ea typeface="프리젠테이션 7 Bold" pitchFamily="2" charset="-127"/>
-                <a:cs typeface="Pretendard" panose="02000503000000020004" pitchFamily="2" charset="-127"/>
-              </a:rPr>
-              <a:t>메인 컬러</a:t>
-            </a:r>
-            <a:r>
-              <a:rPr lang="en-US" altLang="ko-KR" sz="1200" b="1" dirty="0" smtClean="0">
-                <a:ln>
-                  <a:solidFill>
-                    <a:schemeClr val="accent1">
-                      <a:alpha val="0"/>
-                    </a:schemeClr>
-                  </a:solidFill>
-                </a:ln>
-                <a:solidFill>
-                  <a:srgbClr val="0043DA"/>
-                </a:solidFill>
-                <a:latin typeface="프리젠테이션 7 Bold" pitchFamily="2" charset="-127"/>
-                <a:ea typeface="프리젠테이션 7 Bold" pitchFamily="2" charset="-127"/>
-                <a:cs typeface="Pretendard" panose="02000503000000020004" pitchFamily="2" charset="-127"/>
-              </a:rPr>
-              <a:t>)</a:t>
-            </a:r>
-          </a:p>
-          <a:p>
-            <a:pPr latinLnBrk="0">
-              <a:lnSpc>
-                <a:spcPct val="150000"/>
-              </a:lnSpc>
-            </a:pPr>
-            <a:r>
-              <a:rPr lang="ko-KR" altLang="en-US" sz="1200" dirty="0" smtClean="0">
-                <a:ln>
-                  <a:solidFill>
-                    <a:schemeClr val="accent1">
-                      <a:alpha val="0"/>
-                    </a:schemeClr>
-                  </a:solidFill>
-                </a:ln>
-                <a:solidFill>
-                  <a:schemeClr val="tx1">
-                    <a:lumMod val="75000"/>
-                    <a:lumOff val="25000"/>
-                  </a:schemeClr>
-                </a:solidFill>
-                <a:latin typeface="프리젠테이션 5 Medium" pitchFamily="2" charset="-127"/>
-                <a:ea typeface="프리젠테이션 5 Medium" pitchFamily="2" charset="-127"/>
-                <a:cs typeface="Pretendard" panose="02000503000000020004" pitchFamily="2" charset="-127"/>
-              </a:rPr>
-              <a:t>폰트 </a:t>
-            </a:r>
-            <a:r>
-              <a:rPr lang="en-US" altLang="ko-KR" sz="1200" dirty="0" smtClean="0">
-                <a:ln>
-                  <a:solidFill>
-                    <a:schemeClr val="accent1">
-                      <a:alpha val="0"/>
-                    </a:schemeClr>
-                  </a:solidFill>
-                </a:ln>
-                <a:solidFill>
-                  <a:schemeClr val="tx1">
-                    <a:lumMod val="75000"/>
-                    <a:lumOff val="25000"/>
-                  </a:schemeClr>
-                </a:solidFill>
-                <a:latin typeface="프리젠테이션 5 Medium" pitchFamily="2" charset="-127"/>
-                <a:ea typeface="프리젠테이션 5 Medium" pitchFamily="2" charset="-127"/>
-                <a:cs typeface="Pretendard" panose="02000503000000020004" pitchFamily="2" charset="-127"/>
-              </a:rPr>
-              <a:t>: </a:t>
-            </a:r>
-            <a:r>
-              <a:rPr lang="ko-KR" altLang="en-US" sz="1200" dirty="0" err="1" smtClean="0">
-                <a:ln>
-                  <a:solidFill>
-                    <a:schemeClr val="accent1">
-                      <a:alpha val="0"/>
-                    </a:schemeClr>
-                  </a:solidFill>
-                </a:ln>
-                <a:solidFill>
-                  <a:schemeClr val="tx1">
-                    <a:lumMod val="75000"/>
-                    <a:lumOff val="25000"/>
-                  </a:schemeClr>
-                </a:solidFill>
-                <a:latin typeface="프리젠테이션 5 Medium" pitchFamily="2" charset="-127"/>
-                <a:ea typeface="프리젠테이션 5 Medium" pitchFamily="2" charset="-127"/>
-                <a:cs typeface="Pretendard" panose="02000503000000020004" pitchFamily="2" charset="-127"/>
-              </a:rPr>
-              <a:t>프리젠테이션</a:t>
-            </a:r>
-            <a:r>
-              <a:rPr lang="ko-KR" altLang="en-US" sz="1200" dirty="0" smtClean="0">
-                <a:ln>
-                  <a:solidFill>
-                    <a:schemeClr val="accent1">
-                      <a:alpha val="0"/>
-                    </a:schemeClr>
-                  </a:solidFill>
-                </a:ln>
-                <a:solidFill>
-                  <a:schemeClr val="tx1">
-                    <a:lumMod val="75000"/>
-                    <a:lumOff val="25000"/>
-                  </a:schemeClr>
-                </a:solidFill>
-                <a:latin typeface="프리젠테이션 5 Medium" pitchFamily="2" charset="-127"/>
-                <a:ea typeface="프리젠테이션 5 Medium" pitchFamily="2" charset="-127"/>
-                <a:cs typeface="Pretendard" panose="02000503000000020004" pitchFamily="2" charset="-127"/>
-              </a:rPr>
-              <a:t> </a:t>
-            </a:r>
-            <a:r>
-              <a:rPr lang="en-US" altLang="ko-KR" sz="1200" dirty="0" smtClean="0">
-                <a:ln>
-                  <a:solidFill>
-                    <a:schemeClr val="accent1">
-                      <a:alpha val="0"/>
-                    </a:schemeClr>
-                  </a:solidFill>
-                </a:ln>
-                <a:solidFill>
-                  <a:schemeClr val="tx1">
-                    <a:lumMod val="75000"/>
-                    <a:lumOff val="25000"/>
-                  </a:schemeClr>
-                </a:solidFill>
-                <a:latin typeface="프리젠테이션 5 Medium" pitchFamily="2" charset="-127"/>
-                <a:ea typeface="프리젠테이션 5 Medium" pitchFamily="2" charset="-127"/>
-                <a:cs typeface="Pretendard" panose="02000503000000020004" pitchFamily="2" charset="-127"/>
-              </a:rPr>
-              <a:t>5 Medium 12pt  </a:t>
-            </a:r>
-            <a:r>
-              <a:rPr lang="ko-KR" altLang="en-US" sz="1200" dirty="0" smtClean="0">
-                <a:ln>
-                  <a:solidFill>
-                    <a:schemeClr val="accent1">
-                      <a:alpha val="0"/>
-                    </a:schemeClr>
-                  </a:solidFill>
-                </a:ln>
-                <a:solidFill>
-                  <a:schemeClr val="tx1">
-                    <a:lumMod val="75000"/>
-                    <a:lumOff val="25000"/>
-                  </a:schemeClr>
-                </a:solidFill>
-                <a:latin typeface="프리젠테이션 5 Medium" pitchFamily="2" charset="-127"/>
-                <a:ea typeface="프리젠테이션 5 Medium" pitchFamily="2" charset="-127"/>
-                <a:cs typeface="Pretendard" panose="02000503000000020004" pitchFamily="2" charset="-127"/>
-              </a:rPr>
-              <a:t>최대 </a:t>
-            </a:r>
-            <a:r>
-              <a:rPr lang="en-US" altLang="ko-KR" sz="1200" dirty="0" smtClean="0">
-                <a:ln>
-                  <a:solidFill>
-                    <a:schemeClr val="accent1">
-                      <a:alpha val="0"/>
-                    </a:schemeClr>
-                  </a:solidFill>
-                </a:ln>
-                <a:solidFill>
-                  <a:schemeClr val="tx1">
-                    <a:lumMod val="75000"/>
-                    <a:lumOff val="25000"/>
-                  </a:schemeClr>
-                </a:solidFill>
-                <a:latin typeface="프리젠테이션 5 Medium" pitchFamily="2" charset="-127"/>
-                <a:ea typeface="프리젠테이션 5 Medium" pitchFamily="2" charset="-127"/>
-                <a:cs typeface="Pretendard" panose="02000503000000020004" pitchFamily="2" charset="-127"/>
-              </a:rPr>
-              <a:t>3</a:t>
-            </a:r>
-            <a:r>
-              <a:rPr lang="ko-KR" altLang="en-US" sz="1200" dirty="0" smtClean="0">
-                <a:ln>
-                  <a:solidFill>
-                    <a:schemeClr val="accent1">
-                      <a:alpha val="0"/>
-                    </a:schemeClr>
-                  </a:solidFill>
-                </a:ln>
-                <a:solidFill>
-                  <a:schemeClr val="tx1">
-                    <a:lumMod val="75000"/>
-                    <a:lumOff val="25000"/>
-                  </a:schemeClr>
-                </a:solidFill>
-                <a:latin typeface="프리젠테이션 5 Medium" pitchFamily="2" charset="-127"/>
-                <a:ea typeface="프리젠테이션 5 Medium" pitchFamily="2" charset="-127"/>
-                <a:cs typeface="Pretendard" panose="02000503000000020004" pitchFamily="2" charset="-127"/>
-              </a:rPr>
-              <a:t>줄까지 작성 가능합니다</a:t>
-            </a:r>
-            <a:r>
-              <a:rPr lang="en-US" altLang="ko-KR" sz="1200" dirty="0" smtClean="0">
-                <a:ln>
-                  <a:solidFill>
-                    <a:schemeClr val="accent1">
-                      <a:alpha val="0"/>
-                    </a:schemeClr>
-                  </a:solidFill>
-                </a:ln>
-                <a:solidFill>
-                  <a:schemeClr val="tx1">
-                    <a:lumMod val="75000"/>
-                    <a:lumOff val="25000"/>
-                  </a:schemeClr>
-                </a:solidFill>
-                <a:latin typeface="프리젠테이션 5 Medium" pitchFamily="2" charset="-127"/>
-                <a:ea typeface="프리젠테이션 5 Medium" pitchFamily="2" charset="-127"/>
-                <a:cs typeface="Pretendard" panose="02000503000000020004" pitchFamily="2" charset="-127"/>
-              </a:rPr>
-              <a:t>.</a:t>
-            </a:r>
-            <a:endParaRPr lang="en-US" altLang="ko-KR" sz="1200" dirty="0">
-              <a:ln>
-                <a:solidFill>
-                  <a:schemeClr val="accent1">
-                    <a:alpha val="0"/>
-                  </a:schemeClr>
-                </a:solidFill>
-              </a:ln>
-              <a:solidFill>
-                <a:srgbClr val="2765E1"/>
-              </a:solidFill>
-              <a:latin typeface="프리젠테이션 5 Medium" pitchFamily="2" charset="-127"/>
-              <a:ea typeface="프리젠테이션 5 Medium" pitchFamily="2" charset="-127"/>
-              <a:cs typeface="Pretendard" panose="02000503000000020004" pitchFamily="2" charset="-127"/>
-            </a:endParaRPr>
+              <a:t>GoldenGate PoC 결과 기반 예상 성과 지표</a:t>
+            </a:r>
           </a:p>
         </p:txBody>
       </p:sp>
@@ -10867,7 +9298,7 @@
         <p:spPr>
           <a:xfrm>
             <a:off x="4587120" y="4069080"/>
-            <a:ext cx="3017760" cy="9000"/>
+            <a:ext cx="3017760" cy="9144"/>
           </a:xfrm>
           <a:prstGeom prst="rect">
             <a:avLst/>
@@ -11459,36 +9890,8 @@
                 <a:ea typeface="프리젠테이션 7 Bold" pitchFamily="2" charset="-127"/>
                 <a:cs typeface="Pretendard ExtraBold" panose="02000903000000020004" pitchFamily="2" charset="-127"/>
               </a:rPr>
-              <a:t>서브색상</a:t>
-            </a:r>
-            <a:r>
-              <a:rPr lang="ko-KR" altLang="en-US" sz="2000" dirty="0">
-                <a:latin typeface="프리젠테이션 7 Bold" pitchFamily="2" charset="-127"/>
-                <a:ea typeface="프리젠테이션 7 Bold" pitchFamily="2" charset="-127"/>
-                <a:cs typeface="Pretendard ExtraBold" panose="02000903000000020004" pitchFamily="2" charset="-127"/>
-              </a:rPr>
-              <a:t> </a:t>
-            </a:r>
-          </a:p>
-          <a:p>
-            <a:pPr>
-              <a:lnSpc>
-                <a:spcPct val="120000"/>
-              </a:lnSpc>
-            </a:pPr>
-            <a:r>
-              <a:rPr lang="ko-KR" altLang="en-US" sz="2000" dirty="0">
-                <a:latin typeface="프리젠테이션 7 Bold" pitchFamily="2" charset="-127"/>
-                <a:ea typeface="프리젠테이션 7 Bold" pitchFamily="2" charset="-127"/>
-                <a:cs typeface="Pretendard ExtraBold" panose="02000903000000020004" pitchFamily="2" charset="-127"/>
-              </a:rPr>
-              <a:t>적용 예시</a:t>
-            </a:r>
-            <a:endParaRPr lang="ko-KR" altLang="en-US" sz="2000" dirty="0">
-              <a:latin typeface="프리젠테이션 7 Bold" pitchFamily="2" charset="-127"/>
-              <a:ea typeface="프리젠테이션 7 Bold" pitchFamily="2" charset="-127"/>
-              <a:cs typeface="Pretendard ExtraBold" panose="02000903000000020004" pitchFamily="2" charset="-127"/>
-            </a:endParaRPr>
+              <a:t>6. 운영 Do &amp; Don't</a:t>
+            </a:r>
           </a:p>
         </p:txBody>
       </p:sp>
@@ -11538,387 +9941,8 @@
                 <a:ea typeface="프리젠테이션 5 Medium" pitchFamily="2" charset="-127"/>
                 <a:cs typeface="Pretendard" panose="02000503000000020004" pitchFamily="2" charset="-127"/>
               </a:rPr>
-              <a:t>설명글을</a:t>
-            </a:r>
-            <a:r>
-              <a:rPr lang="ko-KR" altLang="en-US" sz="1200" dirty="0">
-                <a:ln>
-                  <a:solidFill>
-                    <a:schemeClr val="accent1">
-                      <a:alpha val="0"/>
-                    </a:schemeClr>
-                  </a:solidFill>
-                </a:ln>
-                <a:solidFill>
-                  <a:schemeClr val="tx1">
-                    <a:lumMod val="75000"/>
-                    <a:lumOff val="25000"/>
-                  </a:schemeClr>
-                </a:solidFill>
-                <a:latin typeface="프리젠테이션 5 Medium" pitchFamily="2" charset="-127"/>
-                <a:ea typeface="프리젠테이션 5 Medium" pitchFamily="2" charset="-127"/>
-                <a:cs typeface="Pretendard" panose="02000503000000020004" pitchFamily="2" charset="-127"/>
-              </a:rPr>
-              <a:t> 적어주세요</a:t>
-            </a:r>
-            <a:r>
-              <a:rPr lang="en-US" altLang="ko-KR" sz="1200" b="1" dirty="0">
-                <a:ln>
-                  <a:solidFill>
-                    <a:schemeClr val="accent1">
-                      <a:alpha val="0"/>
-                    </a:schemeClr>
-                  </a:solidFill>
-                </a:ln>
-                <a:solidFill>
-                  <a:schemeClr val="tx1">
-                    <a:lumMod val="75000"/>
-                    <a:lumOff val="25000"/>
-                  </a:schemeClr>
-                </a:solidFill>
-                <a:latin typeface="프리젠테이션 5 Medium" pitchFamily="2" charset="-127"/>
-                <a:ea typeface="프리젠테이션 5 Medium" pitchFamily="2" charset="-127"/>
-                <a:cs typeface="Pretendard" panose="02000503000000020004" pitchFamily="2" charset="-127"/>
-              </a:rPr>
-              <a:t>. </a:t>
-            </a:r>
-            <a:r>
-              <a:rPr lang="ko-KR" altLang="en-US" sz="1200" b="1" dirty="0">
-                <a:ln>
-                  <a:solidFill>
-                    <a:schemeClr val="accent1">
-                      <a:alpha val="0"/>
-                    </a:schemeClr>
-                  </a:solidFill>
-                </a:ln>
-                <a:solidFill>
-                  <a:srgbClr val="0043DA"/>
-                </a:solidFill>
-                <a:latin typeface="프리젠테이션 7 Bold" pitchFamily="2" charset="-127"/>
-                <a:ea typeface="프리젠테이션 7 Bold" pitchFamily="2" charset="-127"/>
-                <a:cs typeface="Pretendard" panose="02000503000000020004" pitchFamily="2" charset="-127"/>
-              </a:rPr>
-              <a:t>강조 텍스트</a:t>
-            </a:r>
-            <a:r>
-              <a:rPr lang="en-US" altLang="ko-KR" sz="1200" b="1" dirty="0">
-                <a:ln>
-                  <a:solidFill>
-                    <a:schemeClr val="accent1">
-                      <a:alpha val="0"/>
-                    </a:schemeClr>
-                  </a:solidFill>
-                </a:ln>
-                <a:solidFill>
-                  <a:srgbClr val="0043DA"/>
-                </a:solidFill>
-                <a:latin typeface="프리젠테이션 7 Bold" pitchFamily="2" charset="-127"/>
-                <a:ea typeface="프리젠테이션 7 Bold" pitchFamily="2" charset="-127"/>
-                <a:cs typeface="Pretendard" panose="02000503000000020004" pitchFamily="2" charset="-127"/>
-              </a:rPr>
-              <a:t>(</a:t>
-            </a:r>
-            <a:r>
-              <a:rPr lang="ko-KR" altLang="en-US" sz="1200" b="1" dirty="0" err="1">
-                <a:ln>
-                  <a:solidFill>
-                    <a:schemeClr val="accent1">
-                      <a:alpha val="0"/>
-                    </a:schemeClr>
-                  </a:solidFill>
-                </a:ln>
-                <a:solidFill>
-                  <a:srgbClr val="0043DA"/>
-                </a:solidFill>
-                <a:latin typeface="프리젠테이션 7 Bold" pitchFamily="2" charset="-127"/>
-                <a:ea typeface="프리젠테이션 7 Bold" pitchFamily="2" charset="-127"/>
-                <a:cs typeface="Pretendard" panose="02000503000000020004" pitchFamily="2" charset="-127"/>
-              </a:rPr>
-              <a:t>프리젠테이션</a:t>
-            </a:r>
-            <a:r>
-              <a:rPr lang="ko-KR" altLang="en-US" sz="1200" b="1" dirty="0">
-                <a:ln>
-                  <a:solidFill>
-                    <a:schemeClr val="accent1">
-                      <a:alpha val="0"/>
-                    </a:schemeClr>
-                  </a:solidFill>
-                </a:ln>
-                <a:solidFill>
-                  <a:srgbClr val="0043DA"/>
-                </a:solidFill>
-                <a:latin typeface="프리젠테이션 7 Bold" pitchFamily="2" charset="-127"/>
-                <a:ea typeface="프리젠테이션 7 Bold" pitchFamily="2" charset="-127"/>
-                <a:cs typeface="Pretendard" panose="02000503000000020004" pitchFamily="2" charset="-127"/>
-              </a:rPr>
-              <a:t> </a:t>
-            </a:r>
-            <a:r>
-              <a:rPr lang="en-US" altLang="ko-KR" sz="1200" b="1" dirty="0">
-                <a:ln>
-                  <a:solidFill>
-                    <a:schemeClr val="accent1">
-                      <a:alpha val="0"/>
-                    </a:schemeClr>
-                  </a:solidFill>
-                </a:ln>
-                <a:solidFill>
-                  <a:srgbClr val="0043DA"/>
-                </a:solidFill>
-                <a:latin typeface="프리젠테이션 7 Bold" pitchFamily="2" charset="-127"/>
-                <a:ea typeface="프리젠테이션 7 Bold" pitchFamily="2" charset="-127"/>
-                <a:cs typeface="Pretendard" panose="02000503000000020004" pitchFamily="2" charset="-127"/>
-              </a:rPr>
-              <a:t>7 Bold, </a:t>
-            </a:r>
-            <a:r>
-              <a:rPr lang="ko-KR" altLang="en-US" sz="1200" b="1" dirty="0">
-                <a:ln>
-                  <a:solidFill>
-                    <a:schemeClr val="accent1">
-                      <a:alpha val="0"/>
-                    </a:schemeClr>
-                  </a:solidFill>
-                </a:ln>
-                <a:solidFill>
-                  <a:srgbClr val="0043DA"/>
-                </a:solidFill>
-                <a:latin typeface="프리젠테이션 7 Bold" pitchFamily="2" charset="-127"/>
-                <a:ea typeface="프리젠테이션 7 Bold" pitchFamily="2" charset="-127"/>
-                <a:cs typeface="Pretendard" panose="02000503000000020004" pitchFamily="2" charset="-127"/>
-              </a:rPr>
-              <a:t>메인 컬러</a:t>
-            </a:r>
-            <a:r>
-              <a:rPr lang="en-US" altLang="ko-KR" sz="1200" b="1" dirty="0" smtClean="0">
-                <a:ln>
-                  <a:solidFill>
-                    <a:schemeClr val="accent1">
-                      <a:alpha val="0"/>
-                    </a:schemeClr>
-                  </a:solidFill>
-                </a:ln>
-                <a:solidFill>
-                  <a:srgbClr val="0043DA"/>
-                </a:solidFill>
-                <a:latin typeface="프리젠테이션 7 Bold" pitchFamily="2" charset="-127"/>
-                <a:ea typeface="프리젠테이션 7 Bold" pitchFamily="2" charset="-127"/>
-                <a:cs typeface="Pretendard" panose="02000503000000020004" pitchFamily="2" charset="-127"/>
-              </a:rPr>
-              <a:t>)</a:t>
-            </a:r>
-          </a:p>
-          <a:p>
-            <a:pPr latinLnBrk="0">
-              <a:lnSpc>
-                <a:spcPct val="150000"/>
-              </a:lnSpc>
-            </a:pPr>
-            <a:r>
-              <a:rPr lang="ko-KR" altLang="en-US" sz="1200" dirty="0" smtClean="0">
-                <a:ln>
-                  <a:solidFill>
-                    <a:schemeClr val="accent1">
-                      <a:alpha val="0"/>
-                    </a:schemeClr>
-                  </a:solidFill>
-                </a:ln>
-                <a:solidFill>
-                  <a:schemeClr val="tx1">
-                    <a:lumMod val="75000"/>
-                    <a:lumOff val="25000"/>
-                  </a:schemeClr>
-                </a:solidFill>
-                <a:latin typeface="프리젠테이션 5 Medium" pitchFamily="2" charset="-127"/>
-                <a:ea typeface="프리젠테이션 5 Medium" pitchFamily="2" charset="-127"/>
-                <a:cs typeface="Pretendard" panose="02000503000000020004" pitchFamily="2" charset="-127"/>
-              </a:rPr>
-              <a:t>폰트 </a:t>
-            </a:r>
-            <a:r>
-              <a:rPr lang="en-US" altLang="ko-KR" sz="1200" dirty="0" smtClean="0">
-                <a:ln>
-                  <a:solidFill>
-                    <a:schemeClr val="accent1">
-                      <a:alpha val="0"/>
-                    </a:schemeClr>
-                  </a:solidFill>
-                </a:ln>
-                <a:solidFill>
-                  <a:schemeClr val="tx1">
-                    <a:lumMod val="75000"/>
-                    <a:lumOff val="25000"/>
-                  </a:schemeClr>
-                </a:solidFill>
-                <a:latin typeface="프리젠테이션 5 Medium" pitchFamily="2" charset="-127"/>
-                <a:ea typeface="프리젠테이션 5 Medium" pitchFamily="2" charset="-127"/>
-                <a:cs typeface="Pretendard" panose="02000503000000020004" pitchFamily="2" charset="-127"/>
-              </a:rPr>
-              <a:t>: </a:t>
-            </a:r>
-            <a:r>
-              <a:rPr lang="ko-KR" altLang="en-US" sz="1200" dirty="0" err="1" smtClean="0">
-                <a:ln>
-                  <a:solidFill>
-                    <a:schemeClr val="accent1">
-                      <a:alpha val="0"/>
-                    </a:schemeClr>
-                  </a:solidFill>
-                </a:ln>
-                <a:solidFill>
-                  <a:schemeClr val="tx1">
-                    <a:lumMod val="75000"/>
-                    <a:lumOff val="25000"/>
-                  </a:schemeClr>
-                </a:solidFill>
-                <a:latin typeface="프리젠테이션 5 Medium" pitchFamily="2" charset="-127"/>
-                <a:ea typeface="프리젠테이션 5 Medium" pitchFamily="2" charset="-127"/>
-                <a:cs typeface="Pretendard" panose="02000503000000020004" pitchFamily="2" charset="-127"/>
-              </a:rPr>
-              <a:t>프리젠테이션</a:t>
-            </a:r>
-            <a:r>
-              <a:rPr lang="ko-KR" altLang="en-US" sz="1200" dirty="0" smtClean="0">
-                <a:ln>
-                  <a:solidFill>
-                    <a:schemeClr val="accent1">
-                      <a:alpha val="0"/>
-                    </a:schemeClr>
-                  </a:solidFill>
-                </a:ln>
-                <a:solidFill>
-                  <a:schemeClr val="tx1">
-                    <a:lumMod val="75000"/>
-                    <a:lumOff val="25000"/>
-                  </a:schemeClr>
-                </a:solidFill>
-                <a:latin typeface="프리젠테이션 5 Medium" pitchFamily="2" charset="-127"/>
-                <a:ea typeface="프리젠테이션 5 Medium" pitchFamily="2" charset="-127"/>
-                <a:cs typeface="Pretendard" panose="02000503000000020004" pitchFamily="2" charset="-127"/>
-              </a:rPr>
-              <a:t> </a:t>
-            </a:r>
-            <a:r>
-              <a:rPr lang="en-US" altLang="ko-KR" sz="1200" dirty="0" smtClean="0">
-                <a:ln>
-                  <a:solidFill>
-                    <a:schemeClr val="accent1">
-                      <a:alpha val="0"/>
-                    </a:schemeClr>
-                  </a:solidFill>
-                </a:ln>
-                <a:solidFill>
-                  <a:schemeClr val="tx1">
-                    <a:lumMod val="75000"/>
-                    <a:lumOff val="25000"/>
-                  </a:schemeClr>
-                </a:solidFill>
-                <a:latin typeface="프리젠테이션 5 Medium" pitchFamily="2" charset="-127"/>
-                <a:ea typeface="프리젠테이션 5 Medium" pitchFamily="2" charset="-127"/>
-                <a:cs typeface="Pretendard" panose="02000503000000020004" pitchFamily="2" charset="-127"/>
-              </a:rPr>
-              <a:t>5 Medium 12pt  </a:t>
-            </a:r>
-            <a:r>
-              <a:rPr lang="ko-KR" altLang="en-US" sz="1200" dirty="0" smtClean="0">
-                <a:ln>
-                  <a:solidFill>
-                    <a:schemeClr val="accent1">
-                      <a:alpha val="0"/>
-                    </a:schemeClr>
-                  </a:solidFill>
-                </a:ln>
-                <a:solidFill>
-                  <a:schemeClr val="tx1">
-                    <a:lumMod val="75000"/>
-                    <a:lumOff val="25000"/>
-                  </a:schemeClr>
-                </a:solidFill>
-                <a:latin typeface="프리젠테이션 5 Medium" pitchFamily="2" charset="-127"/>
-                <a:ea typeface="프리젠테이션 5 Medium" pitchFamily="2" charset="-127"/>
-                <a:cs typeface="Pretendard" panose="02000503000000020004" pitchFamily="2" charset="-127"/>
-              </a:rPr>
-              <a:t>최대 </a:t>
-            </a:r>
-            <a:r>
-              <a:rPr lang="en-US" altLang="ko-KR" sz="1200" dirty="0" smtClean="0">
-                <a:ln>
-                  <a:solidFill>
-                    <a:schemeClr val="accent1">
-                      <a:alpha val="0"/>
-                    </a:schemeClr>
-                  </a:solidFill>
-                </a:ln>
-                <a:solidFill>
-                  <a:schemeClr val="tx1">
-                    <a:lumMod val="75000"/>
-                    <a:lumOff val="25000"/>
-                  </a:schemeClr>
-                </a:solidFill>
-                <a:latin typeface="프리젠테이션 5 Medium" pitchFamily="2" charset="-127"/>
-                <a:ea typeface="프리젠테이션 5 Medium" pitchFamily="2" charset="-127"/>
-                <a:cs typeface="Pretendard" panose="02000503000000020004" pitchFamily="2" charset="-127"/>
-              </a:rPr>
-              <a:t>3</a:t>
-            </a:r>
-            <a:r>
-              <a:rPr lang="ko-KR" altLang="en-US" sz="1200" dirty="0" smtClean="0">
-                <a:ln>
-                  <a:solidFill>
-                    <a:schemeClr val="accent1">
-                      <a:alpha val="0"/>
-                    </a:schemeClr>
-                  </a:solidFill>
-                </a:ln>
-                <a:solidFill>
-                  <a:schemeClr val="tx1">
-                    <a:lumMod val="75000"/>
-                    <a:lumOff val="25000"/>
-                  </a:schemeClr>
-                </a:solidFill>
-                <a:latin typeface="프리젠테이션 5 Medium" pitchFamily="2" charset="-127"/>
-                <a:ea typeface="프리젠테이션 5 Medium" pitchFamily="2" charset="-127"/>
-                <a:cs typeface="Pretendard" panose="02000503000000020004" pitchFamily="2" charset="-127"/>
-              </a:rPr>
-              <a:t>줄까지 작성 가능합니다</a:t>
-            </a:r>
-            <a:r>
-              <a:rPr lang="en-US" altLang="ko-KR" sz="1200" dirty="0" smtClean="0">
-                <a:ln>
-                  <a:solidFill>
-                    <a:schemeClr val="accent1">
-                      <a:alpha val="0"/>
-                    </a:schemeClr>
-                  </a:solidFill>
-                </a:ln>
-                <a:solidFill>
-                  <a:schemeClr val="tx1">
-                    <a:lumMod val="75000"/>
-                    <a:lumOff val="25000"/>
-                  </a:schemeClr>
-                </a:solidFill>
-                <a:latin typeface="프리젠테이션 5 Medium" pitchFamily="2" charset="-127"/>
-                <a:ea typeface="프리젠테이션 5 Medium" pitchFamily="2" charset="-127"/>
-                <a:cs typeface="Pretendard" panose="02000503000000020004" pitchFamily="2" charset="-127"/>
-              </a:rPr>
-              <a:t>.</a:t>
-            </a:r>
-            <a:endParaRPr lang="en-US" altLang="ko-KR" sz="1200" dirty="0">
-              <a:ln>
-                <a:solidFill>
-                  <a:schemeClr val="accent1">
-                    <a:alpha val="0"/>
-                  </a:schemeClr>
-                </a:solidFill>
-              </a:ln>
-              <a:solidFill>
-                <a:srgbClr val="2765E1"/>
-              </a:solidFill>
-              <a:latin typeface="프리젠테이션 5 Medium" pitchFamily="2" charset="-127"/>
-              <a:ea typeface="프리젠테이션 5 Medium" pitchFamily="2" charset="-127"/>
-              <a:cs typeface="Pretendard" panose="02000503000000020004" pitchFamily="2" charset="-127"/>
-            </a:endParaRPr>
+              <a:t>실패 사례에서 학습한 현장 검증 체크리스트</a:t>
+            </a:r>
           </a:p>
         </p:txBody>
       </p:sp>
@@ -12043,7 +10067,7 @@
         </p:nvSpPr>
         <p:spPr>
           <a:xfrm>
-            <a:off x="637160" y="2603120"/>
+            <a:off x="762006" y="2603120"/>
             <a:ext cx="411480" cy="411480"/>
           </a:xfrm>
           <a:prstGeom prst="rect">
@@ -12070,8 +10094,8 @@
         </p:nvSpPr>
         <p:spPr>
           <a:xfrm>
-            <a:off x="1209960" y="2603120"/>
-            <a:ext cx="4551840" cy="274320"/>
+            <a:off x="876360" y="2853659"/>
+            <a:ext cx="4648080" cy="274320"/>
           </a:xfrm>
           <a:prstGeom prst="rect">
             <a:avLst/>
@@ -12109,8 +10133,8 @@
         </p:nvSpPr>
         <p:spPr>
           <a:xfrm>
-            <a:off x="637160" y="2968800"/>
-            <a:ext cx="5124480" cy="2930160"/>
+            <a:off x="876360" y="3232952"/>
+            <a:ext cx="4648080" cy="2930160"/>
           </a:xfrm>
           <a:prstGeom prst="rect">
             <a:avLst/>
@@ -12266,8 +10290,8 @@
         </p:nvSpPr>
         <p:spPr>
           <a:xfrm>
-            <a:off x="6471320" y="2603120"/>
-            <a:ext cx="4551840" cy="274320"/>
+            <a:off x="6710520" y="2853659"/>
+            <a:ext cx="4648080" cy="274320"/>
           </a:xfrm>
           <a:prstGeom prst="rect">
             <a:avLst/>
@@ -12305,8 +10329,8 @@
         </p:nvSpPr>
         <p:spPr>
           <a:xfrm>
-            <a:off x="6471320" y="2968800"/>
-            <a:ext cx="5124480" cy="2930160"/>
+            <a:off x="6710520" y="3232952"/>
+            <a:ext cx="4648080" cy="2930160"/>
           </a:xfrm>
           <a:prstGeom prst="rect">
             <a:avLst/>
@@ -12553,36 +10577,8 @@
                 <a:ea typeface="프리젠테이션 7 Bold" pitchFamily="2" charset="-127"/>
                 <a:cs typeface="Pretendard ExtraBold" panose="02000903000000020004" pitchFamily="2" charset="-127"/>
               </a:rPr>
-              <a:t>서브색상</a:t>
-            </a:r>
-            <a:r>
-              <a:rPr lang="ko-KR" altLang="en-US" sz="2000" dirty="0">
-                <a:latin typeface="프리젠테이션 7 Bold" pitchFamily="2" charset="-127"/>
-                <a:ea typeface="프리젠테이션 7 Bold" pitchFamily="2" charset="-127"/>
-                <a:cs typeface="Pretendard ExtraBold" panose="02000903000000020004" pitchFamily="2" charset="-127"/>
-              </a:rPr>
-              <a:t> </a:t>
-            </a:r>
-          </a:p>
-          <a:p>
-            <a:pPr>
-              <a:lnSpc>
-                <a:spcPct val="120000"/>
-              </a:lnSpc>
-            </a:pPr>
-            <a:r>
-              <a:rPr lang="ko-KR" altLang="en-US" sz="2000" dirty="0">
-                <a:latin typeface="프리젠테이션 7 Bold" pitchFamily="2" charset="-127"/>
-                <a:ea typeface="프리젠테이션 7 Bold" pitchFamily="2" charset="-127"/>
-                <a:cs typeface="Pretendard ExtraBold" panose="02000903000000020004" pitchFamily="2" charset="-127"/>
-              </a:rPr>
-              <a:t>적용 예시</a:t>
-            </a:r>
-            <a:endParaRPr lang="ko-KR" altLang="en-US" sz="2000" dirty="0">
-              <a:latin typeface="프리젠테이션 7 Bold" pitchFamily="2" charset="-127"/>
-              <a:ea typeface="프리젠테이션 7 Bold" pitchFamily="2" charset="-127"/>
-              <a:cs typeface="Pretendard ExtraBold" panose="02000903000000020004" pitchFamily="2" charset="-127"/>
-            </a:endParaRPr>
+              <a:t>7. GoldenGate SWOT 분석</a:t>
+            </a:r>
           </a:p>
         </p:txBody>
       </p:sp>
@@ -12632,387 +10628,8 @@
                 <a:ea typeface="프리젠테이션 5 Medium" pitchFamily="2" charset="-127"/>
                 <a:cs typeface="Pretendard" panose="02000503000000020004" pitchFamily="2" charset="-127"/>
               </a:rPr>
-              <a:t>설명글을</a:t>
-            </a:r>
-            <a:r>
-              <a:rPr lang="ko-KR" altLang="en-US" sz="1200" dirty="0">
-                <a:ln>
-                  <a:solidFill>
-                    <a:schemeClr val="accent1">
-                      <a:alpha val="0"/>
-                    </a:schemeClr>
-                  </a:solidFill>
-                </a:ln>
-                <a:solidFill>
-                  <a:schemeClr val="tx1">
-                    <a:lumMod val="75000"/>
-                    <a:lumOff val="25000"/>
-                  </a:schemeClr>
-                </a:solidFill>
-                <a:latin typeface="프리젠테이션 5 Medium" pitchFamily="2" charset="-127"/>
-                <a:ea typeface="프리젠테이션 5 Medium" pitchFamily="2" charset="-127"/>
-                <a:cs typeface="Pretendard" panose="02000503000000020004" pitchFamily="2" charset="-127"/>
-              </a:rPr>
-              <a:t> 적어주세요</a:t>
-            </a:r>
-            <a:r>
-              <a:rPr lang="en-US" altLang="ko-KR" sz="1200" b="1" dirty="0">
-                <a:ln>
-                  <a:solidFill>
-                    <a:schemeClr val="accent1">
-                      <a:alpha val="0"/>
-                    </a:schemeClr>
-                  </a:solidFill>
-                </a:ln>
-                <a:solidFill>
-                  <a:schemeClr val="tx1">
-                    <a:lumMod val="75000"/>
-                    <a:lumOff val="25000"/>
-                  </a:schemeClr>
-                </a:solidFill>
-                <a:latin typeface="프리젠테이션 5 Medium" pitchFamily="2" charset="-127"/>
-                <a:ea typeface="프리젠테이션 5 Medium" pitchFamily="2" charset="-127"/>
-                <a:cs typeface="Pretendard" panose="02000503000000020004" pitchFamily="2" charset="-127"/>
-              </a:rPr>
-              <a:t>. </a:t>
-            </a:r>
-            <a:r>
-              <a:rPr lang="ko-KR" altLang="en-US" sz="1200" b="1" dirty="0">
-                <a:ln>
-                  <a:solidFill>
-                    <a:schemeClr val="accent1">
-                      <a:alpha val="0"/>
-                    </a:schemeClr>
-                  </a:solidFill>
-                </a:ln>
-                <a:solidFill>
-                  <a:srgbClr val="0043DA"/>
-                </a:solidFill>
-                <a:latin typeface="프리젠테이션 7 Bold" pitchFamily="2" charset="-127"/>
-                <a:ea typeface="프리젠테이션 7 Bold" pitchFamily="2" charset="-127"/>
-                <a:cs typeface="Pretendard" panose="02000503000000020004" pitchFamily="2" charset="-127"/>
-              </a:rPr>
-              <a:t>강조 텍스트</a:t>
-            </a:r>
-            <a:r>
-              <a:rPr lang="en-US" altLang="ko-KR" sz="1200" b="1" dirty="0">
-                <a:ln>
-                  <a:solidFill>
-                    <a:schemeClr val="accent1">
-                      <a:alpha val="0"/>
-                    </a:schemeClr>
-                  </a:solidFill>
-                </a:ln>
-                <a:solidFill>
-                  <a:srgbClr val="0043DA"/>
-                </a:solidFill>
-                <a:latin typeface="프리젠테이션 7 Bold" pitchFamily="2" charset="-127"/>
-                <a:ea typeface="프리젠테이션 7 Bold" pitchFamily="2" charset="-127"/>
-                <a:cs typeface="Pretendard" panose="02000503000000020004" pitchFamily="2" charset="-127"/>
-              </a:rPr>
-              <a:t>(</a:t>
-            </a:r>
-            <a:r>
-              <a:rPr lang="ko-KR" altLang="en-US" sz="1200" b="1" dirty="0" err="1">
-                <a:ln>
-                  <a:solidFill>
-                    <a:schemeClr val="accent1">
-                      <a:alpha val="0"/>
-                    </a:schemeClr>
-                  </a:solidFill>
-                </a:ln>
-                <a:solidFill>
-                  <a:srgbClr val="0043DA"/>
-                </a:solidFill>
-                <a:latin typeface="프리젠테이션 7 Bold" pitchFamily="2" charset="-127"/>
-                <a:ea typeface="프리젠테이션 7 Bold" pitchFamily="2" charset="-127"/>
-                <a:cs typeface="Pretendard" panose="02000503000000020004" pitchFamily="2" charset="-127"/>
-              </a:rPr>
-              <a:t>프리젠테이션</a:t>
-            </a:r>
-            <a:r>
-              <a:rPr lang="ko-KR" altLang="en-US" sz="1200" b="1" dirty="0">
-                <a:ln>
-                  <a:solidFill>
-                    <a:schemeClr val="accent1">
-                      <a:alpha val="0"/>
-                    </a:schemeClr>
-                  </a:solidFill>
-                </a:ln>
-                <a:solidFill>
-                  <a:srgbClr val="0043DA"/>
-                </a:solidFill>
-                <a:latin typeface="프리젠테이션 7 Bold" pitchFamily="2" charset="-127"/>
-                <a:ea typeface="프리젠테이션 7 Bold" pitchFamily="2" charset="-127"/>
-                <a:cs typeface="Pretendard" panose="02000503000000020004" pitchFamily="2" charset="-127"/>
-              </a:rPr>
-              <a:t> </a:t>
-            </a:r>
-            <a:r>
-              <a:rPr lang="en-US" altLang="ko-KR" sz="1200" b="1" dirty="0">
-                <a:ln>
-                  <a:solidFill>
-                    <a:schemeClr val="accent1">
-                      <a:alpha val="0"/>
-                    </a:schemeClr>
-                  </a:solidFill>
-                </a:ln>
-                <a:solidFill>
-                  <a:srgbClr val="0043DA"/>
-                </a:solidFill>
-                <a:latin typeface="프리젠테이션 7 Bold" pitchFamily="2" charset="-127"/>
-                <a:ea typeface="프리젠테이션 7 Bold" pitchFamily="2" charset="-127"/>
-                <a:cs typeface="Pretendard" panose="02000503000000020004" pitchFamily="2" charset="-127"/>
-              </a:rPr>
-              <a:t>7 Bold, </a:t>
-            </a:r>
-            <a:r>
-              <a:rPr lang="ko-KR" altLang="en-US" sz="1200" b="1" dirty="0">
-                <a:ln>
-                  <a:solidFill>
-                    <a:schemeClr val="accent1">
-                      <a:alpha val="0"/>
-                    </a:schemeClr>
-                  </a:solidFill>
-                </a:ln>
-                <a:solidFill>
-                  <a:srgbClr val="0043DA"/>
-                </a:solidFill>
-                <a:latin typeface="프리젠테이션 7 Bold" pitchFamily="2" charset="-127"/>
-                <a:ea typeface="프리젠테이션 7 Bold" pitchFamily="2" charset="-127"/>
-                <a:cs typeface="Pretendard" panose="02000503000000020004" pitchFamily="2" charset="-127"/>
-              </a:rPr>
-              <a:t>메인 컬러</a:t>
-            </a:r>
-            <a:r>
-              <a:rPr lang="en-US" altLang="ko-KR" sz="1200" b="1" dirty="0" smtClean="0">
-                <a:ln>
-                  <a:solidFill>
-                    <a:schemeClr val="accent1">
-                      <a:alpha val="0"/>
-                    </a:schemeClr>
-                  </a:solidFill>
-                </a:ln>
-                <a:solidFill>
-                  <a:srgbClr val="0043DA"/>
-                </a:solidFill>
-                <a:latin typeface="프리젠테이션 7 Bold" pitchFamily="2" charset="-127"/>
-                <a:ea typeface="프리젠테이션 7 Bold" pitchFamily="2" charset="-127"/>
-                <a:cs typeface="Pretendard" panose="02000503000000020004" pitchFamily="2" charset="-127"/>
-              </a:rPr>
-              <a:t>)</a:t>
-            </a:r>
-          </a:p>
-          <a:p>
-            <a:pPr latinLnBrk="0">
-              <a:lnSpc>
-                <a:spcPct val="150000"/>
-              </a:lnSpc>
-            </a:pPr>
-            <a:r>
-              <a:rPr lang="ko-KR" altLang="en-US" sz="1200" dirty="0" smtClean="0">
-                <a:ln>
-                  <a:solidFill>
-                    <a:schemeClr val="accent1">
-                      <a:alpha val="0"/>
-                    </a:schemeClr>
-                  </a:solidFill>
-                </a:ln>
-                <a:solidFill>
-                  <a:schemeClr val="tx1">
-                    <a:lumMod val="75000"/>
-                    <a:lumOff val="25000"/>
-                  </a:schemeClr>
-                </a:solidFill>
-                <a:latin typeface="프리젠테이션 5 Medium" pitchFamily="2" charset="-127"/>
-                <a:ea typeface="프리젠테이션 5 Medium" pitchFamily="2" charset="-127"/>
-                <a:cs typeface="Pretendard" panose="02000503000000020004" pitchFamily="2" charset="-127"/>
-              </a:rPr>
-              <a:t>폰트 </a:t>
-            </a:r>
-            <a:r>
-              <a:rPr lang="en-US" altLang="ko-KR" sz="1200" dirty="0" smtClean="0">
-                <a:ln>
-                  <a:solidFill>
-                    <a:schemeClr val="accent1">
-                      <a:alpha val="0"/>
-                    </a:schemeClr>
-                  </a:solidFill>
-                </a:ln>
-                <a:solidFill>
-                  <a:schemeClr val="tx1">
-                    <a:lumMod val="75000"/>
-                    <a:lumOff val="25000"/>
-                  </a:schemeClr>
-                </a:solidFill>
-                <a:latin typeface="프리젠테이션 5 Medium" pitchFamily="2" charset="-127"/>
-                <a:ea typeface="프리젠테이션 5 Medium" pitchFamily="2" charset="-127"/>
-                <a:cs typeface="Pretendard" panose="02000503000000020004" pitchFamily="2" charset="-127"/>
-              </a:rPr>
-              <a:t>: </a:t>
-            </a:r>
-            <a:r>
-              <a:rPr lang="ko-KR" altLang="en-US" sz="1200" dirty="0" err="1" smtClean="0">
-                <a:ln>
-                  <a:solidFill>
-                    <a:schemeClr val="accent1">
-                      <a:alpha val="0"/>
-                    </a:schemeClr>
-                  </a:solidFill>
-                </a:ln>
-                <a:solidFill>
-                  <a:schemeClr val="tx1">
-                    <a:lumMod val="75000"/>
-                    <a:lumOff val="25000"/>
-                  </a:schemeClr>
-                </a:solidFill>
-                <a:latin typeface="프리젠테이션 5 Medium" pitchFamily="2" charset="-127"/>
-                <a:ea typeface="프리젠테이션 5 Medium" pitchFamily="2" charset="-127"/>
-                <a:cs typeface="Pretendard" panose="02000503000000020004" pitchFamily="2" charset="-127"/>
-              </a:rPr>
-              <a:t>프리젠테이션</a:t>
-            </a:r>
-            <a:r>
-              <a:rPr lang="ko-KR" altLang="en-US" sz="1200" dirty="0" smtClean="0">
-                <a:ln>
-                  <a:solidFill>
-                    <a:schemeClr val="accent1">
-                      <a:alpha val="0"/>
-                    </a:schemeClr>
-                  </a:solidFill>
-                </a:ln>
-                <a:solidFill>
-                  <a:schemeClr val="tx1">
-                    <a:lumMod val="75000"/>
-                    <a:lumOff val="25000"/>
-                  </a:schemeClr>
-                </a:solidFill>
-                <a:latin typeface="프리젠테이션 5 Medium" pitchFamily="2" charset="-127"/>
-                <a:ea typeface="프리젠테이션 5 Medium" pitchFamily="2" charset="-127"/>
-                <a:cs typeface="Pretendard" panose="02000503000000020004" pitchFamily="2" charset="-127"/>
-              </a:rPr>
-              <a:t> </a:t>
-            </a:r>
-            <a:r>
-              <a:rPr lang="en-US" altLang="ko-KR" sz="1200" dirty="0" smtClean="0">
-                <a:ln>
-                  <a:solidFill>
-                    <a:schemeClr val="accent1">
-                      <a:alpha val="0"/>
-                    </a:schemeClr>
-                  </a:solidFill>
-                </a:ln>
-                <a:solidFill>
-                  <a:schemeClr val="tx1">
-                    <a:lumMod val="75000"/>
-                    <a:lumOff val="25000"/>
-                  </a:schemeClr>
-                </a:solidFill>
-                <a:latin typeface="프리젠테이션 5 Medium" pitchFamily="2" charset="-127"/>
-                <a:ea typeface="프리젠테이션 5 Medium" pitchFamily="2" charset="-127"/>
-                <a:cs typeface="Pretendard" panose="02000503000000020004" pitchFamily="2" charset="-127"/>
-              </a:rPr>
-              <a:t>5 Medium 12pt  </a:t>
-            </a:r>
-            <a:r>
-              <a:rPr lang="ko-KR" altLang="en-US" sz="1200" dirty="0" smtClean="0">
-                <a:ln>
-                  <a:solidFill>
-                    <a:schemeClr val="accent1">
-                      <a:alpha val="0"/>
-                    </a:schemeClr>
-                  </a:solidFill>
-                </a:ln>
-                <a:solidFill>
-                  <a:schemeClr val="tx1">
-                    <a:lumMod val="75000"/>
-                    <a:lumOff val="25000"/>
-                  </a:schemeClr>
-                </a:solidFill>
-                <a:latin typeface="프리젠테이션 5 Medium" pitchFamily="2" charset="-127"/>
-                <a:ea typeface="프리젠테이션 5 Medium" pitchFamily="2" charset="-127"/>
-                <a:cs typeface="Pretendard" panose="02000503000000020004" pitchFamily="2" charset="-127"/>
-              </a:rPr>
-              <a:t>최대 </a:t>
-            </a:r>
-            <a:r>
-              <a:rPr lang="en-US" altLang="ko-KR" sz="1200" dirty="0" smtClean="0">
-                <a:ln>
-                  <a:solidFill>
-                    <a:schemeClr val="accent1">
-                      <a:alpha val="0"/>
-                    </a:schemeClr>
-                  </a:solidFill>
-                </a:ln>
-                <a:solidFill>
-                  <a:schemeClr val="tx1">
-                    <a:lumMod val="75000"/>
-                    <a:lumOff val="25000"/>
-                  </a:schemeClr>
-                </a:solidFill>
-                <a:latin typeface="프리젠테이션 5 Medium" pitchFamily="2" charset="-127"/>
-                <a:ea typeface="프리젠테이션 5 Medium" pitchFamily="2" charset="-127"/>
-                <a:cs typeface="Pretendard" panose="02000503000000020004" pitchFamily="2" charset="-127"/>
-              </a:rPr>
-              <a:t>3</a:t>
-            </a:r>
-            <a:r>
-              <a:rPr lang="ko-KR" altLang="en-US" sz="1200" dirty="0" smtClean="0">
-                <a:ln>
-                  <a:solidFill>
-                    <a:schemeClr val="accent1">
-                      <a:alpha val="0"/>
-                    </a:schemeClr>
-                  </a:solidFill>
-                </a:ln>
-                <a:solidFill>
-                  <a:schemeClr val="tx1">
-                    <a:lumMod val="75000"/>
-                    <a:lumOff val="25000"/>
-                  </a:schemeClr>
-                </a:solidFill>
-                <a:latin typeface="프리젠테이션 5 Medium" pitchFamily="2" charset="-127"/>
-                <a:ea typeface="프리젠테이션 5 Medium" pitchFamily="2" charset="-127"/>
-                <a:cs typeface="Pretendard" panose="02000503000000020004" pitchFamily="2" charset="-127"/>
-              </a:rPr>
-              <a:t>줄까지 작성 가능합니다</a:t>
-            </a:r>
-            <a:r>
-              <a:rPr lang="en-US" altLang="ko-KR" sz="1200" dirty="0" smtClean="0">
-                <a:ln>
-                  <a:solidFill>
-                    <a:schemeClr val="accent1">
-                      <a:alpha val="0"/>
-                    </a:schemeClr>
-                  </a:solidFill>
-                </a:ln>
-                <a:solidFill>
-                  <a:schemeClr val="tx1">
-                    <a:lumMod val="75000"/>
-                    <a:lumOff val="25000"/>
-                  </a:schemeClr>
-                </a:solidFill>
-                <a:latin typeface="프리젠테이션 5 Medium" pitchFamily="2" charset="-127"/>
-                <a:ea typeface="프리젠테이션 5 Medium" pitchFamily="2" charset="-127"/>
-                <a:cs typeface="Pretendard" panose="02000503000000020004" pitchFamily="2" charset="-127"/>
-              </a:rPr>
-              <a:t>.</a:t>
-            </a:r>
-            <a:endParaRPr lang="en-US" altLang="ko-KR" sz="1200" dirty="0">
-              <a:ln>
-                <a:solidFill>
-                  <a:schemeClr val="accent1">
-                    <a:alpha val="0"/>
-                  </a:schemeClr>
-                </a:solidFill>
-              </a:ln>
-              <a:solidFill>
-                <a:srgbClr val="2765E1"/>
-              </a:solidFill>
-              <a:latin typeface="프리젠테이션 5 Medium" pitchFamily="2" charset="-127"/>
-              <a:ea typeface="프리젠테이션 5 Medium" pitchFamily="2" charset="-127"/>
-              <a:cs typeface="Pretendard" panose="02000503000000020004" pitchFamily="2" charset="-127"/>
-            </a:endParaRPr>
+              <a:t>AWS 전환 프로젝트 GoldenGate 선택 전략 분석</a:t>
+            </a:r>
           </a:p>
         </p:txBody>
       </p:sp>
